--- a/artifacts/speaking-portfolio-expanded/decks/free-tier-40min-handout.pptx
+++ b/artifacts/speaking-portfolio-expanded/decks/free-tier-40min-handout.pptx
@@ -160,7 +160,7 @@
                 <a:ea typeface="Arial"/>
                 <a:cs typeface="Arial"/>
               </a:rPr>
-              <a:t xml:space="preserve">Rewritten 2026-09-06. 40 minutes, 15 slides, four audience moments, no Q&amp;A. Nobody outside a provider knows its margins and this talk never estimates one; the fixture arithmetic is synthetic. Say that once, on slide 1, then argue.</a:t>
+              <a:t xml:space="preserve">Rewritten and retitled 2026-09-06 (was "Cry Me a Free Tier"). 40 minutes, 15 slides, four audience moments, no Q&amp;A. Nobody outside a provider knows its margins and this talk never estimates one; the fixture arithmetic is synthetic. Say that once, on slide 1, then argue.</a:t>
             </a:r>
             <a:endParaRPr lang="en-US" sz="1200"/>
           </a:p>
@@ -1327,7 +1327,7 @@
                 <a:ea typeface="Arial"/>
                 <a:cs typeface="Arial"/>
               </a:rPr>
-              <a:t xml:space="preserve">Your acceptance rate is a price multiplier</a:t>
+              <a:t xml:space="preserve">Doubling on a Tuesday</a:t>
             </a:r>
             <a:endParaRPr lang="en-US" sz="1200"/>
           </a:p>
@@ -1808,7 +1808,7 @@
                 <a:ea typeface="Arial"/>
                 <a:cs typeface="Arial"/>
               </a:rPr>
-              <a:t xml:space="preserve">Demo: change one assumption, watch the unit cost</a:t>
+              <a:t xml:space="preserve">Turn the dial</a:t>
             </a:r>
             <a:endParaRPr lang="en-US" sz="1200"/>
           </a:p>
@@ -1946,7 +1946,7 @@
                 <a:ea typeface="Arial"/>
                 <a:cs typeface="Arial"/>
               </a:rPr>
-              <a:t xml:space="preserve">&gt; Sensitivity, not prediction. Quality is held fixed, which is itself an assumption.</a:t>
+              <a:t xml:space="preserve">&gt; Sensitivity, not prediction.</a:t>
             </a:r>
             <a:endParaRPr lang="en-US" sz="1200"/>
           </a:p>
@@ -2381,7 +2381,7 @@
                 <a:ea typeface="Arial"/>
                 <a:cs typeface="Arial"/>
               </a:rPr>
-              <a:t xml:space="preserve">Demo: change one assumption, watch the unit cost</a:t>
+              <a:t xml:space="preserve">Turn the dial</a:t>
             </a:r>
             <a:endParaRPr lang="en-US" sz="1200"/>
           </a:p>
@@ -2519,7 +2519,7 @@
                 <a:ea typeface="Arial"/>
                 <a:cs typeface="Arial"/>
               </a:rPr>
-              <a:t xml:space="preserve">&gt; Sensitivity, not prediction. Quality is held fixed, which is itself an assumption.</a:t>
+              <a:t xml:space="preserve">&gt; Sensitivity, not prediction.</a:t>
             </a:r>
             <a:endParaRPr lang="en-US" sz="1200"/>
           </a:p>
@@ -3322,7 +3322,7 @@
                 <a:ea typeface="Arial"/>
                 <a:cs typeface="Arial"/>
               </a:rPr>
-              <a:t xml:space="preserve">So stop thinking of this as shopping, where the customer holds the power because they can leave. You are contracting, with a much better capitalized counterparty, and your architecture is the collateral. That reframe is the whole talk, and everything on the next three slides is just a way of reducing specificity or pricing the exposure.</a:t>
+              <a:t xml:space="preserve">So stop thinking of this as shopping, where the customer holds the power because they can leave. You are contracting, with a much better capitalized counterparty, and your architecture is the collateral. That reframe is the whole talk, and everything after this is just a way of reducing specificity or pricing the exposure.</a:t>
             </a:r>
             <a:endParaRPr lang="en-US" sz="1200"/>
           </a:p>
@@ -3803,7 +3803,7 @@
                 <a:ea typeface="Arial"/>
                 <a:cs typeface="Arial"/>
               </a:rPr>
-              <a:t xml:space="preserve">So stop thinking of this as shopping, where the customer holds the power because they can leave. You are contracting, with a much better capitalized counterparty, and your architecture is the collateral. That reframe is the whole talk, and everything on the next three slides is just a way of reducing specificity or pricing the exposure.</a:t>
+              <a:t xml:space="preserve">So stop thinking of this as shopping, where the customer holds the power because they can leave. You are contracting, with a much better capitalized counterparty, and your architecture is the collateral. That reframe is the whole talk, and everything after this is just a way of reducing specificity or pricing the exposure.</a:t>
             </a:r>
             <a:endParaRPr lang="en-US" sz="1200"/>
           </a:p>
@@ -3916,7 +3916,7 @@
                 <a:ea typeface="Arial"/>
                 <a:cs typeface="Arial"/>
               </a:rPr>
-              <a:t xml:space="preserve">Reversibility has a price and you can compute it</a:t>
+              <a:t xml:space="preserve">Reversible is a line item</a:t>
             </a:r>
             <a:endParaRPr lang="en-US" sz="1200"/>
           </a:p>
@@ -4238,7 +4238,7 @@
                 <a:ea typeface="Arial"/>
                 <a:cs typeface="Arial"/>
               </a:rPr>
-              <a:t xml:space="preserve">Same for optimization. Take a cache or a router that halves inference per attempt at the same acceptance rate. In our fixture it saves one cent per attempt at one-times pricing and ten cents at ten-times. Divide your build cost by that, divide by monthly attempts, and you have payback in months. At a million attempts a month, ten cents each is a hundred thousand dollars a month and you should have started yesterday. At a thousand attempts a month it is ten dollars and you should never do it. Identical project. The sweep is what tells you which world you are living in. And preserved acceptance is an assumption until an eval says otherwise; a router that costs more to run than it saves is not better engineering.</a:t>
+              <a:t xml:space="preserve">Same for optimization. Take a cache or a router that halves inference per attempt at the same acceptance rate. In our fixture it saves one cent per attempt at one-times pricing and ten cents at ten-times. Divide your build cost by that, divide by monthly attempts, and you have payback in months. At a million attempts a month, ten cents each is a hundred thousand dollars a month and you should have started yesterday. At a thousand attempts a month it is a hundred dollars, ten at today's price, and you should never do it. Identical project. The sweep is what tells you which world you are living in. A router that costs more to run than it saves is not better engineering.</a:t>
             </a:r>
             <a:endParaRPr lang="en-US" sz="1200"/>
           </a:p>
@@ -4397,7 +4397,7 @@
                 <a:ea typeface="Arial"/>
                 <a:cs typeface="Arial"/>
               </a:rPr>
-              <a:t xml:space="preserve">Reversibility has a price and you can compute it</a:t>
+              <a:t xml:space="preserve">Reversible is a line item</a:t>
             </a:r>
             <a:endParaRPr lang="en-US" sz="1200"/>
           </a:p>
@@ -4719,7 +4719,7 @@
                 <a:ea typeface="Arial"/>
                 <a:cs typeface="Arial"/>
               </a:rPr>
-              <a:t xml:space="preserve">Same for optimization. Take a cache or a router that halves inference per attempt at the same acceptance rate. In our fixture it saves one cent per attempt at one-times pricing and ten cents at ten-times. Divide your build cost by that, divide by monthly attempts, and you have payback in months. At a million attempts a month, ten cents each is a hundred thousand dollars a month and you should have started yesterday. At a thousand attempts a month it is ten dollars and you should never do it. Identical project. The sweep is what tells you which world you are living in. And preserved acceptance is an assumption until an eval says otherwise; a router that costs more to run than it saves is not better engineering.</a:t>
+              <a:t xml:space="preserve">Same for optimization. Take a cache or a router that halves inference per attempt at the same acceptance rate. In our fixture it saves one cent per attempt at one-times pricing and ten cents at ten-times. Divide your build cost by that, divide by monthly attempts, and you have payback in months. At a million attempts a month, ten cents each is a hundred thousand dollars a month and you should have started yesterday. At a thousand attempts a month it is a hundred dollars, ten at today's price, and you should never do it. Identical project. The sweep is what tells you which world you are living in. A router that costs more to run than it saves is not better engineering.</a:t>
             </a:r>
             <a:endParaRPr lang="en-US" sz="1200"/>
           </a:p>
@@ -6185,7 +6185,7 @@
                 <a:ea typeface="Arial"/>
                 <a:cs typeface="Arial"/>
               </a:rPr>
-              <a:t xml:space="preserve">Cheap intelligence changes incentives before it changes organizations. Leave the table up.</a:t>
+              <a:t xml:space="preserve">Cheap intelligence changes incentives before it changes organizations.</a:t>
             </a:r>
             <a:endParaRPr lang="en-US" sz="1200"/>
           </a:p>
@@ -6231,7 +6231,7 @@
                 <a:ea typeface="Arial"/>
                 <a:cs typeface="Arial"/>
               </a:rPr>
-              <a:t xml:space="preserve">Stage direction: Say the last line slowly. Leave the sweep table on screen for questions.</a:t>
+              <a:t xml:space="preserve">Stage direction: Say the last line slowly, then stop talking. For questions, jump back to the sweep table if this route kept slide 11.</a:t>
             </a:r>
             <a:endParaRPr lang="en-US" sz="1200"/>
           </a:p>
@@ -7283,7 +7283,7 @@
                 <a:ea typeface="Arial"/>
                 <a:cs typeface="Arial"/>
               </a:rPr>
-              <a:t xml:space="preserve">Price, cost, and value are three different numbers</a:t>
+              <a:t xml:space="preserve">Four boxes, one invoice</a:t>
             </a:r>
             <a:endParaRPr lang="en-US" sz="1200"/>
           </a:p>
@@ -8199,7 +8199,7 @@
                 <a:ea typeface="Arial"/>
                 <a:cs typeface="Arial"/>
               </a:rPr>
-              <a:t xml:space="preserve">Those enormous commitments are moves, not measurements</a:t>
+              <a:t xml:space="preserve">Burn the boats</a:t>
             </a:r>
             <a:endParaRPr lang="en-US" sz="1200"/>
           </a:p>
@@ -8475,7 +8475,7 @@
                 <a:ea typeface="Arial"/>
                 <a:cs typeface="Arial"/>
               </a:rPr>
-              <a:t xml:space="preserve">Which tells you something about the game underneath. Two well-funded players racing to acquire the same customers, both burning capital, neither able to stop first, is a war of attrition. In that model the price stays low for as long as both sides can pay to keep it there. Note who is not a player in that game. You are not a combatant. You are the terrain.</a:t>
+              <a:t xml:space="preserve">Which tells you something about the game underneath. Two well-funded players racing to acquire the same customers, both burning capital, neither able to stop first, is a war of attrition. In that model the price stays low for as long as both sides can pay to keep it there. Note who is not a player in that game. Somebody is buying your free tier, and it is not you. You are not a combatant. You are the terrain.</a:t>
             </a:r>
             <a:endParaRPr lang="en-US" sz="1200"/>
           </a:p>
@@ -8613,7 +8613,7 @@
                 <a:ea typeface="Arial"/>
                 <a:cs typeface="Arial"/>
               </a:rPr>
-              <a:t xml:space="preserve">Stage direction: Recheck all three items the week of the talk. If a number has moved, the frame still works; say the new number.</a:t>
+              <a:t xml:space="preserve">Stage direction: Recheck all three items the week of the talk. If a number has moved, the frame still works; say the new number. Specifically: Anthropic's IPO prospectus is expected late September 2026 and may disclose contract detail behind the $100B AWS commitment, so that figure or its framing can move. Do not confuse it with the adjacent Microsoft/OpenAI restructuring figures.</a:t>
             </a:r>
             <a:endParaRPr lang="en-US" sz="1200"/>
           </a:p>
@@ -10977,7 +10977,7 @@
                 <a:ea typeface="Arial"/>
                 <a:cs typeface="Arial"/>
               </a:rPr>
-              <a:t xml:space="preserve">Cry Me a Free Tier</a:t>
+              <a:t xml:space="preserve">Buy Me a Free Tier</a:t>
             </a:r>
             <a:endParaRPr lang="en-US" sz="3750"/>
           </a:p>
@@ -11147,7 +11147,7 @@
                 <a:ea typeface="Arial"/>
                 <a:cs typeface="Arial"/>
               </a:rPr>
-              <a:t xml:space="preserve">Cry Me a Free Tier</a:t>
+              <a:t xml:space="preserve">Buy Me a Free Tier</a:t>
             </a:r>
             <a:endParaRPr lang="en-US" sz="975"/>
           </a:p>
@@ -12325,7 +12325,7 @@
                 <a:ea typeface="Arial"/>
                 <a:cs typeface="Arial"/>
               </a:rPr>
-              <a:t xml:space="preserve">Cry Me a Free Tier</a:t>
+              <a:t xml:space="preserve">Buy Me a Free Tier</a:t>
             </a:r>
             <a:endParaRPr lang="en-US" sz="975"/>
           </a:p>
@@ -13480,7 +13480,7 @@
                 <a:ea typeface="Arial"/>
                 <a:cs typeface="Arial"/>
               </a:rPr>
-              <a:t xml:space="preserve">Cry Me a Free Tier</a:t>
+              <a:t xml:space="preserve">Buy Me a Free Tier</a:t>
             </a:r>
             <a:endParaRPr lang="en-US" sz="975"/>
           </a:p>
@@ -13660,7 +13660,7 @@
                 <a:ea typeface="Arial"/>
                 <a:cs typeface="Arial"/>
               </a:rPr>
-              <a:t xml:space="preserve">Your acceptance rate is a price multiplier</a:t>
+              <a:t xml:space="preserve">Doubling on a Tuesday</a:t>
             </a:r>
             <a:endParaRPr lang="en-US" sz="2550"/>
           </a:p>
@@ -14658,7 +14658,7 @@
                 <a:ea typeface="Arial"/>
                 <a:cs typeface="Arial"/>
               </a:rPr>
-              <a:t xml:space="preserve">Cry Me a Free Tier</a:t>
+              <a:t xml:space="preserve">Buy Me a Free Tier</a:t>
             </a:r>
             <a:endParaRPr lang="en-US" sz="975"/>
           </a:p>
@@ -14838,7 +14838,7 @@
                 <a:ea typeface="Arial"/>
                 <a:cs typeface="Arial"/>
               </a:rPr>
-              <a:t xml:space="preserve">Demo: change one assumption, watch the unit cost</a:t>
+              <a:t xml:space="preserve">Turn the dial</a:t>
             </a:r>
             <a:endParaRPr lang="en-US" sz="2550"/>
           </a:p>
@@ -14887,30 +14887,7 @@
                 <a:ea typeface="Arial"/>
                 <a:cs typeface="Arial"/>
               </a:rPr>
-              <a:t xml:space="preserve">Sensitivity, not prediction. Quality is</a:t>
-            </a:r>
-            <a:endParaRPr lang="en-US" sz="1500"/>
-          </a:p>
-          <a:p>
-            <a:pPr marL="0" indent="0">
-              <a:lnSpc>
-                <a:spcPts val="1950"/>
-              </a:lnSpc>
-              <a:spcAft>
-                <a:spcPts val="0"/>
-              </a:spcAft>
-              <a:buNone/>
-            </a:pPr>
-            <a:r>
-              <a:rPr lang="en-US" sz="1500" b="0">
-                <a:solidFill>
-                  <a:srgbClr val="202B33"/>
-                </a:solidFill>
-                <a:latin typeface="Arial"/>
-                <a:ea typeface="Arial"/>
-                <a:cs typeface="Arial"/>
-              </a:rPr>
-              <a:t xml:space="preserve">held fixed, which is itself an assumption.</a:t>
+              <a:t xml:space="preserve">Sensitivity, not prediction.</a:t>
             </a:r>
             <a:endParaRPr lang="en-US" sz="1500"/>
           </a:p>
@@ -15118,6 +15095,29 @@
                 <a:cs typeface="Arial"/>
               </a:rPr>
               <a:t xml:space="preserve"/>
+            </a:r>
+            <a:endParaRPr lang="en-US" sz="1500"/>
+          </a:p>
+          <a:p>
+            <a:pPr marL="0" indent="0">
+              <a:lnSpc>
+                <a:spcPts val="1950"/>
+              </a:lnSpc>
+              <a:spcAft>
+                <a:spcPts val="0"/>
+              </a:spcAft>
+              <a:buNone/>
+            </a:pPr>
+            <a:r>
+              <a:rPr lang="en-US" sz="1500" b="0">
+                <a:solidFill>
+                  <a:srgbClr val="202B33"/>
+                </a:solidFill>
+                <a:latin typeface="Arial"/>
+                <a:ea typeface="Arial"/>
+                <a:cs typeface="Arial"/>
+              </a:rPr>
+              <a:t xml:space="preserve">Then multiply by your own volume, because</a:t>
             </a:r>
             <a:endParaRPr lang="en-US" sz="1500"/>
           </a:p>
@@ -15166,29 +15166,6 @@
                 <a:ea typeface="Arial"/>
                 <a:cs typeface="Arial"/>
               </a:rPr>
-              <a:t xml:space="preserve">Then multiply by your own volume, because</a:t>
-            </a:r>
-            <a:endParaRPr lang="en-US" sz="1500"/>
-          </a:p>
-          <a:p>
-            <a:pPr marL="0" indent="0">
-              <a:lnSpc>
-                <a:spcPts val="1950"/>
-              </a:lnSpc>
-              <a:spcAft>
-                <a:spcPts val="0"/>
-              </a:spcAft>
-              <a:buNone/>
-            </a:pPr>
-            <a:r>
-              <a:rPr lang="en-US" sz="1500" b="0">
-                <a:solidFill>
-                  <a:srgbClr val="202B33"/>
-                </a:solidFill>
-                <a:latin typeface="Arial"/>
-                <a:ea typeface="Arial"/>
-                <a:cs typeface="Arial"/>
-              </a:rPr>
               <a:t xml:space="preserve">the table is meaningless without it. At a</a:t>
             </a:r>
             <a:endParaRPr lang="en-US" sz="1500"/>
@@ -15445,7 +15422,7 @@
                 <a:ea typeface="Arial"/>
                 <a:cs typeface="Arial"/>
               </a:rPr>
-              <a:t xml:space="preserve">Cry Me a Free Tier</a:t>
+              <a:t xml:space="preserve">Buy Me a Free Tier</a:t>
             </a:r>
             <a:endParaRPr lang="en-US" sz="975"/>
           </a:p>
@@ -15625,7 +15602,7 @@
                 <a:ea typeface="Arial"/>
                 <a:cs typeface="Arial"/>
               </a:rPr>
-              <a:t xml:space="preserve">Demo: change one assumption, watch the unit cost</a:t>
+              <a:t xml:space="preserve">Turn the dial</a:t>
             </a:r>
             <a:endParaRPr lang="en-US" sz="2550"/>
           </a:p>
@@ -16262,7 +16239,7 @@
                 <a:ea typeface="Arial"/>
                 <a:cs typeface="Arial"/>
               </a:rPr>
-              <a:t xml:space="preserve">Cry Me a Free Tier</a:t>
+              <a:t xml:space="preserve">Buy Me a Free Tier</a:t>
             </a:r>
             <a:endParaRPr lang="en-US" sz="975"/>
           </a:p>
@@ -17417,7 +17394,7 @@
                 <a:ea typeface="Arial"/>
                 <a:cs typeface="Arial"/>
               </a:rPr>
-              <a:t xml:space="preserve">Cry Me a Free Tier</a:t>
+              <a:t xml:space="preserve">Buy Me a Free Tier</a:t>
             </a:r>
             <a:endParaRPr lang="en-US" sz="975"/>
           </a:p>
@@ -17719,29 +17696,6 @@
             </a:r>
             <a:endParaRPr lang="en-US" sz="1500"/>
           </a:p>
-          <a:p>
-            <a:pPr marL="0" indent="0">
-              <a:lnSpc>
-                <a:spcPts val="1950"/>
-              </a:lnSpc>
-              <a:spcAft>
-                <a:spcPts val="0"/>
-              </a:spcAft>
-              <a:buNone/>
-            </a:pPr>
-            <a:r>
-              <a:rPr lang="en-US" sz="1500" b="0">
-                <a:solidFill>
-                  <a:srgbClr val="202B33"/>
-                </a:solidFill>
-                <a:latin typeface="Arial"/>
-                <a:ea typeface="Arial"/>
-                <a:cs typeface="Arial"/>
-              </a:rPr>
-              <a:t xml:space="preserve">architecture is the collateral. That</a:t>
-            </a:r>
-            <a:endParaRPr lang="en-US" sz="1500"/>
-          </a:p>
         </p:txBody>
       </p:sp>
       <p:sp>
@@ -17787,6 +17741,29 @@
                 <a:ea typeface="Arial"/>
                 <a:cs typeface="Arial"/>
               </a:rPr>
+              <a:t xml:space="preserve">architecture is the collateral. That</a:t>
+            </a:r>
+            <a:endParaRPr lang="en-US" sz="1500"/>
+          </a:p>
+          <a:p>
+            <a:pPr marL="0" indent="0">
+              <a:lnSpc>
+                <a:spcPts val="1950"/>
+              </a:lnSpc>
+              <a:spcAft>
+                <a:spcPts val="0"/>
+              </a:spcAft>
+              <a:buNone/>
+            </a:pPr>
+            <a:r>
+              <a:rPr lang="en-US" sz="1500" b="0">
+                <a:solidFill>
+                  <a:srgbClr val="202B33"/>
+                </a:solidFill>
+                <a:latin typeface="Arial"/>
+                <a:ea typeface="Arial"/>
+                <a:cs typeface="Arial"/>
+              </a:rPr>
               <a:t xml:space="preserve">reframe is the whole talk, and everything</a:t>
             </a:r>
             <a:endParaRPr lang="en-US" sz="1500"/>
@@ -17810,53 +17787,30 @@
                 <a:ea typeface="Arial"/>
                 <a:cs typeface="Arial"/>
               </a:rPr>
-              <a:t xml:space="preserve">on the next three slides is just a way of</a:t>
-            </a:r>
-            <a:endParaRPr lang="en-US" sz="1500"/>
-          </a:p>
-          <a:p>
-            <a:pPr marL="0" indent="0">
-              <a:lnSpc>
-                <a:spcPts val="1950"/>
-              </a:lnSpc>
-              <a:spcAft>
-                <a:spcPts val="0"/>
-              </a:spcAft>
-              <a:buNone/>
-            </a:pPr>
-            <a:r>
-              <a:rPr lang="en-US" sz="1500" b="0">
-                <a:solidFill>
-                  <a:srgbClr val="202B33"/>
-                </a:solidFill>
-                <a:latin typeface="Arial"/>
-                <a:ea typeface="Arial"/>
-                <a:cs typeface="Arial"/>
-              </a:rPr>
-              <a:t xml:space="preserve">reducing specificity or pricing the</a:t>
-            </a:r>
-            <a:endParaRPr lang="en-US" sz="1500"/>
-          </a:p>
-          <a:p>
-            <a:pPr marL="0" indent="0">
-              <a:lnSpc>
-                <a:spcPts val="1950"/>
-              </a:lnSpc>
-              <a:spcAft>
-                <a:spcPts val="0"/>
-              </a:spcAft>
-              <a:buNone/>
-            </a:pPr>
-            <a:r>
-              <a:rPr lang="en-US" sz="1500" b="0">
-                <a:solidFill>
-                  <a:srgbClr val="202B33"/>
-                </a:solidFill>
-                <a:latin typeface="Arial"/>
-                <a:ea typeface="Arial"/>
-                <a:cs typeface="Arial"/>
-              </a:rPr>
-              <a:t xml:space="preserve">exposure.</a:t>
+              <a:t xml:space="preserve">after this is just a way of reducing</a:t>
+            </a:r>
+            <a:endParaRPr lang="en-US" sz="1500"/>
+          </a:p>
+          <a:p>
+            <a:pPr marL="0" indent="0">
+              <a:lnSpc>
+                <a:spcPts val="1950"/>
+              </a:lnSpc>
+              <a:spcAft>
+                <a:spcPts val="0"/>
+              </a:spcAft>
+              <a:buNone/>
+            </a:pPr>
+            <a:r>
+              <a:rPr lang="en-US" sz="1500" b="0">
+                <a:solidFill>
+                  <a:srgbClr val="202B33"/>
+                </a:solidFill>
+                <a:latin typeface="Arial"/>
+                <a:ea typeface="Arial"/>
+                <a:cs typeface="Arial"/>
+              </a:rPr>
+              <a:t xml:space="preserve">specificity or pricing the exposure.</a:t>
             </a:r>
             <a:endParaRPr lang="en-US" sz="1500"/>
           </a:p>
@@ -17905,7 +17859,7 @@
                 <a:ea typeface="Arial"/>
                 <a:cs typeface="Arial"/>
               </a:rPr>
-              <a:t xml:space="preserve">Cry Me a Free Tier</a:t>
+              <a:t xml:space="preserve">Buy Me a Free Tier</a:t>
             </a:r>
             <a:endParaRPr lang="en-US" sz="975"/>
           </a:p>
@@ -18085,7 +18039,7 @@
                 <a:ea typeface="Arial"/>
                 <a:cs typeface="Arial"/>
               </a:rPr>
-              <a:t xml:space="preserve">Reversibility has a price and you can compute it</a:t>
+              <a:t xml:space="preserve">Reversible is a line item</a:t>
             </a:r>
             <a:endParaRPr lang="en-US" sz="2550"/>
           </a:p>
@@ -18853,7 +18807,7 @@
                 <a:ea typeface="Arial"/>
                 <a:cs typeface="Arial"/>
               </a:rPr>
-              <a:t xml:space="preserve">Cry Me a Free Tier</a:t>
+              <a:t xml:space="preserve">Buy Me a Free Tier</a:t>
             </a:r>
             <a:endParaRPr lang="en-US" sz="975"/>
           </a:p>
@@ -19033,30 +18987,7 @@
                 <a:ea typeface="Arial"/>
                 <a:cs typeface="Arial"/>
               </a:rPr>
-              <a:t xml:space="preserve">Reversibility has a price and you can compute it</a:t>
-            </a:r>
-            <a:endParaRPr lang="en-US" sz="2550"/>
-          </a:p>
-          <a:p>
-            <a:pPr marL="0" indent="0">
-              <a:lnSpc>
-                <a:spcPts val="3060"/>
-              </a:lnSpc>
-              <a:spcAft>
-                <a:spcPts val="0"/>
-              </a:spcAft>
-              <a:buNone/>
-            </a:pPr>
-            <a:r>
-              <a:rPr lang="en-US" sz="2550" b="1">
-                <a:solidFill>
-                  <a:srgbClr val="202B33"/>
-                </a:solidFill>
-                <a:latin typeface="Arial"/>
-                <a:ea typeface="Arial"/>
-                <a:cs typeface="Arial"/>
-              </a:rPr>
-              <a:t xml:space="preserve">(continued)</a:t>
+              <a:t xml:space="preserve">Reversible is a line item (continued)</a:t>
             </a:r>
             <a:endParaRPr lang="en-US" sz="2550"/>
           </a:p>
@@ -19270,29 +19201,6 @@
             </a:r>
             <a:endParaRPr lang="en-US" sz="1500"/>
           </a:p>
-          <a:p>
-            <a:pPr marL="0" indent="0">
-              <a:lnSpc>
-                <a:spcPts val="1950"/>
-              </a:lnSpc>
-              <a:spcAft>
-                <a:spcPts val="0"/>
-              </a:spcAft>
-              <a:buNone/>
-            </a:pPr>
-            <a:r>
-              <a:rPr lang="en-US" sz="1500" b="0">
-                <a:solidFill>
-                  <a:srgbClr val="202B33"/>
-                </a:solidFill>
-                <a:latin typeface="Arial"/>
-                <a:ea typeface="Arial"/>
-                <a:cs typeface="Arial"/>
-              </a:rPr>
-              <a:t xml:space="preserve">each is a hundred thousand dollars a month</a:t>
-            </a:r>
-            <a:endParaRPr lang="en-US" sz="1500"/>
-          </a:p>
         </p:txBody>
       </p:sp>
       <p:sp>
@@ -19338,6 +19246,29 @@
                 <a:ea typeface="Arial"/>
                 <a:cs typeface="Arial"/>
               </a:rPr>
+              <a:t xml:space="preserve">each is a hundred thousand dollars a month</a:t>
+            </a:r>
+            <a:endParaRPr lang="en-US" sz="1500"/>
+          </a:p>
+          <a:p>
+            <a:pPr marL="0" indent="0">
+              <a:lnSpc>
+                <a:spcPts val="1950"/>
+              </a:lnSpc>
+              <a:spcAft>
+                <a:spcPts val="0"/>
+              </a:spcAft>
+              <a:buNone/>
+            </a:pPr>
+            <a:r>
+              <a:rPr lang="en-US" sz="1500" b="0">
+                <a:solidFill>
+                  <a:srgbClr val="202B33"/>
+                </a:solidFill>
+                <a:latin typeface="Arial"/>
+                <a:ea typeface="Arial"/>
+                <a:cs typeface="Arial"/>
+              </a:rPr>
               <a:t xml:space="preserve">and you should have started yesterday. At a</a:t>
             </a:r>
             <a:endParaRPr lang="en-US" sz="1500"/>
@@ -19361,168 +19292,122 @@
                 <a:ea typeface="Arial"/>
                 <a:cs typeface="Arial"/>
               </a:rPr>
-              <a:t xml:space="preserve">thousand attempts a month it is ten dollars</a:t>
-            </a:r>
-            <a:endParaRPr lang="en-US" sz="1500"/>
-          </a:p>
-          <a:p>
-            <a:pPr marL="0" indent="0">
-              <a:lnSpc>
-                <a:spcPts val="1950"/>
-              </a:lnSpc>
-              <a:spcAft>
-                <a:spcPts val="0"/>
-              </a:spcAft>
-              <a:buNone/>
-            </a:pPr>
-            <a:r>
-              <a:rPr lang="en-US" sz="1500" b="0">
-                <a:solidFill>
-                  <a:srgbClr val="202B33"/>
-                </a:solidFill>
-                <a:latin typeface="Arial"/>
-                <a:ea typeface="Arial"/>
-                <a:cs typeface="Arial"/>
-              </a:rPr>
-              <a:t xml:space="preserve">and you should never do it. Identical</a:t>
-            </a:r>
-            <a:endParaRPr lang="en-US" sz="1500"/>
-          </a:p>
-          <a:p>
-            <a:pPr marL="0" indent="0">
-              <a:lnSpc>
-                <a:spcPts val="1950"/>
-              </a:lnSpc>
-              <a:spcAft>
-                <a:spcPts val="0"/>
-              </a:spcAft>
-              <a:buNone/>
-            </a:pPr>
-            <a:r>
-              <a:rPr lang="en-US" sz="1500" b="0">
-                <a:solidFill>
-                  <a:srgbClr val="202B33"/>
-                </a:solidFill>
-                <a:latin typeface="Arial"/>
-                <a:ea typeface="Arial"/>
-                <a:cs typeface="Arial"/>
-              </a:rPr>
-              <a:t xml:space="preserve">project. The sweep is what tells you which</a:t>
-            </a:r>
-            <a:endParaRPr lang="en-US" sz="1500"/>
-          </a:p>
-          <a:p>
-            <a:pPr marL="0" indent="0">
-              <a:lnSpc>
-                <a:spcPts val="1950"/>
-              </a:lnSpc>
-              <a:spcAft>
-                <a:spcPts val="0"/>
-              </a:spcAft>
-              <a:buNone/>
-            </a:pPr>
-            <a:r>
-              <a:rPr lang="en-US" sz="1500" b="0">
-                <a:solidFill>
-                  <a:srgbClr val="202B33"/>
-                </a:solidFill>
-                <a:latin typeface="Arial"/>
-                <a:ea typeface="Arial"/>
-                <a:cs typeface="Arial"/>
-              </a:rPr>
-              <a:t xml:space="preserve">world you are living in. And preserved</a:t>
-            </a:r>
-            <a:endParaRPr lang="en-US" sz="1500"/>
-          </a:p>
-          <a:p>
-            <a:pPr marL="0" indent="0">
-              <a:lnSpc>
-                <a:spcPts val="1950"/>
-              </a:lnSpc>
-              <a:spcAft>
-                <a:spcPts val="0"/>
-              </a:spcAft>
-              <a:buNone/>
-            </a:pPr>
-            <a:r>
-              <a:rPr lang="en-US" sz="1500" b="0">
-                <a:solidFill>
-                  <a:srgbClr val="202B33"/>
-                </a:solidFill>
-                <a:latin typeface="Arial"/>
-                <a:ea typeface="Arial"/>
-                <a:cs typeface="Arial"/>
-              </a:rPr>
-              <a:t xml:space="preserve">acceptance is an assumption until an eval</a:t>
-            </a:r>
-            <a:endParaRPr lang="en-US" sz="1500"/>
-          </a:p>
-          <a:p>
-            <a:pPr marL="0" indent="0">
-              <a:lnSpc>
-                <a:spcPts val="1950"/>
-              </a:lnSpc>
-              <a:spcAft>
-                <a:spcPts val="0"/>
-              </a:spcAft>
-              <a:buNone/>
-            </a:pPr>
-            <a:r>
-              <a:rPr lang="en-US" sz="1500" b="0">
-                <a:solidFill>
-                  <a:srgbClr val="202B33"/>
-                </a:solidFill>
-                <a:latin typeface="Arial"/>
-                <a:ea typeface="Arial"/>
-                <a:cs typeface="Arial"/>
-              </a:rPr>
-              <a:t xml:space="preserve">says otherwise; a router that costs more to</a:t>
-            </a:r>
-            <a:endParaRPr lang="en-US" sz="1500"/>
-          </a:p>
-          <a:p>
-            <a:pPr marL="0" indent="0">
-              <a:lnSpc>
-                <a:spcPts val="1950"/>
-              </a:lnSpc>
-              <a:spcAft>
-                <a:spcPts val="0"/>
-              </a:spcAft>
-              <a:buNone/>
-            </a:pPr>
-            <a:r>
-              <a:rPr lang="en-US" sz="1500" b="0">
-                <a:solidFill>
-                  <a:srgbClr val="202B33"/>
-                </a:solidFill>
-                <a:latin typeface="Arial"/>
-                <a:ea typeface="Arial"/>
-                <a:cs typeface="Arial"/>
-              </a:rPr>
-              <a:t xml:space="preserve">run than it saves is not better</a:t>
-            </a:r>
-            <a:endParaRPr lang="en-US" sz="1500"/>
-          </a:p>
-          <a:p>
-            <a:pPr marL="0" indent="0">
-              <a:lnSpc>
-                <a:spcPts val="1950"/>
-              </a:lnSpc>
-              <a:spcAft>
-                <a:spcPts val="0"/>
-              </a:spcAft>
-              <a:buNone/>
-            </a:pPr>
-            <a:r>
-              <a:rPr lang="en-US" sz="1500" b="0">
-                <a:solidFill>
-                  <a:srgbClr val="202B33"/>
-                </a:solidFill>
-                <a:latin typeface="Arial"/>
-                <a:ea typeface="Arial"/>
-                <a:cs typeface="Arial"/>
-              </a:rPr>
-              <a:t xml:space="preserve">engineering.</a:t>
+              <a:t xml:space="preserve">thousand attempts a month it is a hundred</a:t>
+            </a:r>
+            <a:endParaRPr lang="en-US" sz="1500"/>
+          </a:p>
+          <a:p>
+            <a:pPr marL="0" indent="0">
+              <a:lnSpc>
+                <a:spcPts val="1950"/>
+              </a:lnSpc>
+              <a:spcAft>
+                <a:spcPts val="0"/>
+              </a:spcAft>
+              <a:buNone/>
+            </a:pPr>
+            <a:r>
+              <a:rPr lang="en-US" sz="1500" b="0">
+                <a:solidFill>
+                  <a:srgbClr val="202B33"/>
+                </a:solidFill>
+                <a:latin typeface="Arial"/>
+                <a:ea typeface="Arial"/>
+                <a:cs typeface="Arial"/>
+              </a:rPr>
+              <a:t xml:space="preserve">dollars, ten at today's price, and you</a:t>
+            </a:r>
+            <a:endParaRPr lang="en-US" sz="1500"/>
+          </a:p>
+          <a:p>
+            <a:pPr marL="0" indent="0">
+              <a:lnSpc>
+                <a:spcPts val="1950"/>
+              </a:lnSpc>
+              <a:spcAft>
+                <a:spcPts val="0"/>
+              </a:spcAft>
+              <a:buNone/>
+            </a:pPr>
+            <a:r>
+              <a:rPr lang="en-US" sz="1500" b="0">
+                <a:solidFill>
+                  <a:srgbClr val="202B33"/>
+                </a:solidFill>
+                <a:latin typeface="Arial"/>
+                <a:ea typeface="Arial"/>
+                <a:cs typeface="Arial"/>
+              </a:rPr>
+              <a:t xml:space="preserve">should never do it. Identical project. The</a:t>
+            </a:r>
+            <a:endParaRPr lang="en-US" sz="1500"/>
+          </a:p>
+          <a:p>
+            <a:pPr marL="0" indent="0">
+              <a:lnSpc>
+                <a:spcPts val="1950"/>
+              </a:lnSpc>
+              <a:spcAft>
+                <a:spcPts val="0"/>
+              </a:spcAft>
+              <a:buNone/>
+            </a:pPr>
+            <a:r>
+              <a:rPr lang="en-US" sz="1500" b="0">
+                <a:solidFill>
+                  <a:srgbClr val="202B33"/>
+                </a:solidFill>
+                <a:latin typeface="Arial"/>
+                <a:ea typeface="Arial"/>
+                <a:cs typeface="Arial"/>
+              </a:rPr>
+              <a:t xml:space="preserve">sweep is what tells you which world you are</a:t>
+            </a:r>
+            <a:endParaRPr lang="en-US" sz="1500"/>
+          </a:p>
+          <a:p>
+            <a:pPr marL="0" indent="0">
+              <a:lnSpc>
+                <a:spcPts val="1950"/>
+              </a:lnSpc>
+              <a:spcAft>
+                <a:spcPts val="0"/>
+              </a:spcAft>
+              <a:buNone/>
+            </a:pPr>
+            <a:r>
+              <a:rPr lang="en-US" sz="1500" b="0">
+                <a:solidFill>
+                  <a:srgbClr val="202B33"/>
+                </a:solidFill>
+                <a:latin typeface="Arial"/>
+                <a:ea typeface="Arial"/>
+                <a:cs typeface="Arial"/>
+              </a:rPr>
+              <a:t xml:space="preserve">living in. A router that costs more to run</a:t>
+            </a:r>
+            <a:endParaRPr lang="en-US" sz="1500"/>
+          </a:p>
+          <a:p>
+            <a:pPr marL="0" indent="0">
+              <a:lnSpc>
+                <a:spcPts val="1950"/>
+              </a:lnSpc>
+              <a:spcAft>
+                <a:spcPts val="0"/>
+              </a:spcAft>
+              <a:buNone/>
+            </a:pPr>
+            <a:r>
+              <a:rPr lang="en-US" sz="1500" b="0">
+                <a:solidFill>
+                  <a:srgbClr val="202B33"/>
+                </a:solidFill>
+                <a:latin typeface="Arial"/>
+                <a:ea typeface="Arial"/>
+                <a:cs typeface="Arial"/>
+              </a:rPr>
+              <a:t xml:space="preserve">than it saves is not better engineering.</a:t>
             </a:r>
             <a:endParaRPr lang="en-US" sz="1500"/>
           </a:p>
@@ -19571,7 +19456,7 @@
                 <a:ea typeface="Arial"/>
                 <a:cs typeface="Arial"/>
               </a:rPr>
-              <a:t xml:space="preserve">Cry Me a Free Tier</a:t>
+              <a:t xml:space="preserve">Buy Me a Free Tier</a:t>
             </a:r>
             <a:endParaRPr lang="en-US" sz="975"/>
           </a:p>
@@ -20657,7 +20542,7 @@
                 <a:ea typeface="Arial"/>
                 <a:cs typeface="Arial"/>
               </a:rPr>
-              <a:t xml:space="preserve">Cry Me a Free Tier</a:t>
+              <a:t xml:space="preserve">Buy Me a Free Tier</a:t>
             </a:r>
             <a:endParaRPr lang="en-US" sz="975"/>
           </a:p>
@@ -21605,7 +21490,7 @@
                 <a:ea typeface="Arial"/>
                 <a:cs typeface="Arial"/>
               </a:rPr>
-              <a:t xml:space="preserve">Cry Me a Free Tier</a:t>
+              <a:t xml:space="preserve">Buy Me a Free Tier</a:t>
             </a:r>
             <a:endParaRPr lang="en-US" sz="975"/>
           </a:p>
@@ -22252,29 +22137,6 @@
             </a:r>
             <a:endParaRPr lang="en-US" sz="1500"/>
           </a:p>
-          <a:p>
-            <a:pPr marL="0" indent="0">
-              <a:lnSpc>
-                <a:spcPts val="1950"/>
-              </a:lnSpc>
-              <a:spcAft>
-                <a:spcPts val="0"/>
-              </a:spcAft>
-              <a:buNone/>
-            </a:pPr>
-            <a:r>
-              <a:rPr lang="en-US" sz="1500" b="0">
-                <a:solidFill>
-                  <a:srgbClr val="202B33"/>
-                </a:solidFill>
-                <a:latin typeface="Arial"/>
-                <a:ea typeface="Arial"/>
-                <a:cs typeface="Arial"/>
-              </a:rPr>
-              <a:t xml:space="preserve">less. Path dependence, because the lots</a:t>
-            </a:r>
-            <a:endParaRPr lang="en-US" sz="1500"/>
-          </a:p>
         </p:txBody>
       </p:sp>
       <p:sp>
@@ -22320,6 +22182,29 @@
                 <a:ea typeface="Arial"/>
                 <a:cs typeface="Arial"/>
               </a:rPr>
+              <a:t xml:space="preserve">less. Path dependence, because the lots</a:t>
+            </a:r>
+            <a:endParaRPr lang="en-US" sz="1500"/>
+          </a:p>
+          <a:p>
+            <a:pPr marL="0" indent="0">
+              <a:lnSpc>
+                <a:spcPts val="1950"/>
+              </a:lnSpc>
+              <a:spcAft>
+                <a:spcPts val="0"/>
+              </a:spcAft>
+              <a:buNone/>
+            </a:pPr>
+            <a:r>
+              <a:rPr lang="en-US" sz="1500" b="0">
+                <a:solidFill>
+                  <a:srgbClr val="202B33"/>
+                </a:solidFill>
+                <a:latin typeface="Arial"/>
+                <a:ea typeface="Arial"/>
+                <a:cs typeface="Arial"/>
+              </a:rPr>
               <a:t xml:space="preserve">stay built. Moral hazard, because whoever</a:t>
             </a:r>
             <a:endParaRPr lang="en-US" sz="1500"/>
@@ -22711,30 +22596,7 @@
                 <a:ea typeface="Arial"/>
                 <a:cs typeface="Arial"/>
               </a:rPr>
-              <a:t xml:space="preserve">before it changes organizations. Leave the</a:t>
-            </a:r>
-            <a:endParaRPr lang="en-US" sz="1500"/>
-          </a:p>
-          <a:p>
-            <a:pPr marL="0" indent="0">
-              <a:lnSpc>
-                <a:spcPts val="1950"/>
-              </a:lnSpc>
-              <a:spcAft>
-                <a:spcPts val="0"/>
-              </a:spcAft>
-              <a:buNone/>
-            </a:pPr>
-            <a:r>
-              <a:rPr lang="en-US" sz="1500" b="0">
-                <a:solidFill>
-                  <a:srgbClr val="202B33"/>
-                </a:solidFill>
-                <a:latin typeface="Arial"/>
-                <a:ea typeface="Arial"/>
-                <a:cs typeface="Arial"/>
-              </a:rPr>
-              <a:t xml:space="preserve">table up.</a:t>
+              <a:t xml:space="preserve">before it changes organizations.</a:t>
             </a:r>
             <a:endParaRPr lang="en-US" sz="1500"/>
           </a:p>
@@ -22783,7 +22645,7 @@
                 <a:ea typeface="Arial"/>
                 <a:cs typeface="Arial"/>
               </a:rPr>
-              <a:t xml:space="preserve">Cry Me a Free Tier</a:t>
+              <a:t xml:space="preserve">Buy Me a Free Tier</a:t>
             </a:r>
             <a:endParaRPr lang="en-US" sz="975"/>
           </a:p>
@@ -23938,7 +23800,7 @@
                 <a:ea typeface="Arial"/>
                 <a:cs typeface="Arial"/>
               </a:rPr>
-              <a:t xml:space="preserve">Cry Me a Free Tier</a:t>
+              <a:t xml:space="preserve">Buy Me a Free Tier</a:t>
             </a:r>
             <a:endParaRPr lang="en-US" sz="975"/>
           </a:p>
@@ -24564,7 +24426,7 @@
                 <a:ea typeface="Arial"/>
                 <a:cs typeface="Arial"/>
               </a:rPr>
-              <a:t xml:space="preserve">Cry Me a Free Tier</a:t>
+              <a:t xml:space="preserve">Buy Me a Free Tier</a:t>
             </a:r>
             <a:endParaRPr lang="en-US" sz="975"/>
           </a:p>
@@ -24744,7 +24606,7 @@
                 <a:ea typeface="Arial"/>
                 <a:cs typeface="Arial"/>
               </a:rPr>
-              <a:t xml:space="preserve">Price, cost, and value are three different numbers</a:t>
+              <a:t xml:space="preserve">Four boxes, one invoice</a:t>
             </a:r>
             <a:endParaRPr lang="en-US" sz="2550"/>
           </a:p>
@@ -25466,7 +25328,7 @@
                 <a:ea typeface="Arial"/>
                 <a:cs typeface="Arial"/>
               </a:rPr>
-              <a:t xml:space="preserve">Cry Me a Free Tier</a:t>
+              <a:t xml:space="preserve">Buy Me a Free Tier</a:t>
             </a:r>
             <a:endParaRPr lang="en-US" sz="975"/>
           </a:p>
@@ -26621,7 +26483,7 @@
                 <a:ea typeface="Arial"/>
                 <a:cs typeface="Arial"/>
               </a:rPr>
-              <a:t xml:space="preserve">Cry Me a Free Tier</a:t>
+              <a:t xml:space="preserve">Buy Me a Free Tier</a:t>
             </a:r>
             <a:endParaRPr lang="en-US" sz="975"/>
           </a:p>
@@ -26801,30 +26663,7 @@
                 <a:ea typeface="Arial"/>
                 <a:cs typeface="Arial"/>
               </a:rPr>
-              <a:t xml:space="preserve">Those enormous commitments are moves, not</a:t>
-            </a:r>
-            <a:endParaRPr lang="en-US" sz="2550"/>
-          </a:p>
-          <a:p>
-            <a:pPr marL="0" indent="0">
-              <a:lnSpc>
-                <a:spcPts val="3060"/>
-              </a:lnSpc>
-              <a:spcAft>
-                <a:spcPts val="0"/>
-              </a:spcAft>
-              <a:buNone/>
-            </a:pPr>
-            <a:r>
-              <a:rPr lang="en-US" sz="2550" b="1">
-                <a:solidFill>
-                  <a:srgbClr val="202B33"/>
-                </a:solidFill>
-                <a:latin typeface="Arial"/>
-                <a:ea typeface="Arial"/>
-                <a:cs typeface="Arial"/>
-              </a:rPr>
-              <a:t xml:space="preserve">measurements</a:t>
+              <a:t xml:space="preserve">Burn the boats</a:t>
             </a:r>
             <a:endParaRPr lang="en-US" sz="2550"/>
           </a:p>
@@ -27796,30 +27635,53 @@
                 <a:ea typeface="Arial"/>
                 <a:cs typeface="Arial"/>
               </a:rPr>
-              <a:t xml:space="preserve">in that game. You are not a combatant. You</a:t>
-            </a:r>
-            <a:endParaRPr lang="en-US" sz="1500"/>
-          </a:p>
-          <a:p>
-            <a:pPr marL="0" indent="0">
-              <a:lnSpc>
-                <a:spcPts val="1950"/>
-              </a:lnSpc>
-              <a:spcAft>
-                <a:spcPts val="0"/>
-              </a:spcAft>
-              <a:buNone/>
-            </a:pPr>
-            <a:r>
-              <a:rPr lang="en-US" sz="1500" b="0">
-                <a:solidFill>
-                  <a:srgbClr val="202B33"/>
-                </a:solidFill>
-                <a:latin typeface="Arial"/>
-                <a:ea typeface="Arial"/>
-                <a:cs typeface="Arial"/>
-              </a:rPr>
-              <a:t xml:space="preserve">are the terrain.</a:t>
+              <a:t xml:space="preserve">in that game. Somebody is buying your free</a:t>
+            </a:r>
+            <a:endParaRPr lang="en-US" sz="1500"/>
+          </a:p>
+          <a:p>
+            <a:pPr marL="0" indent="0">
+              <a:lnSpc>
+                <a:spcPts val="1950"/>
+              </a:lnSpc>
+              <a:spcAft>
+                <a:spcPts val="0"/>
+              </a:spcAft>
+              <a:buNone/>
+            </a:pPr>
+            <a:r>
+              <a:rPr lang="en-US" sz="1500" b="0">
+                <a:solidFill>
+                  <a:srgbClr val="202B33"/>
+                </a:solidFill>
+                <a:latin typeface="Arial"/>
+                <a:ea typeface="Arial"/>
+                <a:cs typeface="Arial"/>
+              </a:rPr>
+              <a:t xml:space="preserve">tier, and it is not you. You are not a</a:t>
+            </a:r>
+            <a:endParaRPr lang="en-US" sz="1500"/>
+          </a:p>
+          <a:p>
+            <a:pPr marL="0" indent="0">
+              <a:lnSpc>
+                <a:spcPts val="1950"/>
+              </a:lnSpc>
+              <a:spcAft>
+                <a:spcPts val="0"/>
+              </a:spcAft>
+              <a:buNone/>
+            </a:pPr>
+            <a:r>
+              <a:rPr lang="en-US" sz="1500" b="0">
+                <a:solidFill>
+                  <a:srgbClr val="202B33"/>
+                </a:solidFill>
+                <a:latin typeface="Arial"/>
+                <a:ea typeface="Arial"/>
+                <a:cs typeface="Arial"/>
+              </a:rPr>
+              <a:t xml:space="preserve">combatant. You are the terrain.</a:t>
             </a:r>
             <a:endParaRPr lang="en-US" sz="1500"/>
           </a:p>
@@ -27868,7 +27730,7 @@
                 <a:ea typeface="Arial"/>
                 <a:cs typeface="Arial"/>
               </a:rPr>
-              <a:t xml:space="preserve">Cry Me a Free Tier</a:t>
+              <a:t xml:space="preserve">Buy Me a Free Tier</a:t>
             </a:r>
             <a:endParaRPr lang="en-US" sz="975"/>
           </a:p>
@@ -28908,7 +28770,7 @@
                 <a:ea typeface="Arial"/>
                 <a:cs typeface="Arial"/>
               </a:rPr>
-              <a:t xml:space="preserve">Cry Me a Free Tier</a:t>
+              <a:t xml:space="preserve">Buy Me a Free Tier</a:t>
             </a:r>
             <a:endParaRPr lang="en-US" sz="975"/>
           </a:p>
@@ -30155,7 +30017,7 @@
                 <a:ea typeface="Arial"/>
                 <a:cs typeface="Arial"/>
               </a:rPr>
-              <a:t xml:space="preserve">Cry Me a Free Tier</a:t>
+              <a:t xml:space="preserve">Buy Me a Free Tier</a:t>
             </a:r>
             <a:endParaRPr lang="en-US" sz="975"/>
           </a:p>
@@ -30551,7 +30413,7 @@
                 <a:ea typeface="Arial"/>
                 <a:cs typeface="Arial"/>
               </a:rPr>
-              <a:t xml:space="preserve">Cry Me a Free Tier</a:t>
+              <a:t xml:space="preserve">Buy Me a Free Tier</a:t>
             </a:r>
             <a:endParaRPr lang="en-US" sz="975"/>
           </a:p>
@@ -31660,7 +31522,7 @@
                 <a:ea typeface="Arial"/>
                 <a:cs typeface="Arial"/>
               </a:rPr>
-              <a:t xml:space="preserve">Cry Me a Free Tier</a:t>
+              <a:t xml:space="preserve">Buy Me a Free Tier</a:t>
             </a:r>
             <a:endParaRPr lang="en-US" sz="975"/>
           </a:p>

--- a/artifacts/speaking-portfolio-expanded/decks/free-tier-40min-handout.pptx
+++ b/artifacts/speaking-portfolio-expanded/decks/free-tier-40min-handout.pptx
@@ -29,7 +29,6 @@
     <p:sldId id="274" r:id="rIdSlide19"/>
     <p:sldId id="275" r:id="rIdSlide20"/>
     <p:sldId id="276" r:id="rIdSlide21"/>
-    <p:sldId id="277" r:id="rIdSlide22"/>
   </p:sldIdLst>
   <p:sldSz cx="10058400" cy="7772400" type="custom"/>
   <p:notesSz cx="6858000" cy="9144000"/>
@@ -411,7 +410,7 @@
                 <a:ea typeface="Arial"/>
                 <a:cs typeface="Arial"/>
               </a:rPr>
-              <a:t xml:space="preserve">18:00 to 20:00 · steady</a:t>
+              <a:t xml:space="preserve">17:00 to 19:45 · steady</a:t>
             </a:r>
             <a:endParaRPr lang="en-US" sz="1200"/>
           </a:p>
@@ -641,7 +640,7 @@
                 <a:ea typeface="Arial"/>
                 <a:cs typeface="Arial"/>
               </a:rPr>
-              <a:t xml:space="preserve">That is path dependence, word four: where you can get to depends on how you got here, and reversal costs more than the original decision did. Paul David made the argument famous with QWERTY in 1985, and I want to be straight with you, because it matters for how you use this: economists have been fighting about that example ever since. Liebowitz and Margolis published a paper in 1990 called The Fable of the Keys arguing the evidence was thin. The concept survives. The canonical example is contested.</a:t>
+              <a:t xml:space="preserve">That is path dependence, word four: where you can get to depends on how you got here, and reversal costs more than the original decision did. Paul David made it famous with QWERTY in 1985, and I will be straight with you because it matters for how you use this — economists have fought about that example ever since, and Liebowitz and Margolis argued in 1990 that the evidence was thin. The concept survives. The canonical example is contested.</a:t>
             </a:r>
             <a:endParaRPr lang="en-US" sz="1200"/>
           </a:p>
@@ -892,7 +891,7 @@
                 <a:ea typeface="Arial"/>
                 <a:cs typeface="Arial"/>
               </a:rPr>
-              <a:t xml:space="preserve">20:00 to 22:00 · steady</a:t>
+              <a:t xml:space="preserve">19:45 to 22:15 · steady</a:t>
             </a:r>
             <a:endParaRPr lang="en-US" sz="1200"/>
           </a:p>
@@ -1122,7 +1121,7 @@
                 <a:ea typeface="Arial"/>
                 <a:cs typeface="Arial"/>
               </a:rPr>
-              <a:t xml:space="preserve">And notice what Shoup actually recommended, because everyone gets this wrong. He never said ban parking. He said charge the right price for it, and give the money back to the neighborhood. Same here. The fix is not austerity and it is not a policy forbidding the model. It is putting the number in front of the person making the choice, at the moment they make it. Estimated cost per accepted outcome, in the design doc, next to the latency budget.</a:t>
+              <a:t xml:space="preserve">And notice what Shoup actually recommended, because everyone gets this wrong. He never said ban parking. He said charge the right price and give the money back to the neighborhood. Same here. The fix is not austerity or a policy forbidding the model. It is putting the number in front of the person choosing, at the moment they choose: estimated cost per accepted outcome, in the design doc, next to the latency budget.</a:t>
             </a:r>
             <a:endParaRPr lang="en-US" sz="1200"/>
           </a:p>
@@ -1373,7 +1372,7 @@
                 <a:ea typeface="Arial"/>
                 <a:cs typeface="Arial"/>
               </a:rPr>
-              <a:t xml:space="preserve">22:00 to 25:00 · steady</a:t>
+              <a:t xml:space="preserve">22:15 to 24:45 · steady</a:t>
             </a:r>
             <a:endParaRPr lang="en-US" sz="1200"/>
           </a:p>
@@ -1854,7 +1853,7 @@
                 <a:ea typeface="Arial"/>
                 <a:cs typeface="Arial"/>
               </a:rPr>
-              <a:t xml:space="preserve">25:00 to 29:00 · peak</a:t>
+              <a:t xml:space="preserve">24:45 to 28:45 · peak</a:t>
             </a:r>
             <a:endParaRPr lang="en-US" sz="1200"/>
           </a:p>
@@ -2427,7 +2426,7 @@
                 <a:ea typeface="Arial"/>
                 <a:cs typeface="Arial"/>
               </a:rPr>
-              <a:t xml:space="preserve">25:00 to 29:00 · peak</a:t>
+              <a:t xml:space="preserve">24:45 to 28:45 · peak</a:t>
             </a:r>
             <a:endParaRPr lang="en-US" sz="1200"/>
           </a:p>
@@ -3000,7 +2999,7 @@
                 <a:ea typeface="Arial"/>
                 <a:cs typeface="Arial"/>
               </a:rPr>
-              <a:t xml:space="preserve">29:00 to 32:00 · peak</a:t>
+              <a:t xml:space="preserve">28:45 to 32:00 · peak</a:t>
             </a:r>
             <a:endParaRPr lang="en-US" sz="1200"/>
           </a:p>
@@ -3481,7 +3480,7 @@
                 <a:ea typeface="Arial"/>
                 <a:cs typeface="Arial"/>
               </a:rPr>
-              <a:t xml:space="preserve">29:00 to 32:00 · peak</a:t>
+              <a:t xml:space="preserve">28:45 to 32:00 · peak</a:t>
             </a:r>
             <a:endParaRPr lang="en-US" sz="1200"/>
           </a:p>
@@ -4146,7 +4145,7 @@
                 <a:ea typeface="Arial"/>
                 <a:cs typeface="Arial"/>
               </a:rPr>
-              <a:t xml:space="preserve">Everyone in this field says "keep it reversible" like it is a personality trait. It is not. It is an option, in the financial sense, and Dixit and Pindyck wrote the book on valuing exactly this kind of flexibility under uncertainty. The right to switch providers has a value that rises with how uncertain the price is and how exposed you are. It also has a premium you pay every month: the abstraction tax, a second eval suite, rehearsal time, and a generic wrapper that hides real differences between models and occasionally makes everything worse.</a:t>
+              <a:t xml:space="preserve">Everyone says "keep it reversible" like it is a personality trait. It is not, it is an option in the financial sense, and Dixit and Pindyck wrote the book on valuing flexibility under uncertainty. The right to switch providers gains value as the price gets less certain and your exposure grows. It also has a monthly premium: the abstraction tax, a second eval suite, rehearsal time, and a generic wrapper that hides real differences between models.</a:t>
             </a:r>
             <a:endParaRPr lang="en-US" sz="1200"/>
           </a:p>
@@ -4192,7 +4191,7 @@
                 <a:ea typeface="Arial"/>
                 <a:cs typeface="Arial"/>
               </a:rPr>
-              <a:t xml:space="preserve">So do not argue about portability on vibes. Price it. Your exposure is the three prices on the next slide times your volume. Your premium is the engineering you would spend. Compare the two numbers.</a:t>
+              <a:t xml:space="preserve">So do not argue about portability on vibes. Price it. Exposure is the three prices on the next slide times your volume; the premium is the engineering you would spend. Compare the two numbers.</a:t>
             </a:r>
             <a:endParaRPr lang="en-US" sz="1200"/>
           </a:p>
@@ -4238,7 +4237,7 @@
                 <a:ea typeface="Arial"/>
                 <a:cs typeface="Arial"/>
               </a:rPr>
-              <a:t xml:space="preserve">Same for optimization. Take a cache or a router that halves inference per attempt at the same acceptance rate. In our fixture it saves one cent per attempt at one-times pricing and ten cents at ten-times. Divide your build cost by that, divide by monthly attempts, and you have payback in months. At a million attempts a month, ten cents each is a hundred thousand dollars a month and you should have started yesterday. At a thousand attempts a month it is a hundred dollars, ten at today's price, and you should never do it. Identical project. The sweep is what tells you which world you are living in. A router that costs more to run than it saves is not better engineering.</a:t>
+              <a:t xml:space="preserve">Same for optimization. Take a router that halves inference per attempt at the same acceptance rate: in our fixture it saves a cent per attempt at sticker price and ten cents at ten times. At a million attempts a month, ten cents each is a hundred thousand dollars and you should have started yesterday. At a thousand attempts it is a hundred dollars — ten at today's price — and you should never do it. Identical project. The sweep tells you which world you live in, and a router that costs more to run than it saves is not better engineering.</a:t>
             </a:r>
             <a:endParaRPr lang="en-US" sz="1200"/>
           </a:p>
@@ -4397,7 +4396,7 @@
                 <a:ea typeface="Arial"/>
                 <a:cs typeface="Arial"/>
               </a:rPr>
-              <a:t xml:space="preserve">Reversible is a line item</a:t>
+              <a:t xml:space="preserve">Three prices for the next design review</a:t>
             </a:r>
             <a:endParaRPr lang="en-US" sz="1200"/>
           </a:p>
@@ -4443,7 +4442,7 @@
                 <a:ea typeface="Arial"/>
                 <a:cs typeface="Arial"/>
               </a:rPr>
-              <a:t xml:space="preserve">32:00 to 35:00 · build</a:t>
+              <a:t xml:space="preserve">35:00 to 37:15 · land</a:t>
             </a:r>
             <a:endParaRPr lang="en-US" sz="1200"/>
           </a:p>
@@ -4489,7 +4488,7 @@
                 <a:ea typeface="Arial"/>
                 <a:cs typeface="Arial"/>
               </a:rPr>
-              <a:t xml:space="preserve">&lt;!-- image: the same bar chart with every bar cut in half by a horizontal slice, the removed top halves fading away, dark slate background, amber accent on the cut line, flat vector, no text --&gt;</a:t>
+              <a:t xml:space="preserve">&lt;!-- image: three price tags hanging from strings at different heights, the highest one slightly singed at the edge, dark slate background, amber accent on the singed tag, flat vector, no text --&gt;</a:t>
             </a:r>
             <a:endParaRPr lang="en-US" sz="1200"/>
           </a:p>
@@ -4535,53 +4534,53 @@
                 <a:ea typeface="Arial"/>
                 <a:cs typeface="Arial"/>
               </a:rPr>
-              <a:t xml:space="preserve">&gt; Word eight: real option</a:t>
-            </a:r>
-            <a:endParaRPr lang="en-US" sz="1200"/>
-          </a:p>
-          <a:p>
-            <a:pPr marL="0" indent="0">
-              <a:lnSpc>
-                <a:spcPts val="1560"/>
-              </a:lnSpc>
-              <a:spcAft>
-                <a:spcPts val="0"/>
-              </a:spcAft>
-              <a:buNone/>
-            </a:pPr>
-            <a:r>
-              <a:rPr lang="en-US" sz="1200" b="0">
-                <a:solidFill>
-                  <a:srgbClr val="202b33"/>
-                </a:solidFill>
-                <a:latin typeface="Arial"/>
-                <a:ea typeface="Arial"/>
-                <a:cs typeface="Arial"/>
-              </a:rPr>
-              <a:t xml:space="preserve">&gt; The option has value. It also has a premium: abstraction tax, eval upkeep, rehearsal time.</a:t>
-            </a:r>
-            <a:endParaRPr lang="en-US" sz="1200"/>
-          </a:p>
-          <a:p>
-            <a:pPr marL="0" indent="0">
-              <a:lnSpc>
-                <a:spcPts val="1560"/>
-              </a:lnSpc>
-              <a:spcAft>
-                <a:spcPts val="0"/>
-              </a:spcAft>
-              <a:buNone/>
-            </a:pPr>
-            <a:r>
-              <a:rPr lang="en-US" sz="1200" b="0">
-                <a:solidFill>
-                  <a:srgbClr val="202b33"/>
-                </a:solidFill>
-                <a:latin typeface="Arial"/>
-                <a:ea typeface="Arial"/>
-                <a:cs typeface="Arial"/>
-              </a:rPr>
-              <a:t xml:space="preserve">&gt; Same project, different answer, depending on which world you are in</a:t>
+              <a:t xml:space="preserve">&gt; What we pay today · What we pay without the offer · What we can survive paying</a:t>
+            </a:r>
+            <a:endParaRPr lang="en-US" sz="1200"/>
+          </a:p>
+          <a:p>
+            <a:pPr marL="0" indent="0">
+              <a:lnSpc>
+                <a:spcPts val="1560"/>
+              </a:lnSpc>
+              <a:spcAft>
+                <a:spcPts val="0"/>
+              </a:spcAft>
+              <a:buNone/>
+            </a:pPr>
+            <a:r>
+              <a:rPr lang="en-US" sz="1200" b="0">
+                <a:solidFill>
+                  <a:srgbClr val="202b33"/>
+                </a:solidFill>
+                <a:latin typeface="Arial"/>
+                <a:ea typeface="Arial"/>
+                <a:cs typeface="Arial"/>
+              </a:rPr>
+              <a:t xml:space="preserve">&gt; Record gross usage separately from credits</a:t>
+            </a:r>
+            <a:endParaRPr lang="en-US" sz="1200"/>
+          </a:p>
+          <a:p>
+            <a:pPr marL="0" indent="0">
+              <a:lnSpc>
+                <a:spcPts val="1560"/>
+              </a:lnSpc>
+              <a:spcAft>
+                <a:spcPts val="0"/>
+              </a:spcAft>
+              <a:buNone/>
+            </a:pPr>
+            <a:r>
+              <a:rPr lang="en-US" sz="1200" b="0">
+                <a:solidFill>
+                  <a:srgbClr val="202b33"/>
+                </a:solidFill>
+                <a:latin typeface="Arial"/>
+                <a:ea typeface="Arial"/>
+                <a:cs typeface="Arial"/>
+              </a:rPr>
+              <a:t xml:space="preserve">&gt; Keep an acceptance suite · Rehearse one replacement · Price the portability</a:t>
             </a:r>
             <a:endParaRPr lang="en-US" sz="1200"/>
           </a:p>
@@ -4627,7 +4626,7 @@
                 <a:ea typeface="Arial"/>
                 <a:cs typeface="Arial"/>
               </a:rPr>
-              <a:t xml:space="preserve">Everyone in this field says "keep it reversible" like it is a personality trait. It is not. It is an option, in the financial sense, and Dixit and Pindyck wrote the book on valuing exactly this kind of flexibility under uncertainty. The right to switch providers has a value that rises with how uncertain the price is and how exposed you are. It also has a premium you pay every month: the abstraction tax, a second eval suite, rehearsal time, and a generic wrapper that hides real differences between models and occasionally makes everything worse.</a:t>
+              <a:t xml:space="preserve">Three numbers, and if you take nothing else, take these. The effective rate you pay today. The gross rate with no promotional treatment, which is your exposure if the offer ends. And the highest rate at which this product still makes sense, which is the number nobody has ever calculated and everybody should. Sweep downward too, so you can cancel the optimization project when efficiency makes it pointless.</a:t>
             </a:r>
             <a:endParaRPr lang="en-US" sz="1200"/>
           </a:p>
@@ -4673,7 +4672,7 @@
                 <a:ea typeface="Arial"/>
                 <a:cs typeface="Arial"/>
               </a:rPr>
-              <a:t xml:space="preserve">So do not argue about portability on vibes. Price it. Your exposure is the three prices on the next slide times your volume. Your premium is the engineering you would spend. Compare the two numbers.</a:t>
+              <a:t xml:space="preserve">Four actions, and each one is one of the words. Record gross consumption separately from credits, so price and subsidy stop being the same number on your dashboard. Keep a small representative acceptance suite, because that is the strike test on your option. Rehearse one provider replacement before you need it, latency and recovery included, because that is how you reduce asset specificity from a slide into a fact. And put the estimated cost per accepted outcome in the design doc next to the latency budget, because that is the meter, and the meter is the fix for moral hazard.</a:t>
             </a:r>
             <a:endParaRPr lang="en-US" sz="1200"/>
           </a:p>
@@ -4719,53 +4718,7 @@
                 <a:ea typeface="Arial"/>
                 <a:cs typeface="Arial"/>
               </a:rPr>
-              <a:t xml:space="preserve">Same for optimization. Take a cache or a router that halves inference per attempt at the same acceptance rate. In our fixture it saves one cent per attempt at one-times pricing and ten cents at ten-times. Divide your build cost by that, divide by monthly attempts, and you have payback in months. At a million attempts a month, ten cents each is a hundred thousand dollars a month and you should have started yesterday. At a thousand attempts a month it is a hundred dollars, ten at today's price, and you should never do it. Identical project. The sweep is what tells you which world you are living in. A router that costs more to run than it saves is not better engineering.</a:t>
-            </a:r>
-            <a:endParaRPr lang="en-US" sz="1200"/>
-          </a:p>
-          <a:p>
-            <a:pPr marL="0" indent="0">
-              <a:lnSpc>
-                <a:spcPts val="1560"/>
-              </a:lnSpc>
-              <a:spcAft>
-                <a:spcPts val="0"/>
-              </a:spcAft>
-              <a:buNone/>
-            </a:pPr>
-            <a:r>
-              <a:rPr lang="en-US" sz="1200" b="0">
-                <a:solidFill>
-                  <a:srgbClr val="202b33"/>
-                </a:solidFill>
-                <a:latin typeface="Arial"/>
-                <a:ea typeface="Arial"/>
-                <a:cs typeface="Arial"/>
-              </a:rPr>
-              <a:t xml:space="preserve"/>
-            </a:r>
-            <a:endParaRPr lang="en-US" sz="1200"/>
-          </a:p>
-          <a:p>
-            <a:pPr marL="0" indent="0">
-              <a:lnSpc>
-                <a:spcPts val="1560"/>
-              </a:lnSpc>
-              <a:spcAft>
-                <a:spcPts val="0"/>
-              </a:spcAft>
-              <a:buNone/>
-            </a:pPr>
-            <a:r>
-              <a:rPr lang="en-US" sz="1200" b="0">
-                <a:solidFill>
-                  <a:srgbClr val="202b33"/>
-                </a:solidFill>
-                <a:latin typeface="Arial"/>
-                <a:ea typeface="Arial"/>
-                <a:cs typeface="Arial"/>
-              </a:rPr>
-              <a:t xml:space="preserve">Source: Dixit and Pindyck (1994), Investment Under Uncertainty, Princeton University Press.</a:t>
+              <a:t xml:space="preserve">Stage direction: 45 seconds in pairs on the third price. Most rooms have never computed it and the silence is useful.</a:t>
             </a:r>
             <a:endParaRPr lang="en-US" sz="1200"/>
           </a:p>
@@ -4878,7 +4831,7 @@
                 <a:ea typeface="Arial"/>
                 <a:cs typeface="Arial"/>
               </a:rPr>
-              <a:t xml:space="preserve">Three prices for the next design review</a:t>
+              <a:t xml:space="preserve">Cheap intelligence changes incentives first</a:t>
             </a:r>
             <a:endParaRPr lang="en-US" sz="1200"/>
           </a:p>
@@ -4924,7 +4877,7 @@
                 <a:ea typeface="Arial"/>
                 <a:cs typeface="Arial"/>
               </a:rPr>
-              <a:t xml:space="preserve">35:00 to 38:00 · land</a:t>
+              <a:t xml:space="preserve">37:15 to 40:00 · land</a:t>
             </a:r>
             <a:endParaRPr lang="en-US" sz="1200"/>
           </a:p>
@@ -4970,7 +4923,7 @@
                 <a:ea typeface="Arial"/>
                 <a:cs typeface="Arial"/>
               </a:rPr>
-              <a:t xml:space="preserve">&lt;!-- image: three price tags hanging from strings at different heights, the highest one slightly singed at the edge, dark slate background, amber accent on the singed tag, flat vector, no text --&gt;</a:t>
+              <a:t xml:space="preserve">&lt;!-- image: the bare bulb from slide 1 now on a desk beside a small solar panel and a battery, the long cable coiled unused, dark slate background, amber accent on the bulb, flat vector, no text --&gt;</a:t>
             </a:r>
             <a:endParaRPr lang="en-US" sz="1200"/>
           </a:p>
@@ -5016,53 +4969,53 @@
                 <a:ea typeface="Arial"/>
                 <a:cs typeface="Arial"/>
               </a:rPr>
-              <a:t xml:space="preserve">&gt; What we pay today · What we pay without the offer · What we can survive paying</a:t>
-            </a:r>
-            <a:endParaRPr lang="en-US" sz="1200"/>
-          </a:p>
-          <a:p>
-            <a:pPr marL="0" indent="0">
-              <a:lnSpc>
-                <a:spcPts val="1560"/>
-              </a:lnSpc>
-              <a:spcAft>
-                <a:spcPts val="0"/>
-              </a:spcAft>
-              <a:buNone/>
-            </a:pPr>
-            <a:r>
-              <a:rPr lang="en-US" sz="1200" b="0">
-                <a:solidFill>
-                  <a:srgbClr val="202b33"/>
-                </a:solidFill>
-                <a:latin typeface="Arial"/>
-                <a:ea typeface="Arial"/>
-                <a:cs typeface="Arial"/>
-              </a:rPr>
-              <a:t xml:space="preserve">&gt; Record gross usage separately from credits</a:t>
-            </a:r>
-            <a:endParaRPr lang="en-US" sz="1200"/>
-          </a:p>
-          <a:p>
-            <a:pPr marL="0" indent="0">
-              <a:lnSpc>
-                <a:spcPts val="1560"/>
-              </a:lnSpc>
-              <a:spcAft>
-                <a:spcPts val="0"/>
-              </a:spcAft>
-              <a:buNone/>
-            </a:pPr>
-            <a:r>
-              <a:rPr lang="en-US" sz="1200" b="0">
-                <a:solidFill>
-                  <a:srgbClr val="202b33"/>
-                </a:solidFill>
-                <a:latin typeface="Arial"/>
-                <a:ea typeface="Arial"/>
-                <a:cs typeface="Arial"/>
-              </a:rPr>
-              <a:t xml:space="preserve">&gt; Keep an acceptance suite · Rehearse one replacement · Price the portability</a:t>
+              <a:t xml:space="preserve">&gt; Externality · Induced demand · Jevons paradox · Path dependence</a:t>
+            </a:r>
+            <a:endParaRPr lang="en-US" sz="1200"/>
+          </a:p>
+          <a:p>
+            <a:pPr marL="0" indent="0">
+              <a:lnSpc>
+                <a:spcPts val="1560"/>
+              </a:lnSpc>
+              <a:spcAft>
+                <a:spcPts val="0"/>
+              </a:spcAft>
+              <a:buNone/>
+            </a:pPr>
+            <a:r>
+              <a:rPr lang="en-US" sz="1200" b="0">
+                <a:solidFill>
+                  <a:srgbClr val="202b33"/>
+                </a:solidFill>
+                <a:latin typeface="Arial"/>
+                <a:ea typeface="Arial"/>
+                <a:cs typeface="Arial"/>
+              </a:rPr>
+              <a:t xml:space="preserve">&gt; Moral hazard · Credible commitment · Asset specificity · Real option</a:t>
+            </a:r>
+            <a:endParaRPr lang="en-US" sz="1200"/>
+          </a:p>
+          <a:p>
+            <a:pPr marL="0" indent="0">
+              <a:lnSpc>
+                <a:spcPts val="1560"/>
+              </a:lnSpc>
+              <a:spcAft>
+                <a:spcPts val="0"/>
+              </a:spcAft>
+              <a:buNone/>
+            </a:pPr>
+            <a:r>
+              <a:rPr lang="en-US" sz="1200" b="0">
+                <a:solidFill>
+                  <a:srgbClr val="202b33"/>
+                </a:solidFill>
+                <a:latin typeface="Arial"/>
+                <a:ea typeface="Arial"/>
+                <a:cs typeface="Arial"/>
+              </a:rPr>
+              <a:t xml:space="preserve">&gt; Build for more than one price.</a:t>
             </a:r>
             <a:endParaRPr lang="en-US" sz="1200"/>
           </a:p>
@@ -5108,7 +5061,7 @@
                 <a:ea typeface="Arial"/>
                 <a:cs typeface="Arial"/>
               </a:rPr>
-              <a:t xml:space="preserve">Three numbers, and if you take nothing else, take these. The effective rate you pay today. The gross rate with no promotional treatment, which is your exposure if the offer ends. And the highest rate at which this product still makes sense, which is the number nobody has ever calculated and everybody should. Sweep downward too, so you can cancel the optimization project when efficiency makes it pointless.</a:t>
+              <a:t xml:space="preserve">Back to the electricity. Use the cheap input. It is genuinely great and I am not asking anyone to be miserable about it. Just understand what it encouraged you to build, and keep the expensive decisions reversible while you find out.</a:t>
             </a:r>
             <a:endParaRPr lang="en-US" sz="1200"/>
           </a:p>
@@ -5154,7 +5107,7 @@
                 <a:ea typeface="Arial"/>
                 <a:cs typeface="Arial"/>
               </a:rPr>
-              <a:t xml:space="preserve">Four actions, and each one is one of the words. Record gross consumption separately from credits, so price and subsidy stop being the same number on your dashboard. Keep a small representative acceptance suite, because that is the strike test on your option. Rehearse one provider replacement before you need it, latency and recovery included, because that is how you reduce asset specificity from a slide into a fact. And put the estimated cost per accepted outcome in the design doc next to the latency budget, because that is the meter, and the meter is the fix for moral hazard.</a:t>
+              <a:t xml:space="preserve">There are your eight words. Externality, because the cost moved rather than vanished. Induced demand and Jevons, because cheaper made you use more, not less. Path dependence, because the lots stay built. Moral hazard, because whoever chooses is not whoever pays. Credible commitment, because those contracts are moves in a game and not disclosures about it. Asset specificity, because your architecture is worth more here than anywhere else. And real option, because reversibility is something you buy, not something you feel.</a:t>
             </a:r>
             <a:endParaRPr lang="en-US" sz="1200"/>
           </a:p>
@@ -5200,7 +5153,7 @@
                 <a:ea typeface="Arial"/>
                 <a:cs typeface="Arial"/>
               </a:rPr>
-              <a:t xml:space="preserve">Stage direction: 45 seconds in pairs on the third price. Most rooms have never computed it and the silence is useful.</a:t>
+              <a:t xml:space="preserve">Some low prices are temporary. Some are a preview of genuinely cheaper production. You do not have to know which. You have to measure outcomes and keep the big choices reversible either way.</a:t>
             </a:r>
             <a:endParaRPr lang="en-US" sz="1200"/>
           </a:p>
@@ -5224,6 +5177,75 @@
                 <a:cs typeface="Arial"/>
               </a:rPr>
               <a:t xml:space="preserve"/>
+            </a:r>
+            <a:endParaRPr lang="en-US" sz="1200"/>
+          </a:p>
+          <a:p>
+            <a:pPr marL="0" indent="0">
+              <a:lnSpc>
+                <a:spcPts val="1560"/>
+              </a:lnSpc>
+              <a:spcAft>
+                <a:spcPts val="0"/>
+              </a:spcAft>
+              <a:buNone/>
+            </a:pPr>
+            <a:r>
+              <a:rPr lang="en-US" sz="1200" b="0">
+                <a:solidFill>
+                  <a:srgbClr val="202b33"/>
+                </a:solidFill>
+                <a:latin typeface="Arial"/>
+                <a:ea typeface="Arial"/>
+                <a:cs typeface="Arial"/>
+              </a:rPr>
+              <a:t xml:space="preserve">Cheap intelligence changes incentives before it changes organizations.</a:t>
+            </a:r>
+            <a:endParaRPr lang="en-US" sz="1200"/>
+          </a:p>
+          <a:p>
+            <a:pPr marL="0" indent="0">
+              <a:lnSpc>
+                <a:spcPts val="1560"/>
+              </a:lnSpc>
+              <a:spcAft>
+                <a:spcPts val="0"/>
+              </a:spcAft>
+              <a:buNone/>
+            </a:pPr>
+            <a:r>
+              <a:rPr lang="en-US" sz="1200" b="0">
+                <a:solidFill>
+                  <a:srgbClr val="202b33"/>
+                </a:solidFill>
+                <a:latin typeface="Arial"/>
+                <a:ea typeface="Arial"/>
+                <a:cs typeface="Arial"/>
+              </a:rPr>
+              <a:t xml:space="preserve"/>
+            </a:r>
+            <a:endParaRPr lang="en-US" sz="1200"/>
+          </a:p>
+          <a:p>
+            <a:pPr marL="0" indent="0">
+              <a:lnSpc>
+                <a:spcPts val="1560"/>
+              </a:lnSpc>
+              <a:spcAft>
+                <a:spcPts val="0"/>
+              </a:spcAft>
+              <a:buNone/>
+            </a:pPr>
+            <a:r>
+              <a:rPr lang="en-US" sz="1200" b="0">
+                <a:solidFill>
+                  <a:srgbClr val="202b33"/>
+                </a:solidFill>
+                <a:latin typeface="Arial"/>
+                <a:ea typeface="Arial"/>
+                <a:cs typeface="Arial"/>
+              </a:rPr>
+              <a:t xml:space="preserve">Stage direction: Say the last line slowly, then stop talking. For questions, jump back to the sweep table if this route kept slide 11.</a:t>
             </a:r>
             <a:endParaRPr lang="en-US" sz="1200"/>
           </a:p>
@@ -5359,7 +5381,7 @@
                 <a:ea typeface="Arial"/>
                 <a:cs typeface="Arial"/>
               </a:rPr>
-              <a:t xml:space="preserve">00:00 to 02:30 · warm</a:t>
+              <a:t xml:space="preserve">00:00 to 02:15 · warm</a:t>
             </a:r>
             <a:endParaRPr lang="en-US" sz="1200"/>
           </a:p>
@@ -5817,7 +5839,7 @@
                 <a:ea typeface="Arial"/>
                 <a:cs typeface="Arial"/>
               </a:rPr>
-              <a:t xml:space="preserve">Cheap intelligence changes incentives first</a:t>
+              <a:t xml:space="preserve">Brooke Group Ltd. v. Brown &amp; Williamson Tobacco Corp., 509 U.S. 209 (1993), on the recoupment requirement in predatory-pricing claims.</a:t>
             </a:r>
             <a:endParaRPr lang="en-US" sz="1200"/>
           </a:p>
@@ -5863,7 +5885,7 @@
                 <a:ea typeface="Arial"/>
                 <a:cs typeface="Arial"/>
               </a:rPr>
-              <a:t xml:space="preserve">38:00 to 40:00 · land</a:t>
+              <a:t xml:space="preserve">Rochet and Tirole (2003), Platform Competition in Two-Sided Markets, Journal of the European Economic Association, on cross-subsidy between sides of a market.</a:t>
             </a:r>
             <a:endParaRPr lang="en-US" sz="1200"/>
           </a:p>
@@ -5909,7 +5931,7 @@
                 <a:ea typeface="Arial"/>
                 <a:cs typeface="Arial"/>
               </a:rPr>
-              <a:t xml:space="preserve">&lt;!-- image: the bare bulb from slide 1 now on a desk beside a small solar panel and a battery, the long cable coiled unused, dark slate background, amber accent on the bulb, flat vector, no text --&gt;</a:t>
+              <a:t xml:space="preserve">[Microsoft, 28 Oct 2025](https://blogs.microsoft.com/blog/2025/10/28/the-next-chapter-of-the-microsoft-openai-partnership/) · [Amazon, Apr 2026](https://www.aboutamazon.com/news/company-news/amazon-invests-additional-5-billion-anthropic-ai) · [AWS Activate, accessed 5 Sep 2026](https://aws.amazon.com/startups/credits/).</a:t>
             </a:r>
             <a:endParaRPr lang="en-US" sz="1200"/>
           </a:p>
@@ -5955,53 +5977,7 @@
                 <a:ea typeface="Arial"/>
                 <a:cs typeface="Arial"/>
               </a:rPr>
-              <a:t xml:space="preserve">&gt; Externality · Induced demand · Jevons paradox · Path dependence</a:t>
-            </a:r>
-            <a:endParaRPr lang="en-US" sz="1200"/>
-          </a:p>
-          <a:p>
-            <a:pPr marL="0" indent="0">
-              <a:lnSpc>
-                <a:spcPts val="1560"/>
-              </a:lnSpc>
-              <a:spcAft>
-                <a:spcPts val="0"/>
-              </a:spcAft>
-              <a:buNone/>
-            </a:pPr>
-            <a:r>
-              <a:rPr lang="en-US" sz="1200" b="0">
-                <a:solidFill>
-                  <a:srgbClr val="202b33"/>
-                </a:solidFill>
-                <a:latin typeface="Arial"/>
-                <a:ea typeface="Arial"/>
-                <a:cs typeface="Arial"/>
-              </a:rPr>
-              <a:t xml:space="preserve">&gt; Moral hazard · Credible commitment · Asset specificity · Real option</a:t>
-            </a:r>
-            <a:endParaRPr lang="en-US" sz="1200"/>
-          </a:p>
-          <a:p>
-            <a:pPr marL="0" indent="0">
-              <a:lnSpc>
-                <a:spcPts val="1560"/>
-              </a:lnSpc>
-              <a:spcAft>
-                <a:spcPts val="0"/>
-              </a:spcAft>
-              <a:buNone/>
-            </a:pPr>
-            <a:r>
-              <a:rPr lang="en-US" sz="1200" b="0">
-                <a:solidFill>
-                  <a:srgbClr val="202b33"/>
-                </a:solidFill>
-                <a:latin typeface="Arial"/>
-                <a:ea typeface="Arial"/>
-                <a:cs typeface="Arial"/>
-              </a:rPr>
-              <a:t xml:space="preserve">&gt; Build for more than one price.</a:t>
+              <a:t xml:space="preserve">Schelling (1960), The Strategy of Conflict, Harvard University Press. Nobel 2005.</a:t>
             </a:r>
             <a:endParaRPr lang="en-US" sz="1200"/>
           </a:p>
@@ -6047,7 +6023,7 @@
                 <a:ea typeface="Arial"/>
                 <a:cs typeface="Arial"/>
               </a:rPr>
-              <a:t xml:space="preserve">Back to the electricity. Use the cheap input. It is genuinely great and I am not asking anyone to be miserable about it. Just understand what it encouraged you to build, and keep the expensive decisions reversible while you find out.</a:t>
+              <a:t xml:space="preserve">Shoup (2005, updated 2011), The High Cost of Free Parking, American Planning Association. Also Shoup (2011), [Free parking or free markets](https://www.accessmagazine.org/spring-2011/free-parking-free-markets/), ACCESS Magazine.</a:t>
             </a:r>
             <a:endParaRPr lang="en-US" sz="1200"/>
           </a:p>
@@ -6093,7 +6069,7 @@
                 <a:ea typeface="Arial"/>
                 <a:cs typeface="Arial"/>
               </a:rPr>
-              <a:t xml:space="preserve">There are your eight words. Externality, because the cost moved rather than vanished. Induced demand and Jevons, because cheaper made you use more, not less. Path dependence, because the lots stay built. Moral hazard, because whoever chooses is not whoever pays. Credible commitment, because those contracts are moves in a game and not disclosures about it. Asset specificity, because your architecture is worth more here than anywhere else. And real option, because reversibility is something you buy, not something you feel.</a:t>
+              <a:t xml:space="preserve">Jevons (1865), The Coal Question, chapter VII. Duranton and Turner (2011), The Fundamental Law of Road Congestion, American Economic Review 101(6).</a:t>
             </a:r>
             <a:endParaRPr lang="en-US" sz="1200"/>
           </a:p>
@@ -6139,7 +6115,7 @@
                 <a:ea typeface="Arial"/>
                 <a:cs typeface="Arial"/>
               </a:rPr>
-              <a:t xml:space="preserve">Some low prices are temporary. Some are a preview of genuinely cheaper production. You do not have to know which. You have to measure outcomes and keep the big choices reversible either way.</a:t>
+              <a:t xml:space="preserve">Cottier, Snodin, Owen, Adamczewski (Epoch AI, March 2025), [LLM inference prices have fallen rapidly but unequally across tasks](https://epoch.ai/data-insights/llm-inference-price-trends). Check for a newer edition before each delivery.</a:t>
             </a:r>
             <a:endParaRPr lang="en-US" sz="1200"/>
           </a:p>
@@ -6185,7 +6161,7 @@
                 <a:ea typeface="Arial"/>
                 <a:cs typeface="Arial"/>
               </a:rPr>
-              <a:t xml:space="preserve">Cheap intelligence changes incentives before it changes organizations.</a:t>
+              <a:t xml:space="preserve">David (1985), Clio and the Economics of QWERTY, American Economic Review 75(2). Contested by Liebowitz and Margolis (1990), The Fable of the Keys, Journal of Law and Economics 33(1). Arthur (1989), Competing Technologies, Increasing Returns, and Lock-In by Historical Events, The Economic Journal 99(394).</a:t>
             </a:r>
             <a:endParaRPr lang="en-US" sz="1200"/>
           </a:p>
@@ -6231,7 +6207,7 @@
                 <a:ea typeface="Arial"/>
                 <a:cs typeface="Arial"/>
               </a:rPr>
-              <a:t xml:space="preserve">Stage direction: Say the last line slowly, then stop talking. For questions, jump back to the sweep table if this route kept slide 11.</a:t>
+              <a:t xml:space="preserve">Holmstrom (1979), Moral Hazard and Observability, Bell Journal of Economics 10(1), 74 to 91. Nobel 2016.</a:t>
             </a:r>
             <a:endParaRPr lang="en-US" sz="1200"/>
           </a:p>
@@ -6255,6 +6231,29 @@
                 <a:cs typeface="Arial"/>
               </a:rPr>
               <a:t xml:space="preserve"/>
+            </a:r>
+            <a:endParaRPr lang="en-US" sz="1200"/>
+          </a:p>
+          <a:p>
+            <a:pPr marL="0" indent="0">
+              <a:lnSpc>
+                <a:spcPts val="1560"/>
+              </a:lnSpc>
+              <a:spcAft>
+                <a:spcPts val="0"/>
+              </a:spcAft>
+              <a:buNone/>
+            </a:pPr>
+            <a:r>
+              <a:rPr lang="en-US" sz="1200" b="0">
+                <a:solidFill>
+                  <a:srgbClr val="202b33"/>
+                </a:solidFill>
+                <a:latin typeface="Arial"/>
+                <a:ea typeface="Arial"/>
+                <a:cs typeface="Arial"/>
+              </a:rPr>
+              <a:t xml:space="preserve">Dixit and Pindyck (1994), Investment Under Uncertainty, Princeton University Press.</a:t>
             </a:r>
             <a:endParaRPr lang="en-US" sz="1200"/>
           </a:p>
@@ -6749,487 +6748,6 @@
 </p:notes>
 </file>
 
-<file path=ppt/notesSlides/notesSlide22.xml><?xml version="1.0" encoding="utf-8"?>
-<p:notes xmlns:a="http://schemas.openxmlformats.org/drawingml/2006/main" xmlns:r="http://schemas.openxmlformats.org/officeDocument/2006/relationships" xmlns:p="http://schemas.openxmlformats.org/presentationml/2006/main">
-  <p:cSld>
-    <p:spTree>
-      <p:nvGrpSpPr>
-        <p:cNvPr id="1" name=""/>
-        <p:cNvGrpSpPr/>
-        <p:nvPr/>
-      </p:nvGrpSpPr>
-      <p:grpSpPr>
-        <a:xfrm>
-          <a:off x="0" y="0"/>
-          <a:ext cx="0" cy="0"/>
-          <a:chOff x="0" y="0"/>
-          <a:chExt cx="0" cy="0"/>
-        </a:xfrm>
-      </p:grpSpPr>
-      <p:sp>
-        <p:nvSpPr>
-          <p:cNvPr id="2" name="Presenter notes"/>
-          <p:cNvSpPr txBox="1"/>
-          <p:nvPr>
-            <p:ph type="body" idx="1"/>
-          </p:nvPr>
-        </p:nvSpPr>
-        <p:spPr>
-          <a:xfrm>
-            <a:off x="457200" y="1428750"/>
-            <a:ext cx="5715000" cy="6667500"/>
-          </a:xfrm>
-        </p:spPr>
-        <p:txBody>
-          <a:bodyPr/>
-          <a:lstStyle/>
-          <a:p>
-            <a:pPr marL="0" indent="0">
-              <a:lnSpc>
-                <a:spcPts val="1560"/>
-              </a:lnSpc>
-              <a:spcAft>
-                <a:spcPts val="0"/>
-              </a:spcAft>
-              <a:buNone/>
-            </a:pPr>
-            <a:r>
-              <a:rPr lang="en-US" sz="1200" b="0">
-                <a:solidFill>
-                  <a:srgbClr val="202b33"/>
-                </a:solidFill>
-                <a:latin typeface="Arial"/>
-                <a:ea typeface="Arial"/>
-                <a:cs typeface="Arial"/>
-              </a:rPr>
-              <a:t xml:space="preserve">Brooke Group Ltd. v. Brown &amp; Williamson Tobacco Corp., 509 U.S. 209 (1993), on the recoupment requirement in predatory-pricing claims.</a:t>
-            </a:r>
-            <a:endParaRPr lang="en-US" sz="1200"/>
-          </a:p>
-          <a:p>
-            <a:pPr marL="0" indent="0">
-              <a:lnSpc>
-                <a:spcPts val="1560"/>
-              </a:lnSpc>
-              <a:spcAft>
-                <a:spcPts val="0"/>
-              </a:spcAft>
-              <a:buNone/>
-            </a:pPr>
-            <a:r>
-              <a:rPr lang="en-US" sz="1200" b="0">
-                <a:solidFill>
-                  <a:srgbClr val="202b33"/>
-                </a:solidFill>
-                <a:latin typeface="Arial"/>
-                <a:ea typeface="Arial"/>
-                <a:cs typeface="Arial"/>
-              </a:rPr>
-              <a:t xml:space="preserve"/>
-            </a:r>
-            <a:endParaRPr lang="en-US" sz="1200"/>
-          </a:p>
-          <a:p>
-            <a:pPr marL="0" indent="0">
-              <a:lnSpc>
-                <a:spcPts val="1560"/>
-              </a:lnSpc>
-              <a:spcAft>
-                <a:spcPts val="0"/>
-              </a:spcAft>
-              <a:buNone/>
-            </a:pPr>
-            <a:r>
-              <a:rPr lang="en-US" sz="1200" b="0">
-                <a:solidFill>
-                  <a:srgbClr val="202b33"/>
-                </a:solidFill>
-                <a:latin typeface="Arial"/>
-                <a:ea typeface="Arial"/>
-                <a:cs typeface="Arial"/>
-              </a:rPr>
-              <a:t xml:space="preserve">Rochet and Tirole (2003), Platform Competition in Two-Sided Markets, Journal of the European Economic Association, on cross-subsidy between sides of a market.</a:t>
-            </a:r>
-            <a:endParaRPr lang="en-US" sz="1200"/>
-          </a:p>
-          <a:p>
-            <a:pPr marL="0" indent="0">
-              <a:lnSpc>
-                <a:spcPts val="1560"/>
-              </a:lnSpc>
-              <a:spcAft>
-                <a:spcPts val="0"/>
-              </a:spcAft>
-              <a:buNone/>
-            </a:pPr>
-            <a:r>
-              <a:rPr lang="en-US" sz="1200" b="0">
-                <a:solidFill>
-                  <a:srgbClr val="202b33"/>
-                </a:solidFill>
-                <a:latin typeface="Arial"/>
-                <a:ea typeface="Arial"/>
-                <a:cs typeface="Arial"/>
-              </a:rPr>
-              <a:t xml:space="preserve"/>
-            </a:r>
-            <a:endParaRPr lang="en-US" sz="1200"/>
-          </a:p>
-          <a:p>
-            <a:pPr marL="0" indent="0">
-              <a:lnSpc>
-                <a:spcPts val="1560"/>
-              </a:lnSpc>
-              <a:spcAft>
-                <a:spcPts val="0"/>
-              </a:spcAft>
-              <a:buNone/>
-            </a:pPr>
-            <a:r>
-              <a:rPr lang="en-US" sz="1200" b="0">
-                <a:solidFill>
-                  <a:srgbClr val="202b33"/>
-                </a:solidFill>
-                <a:latin typeface="Arial"/>
-                <a:ea typeface="Arial"/>
-                <a:cs typeface="Arial"/>
-              </a:rPr>
-              <a:t xml:space="preserve">[Microsoft, 28 Oct 2025](https://blogs.microsoft.com/blog/2025/10/28/the-next-chapter-of-the-microsoft-openai-partnership/) · [Amazon, Apr 2026](https://www.aboutamazon.com/news/company-news/amazon-invests-additional-5-billion-anthropic-ai) · [AWS Activate, accessed 5 Sep 2026](https://aws.amazon.com/startups/credits/).</a:t>
-            </a:r>
-            <a:endParaRPr lang="en-US" sz="1200"/>
-          </a:p>
-          <a:p>
-            <a:pPr marL="0" indent="0">
-              <a:lnSpc>
-                <a:spcPts val="1560"/>
-              </a:lnSpc>
-              <a:spcAft>
-                <a:spcPts val="0"/>
-              </a:spcAft>
-              <a:buNone/>
-            </a:pPr>
-            <a:r>
-              <a:rPr lang="en-US" sz="1200" b="0">
-                <a:solidFill>
-                  <a:srgbClr val="202b33"/>
-                </a:solidFill>
-                <a:latin typeface="Arial"/>
-                <a:ea typeface="Arial"/>
-                <a:cs typeface="Arial"/>
-              </a:rPr>
-              <a:t xml:space="preserve"/>
-            </a:r>
-            <a:endParaRPr lang="en-US" sz="1200"/>
-          </a:p>
-          <a:p>
-            <a:pPr marL="0" indent="0">
-              <a:lnSpc>
-                <a:spcPts val="1560"/>
-              </a:lnSpc>
-              <a:spcAft>
-                <a:spcPts val="0"/>
-              </a:spcAft>
-              <a:buNone/>
-            </a:pPr>
-            <a:r>
-              <a:rPr lang="en-US" sz="1200" b="0">
-                <a:solidFill>
-                  <a:srgbClr val="202b33"/>
-                </a:solidFill>
-                <a:latin typeface="Arial"/>
-                <a:ea typeface="Arial"/>
-                <a:cs typeface="Arial"/>
-              </a:rPr>
-              <a:t xml:space="preserve">Schelling (1960), The Strategy of Conflict, Harvard University Press. Nobel 2005.</a:t>
-            </a:r>
-            <a:endParaRPr lang="en-US" sz="1200"/>
-          </a:p>
-          <a:p>
-            <a:pPr marL="0" indent="0">
-              <a:lnSpc>
-                <a:spcPts val="1560"/>
-              </a:lnSpc>
-              <a:spcAft>
-                <a:spcPts val="0"/>
-              </a:spcAft>
-              <a:buNone/>
-            </a:pPr>
-            <a:r>
-              <a:rPr lang="en-US" sz="1200" b="0">
-                <a:solidFill>
-                  <a:srgbClr val="202b33"/>
-                </a:solidFill>
-                <a:latin typeface="Arial"/>
-                <a:ea typeface="Arial"/>
-                <a:cs typeface="Arial"/>
-              </a:rPr>
-              <a:t xml:space="preserve"/>
-            </a:r>
-            <a:endParaRPr lang="en-US" sz="1200"/>
-          </a:p>
-          <a:p>
-            <a:pPr marL="0" indent="0">
-              <a:lnSpc>
-                <a:spcPts val="1560"/>
-              </a:lnSpc>
-              <a:spcAft>
-                <a:spcPts val="0"/>
-              </a:spcAft>
-              <a:buNone/>
-            </a:pPr>
-            <a:r>
-              <a:rPr lang="en-US" sz="1200" b="0">
-                <a:solidFill>
-                  <a:srgbClr val="202b33"/>
-                </a:solidFill>
-                <a:latin typeface="Arial"/>
-                <a:ea typeface="Arial"/>
-                <a:cs typeface="Arial"/>
-              </a:rPr>
-              <a:t xml:space="preserve">Shoup (2005, updated 2011), The High Cost of Free Parking, American Planning Association. Also Shoup (2011), [Free parking or free markets](https://www.accessmagazine.org/spring-2011/free-parking-free-markets/), ACCESS Magazine.</a:t>
-            </a:r>
-            <a:endParaRPr lang="en-US" sz="1200"/>
-          </a:p>
-          <a:p>
-            <a:pPr marL="0" indent="0">
-              <a:lnSpc>
-                <a:spcPts val="1560"/>
-              </a:lnSpc>
-              <a:spcAft>
-                <a:spcPts val="0"/>
-              </a:spcAft>
-              <a:buNone/>
-            </a:pPr>
-            <a:r>
-              <a:rPr lang="en-US" sz="1200" b="0">
-                <a:solidFill>
-                  <a:srgbClr val="202b33"/>
-                </a:solidFill>
-                <a:latin typeface="Arial"/>
-                <a:ea typeface="Arial"/>
-                <a:cs typeface="Arial"/>
-              </a:rPr>
-              <a:t xml:space="preserve"/>
-            </a:r>
-            <a:endParaRPr lang="en-US" sz="1200"/>
-          </a:p>
-          <a:p>
-            <a:pPr marL="0" indent="0">
-              <a:lnSpc>
-                <a:spcPts val="1560"/>
-              </a:lnSpc>
-              <a:spcAft>
-                <a:spcPts val="0"/>
-              </a:spcAft>
-              <a:buNone/>
-            </a:pPr>
-            <a:r>
-              <a:rPr lang="en-US" sz="1200" b="0">
-                <a:solidFill>
-                  <a:srgbClr val="202b33"/>
-                </a:solidFill>
-                <a:latin typeface="Arial"/>
-                <a:ea typeface="Arial"/>
-                <a:cs typeface="Arial"/>
-              </a:rPr>
-              <a:t xml:space="preserve">Jevons (1865), The Coal Question, chapter VII. Duranton and Turner (2011), The Fundamental Law of Road Congestion, American Economic Review 101(6).</a:t>
-            </a:r>
-            <a:endParaRPr lang="en-US" sz="1200"/>
-          </a:p>
-          <a:p>
-            <a:pPr marL="0" indent="0">
-              <a:lnSpc>
-                <a:spcPts val="1560"/>
-              </a:lnSpc>
-              <a:spcAft>
-                <a:spcPts val="0"/>
-              </a:spcAft>
-              <a:buNone/>
-            </a:pPr>
-            <a:r>
-              <a:rPr lang="en-US" sz="1200" b="0">
-                <a:solidFill>
-                  <a:srgbClr val="202b33"/>
-                </a:solidFill>
-                <a:latin typeface="Arial"/>
-                <a:ea typeface="Arial"/>
-                <a:cs typeface="Arial"/>
-              </a:rPr>
-              <a:t xml:space="preserve"/>
-            </a:r>
-            <a:endParaRPr lang="en-US" sz="1200"/>
-          </a:p>
-          <a:p>
-            <a:pPr marL="0" indent="0">
-              <a:lnSpc>
-                <a:spcPts val="1560"/>
-              </a:lnSpc>
-              <a:spcAft>
-                <a:spcPts val="0"/>
-              </a:spcAft>
-              <a:buNone/>
-            </a:pPr>
-            <a:r>
-              <a:rPr lang="en-US" sz="1200" b="0">
-                <a:solidFill>
-                  <a:srgbClr val="202b33"/>
-                </a:solidFill>
-                <a:latin typeface="Arial"/>
-                <a:ea typeface="Arial"/>
-                <a:cs typeface="Arial"/>
-              </a:rPr>
-              <a:t xml:space="preserve">Cottier, Snodin, Owen, Adamczewski (Epoch AI, March 2025), [LLM inference prices have fallen rapidly but unequally across tasks](https://epoch.ai/data-insights/llm-inference-price-trends). Check for a newer edition before each delivery.</a:t>
-            </a:r>
-            <a:endParaRPr lang="en-US" sz="1200"/>
-          </a:p>
-          <a:p>
-            <a:pPr marL="0" indent="0">
-              <a:lnSpc>
-                <a:spcPts val="1560"/>
-              </a:lnSpc>
-              <a:spcAft>
-                <a:spcPts val="0"/>
-              </a:spcAft>
-              <a:buNone/>
-            </a:pPr>
-            <a:r>
-              <a:rPr lang="en-US" sz="1200" b="0">
-                <a:solidFill>
-                  <a:srgbClr val="202b33"/>
-                </a:solidFill>
-                <a:latin typeface="Arial"/>
-                <a:ea typeface="Arial"/>
-                <a:cs typeface="Arial"/>
-              </a:rPr>
-              <a:t xml:space="preserve"/>
-            </a:r>
-            <a:endParaRPr lang="en-US" sz="1200"/>
-          </a:p>
-          <a:p>
-            <a:pPr marL="0" indent="0">
-              <a:lnSpc>
-                <a:spcPts val="1560"/>
-              </a:lnSpc>
-              <a:spcAft>
-                <a:spcPts val="0"/>
-              </a:spcAft>
-              <a:buNone/>
-            </a:pPr>
-            <a:r>
-              <a:rPr lang="en-US" sz="1200" b="0">
-                <a:solidFill>
-                  <a:srgbClr val="202b33"/>
-                </a:solidFill>
-                <a:latin typeface="Arial"/>
-                <a:ea typeface="Arial"/>
-                <a:cs typeface="Arial"/>
-              </a:rPr>
-              <a:t xml:space="preserve">David (1985), Clio and the Economics of QWERTY, American Economic Review 75(2). Contested by Liebowitz and Margolis (1990), The Fable of the Keys, Journal of Law and Economics 33(1). Arthur (1989), Competing Technologies, Increasing Returns, and Lock-In by Historical Events, The Economic Journal 99(394).</a:t>
-            </a:r>
-            <a:endParaRPr lang="en-US" sz="1200"/>
-          </a:p>
-          <a:p>
-            <a:pPr marL="0" indent="0">
-              <a:lnSpc>
-                <a:spcPts val="1560"/>
-              </a:lnSpc>
-              <a:spcAft>
-                <a:spcPts val="0"/>
-              </a:spcAft>
-              <a:buNone/>
-            </a:pPr>
-            <a:r>
-              <a:rPr lang="en-US" sz="1200" b="0">
-                <a:solidFill>
-                  <a:srgbClr val="202b33"/>
-                </a:solidFill>
-                <a:latin typeface="Arial"/>
-                <a:ea typeface="Arial"/>
-                <a:cs typeface="Arial"/>
-              </a:rPr>
-              <a:t xml:space="preserve"/>
-            </a:r>
-            <a:endParaRPr lang="en-US" sz="1200"/>
-          </a:p>
-          <a:p>
-            <a:pPr marL="0" indent="0">
-              <a:lnSpc>
-                <a:spcPts val="1560"/>
-              </a:lnSpc>
-              <a:spcAft>
-                <a:spcPts val="0"/>
-              </a:spcAft>
-              <a:buNone/>
-            </a:pPr>
-            <a:r>
-              <a:rPr lang="en-US" sz="1200" b="0">
-                <a:solidFill>
-                  <a:srgbClr val="202b33"/>
-                </a:solidFill>
-                <a:latin typeface="Arial"/>
-                <a:ea typeface="Arial"/>
-                <a:cs typeface="Arial"/>
-              </a:rPr>
-              <a:t xml:space="preserve">Holmstrom (1979), Moral Hazard and Observability, Bell Journal of Economics 10(1), 74 to 91. Nobel 2016.</a:t>
-            </a:r>
-            <a:endParaRPr lang="en-US" sz="1200"/>
-          </a:p>
-          <a:p>
-            <a:pPr marL="0" indent="0">
-              <a:lnSpc>
-                <a:spcPts val="1560"/>
-              </a:lnSpc>
-              <a:spcAft>
-                <a:spcPts val="0"/>
-              </a:spcAft>
-              <a:buNone/>
-            </a:pPr>
-            <a:r>
-              <a:rPr lang="en-US" sz="1200" b="0">
-                <a:solidFill>
-                  <a:srgbClr val="202b33"/>
-                </a:solidFill>
-                <a:latin typeface="Arial"/>
-                <a:ea typeface="Arial"/>
-                <a:cs typeface="Arial"/>
-              </a:rPr>
-              <a:t xml:space="preserve"/>
-            </a:r>
-            <a:endParaRPr lang="en-US" sz="1200"/>
-          </a:p>
-          <a:p>
-            <a:pPr marL="0" indent="0">
-              <a:lnSpc>
-                <a:spcPts val="1560"/>
-              </a:lnSpc>
-              <a:spcAft>
-                <a:spcPts val="0"/>
-              </a:spcAft>
-              <a:buNone/>
-            </a:pPr>
-            <a:r>
-              <a:rPr lang="en-US" sz="1200" b="0">
-                <a:solidFill>
-                  <a:srgbClr val="202b33"/>
-                </a:solidFill>
-                <a:latin typeface="Arial"/>
-                <a:ea typeface="Arial"/>
-                <a:cs typeface="Arial"/>
-              </a:rPr>
-              <a:t xml:space="preserve">Dixit and Pindyck (1994), Investment Under Uncertainty, Princeton University Press.</a:t>
-            </a:r>
-            <a:endParaRPr lang="en-US" sz="1200"/>
-          </a:p>
-        </p:txBody>
-      </p:sp>
-    </p:spTree>
-  </p:cSld>
-  <p:clrMapOvr>
-    <a:masterClrMapping/>
-  </p:clrMapOvr>
-</p:notes>
-</file>
-
 <file path=ppt/notesSlides/notesSlide3.xml><?xml version="1.0" encoding="utf-8"?>
 <p:notes xmlns:a="http://schemas.openxmlformats.org/drawingml/2006/main" xmlns:r="http://schemas.openxmlformats.org/officeDocument/2006/relationships" xmlns:p="http://schemas.openxmlformats.org/presentationml/2006/main">
   <p:cSld>
@@ -7329,7 +6847,7 @@
                 <a:ea typeface="Arial"/>
                 <a:cs typeface="Arial"/>
               </a:rPr>
-              <a:t xml:space="preserve">02:30 to 04:30 · warm</a:t>
+              <a:t xml:space="preserve">02:15 to 04:00 · warm</a:t>
             </a:r>
             <a:endParaRPr lang="en-US" sz="1200"/>
           </a:p>
@@ -7787,7 +7305,7 @@
                 <a:ea typeface="Arial"/>
                 <a:cs typeface="Arial"/>
               </a:rPr>
-              <a:t xml:space="preserve">04:30 to 07:30 · steady</a:t>
+              <a:t xml:space="preserve">04:00 to 06:45 · steady</a:t>
             </a:r>
             <a:endParaRPr lang="en-US" sz="1200"/>
           </a:p>
@@ -8245,7 +7763,7 @@
                 <a:ea typeface="Arial"/>
                 <a:cs typeface="Arial"/>
               </a:rPr>
-              <a:t xml:space="preserve">07:30 to 10:00 · build</a:t>
+              <a:t xml:space="preserve">06:45 to 09:30 · build</a:t>
             </a:r>
             <a:endParaRPr lang="en-US" sz="1200"/>
           </a:p>
@@ -8429,7 +7947,7 @@
                 <a:ea typeface="Arial"/>
                 <a:cs typeface="Arial"/>
               </a:rPr>
-              <a:t xml:space="preserve">Everyone reads these as evidence about cost. They are not. They are evidence about strategy, and Thomas Schelling gave us the word in 1960: a credible commitment. You deliberately destroy your own ability to back out, precisely so everyone else updates. Burn the boats. A ten-year contract you cannot walk away from is not a disclosure of your margins. It is a signal that you intend to still be here, aimed at competitors and at customers who are nervous about picking you.</a:t>
+              <a:t xml:space="preserve">Everyone reads these as evidence about cost. They are evidence about strategy, and Thomas Schelling gave us the word in 1960: a credible commitment. You deliberately destroy your own ability to back out, precisely so everyone else updates. Burn the boats. A ten-year contract you cannot walk away from discloses nothing about your margins. It signals that you intend to still be here, aimed at competitors and at nervous customers.</a:t>
             </a:r>
             <a:endParaRPr lang="en-US" sz="1200"/>
           </a:p>
@@ -8772,7 +8290,7 @@
                 <a:ea typeface="Arial"/>
                 <a:cs typeface="Arial"/>
               </a:rPr>
-              <a:t xml:space="preserve">10:00 to 12:30 · build</a:t>
+              <a:t xml:space="preserve">09:30 to 11:45 · build</a:t>
             </a:r>
             <a:endParaRPr lang="en-US" sz="1200"/>
           </a:p>
@@ -9253,7 +8771,7 @@
                 <a:ea typeface="Arial"/>
                 <a:cs typeface="Arial"/>
               </a:rPr>
-              <a:t xml:space="preserve">12:30 to 15:00 · build</a:t>
+              <a:t xml:space="preserve">11:45 to 15:00 · build</a:t>
             </a:r>
             <a:endParaRPr lang="en-US" sz="1200"/>
           </a:p>
@@ -9529,7 +9047,7 @@
                 <a:ea typeface="Arial"/>
                 <a:cs typeface="Arial"/>
               </a:rPr>
-              <a:t xml:space="preserve">So: your per-token price has fallen off a cliff over the last few years, and your bill went up. Everyone in this room has had that conversation with a CFO and lost it. You are not being gouged and you did not do anything wrong. Spend is price times consumption, and consumption is jobs times calls per job times tokens per call. Cheapness moved every term on the right. Epoch's data through 2025 shows the price of a fixed capability falling fast and very unevenly by task, which is real and worth knowing, and is also exactly the condition under which total spend rises.</a:t>
+              <a:t xml:space="preserve">So: your per-token price fell off a cliff and your bill went up. Everyone here has had that conversation with a CFO and lost it. You are not being gouged and you did nothing wrong. Spend is price times jobs times calls per job times tokens per call, and cheapness moved every term on the right. Epoch's data through 2025 shows the price of a fixed capability falling fast and very unevenly by task — which is real, and is also exactly the condition under which total spend rises.</a:t>
             </a:r>
             <a:endParaRPr lang="en-US" sz="1200"/>
           </a:p>
@@ -9826,7 +9344,7 @@
                 <a:ea typeface="Arial"/>
                 <a:cs typeface="Arial"/>
               </a:rPr>
-              <a:t xml:space="preserve">12:30 to 15:00 · build</a:t>
+              <a:t xml:space="preserve">11:45 to 15:00 · build</a:t>
             </a:r>
             <a:endParaRPr lang="en-US" sz="1200"/>
           </a:p>
@@ -10102,7 +9620,7 @@
                 <a:ea typeface="Arial"/>
                 <a:cs typeface="Arial"/>
               </a:rPr>
-              <a:t xml:space="preserve">So: your per-token price has fallen off a cliff over the last few years, and your bill went up. Everyone in this room has had that conversation with a CFO and lost it. You are not being gouged and you did not do anything wrong. Spend is price times consumption, and consumption is jobs times calls per job times tokens per call. Cheapness moved every term on the right. Epoch's data through 2025 shows the price of a fixed capability falling fast and very unevenly by task, which is real and worth knowing, and is also exactly the condition under which total spend rises.</a:t>
+              <a:t xml:space="preserve">So: your per-token price fell off a cliff and your bill went up. Everyone here has had that conversation with a CFO and lost it. You are not being gouged and you did nothing wrong. Spend is price times jobs times calls per job times tokens per call, and cheapness moved every term on the right. Epoch's data through 2025 shows the price of a fixed capability falling fast and very unevenly by task — which is real, and is also exactly the condition under which total spend rises.</a:t>
             </a:r>
             <a:endParaRPr lang="en-US" sz="1200"/>
           </a:p>
@@ -10399,7 +9917,7 @@
                 <a:ea typeface="Arial"/>
                 <a:cs typeface="Arial"/>
               </a:rPr>
-              <a:t xml:space="preserve">15:00 to 18:00 · build</a:t>
+              <a:t xml:space="preserve">15:00 to 17:00 · build</a:t>
             </a:r>
             <a:endParaRPr lang="en-US" sz="1200"/>
           </a:p>
@@ -11794,29 +11312,6 @@
             </a:r>
             <a:endParaRPr lang="en-US" sz="1500"/>
           </a:p>
-          <a:p>
-            <a:pPr marL="0" indent="0">
-              <a:lnSpc>
-                <a:spcPts val="1950"/>
-              </a:lnSpc>
-              <a:spcAft>
-                <a:spcPts val="0"/>
-              </a:spcAft>
-              <a:buNone/>
-            </a:pPr>
-            <a:r>
-              <a:rPr lang="en-US" sz="1500" b="0">
-                <a:solidFill>
-                  <a:srgbClr val="202B33"/>
-                </a:solidFill>
-                <a:latin typeface="Arial"/>
-                <a:ea typeface="Arial"/>
-                <a:cs typeface="Arial"/>
-              </a:rPr>
-              <a:t xml:space="preserve">decision did. Paul David made the argument</a:t>
-            </a:r>
-            <a:endParaRPr lang="en-US" sz="1500"/>
-          </a:p>
         </p:txBody>
       </p:sp>
       <p:sp>
@@ -11862,191 +11357,168 @@
                 <a:ea typeface="Arial"/>
                 <a:cs typeface="Arial"/>
               </a:rPr>
-              <a:t xml:space="preserve">famous with QWERTY in 1985, and I want to</a:t>
-            </a:r>
-            <a:endParaRPr lang="en-US" sz="1500"/>
-          </a:p>
-          <a:p>
-            <a:pPr marL="0" indent="0">
-              <a:lnSpc>
-                <a:spcPts val="1950"/>
-              </a:lnSpc>
-              <a:spcAft>
-                <a:spcPts val="0"/>
-              </a:spcAft>
-              <a:buNone/>
-            </a:pPr>
-            <a:r>
-              <a:rPr lang="en-US" sz="1500" b="0">
-                <a:solidFill>
-                  <a:srgbClr val="202B33"/>
-                </a:solidFill>
-                <a:latin typeface="Arial"/>
-                <a:ea typeface="Arial"/>
-                <a:cs typeface="Arial"/>
-              </a:rPr>
-              <a:t xml:space="preserve">be straight with you, because it matters</a:t>
-            </a:r>
-            <a:endParaRPr lang="en-US" sz="1500"/>
-          </a:p>
-          <a:p>
-            <a:pPr marL="0" indent="0">
-              <a:lnSpc>
-                <a:spcPts val="1950"/>
-              </a:lnSpc>
-              <a:spcAft>
-                <a:spcPts val="0"/>
-              </a:spcAft>
-              <a:buNone/>
-            </a:pPr>
-            <a:r>
-              <a:rPr lang="en-US" sz="1500" b="0">
-                <a:solidFill>
-                  <a:srgbClr val="202B33"/>
-                </a:solidFill>
-                <a:latin typeface="Arial"/>
-                <a:ea typeface="Arial"/>
-                <a:cs typeface="Arial"/>
-              </a:rPr>
-              <a:t xml:space="preserve">for how you use this: economists have been</a:t>
-            </a:r>
-            <a:endParaRPr lang="en-US" sz="1500"/>
-          </a:p>
-          <a:p>
-            <a:pPr marL="0" indent="0">
-              <a:lnSpc>
-                <a:spcPts val="1950"/>
-              </a:lnSpc>
-              <a:spcAft>
-                <a:spcPts val="0"/>
-              </a:spcAft>
-              <a:buNone/>
-            </a:pPr>
-            <a:r>
-              <a:rPr lang="en-US" sz="1500" b="0">
-                <a:solidFill>
-                  <a:srgbClr val="202B33"/>
-                </a:solidFill>
-                <a:latin typeface="Arial"/>
-                <a:ea typeface="Arial"/>
-                <a:cs typeface="Arial"/>
-              </a:rPr>
-              <a:t xml:space="preserve">fighting about that example ever since.</a:t>
-            </a:r>
-            <a:endParaRPr lang="en-US" sz="1500"/>
-          </a:p>
-          <a:p>
-            <a:pPr marL="0" indent="0">
-              <a:lnSpc>
-                <a:spcPts val="1950"/>
-              </a:lnSpc>
-              <a:spcAft>
-                <a:spcPts val="0"/>
-              </a:spcAft>
-              <a:buNone/>
-            </a:pPr>
-            <a:r>
-              <a:rPr lang="en-US" sz="1500" b="0">
-                <a:solidFill>
-                  <a:srgbClr val="202B33"/>
-                </a:solidFill>
-                <a:latin typeface="Arial"/>
-                <a:ea typeface="Arial"/>
-                <a:cs typeface="Arial"/>
-              </a:rPr>
-              <a:t xml:space="preserve">Liebowitz and Margolis published a paper in</a:t>
-            </a:r>
-            <a:endParaRPr lang="en-US" sz="1500"/>
-          </a:p>
-          <a:p>
-            <a:pPr marL="0" indent="0">
-              <a:lnSpc>
-                <a:spcPts val="1950"/>
-              </a:lnSpc>
-              <a:spcAft>
-                <a:spcPts val="0"/>
-              </a:spcAft>
-              <a:buNone/>
-            </a:pPr>
-            <a:r>
-              <a:rPr lang="en-US" sz="1500" b="0">
-                <a:solidFill>
-                  <a:srgbClr val="202B33"/>
-                </a:solidFill>
-                <a:latin typeface="Arial"/>
-                <a:ea typeface="Arial"/>
-                <a:cs typeface="Arial"/>
-              </a:rPr>
-              <a:t xml:space="preserve">1990 called The Fable of the Keys arguing</a:t>
-            </a:r>
-            <a:endParaRPr lang="en-US" sz="1500"/>
-          </a:p>
-          <a:p>
-            <a:pPr marL="0" indent="0">
-              <a:lnSpc>
-                <a:spcPts val="1950"/>
-              </a:lnSpc>
-              <a:spcAft>
-                <a:spcPts val="0"/>
-              </a:spcAft>
-              <a:buNone/>
-            </a:pPr>
-            <a:r>
-              <a:rPr lang="en-US" sz="1500" b="0">
-                <a:solidFill>
-                  <a:srgbClr val="202B33"/>
-                </a:solidFill>
-                <a:latin typeface="Arial"/>
-                <a:ea typeface="Arial"/>
-                <a:cs typeface="Arial"/>
-              </a:rPr>
-              <a:t xml:space="preserve">the evidence was thin. The concept</a:t>
-            </a:r>
-            <a:endParaRPr lang="en-US" sz="1500"/>
-          </a:p>
-          <a:p>
-            <a:pPr marL="0" indent="0">
-              <a:lnSpc>
-                <a:spcPts val="1950"/>
-              </a:lnSpc>
-              <a:spcAft>
-                <a:spcPts val="0"/>
-              </a:spcAft>
-              <a:buNone/>
-            </a:pPr>
-            <a:r>
-              <a:rPr lang="en-US" sz="1500" b="0">
-                <a:solidFill>
-                  <a:srgbClr val="202B33"/>
-                </a:solidFill>
-                <a:latin typeface="Arial"/>
-                <a:ea typeface="Arial"/>
-                <a:cs typeface="Arial"/>
-              </a:rPr>
-              <a:t xml:space="preserve">survives. The canonical example is</a:t>
-            </a:r>
-            <a:endParaRPr lang="en-US" sz="1500"/>
-          </a:p>
-          <a:p>
-            <a:pPr marL="0" indent="0">
-              <a:lnSpc>
-                <a:spcPts val="1950"/>
-              </a:lnSpc>
-              <a:spcAft>
-                <a:spcPts val="0"/>
-              </a:spcAft>
-              <a:buNone/>
-            </a:pPr>
-            <a:r>
-              <a:rPr lang="en-US" sz="1500" b="0">
-                <a:solidFill>
-                  <a:srgbClr val="202B33"/>
-                </a:solidFill>
-                <a:latin typeface="Arial"/>
-                <a:ea typeface="Arial"/>
-                <a:cs typeface="Arial"/>
-              </a:rPr>
-              <a:t xml:space="preserve">contested.</a:t>
+              <a:t xml:space="preserve">decision did. Paul David made it famous</a:t>
+            </a:r>
+            <a:endParaRPr lang="en-US" sz="1500"/>
+          </a:p>
+          <a:p>
+            <a:pPr marL="0" indent="0">
+              <a:lnSpc>
+                <a:spcPts val="1950"/>
+              </a:lnSpc>
+              <a:spcAft>
+                <a:spcPts val="0"/>
+              </a:spcAft>
+              <a:buNone/>
+            </a:pPr>
+            <a:r>
+              <a:rPr lang="en-US" sz="1500" b="0">
+                <a:solidFill>
+                  <a:srgbClr val="202B33"/>
+                </a:solidFill>
+                <a:latin typeface="Arial"/>
+                <a:ea typeface="Arial"/>
+                <a:cs typeface="Arial"/>
+              </a:rPr>
+              <a:t xml:space="preserve">with QWERTY in 1985, and I will be straight</a:t>
+            </a:r>
+            <a:endParaRPr lang="en-US" sz="1500"/>
+          </a:p>
+          <a:p>
+            <a:pPr marL="0" indent="0">
+              <a:lnSpc>
+                <a:spcPts val="1950"/>
+              </a:lnSpc>
+              <a:spcAft>
+                <a:spcPts val="0"/>
+              </a:spcAft>
+              <a:buNone/>
+            </a:pPr>
+            <a:r>
+              <a:rPr lang="en-US" sz="1500" b="0">
+                <a:solidFill>
+                  <a:srgbClr val="202B33"/>
+                </a:solidFill>
+                <a:latin typeface="Arial"/>
+                <a:ea typeface="Arial"/>
+                <a:cs typeface="Arial"/>
+              </a:rPr>
+              <a:t xml:space="preserve">with you because it matters for how you use</a:t>
+            </a:r>
+            <a:endParaRPr lang="en-US" sz="1500"/>
+          </a:p>
+          <a:p>
+            <a:pPr marL="0" indent="0">
+              <a:lnSpc>
+                <a:spcPts val="1950"/>
+              </a:lnSpc>
+              <a:spcAft>
+                <a:spcPts val="0"/>
+              </a:spcAft>
+              <a:buNone/>
+            </a:pPr>
+            <a:r>
+              <a:rPr lang="en-US" sz="1500" b="0">
+                <a:solidFill>
+                  <a:srgbClr val="202B33"/>
+                </a:solidFill>
+                <a:latin typeface="Arial"/>
+                <a:ea typeface="Arial"/>
+                <a:cs typeface="Arial"/>
+              </a:rPr>
+              <a:t xml:space="preserve">this — economists have fought about that</a:t>
+            </a:r>
+            <a:endParaRPr lang="en-US" sz="1500"/>
+          </a:p>
+          <a:p>
+            <a:pPr marL="0" indent="0">
+              <a:lnSpc>
+                <a:spcPts val="1950"/>
+              </a:lnSpc>
+              <a:spcAft>
+                <a:spcPts val="0"/>
+              </a:spcAft>
+              <a:buNone/>
+            </a:pPr>
+            <a:r>
+              <a:rPr lang="en-US" sz="1500" b="0">
+                <a:solidFill>
+                  <a:srgbClr val="202B33"/>
+                </a:solidFill>
+                <a:latin typeface="Arial"/>
+                <a:ea typeface="Arial"/>
+                <a:cs typeface="Arial"/>
+              </a:rPr>
+              <a:t xml:space="preserve">example ever since, and Liebowitz and</a:t>
+            </a:r>
+            <a:endParaRPr lang="en-US" sz="1500"/>
+          </a:p>
+          <a:p>
+            <a:pPr marL="0" indent="0">
+              <a:lnSpc>
+                <a:spcPts val="1950"/>
+              </a:lnSpc>
+              <a:spcAft>
+                <a:spcPts val="0"/>
+              </a:spcAft>
+              <a:buNone/>
+            </a:pPr>
+            <a:r>
+              <a:rPr lang="en-US" sz="1500" b="0">
+                <a:solidFill>
+                  <a:srgbClr val="202B33"/>
+                </a:solidFill>
+                <a:latin typeface="Arial"/>
+                <a:ea typeface="Arial"/>
+                <a:cs typeface="Arial"/>
+              </a:rPr>
+              <a:t xml:space="preserve">Margolis argued in 1990 that the evidence</a:t>
+            </a:r>
+            <a:endParaRPr lang="en-US" sz="1500"/>
+          </a:p>
+          <a:p>
+            <a:pPr marL="0" indent="0">
+              <a:lnSpc>
+                <a:spcPts val="1950"/>
+              </a:lnSpc>
+              <a:spcAft>
+                <a:spcPts val="0"/>
+              </a:spcAft>
+              <a:buNone/>
+            </a:pPr>
+            <a:r>
+              <a:rPr lang="en-US" sz="1500" b="0">
+                <a:solidFill>
+                  <a:srgbClr val="202B33"/>
+                </a:solidFill>
+                <a:latin typeface="Arial"/>
+                <a:ea typeface="Arial"/>
+                <a:cs typeface="Arial"/>
+              </a:rPr>
+              <a:t xml:space="preserve">was thin. The concept survives. The</a:t>
+            </a:r>
+            <a:endParaRPr lang="en-US" sz="1500"/>
+          </a:p>
+          <a:p>
+            <a:pPr marL="0" indent="0">
+              <a:lnSpc>
+                <a:spcPts val="1950"/>
+              </a:lnSpc>
+              <a:spcAft>
+                <a:spcPts val="0"/>
+              </a:spcAft>
+              <a:buNone/>
+            </a:pPr>
+            <a:r>
+              <a:rPr lang="en-US" sz="1500" b="0">
+                <a:solidFill>
+                  <a:srgbClr val="202B33"/>
+                </a:solidFill>
+                <a:latin typeface="Arial"/>
+                <a:ea typeface="Arial"/>
+                <a:cs typeface="Arial"/>
+              </a:rPr>
+              <a:t xml:space="preserve">canonical example is contested.</a:t>
             </a:r>
             <a:endParaRPr lang="en-US" sz="1500"/>
           </a:p>
@@ -13270,168 +12742,145 @@
                 <a:ea typeface="Arial"/>
                 <a:cs typeface="Arial"/>
               </a:rPr>
-              <a:t xml:space="preserve">price for it, and give the money back to</a:t>
-            </a:r>
-            <a:endParaRPr lang="en-US" sz="1500"/>
-          </a:p>
-          <a:p>
-            <a:pPr marL="0" indent="0">
-              <a:lnSpc>
-                <a:spcPts val="1950"/>
-              </a:lnSpc>
-              <a:spcAft>
-                <a:spcPts val="0"/>
-              </a:spcAft>
-              <a:buNone/>
-            </a:pPr>
-            <a:r>
-              <a:rPr lang="en-US" sz="1500" b="0">
-                <a:solidFill>
-                  <a:srgbClr val="202B33"/>
-                </a:solidFill>
-                <a:latin typeface="Arial"/>
-                <a:ea typeface="Arial"/>
-                <a:cs typeface="Arial"/>
-              </a:rPr>
-              <a:t xml:space="preserve">the neighborhood. Same here. The fix is not</a:t>
-            </a:r>
-            <a:endParaRPr lang="en-US" sz="1500"/>
-          </a:p>
-          <a:p>
-            <a:pPr marL="0" indent="0">
-              <a:lnSpc>
-                <a:spcPts val="1950"/>
-              </a:lnSpc>
-              <a:spcAft>
-                <a:spcPts val="0"/>
-              </a:spcAft>
-              <a:buNone/>
-            </a:pPr>
-            <a:r>
-              <a:rPr lang="en-US" sz="1500" b="0">
-                <a:solidFill>
-                  <a:srgbClr val="202B33"/>
-                </a:solidFill>
-                <a:latin typeface="Arial"/>
-                <a:ea typeface="Arial"/>
-                <a:cs typeface="Arial"/>
-              </a:rPr>
-              <a:t xml:space="preserve">austerity and it is not a policy forbidding</a:t>
-            </a:r>
-            <a:endParaRPr lang="en-US" sz="1500"/>
-          </a:p>
-          <a:p>
-            <a:pPr marL="0" indent="0">
-              <a:lnSpc>
-                <a:spcPts val="1950"/>
-              </a:lnSpc>
-              <a:spcAft>
-                <a:spcPts val="0"/>
-              </a:spcAft>
-              <a:buNone/>
-            </a:pPr>
-            <a:r>
-              <a:rPr lang="en-US" sz="1500" b="0">
-                <a:solidFill>
-                  <a:srgbClr val="202B33"/>
-                </a:solidFill>
-                <a:latin typeface="Arial"/>
-                <a:ea typeface="Arial"/>
-                <a:cs typeface="Arial"/>
-              </a:rPr>
-              <a:t xml:space="preserve">the model. It is putting the number in</a:t>
-            </a:r>
-            <a:endParaRPr lang="en-US" sz="1500"/>
-          </a:p>
-          <a:p>
-            <a:pPr marL="0" indent="0">
-              <a:lnSpc>
-                <a:spcPts val="1950"/>
-              </a:lnSpc>
-              <a:spcAft>
-                <a:spcPts val="0"/>
-              </a:spcAft>
-              <a:buNone/>
-            </a:pPr>
-            <a:r>
-              <a:rPr lang="en-US" sz="1500" b="0">
-                <a:solidFill>
-                  <a:srgbClr val="202B33"/>
-                </a:solidFill>
-                <a:latin typeface="Arial"/>
-                <a:ea typeface="Arial"/>
-                <a:cs typeface="Arial"/>
-              </a:rPr>
-              <a:t xml:space="preserve">front of the person making the choice, at</a:t>
-            </a:r>
-            <a:endParaRPr lang="en-US" sz="1500"/>
-          </a:p>
-          <a:p>
-            <a:pPr marL="0" indent="0">
-              <a:lnSpc>
-                <a:spcPts val="1950"/>
-              </a:lnSpc>
-              <a:spcAft>
-                <a:spcPts val="0"/>
-              </a:spcAft>
-              <a:buNone/>
-            </a:pPr>
-            <a:r>
-              <a:rPr lang="en-US" sz="1500" b="0">
-                <a:solidFill>
-                  <a:srgbClr val="202B33"/>
-                </a:solidFill>
-                <a:latin typeface="Arial"/>
-                <a:ea typeface="Arial"/>
-                <a:cs typeface="Arial"/>
-              </a:rPr>
-              <a:t xml:space="preserve">the moment they make it. Estimated cost per</a:t>
-            </a:r>
-            <a:endParaRPr lang="en-US" sz="1500"/>
-          </a:p>
-          <a:p>
-            <a:pPr marL="0" indent="0">
-              <a:lnSpc>
-                <a:spcPts val="1950"/>
-              </a:lnSpc>
-              <a:spcAft>
-                <a:spcPts val="0"/>
-              </a:spcAft>
-              <a:buNone/>
-            </a:pPr>
-            <a:r>
-              <a:rPr lang="en-US" sz="1500" b="0">
-                <a:solidFill>
-                  <a:srgbClr val="202B33"/>
-                </a:solidFill>
-                <a:latin typeface="Arial"/>
-                <a:ea typeface="Arial"/>
-                <a:cs typeface="Arial"/>
-              </a:rPr>
-              <a:t xml:space="preserve">accepted outcome, in the design doc, next</a:t>
-            </a:r>
-            <a:endParaRPr lang="en-US" sz="1500"/>
-          </a:p>
-          <a:p>
-            <a:pPr marL="0" indent="0">
-              <a:lnSpc>
-                <a:spcPts val="1950"/>
-              </a:lnSpc>
-              <a:spcAft>
-                <a:spcPts val="0"/>
-              </a:spcAft>
-              <a:buNone/>
-            </a:pPr>
-            <a:r>
-              <a:rPr lang="en-US" sz="1500" b="0">
-                <a:solidFill>
-                  <a:srgbClr val="202B33"/>
-                </a:solidFill>
-                <a:latin typeface="Arial"/>
-                <a:ea typeface="Arial"/>
-                <a:cs typeface="Arial"/>
-              </a:rPr>
-              <a:t xml:space="preserve">to the latency budget.</a:t>
+              <a:t xml:space="preserve">price and give the money back to the</a:t>
+            </a:r>
+            <a:endParaRPr lang="en-US" sz="1500"/>
+          </a:p>
+          <a:p>
+            <a:pPr marL="0" indent="0">
+              <a:lnSpc>
+                <a:spcPts val="1950"/>
+              </a:lnSpc>
+              <a:spcAft>
+                <a:spcPts val="0"/>
+              </a:spcAft>
+              <a:buNone/>
+            </a:pPr>
+            <a:r>
+              <a:rPr lang="en-US" sz="1500" b="0">
+                <a:solidFill>
+                  <a:srgbClr val="202B33"/>
+                </a:solidFill>
+                <a:latin typeface="Arial"/>
+                <a:ea typeface="Arial"/>
+                <a:cs typeface="Arial"/>
+              </a:rPr>
+              <a:t xml:space="preserve">neighborhood. Same here. The fix is not</a:t>
+            </a:r>
+            <a:endParaRPr lang="en-US" sz="1500"/>
+          </a:p>
+          <a:p>
+            <a:pPr marL="0" indent="0">
+              <a:lnSpc>
+                <a:spcPts val="1950"/>
+              </a:lnSpc>
+              <a:spcAft>
+                <a:spcPts val="0"/>
+              </a:spcAft>
+              <a:buNone/>
+            </a:pPr>
+            <a:r>
+              <a:rPr lang="en-US" sz="1500" b="0">
+                <a:solidFill>
+                  <a:srgbClr val="202B33"/>
+                </a:solidFill>
+                <a:latin typeface="Arial"/>
+                <a:ea typeface="Arial"/>
+                <a:cs typeface="Arial"/>
+              </a:rPr>
+              <a:t xml:space="preserve">austerity or a policy forbidding the model.</a:t>
+            </a:r>
+            <a:endParaRPr lang="en-US" sz="1500"/>
+          </a:p>
+          <a:p>
+            <a:pPr marL="0" indent="0">
+              <a:lnSpc>
+                <a:spcPts val="1950"/>
+              </a:lnSpc>
+              <a:spcAft>
+                <a:spcPts val="0"/>
+              </a:spcAft>
+              <a:buNone/>
+            </a:pPr>
+            <a:r>
+              <a:rPr lang="en-US" sz="1500" b="0">
+                <a:solidFill>
+                  <a:srgbClr val="202B33"/>
+                </a:solidFill>
+                <a:latin typeface="Arial"/>
+                <a:ea typeface="Arial"/>
+                <a:cs typeface="Arial"/>
+              </a:rPr>
+              <a:t xml:space="preserve">It is putting the number in front of the</a:t>
+            </a:r>
+            <a:endParaRPr lang="en-US" sz="1500"/>
+          </a:p>
+          <a:p>
+            <a:pPr marL="0" indent="0">
+              <a:lnSpc>
+                <a:spcPts val="1950"/>
+              </a:lnSpc>
+              <a:spcAft>
+                <a:spcPts val="0"/>
+              </a:spcAft>
+              <a:buNone/>
+            </a:pPr>
+            <a:r>
+              <a:rPr lang="en-US" sz="1500" b="0">
+                <a:solidFill>
+                  <a:srgbClr val="202B33"/>
+                </a:solidFill>
+                <a:latin typeface="Arial"/>
+                <a:ea typeface="Arial"/>
+                <a:cs typeface="Arial"/>
+              </a:rPr>
+              <a:t xml:space="preserve">person choosing, at the moment they choose:</a:t>
+            </a:r>
+            <a:endParaRPr lang="en-US" sz="1500"/>
+          </a:p>
+          <a:p>
+            <a:pPr marL="0" indent="0">
+              <a:lnSpc>
+                <a:spcPts val="1950"/>
+              </a:lnSpc>
+              <a:spcAft>
+                <a:spcPts val="0"/>
+              </a:spcAft>
+              <a:buNone/>
+            </a:pPr>
+            <a:r>
+              <a:rPr lang="en-US" sz="1500" b="0">
+                <a:solidFill>
+                  <a:srgbClr val="202B33"/>
+                </a:solidFill>
+                <a:latin typeface="Arial"/>
+                <a:ea typeface="Arial"/>
+                <a:cs typeface="Arial"/>
+              </a:rPr>
+              <a:t xml:space="preserve">estimated cost per accepted outcome, in the</a:t>
+            </a:r>
+            <a:endParaRPr lang="en-US" sz="1500"/>
+          </a:p>
+          <a:p>
+            <a:pPr marL="0" indent="0">
+              <a:lnSpc>
+                <a:spcPts val="1950"/>
+              </a:lnSpc>
+              <a:spcAft>
+                <a:spcPts val="0"/>
+              </a:spcAft>
+              <a:buNone/>
+            </a:pPr>
+            <a:r>
+              <a:rPr lang="en-US" sz="1500" b="0">
+                <a:solidFill>
+                  <a:srgbClr val="202B33"/>
+                </a:solidFill>
+                <a:latin typeface="Arial"/>
+                <a:ea typeface="Arial"/>
+                <a:cs typeface="Arial"/>
+              </a:rPr>
+              <a:t xml:space="preserve">design doc, next to the latency budget.</a:t>
             </a:r>
             <a:endParaRPr lang="en-US" sz="1500"/>
           </a:p>
@@ -18295,122 +17744,260 @@
                 <a:ea typeface="Arial"/>
                 <a:cs typeface="Arial"/>
               </a:rPr>
-              <a:t xml:space="preserve">Everyone in this field says "keep it</a:t>
-            </a:r>
-            <a:endParaRPr lang="en-US" sz="1500"/>
-          </a:p>
-          <a:p>
-            <a:pPr marL="0" indent="0">
-              <a:lnSpc>
-                <a:spcPts val="1950"/>
-              </a:lnSpc>
-              <a:spcAft>
-                <a:spcPts val="0"/>
-              </a:spcAft>
-              <a:buNone/>
-            </a:pPr>
-            <a:r>
-              <a:rPr lang="en-US" sz="1500" b="0">
-                <a:solidFill>
-                  <a:srgbClr val="202B33"/>
-                </a:solidFill>
-                <a:latin typeface="Arial"/>
-                <a:ea typeface="Arial"/>
-                <a:cs typeface="Arial"/>
-              </a:rPr>
-              <a:t xml:space="preserve">reversible" like it is a personality trait.</a:t>
-            </a:r>
-            <a:endParaRPr lang="en-US" sz="1500"/>
-          </a:p>
-          <a:p>
-            <a:pPr marL="0" indent="0">
-              <a:lnSpc>
-                <a:spcPts val="1950"/>
-              </a:lnSpc>
-              <a:spcAft>
-                <a:spcPts val="0"/>
-              </a:spcAft>
-              <a:buNone/>
-            </a:pPr>
-            <a:r>
-              <a:rPr lang="en-US" sz="1500" b="0">
-                <a:solidFill>
-                  <a:srgbClr val="202B33"/>
-                </a:solidFill>
-                <a:latin typeface="Arial"/>
-                <a:ea typeface="Arial"/>
-                <a:cs typeface="Arial"/>
-              </a:rPr>
-              <a:t xml:space="preserve">It is not. It is an option, in the</a:t>
-            </a:r>
-            <a:endParaRPr lang="en-US" sz="1500"/>
-          </a:p>
-          <a:p>
-            <a:pPr marL="0" indent="0">
-              <a:lnSpc>
-                <a:spcPts val="1950"/>
-              </a:lnSpc>
-              <a:spcAft>
-                <a:spcPts val="0"/>
-              </a:spcAft>
-              <a:buNone/>
-            </a:pPr>
-            <a:r>
-              <a:rPr lang="en-US" sz="1500" b="0">
-                <a:solidFill>
-                  <a:srgbClr val="202B33"/>
-                </a:solidFill>
-                <a:latin typeface="Arial"/>
-                <a:ea typeface="Arial"/>
-                <a:cs typeface="Arial"/>
-              </a:rPr>
-              <a:t xml:space="preserve">financial sense, and Dixit and Pindyck</a:t>
-            </a:r>
-            <a:endParaRPr lang="en-US" sz="1500"/>
-          </a:p>
-          <a:p>
-            <a:pPr marL="0" indent="0">
-              <a:lnSpc>
-                <a:spcPts val="1950"/>
-              </a:lnSpc>
-              <a:spcAft>
-                <a:spcPts val="0"/>
-              </a:spcAft>
-              <a:buNone/>
-            </a:pPr>
-            <a:r>
-              <a:rPr lang="en-US" sz="1500" b="0">
-                <a:solidFill>
-                  <a:srgbClr val="202B33"/>
-                </a:solidFill>
-                <a:latin typeface="Arial"/>
-                <a:ea typeface="Arial"/>
-                <a:cs typeface="Arial"/>
-              </a:rPr>
-              <a:t xml:space="preserve">wrote the book on valuing exactly this kind</a:t>
-            </a:r>
-            <a:endParaRPr lang="en-US" sz="1500"/>
-          </a:p>
-          <a:p>
-            <a:pPr marL="0" indent="0">
-              <a:lnSpc>
-                <a:spcPts val="1950"/>
-              </a:lnSpc>
-              <a:spcAft>
-                <a:spcPts val="0"/>
-              </a:spcAft>
-              <a:buNone/>
-            </a:pPr>
-            <a:r>
-              <a:rPr lang="en-US" sz="1500" b="0">
-                <a:solidFill>
-                  <a:srgbClr val="202B33"/>
-                </a:solidFill>
-                <a:latin typeface="Arial"/>
-                <a:ea typeface="Arial"/>
-                <a:cs typeface="Arial"/>
-              </a:rPr>
-              <a:t xml:space="preserve">of flexibility under uncertainty. The right</a:t>
+              <a:t xml:space="preserve">Everyone says "keep it reversible" like it</a:t>
+            </a:r>
+            <a:endParaRPr lang="en-US" sz="1500"/>
+          </a:p>
+          <a:p>
+            <a:pPr marL="0" indent="0">
+              <a:lnSpc>
+                <a:spcPts val="1950"/>
+              </a:lnSpc>
+              <a:spcAft>
+                <a:spcPts val="0"/>
+              </a:spcAft>
+              <a:buNone/>
+            </a:pPr>
+            <a:r>
+              <a:rPr lang="en-US" sz="1500" b="0">
+                <a:solidFill>
+                  <a:srgbClr val="202B33"/>
+                </a:solidFill>
+                <a:latin typeface="Arial"/>
+                <a:ea typeface="Arial"/>
+                <a:cs typeface="Arial"/>
+              </a:rPr>
+              <a:t xml:space="preserve">is a personality trait. It is not, it is an</a:t>
+            </a:r>
+            <a:endParaRPr lang="en-US" sz="1500"/>
+          </a:p>
+          <a:p>
+            <a:pPr marL="0" indent="0">
+              <a:lnSpc>
+                <a:spcPts val="1950"/>
+              </a:lnSpc>
+              <a:spcAft>
+                <a:spcPts val="0"/>
+              </a:spcAft>
+              <a:buNone/>
+            </a:pPr>
+            <a:r>
+              <a:rPr lang="en-US" sz="1500" b="0">
+                <a:solidFill>
+                  <a:srgbClr val="202B33"/>
+                </a:solidFill>
+                <a:latin typeface="Arial"/>
+                <a:ea typeface="Arial"/>
+                <a:cs typeface="Arial"/>
+              </a:rPr>
+              <a:t xml:space="preserve">option in the financial sense, and Dixit</a:t>
+            </a:r>
+            <a:endParaRPr lang="en-US" sz="1500"/>
+          </a:p>
+          <a:p>
+            <a:pPr marL="0" indent="0">
+              <a:lnSpc>
+                <a:spcPts val="1950"/>
+              </a:lnSpc>
+              <a:spcAft>
+                <a:spcPts val="0"/>
+              </a:spcAft>
+              <a:buNone/>
+            </a:pPr>
+            <a:r>
+              <a:rPr lang="en-US" sz="1500" b="0">
+                <a:solidFill>
+                  <a:srgbClr val="202B33"/>
+                </a:solidFill>
+                <a:latin typeface="Arial"/>
+                <a:ea typeface="Arial"/>
+                <a:cs typeface="Arial"/>
+              </a:rPr>
+              <a:t xml:space="preserve">and Pindyck wrote the book on valuing</a:t>
+            </a:r>
+            <a:endParaRPr lang="en-US" sz="1500"/>
+          </a:p>
+          <a:p>
+            <a:pPr marL="0" indent="0">
+              <a:lnSpc>
+                <a:spcPts val="1950"/>
+              </a:lnSpc>
+              <a:spcAft>
+                <a:spcPts val="0"/>
+              </a:spcAft>
+              <a:buNone/>
+            </a:pPr>
+            <a:r>
+              <a:rPr lang="en-US" sz="1500" b="0">
+                <a:solidFill>
+                  <a:srgbClr val="202B33"/>
+                </a:solidFill>
+                <a:latin typeface="Arial"/>
+                <a:ea typeface="Arial"/>
+                <a:cs typeface="Arial"/>
+              </a:rPr>
+              <a:t xml:space="preserve">flexibility under uncertainty. The right to</a:t>
+            </a:r>
+            <a:endParaRPr lang="en-US" sz="1500"/>
+          </a:p>
+          <a:p>
+            <a:pPr marL="0" indent="0">
+              <a:lnSpc>
+                <a:spcPts val="1950"/>
+              </a:lnSpc>
+              <a:spcAft>
+                <a:spcPts val="0"/>
+              </a:spcAft>
+              <a:buNone/>
+            </a:pPr>
+            <a:r>
+              <a:rPr lang="en-US" sz="1500" b="0">
+                <a:solidFill>
+                  <a:srgbClr val="202B33"/>
+                </a:solidFill>
+                <a:latin typeface="Arial"/>
+                <a:ea typeface="Arial"/>
+                <a:cs typeface="Arial"/>
+              </a:rPr>
+              <a:t xml:space="preserve">switch providers gains value as the price</a:t>
+            </a:r>
+            <a:endParaRPr lang="en-US" sz="1500"/>
+          </a:p>
+          <a:p>
+            <a:pPr marL="0" indent="0">
+              <a:lnSpc>
+                <a:spcPts val="1950"/>
+              </a:lnSpc>
+              <a:spcAft>
+                <a:spcPts val="0"/>
+              </a:spcAft>
+              <a:buNone/>
+            </a:pPr>
+            <a:r>
+              <a:rPr lang="en-US" sz="1500" b="0">
+                <a:solidFill>
+                  <a:srgbClr val="202B33"/>
+                </a:solidFill>
+                <a:latin typeface="Arial"/>
+                <a:ea typeface="Arial"/>
+                <a:cs typeface="Arial"/>
+              </a:rPr>
+              <a:t xml:space="preserve">gets less certain and your exposure grows.</a:t>
+            </a:r>
+            <a:endParaRPr lang="en-US" sz="1500"/>
+          </a:p>
+          <a:p>
+            <a:pPr marL="0" indent="0">
+              <a:lnSpc>
+                <a:spcPts val="1950"/>
+              </a:lnSpc>
+              <a:spcAft>
+                <a:spcPts val="0"/>
+              </a:spcAft>
+              <a:buNone/>
+            </a:pPr>
+            <a:r>
+              <a:rPr lang="en-US" sz="1500" b="0">
+                <a:solidFill>
+                  <a:srgbClr val="202B33"/>
+                </a:solidFill>
+                <a:latin typeface="Arial"/>
+                <a:ea typeface="Arial"/>
+                <a:cs typeface="Arial"/>
+              </a:rPr>
+              <a:t xml:space="preserve">It also has a monthly premium: the</a:t>
+            </a:r>
+            <a:endParaRPr lang="en-US" sz="1500"/>
+          </a:p>
+          <a:p>
+            <a:pPr marL="0" indent="0">
+              <a:lnSpc>
+                <a:spcPts val="1950"/>
+              </a:lnSpc>
+              <a:spcAft>
+                <a:spcPts val="0"/>
+              </a:spcAft>
+              <a:buNone/>
+            </a:pPr>
+            <a:r>
+              <a:rPr lang="en-US" sz="1500" b="0">
+                <a:solidFill>
+                  <a:srgbClr val="202B33"/>
+                </a:solidFill>
+                <a:latin typeface="Arial"/>
+                <a:ea typeface="Arial"/>
+                <a:cs typeface="Arial"/>
+              </a:rPr>
+              <a:t xml:space="preserve">abstraction tax, a second eval suite,</a:t>
+            </a:r>
+            <a:endParaRPr lang="en-US" sz="1500"/>
+          </a:p>
+          <a:p>
+            <a:pPr marL="0" indent="0">
+              <a:lnSpc>
+                <a:spcPts val="1950"/>
+              </a:lnSpc>
+              <a:spcAft>
+                <a:spcPts val="0"/>
+              </a:spcAft>
+              <a:buNone/>
+            </a:pPr>
+            <a:r>
+              <a:rPr lang="en-US" sz="1500" b="0">
+                <a:solidFill>
+                  <a:srgbClr val="202B33"/>
+                </a:solidFill>
+                <a:latin typeface="Arial"/>
+                <a:ea typeface="Arial"/>
+                <a:cs typeface="Arial"/>
+              </a:rPr>
+              <a:t xml:space="preserve">rehearsal time, and a generic wrapper that</a:t>
+            </a:r>
+            <a:endParaRPr lang="en-US" sz="1500"/>
+          </a:p>
+          <a:p>
+            <a:pPr marL="0" indent="0">
+              <a:lnSpc>
+                <a:spcPts val="1950"/>
+              </a:lnSpc>
+              <a:spcAft>
+                <a:spcPts val="0"/>
+              </a:spcAft>
+              <a:buNone/>
+            </a:pPr>
+            <a:r>
+              <a:rPr lang="en-US" sz="1500" b="0">
+                <a:solidFill>
+                  <a:srgbClr val="202B33"/>
+                </a:solidFill>
+                <a:latin typeface="Arial"/>
+                <a:ea typeface="Arial"/>
+                <a:cs typeface="Arial"/>
+              </a:rPr>
+              <a:t xml:space="preserve">hides real differences between models.</a:t>
+            </a:r>
+            <a:endParaRPr lang="en-US" sz="1500"/>
+          </a:p>
+          <a:p>
+            <a:pPr marL="0" indent="0">
+              <a:lnSpc>
+                <a:spcPts val="1950"/>
+              </a:lnSpc>
+              <a:spcAft>
+                <a:spcPts val="0"/>
+              </a:spcAft>
+              <a:buNone/>
+            </a:pPr>
+            <a:r>
+              <a:rPr lang="en-US" sz="1500" b="0">
+                <a:solidFill>
+                  <a:srgbClr val="202B33"/>
+                </a:solidFill>
+                <a:latin typeface="Arial"/>
+                <a:ea typeface="Arial"/>
+                <a:cs typeface="Arial"/>
+              </a:rPr>
+              <a:t xml:space="preserve"/>
             </a:r>
             <a:endParaRPr lang="en-US" sz="1500"/>
           </a:p>
@@ -18459,168 +18046,99 @@
                 <a:ea typeface="Arial"/>
                 <a:cs typeface="Arial"/>
               </a:rPr>
-              <a:t xml:space="preserve">to switch providers has a value that rises</a:t>
-            </a:r>
-            <a:endParaRPr lang="en-US" sz="1500"/>
-          </a:p>
-          <a:p>
-            <a:pPr marL="0" indent="0">
-              <a:lnSpc>
-                <a:spcPts val="1950"/>
-              </a:lnSpc>
-              <a:spcAft>
-                <a:spcPts val="0"/>
-              </a:spcAft>
-              <a:buNone/>
-            </a:pPr>
-            <a:r>
-              <a:rPr lang="en-US" sz="1500" b="0">
-                <a:solidFill>
-                  <a:srgbClr val="202B33"/>
-                </a:solidFill>
-                <a:latin typeface="Arial"/>
-                <a:ea typeface="Arial"/>
-                <a:cs typeface="Arial"/>
-              </a:rPr>
-              <a:t xml:space="preserve">with how uncertain the price is and how</a:t>
-            </a:r>
-            <a:endParaRPr lang="en-US" sz="1500"/>
-          </a:p>
-          <a:p>
-            <a:pPr marL="0" indent="0">
-              <a:lnSpc>
-                <a:spcPts val="1950"/>
-              </a:lnSpc>
-              <a:spcAft>
-                <a:spcPts val="0"/>
-              </a:spcAft>
-              <a:buNone/>
-            </a:pPr>
-            <a:r>
-              <a:rPr lang="en-US" sz="1500" b="0">
-                <a:solidFill>
-                  <a:srgbClr val="202B33"/>
-                </a:solidFill>
-                <a:latin typeface="Arial"/>
-                <a:ea typeface="Arial"/>
-                <a:cs typeface="Arial"/>
-              </a:rPr>
-              <a:t xml:space="preserve">exposed you are. It also has a premium you</a:t>
-            </a:r>
-            <a:endParaRPr lang="en-US" sz="1500"/>
-          </a:p>
-          <a:p>
-            <a:pPr marL="0" indent="0">
-              <a:lnSpc>
-                <a:spcPts val="1950"/>
-              </a:lnSpc>
-              <a:spcAft>
-                <a:spcPts val="0"/>
-              </a:spcAft>
-              <a:buNone/>
-            </a:pPr>
-            <a:r>
-              <a:rPr lang="en-US" sz="1500" b="0">
-                <a:solidFill>
-                  <a:srgbClr val="202B33"/>
-                </a:solidFill>
-                <a:latin typeface="Arial"/>
-                <a:ea typeface="Arial"/>
-                <a:cs typeface="Arial"/>
-              </a:rPr>
-              <a:t xml:space="preserve">pay every month: the abstraction tax, a</a:t>
-            </a:r>
-            <a:endParaRPr lang="en-US" sz="1500"/>
-          </a:p>
-          <a:p>
-            <a:pPr marL="0" indent="0">
-              <a:lnSpc>
-                <a:spcPts val="1950"/>
-              </a:lnSpc>
-              <a:spcAft>
-                <a:spcPts val="0"/>
-              </a:spcAft>
-              <a:buNone/>
-            </a:pPr>
-            <a:r>
-              <a:rPr lang="en-US" sz="1500" b="0">
-                <a:solidFill>
-                  <a:srgbClr val="202B33"/>
-                </a:solidFill>
-                <a:latin typeface="Arial"/>
-                <a:ea typeface="Arial"/>
-                <a:cs typeface="Arial"/>
-              </a:rPr>
-              <a:t xml:space="preserve">second eval suite, rehearsal time, and a</a:t>
-            </a:r>
-            <a:endParaRPr lang="en-US" sz="1500"/>
-          </a:p>
-          <a:p>
-            <a:pPr marL="0" indent="0">
-              <a:lnSpc>
-                <a:spcPts val="1950"/>
-              </a:lnSpc>
-              <a:spcAft>
-                <a:spcPts val="0"/>
-              </a:spcAft>
-              <a:buNone/>
-            </a:pPr>
-            <a:r>
-              <a:rPr lang="en-US" sz="1500" b="0">
-                <a:solidFill>
-                  <a:srgbClr val="202B33"/>
-                </a:solidFill>
-                <a:latin typeface="Arial"/>
-                <a:ea typeface="Arial"/>
-                <a:cs typeface="Arial"/>
-              </a:rPr>
-              <a:t xml:space="preserve">generic wrapper that hides real differences</a:t>
-            </a:r>
-            <a:endParaRPr lang="en-US" sz="1500"/>
-          </a:p>
-          <a:p>
-            <a:pPr marL="0" indent="0">
-              <a:lnSpc>
-                <a:spcPts val="1950"/>
-              </a:lnSpc>
-              <a:spcAft>
-                <a:spcPts val="0"/>
-              </a:spcAft>
-              <a:buNone/>
-            </a:pPr>
-            <a:r>
-              <a:rPr lang="en-US" sz="1500" b="0">
-                <a:solidFill>
-                  <a:srgbClr val="202B33"/>
-                </a:solidFill>
-                <a:latin typeface="Arial"/>
-                <a:ea typeface="Arial"/>
-                <a:cs typeface="Arial"/>
-              </a:rPr>
-              <a:t xml:space="preserve">between models and occasionally makes</a:t>
-            </a:r>
-            <a:endParaRPr lang="en-US" sz="1500"/>
-          </a:p>
-          <a:p>
-            <a:pPr marL="0" indent="0">
-              <a:lnSpc>
-                <a:spcPts val="1950"/>
-              </a:lnSpc>
-              <a:spcAft>
-                <a:spcPts val="0"/>
-              </a:spcAft>
-              <a:buNone/>
-            </a:pPr>
-            <a:r>
-              <a:rPr lang="en-US" sz="1500" b="0">
-                <a:solidFill>
-                  <a:srgbClr val="202B33"/>
-                </a:solidFill>
-                <a:latin typeface="Arial"/>
-                <a:ea typeface="Arial"/>
-                <a:cs typeface="Arial"/>
-              </a:rPr>
-              <a:t xml:space="preserve">everything worse.</a:t>
+              <a:t xml:space="preserve">So do not argue about portability on vibes.</a:t>
+            </a:r>
+            <a:endParaRPr lang="en-US" sz="1500"/>
+          </a:p>
+          <a:p>
+            <a:pPr marL="0" indent="0">
+              <a:lnSpc>
+                <a:spcPts val="1950"/>
+              </a:lnSpc>
+              <a:spcAft>
+                <a:spcPts val="0"/>
+              </a:spcAft>
+              <a:buNone/>
+            </a:pPr>
+            <a:r>
+              <a:rPr lang="en-US" sz="1500" b="0">
+                <a:solidFill>
+                  <a:srgbClr val="202B33"/>
+                </a:solidFill>
+                <a:latin typeface="Arial"/>
+                <a:ea typeface="Arial"/>
+                <a:cs typeface="Arial"/>
+              </a:rPr>
+              <a:t xml:space="preserve">Price it. Exposure is the three prices on</a:t>
+            </a:r>
+            <a:endParaRPr lang="en-US" sz="1500"/>
+          </a:p>
+          <a:p>
+            <a:pPr marL="0" indent="0">
+              <a:lnSpc>
+                <a:spcPts val="1950"/>
+              </a:lnSpc>
+              <a:spcAft>
+                <a:spcPts val="0"/>
+              </a:spcAft>
+              <a:buNone/>
+            </a:pPr>
+            <a:r>
+              <a:rPr lang="en-US" sz="1500" b="0">
+                <a:solidFill>
+                  <a:srgbClr val="202B33"/>
+                </a:solidFill>
+                <a:latin typeface="Arial"/>
+                <a:ea typeface="Arial"/>
+                <a:cs typeface="Arial"/>
+              </a:rPr>
+              <a:t xml:space="preserve">the next slide times your volume; the</a:t>
+            </a:r>
+            <a:endParaRPr lang="en-US" sz="1500"/>
+          </a:p>
+          <a:p>
+            <a:pPr marL="0" indent="0">
+              <a:lnSpc>
+                <a:spcPts val="1950"/>
+              </a:lnSpc>
+              <a:spcAft>
+                <a:spcPts val="0"/>
+              </a:spcAft>
+              <a:buNone/>
+            </a:pPr>
+            <a:r>
+              <a:rPr lang="en-US" sz="1500" b="0">
+                <a:solidFill>
+                  <a:srgbClr val="202B33"/>
+                </a:solidFill>
+                <a:latin typeface="Arial"/>
+                <a:ea typeface="Arial"/>
+                <a:cs typeface="Arial"/>
+              </a:rPr>
+              <a:t xml:space="preserve">premium is the engineering you would spend.</a:t>
+            </a:r>
+            <a:endParaRPr lang="en-US" sz="1500"/>
+          </a:p>
+          <a:p>
+            <a:pPr marL="0" indent="0">
+              <a:lnSpc>
+                <a:spcPts val="1950"/>
+              </a:lnSpc>
+              <a:spcAft>
+                <a:spcPts val="0"/>
+              </a:spcAft>
+              <a:buNone/>
+            </a:pPr>
+            <a:r>
+              <a:rPr lang="en-US" sz="1500" b="0">
+                <a:solidFill>
+                  <a:srgbClr val="202B33"/>
+                </a:solidFill>
+                <a:latin typeface="Arial"/>
+                <a:ea typeface="Arial"/>
+                <a:cs typeface="Arial"/>
+              </a:rPr>
+              <a:t xml:space="preserve">Compare the two numbers.</a:t>
             </a:r>
             <a:endParaRPr lang="en-US" sz="1500"/>
           </a:p>
@@ -18666,99 +18184,306 @@
                 <a:ea typeface="Arial"/>
                 <a:cs typeface="Arial"/>
               </a:rPr>
-              <a:t xml:space="preserve">So do not argue about portability on vibes.</a:t>
-            </a:r>
-            <a:endParaRPr lang="en-US" sz="1500"/>
-          </a:p>
-          <a:p>
-            <a:pPr marL="0" indent="0">
-              <a:lnSpc>
-                <a:spcPts val="1950"/>
-              </a:lnSpc>
-              <a:spcAft>
-                <a:spcPts val="0"/>
-              </a:spcAft>
-              <a:buNone/>
-            </a:pPr>
-            <a:r>
-              <a:rPr lang="en-US" sz="1500" b="0">
-                <a:solidFill>
-                  <a:srgbClr val="202B33"/>
-                </a:solidFill>
-                <a:latin typeface="Arial"/>
-                <a:ea typeface="Arial"/>
-                <a:cs typeface="Arial"/>
-              </a:rPr>
-              <a:t xml:space="preserve">Price it. Your exposure is the three prices</a:t>
-            </a:r>
-            <a:endParaRPr lang="en-US" sz="1500"/>
-          </a:p>
-          <a:p>
-            <a:pPr marL="0" indent="0">
-              <a:lnSpc>
-                <a:spcPts val="1950"/>
-              </a:lnSpc>
-              <a:spcAft>
-                <a:spcPts val="0"/>
-              </a:spcAft>
-              <a:buNone/>
-            </a:pPr>
-            <a:r>
-              <a:rPr lang="en-US" sz="1500" b="0">
-                <a:solidFill>
-                  <a:srgbClr val="202B33"/>
-                </a:solidFill>
-                <a:latin typeface="Arial"/>
-                <a:ea typeface="Arial"/>
-                <a:cs typeface="Arial"/>
-              </a:rPr>
-              <a:t xml:space="preserve">on the next slide times your volume. Your</a:t>
-            </a:r>
-            <a:endParaRPr lang="en-US" sz="1500"/>
-          </a:p>
-          <a:p>
-            <a:pPr marL="0" indent="0">
-              <a:lnSpc>
-                <a:spcPts val="1950"/>
-              </a:lnSpc>
-              <a:spcAft>
-                <a:spcPts val="0"/>
-              </a:spcAft>
-              <a:buNone/>
-            </a:pPr>
-            <a:r>
-              <a:rPr lang="en-US" sz="1500" b="0">
-                <a:solidFill>
-                  <a:srgbClr val="202B33"/>
-                </a:solidFill>
-                <a:latin typeface="Arial"/>
-                <a:ea typeface="Arial"/>
-                <a:cs typeface="Arial"/>
-              </a:rPr>
-              <a:t xml:space="preserve">premium is the engineering you would spend.</a:t>
-            </a:r>
-            <a:endParaRPr lang="en-US" sz="1500"/>
-          </a:p>
-          <a:p>
-            <a:pPr marL="0" indent="0">
-              <a:lnSpc>
-                <a:spcPts val="1950"/>
-              </a:lnSpc>
-              <a:spcAft>
-                <a:spcPts val="0"/>
-              </a:spcAft>
-              <a:buNone/>
-            </a:pPr>
-            <a:r>
-              <a:rPr lang="en-US" sz="1500" b="0">
-                <a:solidFill>
-                  <a:srgbClr val="202B33"/>
-                </a:solidFill>
-                <a:latin typeface="Arial"/>
-                <a:ea typeface="Arial"/>
-                <a:cs typeface="Arial"/>
-              </a:rPr>
-              <a:t xml:space="preserve">Compare the two numbers.</a:t>
+              <a:t xml:space="preserve">Same for optimization. Take a router that</a:t>
+            </a:r>
+            <a:endParaRPr lang="en-US" sz="1500"/>
+          </a:p>
+          <a:p>
+            <a:pPr marL="0" indent="0">
+              <a:lnSpc>
+                <a:spcPts val="1950"/>
+              </a:lnSpc>
+              <a:spcAft>
+                <a:spcPts val="0"/>
+              </a:spcAft>
+              <a:buNone/>
+            </a:pPr>
+            <a:r>
+              <a:rPr lang="en-US" sz="1500" b="0">
+                <a:solidFill>
+                  <a:srgbClr val="202B33"/>
+                </a:solidFill>
+                <a:latin typeface="Arial"/>
+                <a:ea typeface="Arial"/>
+                <a:cs typeface="Arial"/>
+              </a:rPr>
+              <a:t xml:space="preserve">halves inference per attempt at the same</a:t>
+            </a:r>
+            <a:endParaRPr lang="en-US" sz="1500"/>
+          </a:p>
+          <a:p>
+            <a:pPr marL="0" indent="0">
+              <a:lnSpc>
+                <a:spcPts val="1950"/>
+              </a:lnSpc>
+              <a:spcAft>
+                <a:spcPts val="0"/>
+              </a:spcAft>
+              <a:buNone/>
+            </a:pPr>
+            <a:r>
+              <a:rPr lang="en-US" sz="1500" b="0">
+                <a:solidFill>
+                  <a:srgbClr val="202B33"/>
+                </a:solidFill>
+                <a:latin typeface="Arial"/>
+                <a:ea typeface="Arial"/>
+                <a:cs typeface="Arial"/>
+              </a:rPr>
+              <a:t xml:space="preserve">acceptance rate: in our fixture it saves a</a:t>
+            </a:r>
+            <a:endParaRPr lang="en-US" sz="1500"/>
+          </a:p>
+          <a:p>
+            <a:pPr marL="0" indent="0">
+              <a:lnSpc>
+                <a:spcPts val="1950"/>
+              </a:lnSpc>
+              <a:spcAft>
+                <a:spcPts val="0"/>
+              </a:spcAft>
+              <a:buNone/>
+            </a:pPr>
+            <a:r>
+              <a:rPr lang="en-US" sz="1500" b="0">
+                <a:solidFill>
+                  <a:srgbClr val="202B33"/>
+                </a:solidFill>
+                <a:latin typeface="Arial"/>
+                <a:ea typeface="Arial"/>
+                <a:cs typeface="Arial"/>
+              </a:rPr>
+              <a:t xml:space="preserve">cent per attempt at sticker price and ten</a:t>
+            </a:r>
+            <a:endParaRPr lang="en-US" sz="1500"/>
+          </a:p>
+          <a:p>
+            <a:pPr marL="0" indent="0">
+              <a:lnSpc>
+                <a:spcPts val="1950"/>
+              </a:lnSpc>
+              <a:spcAft>
+                <a:spcPts val="0"/>
+              </a:spcAft>
+              <a:buNone/>
+            </a:pPr>
+            <a:r>
+              <a:rPr lang="en-US" sz="1500" b="0">
+                <a:solidFill>
+                  <a:srgbClr val="202B33"/>
+                </a:solidFill>
+                <a:latin typeface="Arial"/>
+                <a:ea typeface="Arial"/>
+                <a:cs typeface="Arial"/>
+              </a:rPr>
+              <a:t xml:space="preserve">cents at ten times. At a million attempts a</a:t>
+            </a:r>
+            <a:endParaRPr lang="en-US" sz="1500"/>
+          </a:p>
+          <a:p>
+            <a:pPr marL="0" indent="0">
+              <a:lnSpc>
+                <a:spcPts val="1950"/>
+              </a:lnSpc>
+              <a:spcAft>
+                <a:spcPts val="0"/>
+              </a:spcAft>
+              <a:buNone/>
+            </a:pPr>
+            <a:r>
+              <a:rPr lang="en-US" sz="1500" b="0">
+                <a:solidFill>
+                  <a:srgbClr val="202B33"/>
+                </a:solidFill>
+                <a:latin typeface="Arial"/>
+                <a:ea typeface="Arial"/>
+                <a:cs typeface="Arial"/>
+              </a:rPr>
+              <a:t xml:space="preserve">month, ten cents each is a hundred thousand</a:t>
+            </a:r>
+            <a:endParaRPr lang="en-US" sz="1500"/>
+          </a:p>
+          <a:p>
+            <a:pPr marL="0" indent="0">
+              <a:lnSpc>
+                <a:spcPts val="1950"/>
+              </a:lnSpc>
+              <a:spcAft>
+                <a:spcPts val="0"/>
+              </a:spcAft>
+              <a:buNone/>
+            </a:pPr>
+            <a:r>
+              <a:rPr lang="en-US" sz="1500" b="0">
+                <a:solidFill>
+                  <a:srgbClr val="202B33"/>
+                </a:solidFill>
+                <a:latin typeface="Arial"/>
+                <a:ea typeface="Arial"/>
+                <a:cs typeface="Arial"/>
+              </a:rPr>
+              <a:t xml:space="preserve">dollars and you should have started</a:t>
+            </a:r>
+            <a:endParaRPr lang="en-US" sz="1500"/>
+          </a:p>
+          <a:p>
+            <a:pPr marL="0" indent="0">
+              <a:lnSpc>
+                <a:spcPts val="1950"/>
+              </a:lnSpc>
+              <a:spcAft>
+                <a:spcPts val="0"/>
+              </a:spcAft>
+              <a:buNone/>
+            </a:pPr>
+            <a:r>
+              <a:rPr lang="en-US" sz="1500" b="0">
+                <a:solidFill>
+                  <a:srgbClr val="202B33"/>
+                </a:solidFill>
+                <a:latin typeface="Arial"/>
+                <a:ea typeface="Arial"/>
+                <a:cs typeface="Arial"/>
+              </a:rPr>
+              <a:t xml:space="preserve">yesterday. At a thousand attempts it is a</a:t>
+            </a:r>
+            <a:endParaRPr lang="en-US" sz="1500"/>
+          </a:p>
+          <a:p>
+            <a:pPr marL="0" indent="0">
+              <a:lnSpc>
+                <a:spcPts val="1950"/>
+              </a:lnSpc>
+              <a:spcAft>
+                <a:spcPts val="0"/>
+              </a:spcAft>
+              <a:buNone/>
+            </a:pPr>
+            <a:r>
+              <a:rPr lang="en-US" sz="1500" b="0">
+                <a:solidFill>
+                  <a:srgbClr val="202B33"/>
+                </a:solidFill>
+                <a:latin typeface="Arial"/>
+                <a:ea typeface="Arial"/>
+                <a:cs typeface="Arial"/>
+              </a:rPr>
+              <a:t xml:space="preserve">hundred dollars — ten at today's price —</a:t>
+            </a:r>
+            <a:endParaRPr lang="en-US" sz="1500"/>
+          </a:p>
+          <a:p>
+            <a:pPr marL="0" indent="0">
+              <a:lnSpc>
+                <a:spcPts val="1950"/>
+              </a:lnSpc>
+              <a:spcAft>
+                <a:spcPts val="0"/>
+              </a:spcAft>
+              <a:buNone/>
+            </a:pPr>
+            <a:r>
+              <a:rPr lang="en-US" sz="1500" b="0">
+                <a:solidFill>
+                  <a:srgbClr val="202B33"/>
+                </a:solidFill>
+                <a:latin typeface="Arial"/>
+                <a:ea typeface="Arial"/>
+                <a:cs typeface="Arial"/>
+              </a:rPr>
+              <a:t xml:space="preserve">and you should never do it. Identical</a:t>
+            </a:r>
+            <a:endParaRPr lang="en-US" sz="1500"/>
+          </a:p>
+          <a:p>
+            <a:pPr marL="0" indent="0">
+              <a:lnSpc>
+                <a:spcPts val="1950"/>
+              </a:lnSpc>
+              <a:spcAft>
+                <a:spcPts val="0"/>
+              </a:spcAft>
+              <a:buNone/>
+            </a:pPr>
+            <a:r>
+              <a:rPr lang="en-US" sz="1500" b="0">
+                <a:solidFill>
+                  <a:srgbClr val="202B33"/>
+                </a:solidFill>
+                <a:latin typeface="Arial"/>
+                <a:ea typeface="Arial"/>
+                <a:cs typeface="Arial"/>
+              </a:rPr>
+              <a:t xml:space="preserve">project. The sweep tells you which world</a:t>
+            </a:r>
+            <a:endParaRPr lang="en-US" sz="1500"/>
+          </a:p>
+          <a:p>
+            <a:pPr marL="0" indent="0">
+              <a:lnSpc>
+                <a:spcPts val="1950"/>
+              </a:lnSpc>
+              <a:spcAft>
+                <a:spcPts val="0"/>
+              </a:spcAft>
+              <a:buNone/>
+            </a:pPr>
+            <a:r>
+              <a:rPr lang="en-US" sz="1500" b="0">
+                <a:solidFill>
+                  <a:srgbClr val="202B33"/>
+                </a:solidFill>
+                <a:latin typeface="Arial"/>
+                <a:ea typeface="Arial"/>
+                <a:cs typeface="Arial"/>
+              </a:rPr>
+              <a:t xml:space="preserve">you live in, and a router that costs more</a:t>
+            </a:r>
+            <a:endParaRPr lang="en-US" sz="1500"/>
+          </a:p>
+          <a:p>
+            <a:pPr marL="0" indent="0">
+              <a:lnSpc>
+                <a:spcPts val="1950"/>
+              </a:lnSpc>
+              <a:spcAft>
+                <a:spcPts val="0"/>
+              </a:spcAft>
+              <a:buNone/>
+            </a:pPr>
+            <a:r>
+              <a:rPr lang="en-US" sz="1500" b="0">
+                <a:solidFill>
+                  <a:srgbClr val="202B33"/>
+                </a:solidFill>
+                <a:latin typeface="Arial"/>
+                <a:ea typeface="Arial"/>
+                <a:cs typeface="Arial"/>
+              </a:rPr>
+              <a:t xml:space="preserve">to run than it saves is not better</a:t>
+            </a:r>
+            <a:endParaRPr lang="en-US" sz="1500"/>
+          </a:p>
+          <a:p>
+            <a:pPr marL="0" indent="0">
+              <a:lnSpc>
+                <a:spcPts val="1950"/>
+              </a:lnSpc>
+              <a:spcAft>
+                <a:spcPts val="0"/>
+              </a:spcAft>
+              <a:buNone/>
+            </a:pPr>
+            <a:r>
+              <a:rPr lang="en-US" sz="1500" b="0">
+                <a:solidFill>
+                  <a:srgbClr val="202B33"/>
+                </a:solidFill>
+                <a:latin typeface="Arial"/>
+                <a:ea typeface="Arial"/>
+                <a:cs typeface="Arial"/>
+              </a:rPr>
+              <a:t xml:space="preserve">engineering.</a:t>
             </a:r>
             <a:endParaRPr lang="en-US" sz="1500"/>
           </a:p>
@@ -18938,7 +18663,7 @@
                 <a:ea typeface="Arial"/>
                 <a:cs typeface="Arial"/>
               </a:rPr>
-              <a:t xml:space="preserve">13 / 15    SOURCE SLIDE 13</a:t>
+              <a:t xml:space="preserve">14 / 15    SOURCE SLIDE 14</a:t>
             </a:r>
             <a:endParaRPr lang="en-US" sz="1050"/>
           </a:p>
@@ -18987,7 +18712,7 @@
                 <a:ea typeface="Arial"/>
                 <a:cs typeface="Arial"/>
               </a:rPr>
-              <a:t xml:space="preserve">Reversible is a line item (continued)</a:t>
+              <a:t xml:space="preserve">Three prices for the next design review</a:t>
             </a:r>
             <a:endParaRPr lang="en-US" sz="2550"/>
           </a:p>
@@ -19036,168 +18761,398 @@
                 <a:ea typeface="Arial"/>
                 <a:cs typeface="Arial"/>
               </a:rPr>
-              <a:t xml:space="preserve">Same for optimization. Take a cache or a</a:t>
-            </a:r>
-            <a:endParaRPr lang="en-US" sz="1500"/>
-          </a:p>
-          <a:p>
-            <a:pPr marL="0" indent="0">
-              <a:lnSpc>
-                <a:spcPts val="1950"/>
-              </a:lnSpc>
-              <a:spcAft>
-                <a:spcPts val="0"/>
-              </a:spcAft>
-              <a:buNone/>
-            </a:pPr>
-            <a:r>
-              <a:rPr lang="en-US" sz="1500" b="0">
-                <a:solidFill>
-                  <a:srgbClr val="202B33"/>
-                </a:solidFill>
-                <a:latin typeface="Arial"/>
-                <a:ea typeface="Arial"/>
-                <a:cs typeface="Arial"/>
-              </a:rPr>
-              <a:t xml:space="preserve">router that halves inference per attempt at</a:t>
-            </a:r>
-            <a:endParaRPr lang="en-US" sz="1500"/>
-          </a:p>
-          <a:p>
-            <a:pPr marL="0" indent="0">
-              <a:lnSpc>
-                <a:spcPts val="1950"/>
-              </a:lnSpc>
-              <a:spcAft>
-                <a:spcPts val="0"/>
-              </a:spcAft>
-              <a:buNone/>
-            </a:pPr>
-            <a:r>
-              <a:rPr lang="en-US" sz="1500" b="0">
-                <a:solidFill>
-                  <a:srgbClr val="202B33"/>
-                </a:solidFill>
-                <a:latin typeface="Arial"/>
-                <a:ea typeface="Arial"/>
-                <a:cs typeface="Arial"/>
-              </a:rPr>
-              <a:t xml:space="preserve">the same acceptance rate. In our fixture it</a:t>
-            </a:r>
-            <a:endParaRPr lang="en-US" sz="1500"/>
-          </a:p>
-          <a:p>
-            <a:pPr marL="0" indent="0">
-              <a:lnSpc>
-                <a:spcPts val="1950"/>
-              </a:lnSpc>
-              <a:spcAft>
-                <a:spcPts val="0"/>
-              </a:spcAft>
-              <a:buNone/>
-            </a:pPr>
-            <a:r>
-              <a:rPr lang="en-US" sz="1500" b="0">
-                <a:solidFill>
-                  <a:srgbClr val="202B33"/>
-                </a:solidFill>
-                <a:latin typeface="Arial"/>
-                <a:ea typeface="Arial"/>
-                <a:cs typeface="Arial"/>
-              </a:rPr>
-              <a:t xml:space="preserve">saves one cent per attempt at one-times</a:t>
-            </a:r>
-            <a:endParaRPr lang="en-US" sz="1500"/>
-          </a:p>
-          <a:p>
-            <a:pPr marL="0" indent="0">
-              <a:lnSpc>
-                <a:spcPts val="1950"/>
-              </a:lnSpc>
-              <a:spcAft>
-                <a:spcPts val="0"/>
-              </a:spcAft>
-              <a:buNone/>
-            </a:pPr>
-            <a:r>
-              <a:rPr lang="en-US" sz="1500" b="0">
-                <a:solidFill>
-                  <a:srgbClr val="202B33"/>
-                </a:solidFill>
-                <a:latin typeface="Arial"/>
-                <a:ea typeface="Arial"/>
-                <a:cs typeface="Arial"/>
-              </a:rPr>
-              <a:t xml:space="preserve">pricing and ten cents at ten-times. Divide</a:t>
-            </a:r>
-            <a:endParaRPr lang="en-US" sz="1500"/>
-          </a:p>
-          <a:p>
-            <a:pPr marL="0" indent="0">
-              <a:lnSpc>
-                <a:spcPts val="1950"/>
-              </a:lnSpc>
-              <a:spcAft>
-                <a:spcPts val="0"/>
-              </a:spcAft>
-              <a:buNone/>
-            </a:pPr>
-            <a:r>
-              <a:rPr lang="en-US" sz="1500" b="0">
-                <a:solidFill>
-                  <a:srgbClr val="202B33"/>
-                </a:solidFill>
-                <a:latin typeface="Arial"/>
-                <a:ea typeface="Arial"/>
-                <a:cs typeface="Arial"/>
-              </a:rPr>
-              <a:t xml:space="preserve">your build cost by that, divide by monthly</a:t>
-            </a:r>
-            <a:endParaRPr lang="en-US" sz="1500"/>
-          </a:p>
-          <a:p>
-            <a:pPr marL="0" indent="0">
-              <a:lnSpc>
-                <a:spcPts val="1950"/>
-              </a:lnSpc>
-              <a:spcAft>
-                <a:spcPts val="0"/>
-              </a:spcAft>
-              <a:buNone/>
-            </a:pPr>
-            <a:r>
-              <a:rPr lang="en-US" sz="1500" b="0">
-                <a:solidFill>
-                  <a:srgbClr val="202B33"/>
-                </a:solidFill>
-                <a:latin typeface="Arial"/>
-                <a:ea typeface="Arial"/>
-                <a:cs typeface="Arial"/>
-              </a:rPr>
-              <a:t xml:space="preserve">attempts, and you have payback in months.</a:t>
-            </a:r>
-            <a:endParaRPr lang="en-US" sz="1500"/>
-          </a:p>
-          <a:p>
-            <a:pPr marL="0" indent="0">
-              <a:lnSpc>
-                <a:spcPts val="1950"/>
-              </a:lnSpc>
-              <a:spcAft>
-                <a:spcPts val="0"/>
-              </a:spcAft>
-              <a:buNone/>
-            </a:pPr>
-            <a:r>
-              <a:rPr lang="en-US" sz="1500" b="0">
-                <a:solidFill>
-                  <a:srgbClr val="202B33"/>
-                </a:solidFill>
-                <a:latin typeface="Arial"/>
-                <a:ea typeface="Arial"/>
-                <a:cs typeface="Arial"/>
-              </a:rPr>
-              <a:t xml:space="preserve">At a million attempts a month, ten cents</a:t>
+              <a:t xml:space="preserve">What we pay today · What we pay without the</a:t>
+            </a:r>
+            <a:endParaRPr lang="en-US" sz="1500"/>
+          </a:p>
+          <a:p>
+            <a:pPr marL="0" indent="0">
+              <a:lnSpc>
+                <a:spcPts val="1950"/>
+              </a:lnSpc>
+              <a:spcAft>
+                <a:spcPts val="0"/>
+              </a:spcAft>
+              <a:buNone/>
+            </a:pPr>
+            <a:r>
+              <a:rPr lang="en-US" sz="1500" b="0">
+                <a:solidFill>
+                  <a:srgbClr val="202B33"/>
+                </a:solidFill>
+                <a:latin typeface="Arial"/>
+                <a:ea typeface="Arial"/>
+                <a:cs typeface="Arial"/>
+              </a:rPr>
+              <a:t xml:space="preserve">offer · What we can survive paying</a:t>
+            </a:r>
+            <a:endParaRPr lang="en-US" sz="1500"/>
+          </a:p>
+          <a:p>
+            <a:pPr marL="0" indent="0">
+              <a:lnSpc>
+                <a:spcPts val="1950"/>
+              </a:lnSpc>
+              <a:spcAft>
+                <a:spcPts val="0"/>
+              </a:spcAft>
+              <a:buNone/>
+            </a:pPr>
+            <a:r>
+              <a:rPr lang="en-US" sz="1500" b="0">
+                <a:solidFill>
+                  <a:srgbClr val="202B33"/>
+                </a:solidFill>
+                <a:latin typeface="Arial"/>
+                <a:ea typeface="Arial"/>
+                <a:cs typeface="Arial"/>
+              </a:rPr>
+              <a:t xml:space="preserve"/>
+            </a:r>
+            <a:endParaRPr lang="en-US" sz="1500"/>
+          </a:p>
+          <a:p>
+            <a:pPr marL="0" indent="0">
+              <a:lnSpc>
+                <a:spcPts val="1950"/>
+              </a:lnSpc>
+              <a:spcAft>
+                <a:spcPts val="0"/>
+              </a:spcAft>
+              <a:buNone/>
+            </a:pPr>
+            <a:r>
+              <a:rPr lang="en-US" sz="1500" b="0">
+                <a:solidFill>
+                  <a:srgbClr val="202B33"/>
+                </a:solidFill>
+                <a:latin typeface="Arial"/>
+                <a:ea typeface="Arial"/>
+                <a:cs typeface="Arial"/>
+              </a:rPr>
+              <a:t xml:space="preserve">Record gross usage separately from credits</a:t>
+            </a:r>
+            <a:endParaRPr lang="en-US" sz="1500"/>
+          </a:p>
+          <a:p>
+            <a:pPr marL="0" indent="0">
+              <a:lnSpc>
+                <a:spcPts val="1950"/>
+              </a:lnSpc>
+              <a:spcAft>
+                <a:spcPts val="0"/>
+              </a:spcAft>
+              <a:buNone/>
+            </a:pPr>
+            <a:r>
+              <a:rPr lang="en-US" sz="1500" b="0">
+                <a:solidFill>
+                  <a:srgbClr val="202B33"/>
+                </a:solidFill>
+                <a:latin typeface="Arial"/>
+                <a:ea typeface="Arial"/>
+                <a:cs typeface="Arial"/>
+              </a:rPr>
+              <a:t xml:space="preserve"/>
+            </a:r>
+            <a:endParaRPr lang="en-US" sz="1500"/>
+          </a:p>
+          <a:p>
+            <a:pPr marL="0" indent="0">
+              <a:lnSpc>
+                <a:spcPts val="1950"/>
+              </a:lnSpc>
+              <a:spcAft>
+                <a:spcPts val="0"/>
+              </a:spcAft>
+              <a:buNone/>
+            </a:pPr>
+            <a:r>
+              <a:rPr lang="en-US" sz="1500" b="0">
+                <a:solidFill>
+                  <a:srgbClr val="202B33"/>
+                </a:solidFill>
+                <a:latin typeface="Arial"/>
+                <a:ea typeface="Arial"/>
+                <a:cs typeface="Arial"/>
+              </a:rPr>
+              <a:t xml:space="preserve">Keep an acceptance suite · Rehearse one</a:t>
+            </a:r>
+            <a:endParaRPr lang="en-US" sz="1500"/>
+          </a:p>
+          <a:p>
+            <a:pPr marL="0" indent="0">
+              <a:lnSpc>
+                <a:spcPts val="1950"/>
+              </a:lnSpc>
+              <a:spcAft>
+                <a:spcPts val="0"/>
+              </a:spcAft>
+              <a:buNone/>
+            </a:pPr>
+            <a:r>
+              <a:rPr lang="en-US" sz="1500" b="0">
+                <a:solidFill>
+                  <a:srgbClr val="202B33"/>
+                </a:solidFill>
+                <a:latin typeface="Arial"/>
+                <a:ea typeface="Arial"/>
+                <a:cs typeface="Arial"/>
+              </a:rPr>
+              <a:t xml:space="preserve">replacement · Price the portability</a:t>
+            </a:r>
+            <a:endParaRPr lang="en-US" sz="1500"/>
+          </a:p>
+          <a:p>
+            <a:pPr marL="0" indent="0">
+              <a:lnSpc>
+                <a:spcPts val="1950"/>
+              </a:lnSpc>
+              <a:spcAft>
+                <a:spcPts val="0"/>
+              </a:spcAft>
+              <a:buNone/>
+            </a:pPr>
+            <a:r>
+              <a:rPr lang="en-US" sz="1500" b="0">
+                <a:solidFill>
+                  <a:srgbClr val="202B33"/>
+                </a:solidFill>
+                <a:latin typeface="Arial"/>
+                <a:ea typeface="Arial"/>
+                <a:cs typeface="Arial"/>
+              </a:rPr>
+              <a:t xml:space="preserve"/>
+            </a:r>
+            <a:endParaRPr lang="en-US" sz="1500"/>
+          </a:p>
+          <a:p>
+            <a:pPr marL="0" indent="0">
+              <a:lnSpc>
+                <a:spcPts val="1950"/>
+              </a:lnSpc>
+              <a:spcAft>
+                <a:spcPts val="0"/>
+              </a:spcAft>
+              <a:buNone/>
+            </a:pPr>
+            <a:r>
+              <a:rPr lang="en-US" sz="1500" b="0">
+                <a:solidFill>
+                  <a:srgbClr val="202B33"/>
+                </a:solidFill>
+                <a:latin typeface="Arial"/>
+                <a:ea typeface="Arial"/>
+                <a:cs typeface="Arial"/>
+              </a:rPr>
+              <a:t xml:space="preserve">Three numbers, and if you take nothing</a:t>
+            </a:r>
+            <a:endParaRPr lang="en-US" sz="1500"/>
+          </a:p>
+          <a:p>
+            <a:pPr marL="0" indent="0">
+              <a:lnSpc>
+                <a:spcPts val="1950"/>
+              </a:lnSpc>
+              <a:spcAft>
+                <a:spcPts val="0"/>
+              </a:spcAft>
+              <a:buNone/>
+            </a:pPr>
+            <a:r>
+              <a:rPr lang="en-US" sz="1500" b="0">
+                <a:solidFill>
+                  <a:srgbClr val="202B33"/>
+                </a:solidFill>
+                <a:latin typeface="Arial"/>
+                <a:ea typeface="Arial"/>
+                <a:cs typeface="Arial"/>
+              </a:rPr>
+              <a:t xml:space="preserve">else, take these. The effective rate you</a:t>
+            </a:r>
+            <a:endParaRPr lang="en-US" sz="1500"/>
+          </a:p>
+          <a:p>
+            <a:pPr marL="0" indent="0">
+              <a:lnSpc>
+                <a:spcPts val="1950"/>
+              </a:lnSpc>
+              <a:spcAft>
+                <a:spcPts val="0"/>
+              </a:spcAft>
+              <a:buNone/>
+            </a:pPr>
+            <a:r>
+              <a:rPr lang="en-US" sz="1500" b="0">
+                <a:solidFill>
+                  <a:srgbClr val="202B33"/>
+                </a:solidFill>
+                <a:latin typeface="Arial"/>
+                <a:ea typeface="Arial"/>
+                <a:cs typeface="Arial"/>
+              </a:rPr>
+              <a:t xml:space="preserve">pay today. The gross rate with no</a:t>
+            </a:r>
+            <a:endParaRPr lang="en-US" sz="1500"/>
+          </a:p>
+          <a:p>
+            <a:pPr marL="0" indent="0">
+              <a:lnSpc>
+                <a:spcPts val="1950"/>
+              </a:lnSpc>
+              <a:spcAft>
+                <a:spcPts val="0"/>
+              </a:spcAft>
+              <a:buNone/>
+            </a:pPr>
+            <a:r>
+              <a:rPr lang="en-US" sz="1500" b="0">
+                <a:solidFill>
+                  <a:srgbClr val="202B33"/>
+                </a:solidFill>
+                <a:latin typeface="Arial"/>
+                <a:ea typeface="Arial"/>
+                <a:cs typeface="Arial"/>
+              </a:rPr>
+              <a:t xml:space="preserve">promotional treatment, which is your</a:t>
+            </a:r>
+            <a:endParaRPr lang="en-US" sz="1500"/>
+          </a:p>
+          <a:p>
+            <a:pPr marL="0" indent="0">
+              <a:lnSpc>
+                <a:spcPts val="1950"/>
+              </a:lnSpc>
+              <a:spcAft>
+                <a:spcPts val="0"/>
+              </a:spcAft>
+              <a:buNone/>
+            </a:pPr>
+            <a:r>
+              <a:rPr lang="en-US" sz="1500" b="0">
+                <a:solidFill>
+                  <a:srgbClr val="202B33"/>
+                </a:solidFill>
+                <a:latin typeface="Arial"/>
+                <a:ea typeface="Arial"/>
+                <a:cs typeface="Arial"/>
+              </a:rPr>
+              <a:t xml:space="preserve">exposure if the offer ends. And the highest</a:t>
+            </a:r>
+            <a:endParaRPr lang="en-US" sz="1500"/>
+          </a:p>
+          <a:p>
+            <a:pPr marL="0" indent="0">
+              <a:lnSpc>
+                <a:spcPts val="1950"/>
+              </a:lnSpc>
+              <a:spcAft>
+                <a:spcPts val="0"/>
+              </a:spcAft>
+              <a:buNone/>
+            </a:pPr>
+            <a:r>
+              <a:rPr lang="en-US" sz="1500" b="0">
+                <a:solidFill>
+                  <a:srgbClr val="202B33"/>
+                </a:solidFill>
+                <a:latin typeface="Arial"/>
+                <a:ea typeface="Arial"/>
+                <a:cs typeface="Arial"/>
+              </a:rPr>
+              <a:t xml:space="preserve">rate at which this product still makes</a:t>
+            </a:r>
+            <a:endParaRPr lang="en-US" sz="1500"/>
+          </a:p>
+          <a:p>
+            <a:pPr marL="0" indent="0">
+              <a:lnSpc>
+                <a:spcPts val="1950"/>
+              </a:lnSpc>
+              <a:spcAft>
+                <a:spcPts val="0"/>
+              </a:spcAft>
+              <a:buNone/>
+            </a:pPr>
+            <a:r>
+              <a:rPr lang="en-US" sz="1500" b="0">
+                <a:solidFill>
+                  <a:srgbClr val="202B33"/>
+                </a:solidFill>
+                <a:latin typeface="Arial"/>
+                <a:ea typeface="Arial"/>
+                <a:cs typeface="Arial"/>
+              </a:rPr>
+              <a:t xml:space="preserve">sense, which is the number nobody has ever</a:t>
+            </a:r>
+            <a:endParaRPr lang="en-US" sz="1500"/>
+          </a:p>
+          <a:p>
+            <a:pPr marL="0" indent="0">
+              <a:lnSpc>
+                <a:spcPts val="1950"/>
+              </a:lnSpc>
+              <a:spcAft>
+                <a:spcPts val="0"/>
+              </a:spcAft>
+              <a:buNone/>
+            </a:pPr>
+            <a:r>
+              <a:rPr lang="en-US" sz="1500" b="0">
+                <a:solidFill>
+                  <a:srgbClr val="202B33"/>
+                </a:solidFill>
+                <a:latin typeface="Arial"/>
+                <a:ea typeface="Arial"/>
+                <a:cs typeface="Arial"/>
+              </a:rPr>
+              <a:t xml:space="preserve">calculated and everybody should. Sweep</a:t>
+            </a:r>
+            <a:endParaRPr lang="en-US" sz="1500"/>
+          </a:p>
+          <a:p>
+            <a:pPr marL="0" indent="0">
+              <a:lnSpc>
+                <a:spcPts val="1950"/>
+              </a:lnSpc>
+              <a:spcAft>
+                <a:spcPts val="0"/>
+              </a:spcAft>
+              <a:buNone/>
+            </a:pPr>
+            <a:r>
+              <a:rPr lang="en-US" sz="1500" b="0">
+                <a:solidFill>
+                  <a:srgbClr val="202B33"/>
+                </a:solidFill>
+                <a:latin typeface="Arial"/>
+                <a:ea typeface="Arial"/>
+                <a:cs typeface="Arial"/>
+              </a:rPr>
+              <a:t xml:space="preserve">downward too, so you can cancel the</a:t>
+            </a:r>
+            <a:endParaRPr lang="en-US" sz="1500"/>
+          </a:p>
+          <a:p>
+            <a:pPr marL="0" indent="0">
+              <a:lnSpc>
+                <a:spcPts val="1950"/>
+              </a:lnSpc>
+              <a:spcAft>
+                <a:spcPts val="0"/>
+              </a:spcAft>
+              <a:buNone/>
+            </a:pPr>
+            <a:r>
+              <a:rPr lang="en-US" sz="1500" b="0">
+                <a:solidFill>
+                  <a:srgbClr val="202B33"/>
+                </a:solidFill>
+                <a:latin typeface="Arial"/>
+                <a:ea typeface="Arial"/>
+                <a:cs typeface="Arial"/>
+              </a:rPr>
+              <a:t xml:space="preserve">optimization project when efficiency makes</a:t>
             </a:r>
             <a:endParaRPr lang="en-US" sz="1500"/>
           </a:p>
@@ -19246,168 +19201,375 @@
                 <a:ea typeface="Arial"/>
                 <a:cs typeface="Arial"/>
               </a:rPr>
-              <a:t xml:space="preserve">each is a hundred thousand dollars a month</a:t>
-            </a:r>
-            <a:endParaRPr lang="en-US" sz="1500"/>
-          </a:p>
-          <a:p>
-            <a:pPr marL="0" indent="0">
-              <a:lnSpc>
-                <a:spcPts val="1950"/>
-              </a:lnSpc>
-              <a:spcAft>
-                <a:spcPts val="0"/>
-              </a:spcAft>
-              <a:buNone/>
-            </a:pPr>
-            <a:r>
-              <a:rPr lang="en-US" sz="1500" b="0">
-                <a:solidFill>
-                  <a:srgbClr val="202B33"/>
-                </a:solidFill>
-                <a:latin typeface="Arial"/>
-                <a:ea typeface="Arial"/>
-                <a:cs typeface="Arial"/>
-              </a:rPr>
-              <a:t xml:space="preserve">and you should have started yesterday. At a</a:t>
-            </a:r>
-            <a:endParaRPr lang="en-US" sz="1500"/>
-          </a:p>
-          <a:p>
-            <a:pPr marL="0" indent="0">
-              <a:lnSpc>
-                <a:spcPts val="1950"/>
-              </a:lnSpc>
-              <a:spcAft>
-                <a:spcPts val="0"/>
-              </a:spcAft>
-              <a:buNone/>
-            </a:pPr>
-            <a:r>
-              <a:rPr lang="en-US" sz="1500" b="0">
-                <a:solidFill>
-                  <a:srgbClr val="202B33"/>
-                </a:solidFill>
-                <a:latin typeface="Arial"/>
-                <a:ea typeface="Arial"/>
-                <a:cs typeface="Arial"/>
-              </a:rPr>
-              <a:t xml:space="preserve">thousand attempts a month it is a hundred</a:t>
-            </a:r>
-            <a:endParaRPr lang="en-US" sz="1500"/>
-          </a:p>
-          <a:p>
-            <a:pPr marL="0" indent="0">
-              <a:lnSpc>
-                <a:spcPts val="1950"/>
-              </a:lnSpc>
-              <a:spcAft>
-                <a:spcPts val="0"/>
-              </a:spcAft>
-              <a:buNone/>
-            </a:pPr>
-            <a:r>
-              <a:rPr lang="en-US" sz="1500" b="0">
-                <a:solidFill>
-                  <a:srgbClr val="202B33"/>
-                </a:solidFill>
-                <a:latin typeface="Arial"/>
-                <a:ea typeface="Arial"/>
-                <a:cs typeface="Arial"/>
-              </a:rPr>
-              <a:t xml:space="preserve">dollars, ten at today's price, and you</a:t>
-            </a:r>
-            <a:endParaRPr lang="en-US" sz="1500"/>
-          </a:p>
-          <a:p>
-            <a:pPr marL="0" indent="0">
-              <a:lnSpc>
-                <a:spcPts val="1950"/>
-              </a:lnSpc>
-              <a:spcAft>
-                <a:spcPts val="0"/>
-              </a:spcAft>
-              <a:buNone/>
-            </a:pPr>
-            <a:r>
-              <a:rPr lang="en-US" sz="1500" b="0">
-                <a:solidFill>
-                  <a:srgbClr val="202B33"/>
-                </a:solidFill>
-                <a:latin typeface="Arial"/>
-                <a:ea typeface="Arial"/>
-                <a:cs typeface="Arial"/>
-              </a:rPr>
-              <a:t xml:space="preserve">should never do it. Identical project. The</a:t>
-            </a:r>
-            <a:endParaRPr lang="en-US" sz="1500"/>
-          </a:p>
-          <a:p>
-            <a:pPr marL="0" indent="0">
-              <a:lnSpc>
-                <a:spcPts val="1950"/>
-              </a:lnSpc>
-              <a:spcAft>
-                <a:spcPts val="0"/>
-              </a:spcAft>
-              <a:buNone/>
-            </a:pPr>
-            <a:r>
-              <a:rPr lang="en-US" sz="1500" b="0">
-                <a:solidFill>
-                  <a:srgbClr val="202B33"/>
-                </a:solidFill>
-                <a:latin typeface="Arial"/>
-                <a:ea typeface="Arial"/>
-                <a:cs typeface="Arial"/>
-              </a:rPr>
-              <a:t xml:space="preserve">sweep is what tells you which world you are</a:t>
-            </a:r>
-            <a:endParaRPr lang="en-US" sz="1500"/>
-          </a:p>
-          <a:p>
-            <a:pPr marL="0" indent="0">
-              <a:lnSpc>
-                <a:spcPts val="1950"/>
-              </a:lnSpc>
-              <a:spcAft>
-                <a:spcPts val="0"/>
-              </a:spcAft>
-              <a:buNone/>
-            </a:pPr>
-            <a:r>
-              <a:rPr lang="en-US" sz="1500" b="0">
-                <a:solidFill>
-                  <a:srgbClr val="202B33"/>
-                </a:solidFill>
-                <a:latin typeface="Arial"/>
-                <a:ea typeface="Arial"/>
-                <a:cs typeface="Arial"/>
-              </a:rPr>
-              <a:t xml:space="preserve">living in. A router that costs more to run</a:t>
-            </a:r>
-            <a:endParaRPr lang="en-US" sz="1500"/>
-          </a:p>
-          <a:p>
-            <a:pPr marL="0" indent="0">
-              <a:lnSpc>
-                <a:spcPts val="1950"/>
-              </a:lnSpc>
-              <a:spcAft>
-                <a:spcPts val="0"/>
-              </a:spcAft>
-              <a:buNone/>
-            </a:pPr>
-            <a:r>
-              <a:rPr lang="en-US" sz="1500" b="0">
-                <a:solidFill>
-                  <a:srgbClr val="202B33"/>
-                </a:solidFill>
-                <a:latin typeface="Arial"/>
-                <a:ea typeface="Arial"/>
-                <a:cs typeface="Arial"/>
-              </a:rPr>
-              <a:t xml:space="preserve">than it saves is not better engineering.</a:t>
+              <a:t xml:space="preserve">it pointless.</a:t>
+            </a:r>
+            <a:endParaRPr lang="en-US" sz="1500"/>
+          </a:p>
+          <a:p>
+            <a:pPr marL="0" indent="0">
+              <a:lnSpc>
+                <a:spcPts val="1950"/>
+              </a:lnSpc>
+              <a:spcAft>
+                <a:spcPts val="0"/>
+              </a:spcAft>
+              <a:buNone/>
+            </a:pPr>
+            <a:r>
+              <a:rPr lang="en-US" sz="1500" b="0">
+                <a:solidFill>
+                  <a:srgbClr val="202B33"/>
+                </a:solidFill>
+                <a:latin typeface="Arial"/>
+                <a:ea typeface="Arial"/>
+                <a:cs typeface="Arial"/>
+              </a:rPr>
+              <a:t xml:space="preserve"/>
+            </a:r>
+            <a:endParaRPr lang="en-US" sz="1500"/>
+          </a:p>
+          <a:p>
+            <a:pPr marL="0" indent="0">
+              <a:lnSpc>
+                <a:spcPts val="1950"/>
+              </a:lnSpc>
+              <a:spcAft>
+                <a:spcPts val="0"/>
+              </a:spcAft>
+              <a:buNone/>
+            </a:pPr>
+            <a:r>
+              <a:rPr lang="en-US" sz="1500" b="0">
+                <a:solidFill>
+                  <a:srgbClr val="202B33"/>
+                </a:solidFill>
+                <a:latin typeface="Arial"/>
+                <a:ea typeface="Arial"/>
+                <a:cs typeface="Arial"/>
+              </a:rPr>
+              <a:t xml:space="preserve">Four actions, and each one is one of the</a:t>
+            </a:r>
+            <a:endParaRPr lang="en-US" sz="1500"/>
+          </a:p>
+          <a:p>
+            <a:pPr marL="0" indent="0">
+              <a:lnSpc>
+                <a:spcPts val="1950"/>
+              </a:lnSpc>
+              <a:spcAft>
+                <a:spcPts val="0"/>
+              </a:spcAft>
+              <a:buNone/>
+            </a:pPr>
+            <a:r>
+              <a:rPr lang="en-US" sz="1500" b="0">
+                <a:solidFill>
+                  <a:srgbClr val="202B33"/>
+                </a:solidFill>
+                <a:latin typeface="Arial"/>
+                <a:ea typeface="Arial"/>
+                <a:cs typeface="Arial"/>
+              </a:rPr>
+              <a:t xml:space="preserve">words. Record gross consumption separately</a:t>
+            </a:r>
+            <a:endParaRPr lang="en-US" sz="1500"/>
+          </a:p>
+          <a:p>
+            <a:pPr marL="0" indent="0">
+              <a:lnSpc>
+                <a:spcPts val="1950"/>
+              </a:lnSpc>
+              <a:spcAft>
+                <a:spcPts val="0"/>
+              </a:spcAft>
+              <a:buNone/>
+            </a:pPr>
+            <a:r>
+              <a:rPr lang="en-US" sz="1500" b="0">
+                <a:solidFill>
+                  <a:srgbClr val="202B33"/>
+                </a:solidFill>
+                <a:latin typeface="Arial"/>
+                <a:ea typeface="Arial"/>
+                <a:cs typeface="Arial"/>
+              </a:rPr>
+              <a:t xml:space="preserve">from credits, so price and subsidy stop</a:t>
+            </a:r>
+            <a:endParaRPr lang="en-US" sz="1500"/>
+          </a:p>
+          <a:p>
+            <a:pPr marL="0" indent="0">
+              <a:lnSpc>
+                <a:spcPts val="1950"/>
+              </a:lnSpc>
+              <a:spcAft>
+                <a:spcPts val="0"/>
+              </a:spcAft>
+              <a:buNone/>
+            </a:pPr>
+            <a:r>
+              <a:rPr lang="en-US" sz="1500" b="0">
+                <a:solidFill>
+                  <a:srgbClr val="202B33"/>
+                </a:solidFill>
+                <a:latin typeface="Arial"/>
+                <a:ea typeface="Arial"/>
+                <a:cs typeface="Arial"/>
+              </a:rPr>
+              <a:t xml:space="preserve">being the same number on your dashboard.</a:t>
+            </a:r>
+            <a:endParaRPr lang="en-US" sz="1500"/>
+          </a:p>
+          <a:p>
+            <a:pPr marL="0" indent="0">
+              <a:lnSpc>
+                <a:spcPts val="1950"/>
+              </a:lnSpc>
+              <a:spcAft>
+                <a:spcPts val="0"/>
+              </a:spcAft>
+              <a:buNone/>
+            </a:pPr>
+            <a:r>
+              <a:rPr lang="en-US" sz="1500" b="0">
+                <a:solidFill>
+                  <a:srgbClr val="202B33"/>
+                </a:solidFill>
+                <a:latin typeface="Arial"/>
+                <a:ea typeface="Arial"/>
+                <a:cs typeface="Arial"/>
+              </a:rPr>
+              <a:t xml:space="preserve">Keep a small representative acceptance</a:t>
+            </a:r>
+            <a:endParaRPr lang="en-US" sz="1500"/>
+          </a:p>
+          <a:p>
+            <a:pPr marL="0" indent="0">
+              <a:lnSpc>
+                <a:spcPts val="1950"/>
+              </a:lnSpc>
+              <a:spcAft>
+                <a:spcPts val="0"/>
+              </a:spcAft>
+              <a:buNone/>
+            </a:pPr>
+            <a:r>
+              <a:rPr lang="en-US" sz="1500" b="0">
+                <a:solidFill>
+                  <a:srgbClr val="202B33"/>
+                </a:solidFill>
+                <a:latin typeface="Arial"/>
+                <a:ea typeface="Arial"/>
+                <a:cs typeface="Arial"/>
+              </a:rPr>
+              <a:t xml:space="preserve">suite, because that is the strike test on</a:t>
+            </a:r>
+            <a:endParaRPr lang="en-US" sz="1500"/>
+          </a:p>
+          <a:p>
+            <a:pPr marL="0" indent="0">
+              <a:lnSpc>
+                <a:spcPts val="1950"/>
+              </a:lnSpc>
+              <a:spcAft>
+                <a:spcPts val="0"/>
+              </a:spcAft>
+              <a:buNone/>
+            </a:pPr>
+            <a:r>
+              <a:rPr lang="en-US" sz="1500" b="0">
+                <a:solidFill>
+                  <a:srgbClr val="202B33"/>
+                </a:solidFill>
+                <a:latin typeface="Arial"/>
+                <a:ea typeface="Arial"/>
+                <a:cs typeface="Arial"/>
+              </a:rPr>
+              <a:t xml:space="preserve">your option. Rehearse one provider</a:t>
+            </a:r>
+            <a:endParaRPr lang="en-US" sz="1500"/>
+          </a:p>
+          <a:p>
+            <a:pPr marL="0" indent="0">
+              <a:lnSpc>
+                <a:spcPts val="1950"/>
+              </a:lnSpc>
+              <a:spcAft>
+                <a:spcPts val="0"/>
+              </a:spcAft>
+              <a:buNone/>
+            </a:pPr>
+            <a:r>
+              <a:rPr lang="en-US" sz="1500" b="0">
+                <a:solidFill>
+                  <a:srgbClr val="202B33"/>
+                </a:solidFill>
+                <a:latin typeface="Arial"/>
+                <a:ea typeface="Arial"/>
+                <a:cs typeface="Arial"/>
+              </a:rPr>
+              <a:t xml:space="preserve">replacement before you need it, latency and</a:t>
+            </a:r>
+            <a:endParaRPr lang="en-US" sz="1500"/>
+          </a:p>
+          <a:p>
+            <a:pPr marL="0" indent="0">
+              <a:lnSpc>
+                <a:spcPts val="1950"/>
+              </a:lnSpc>
+              <a:spcAft>
+                <a:spcPts val="0"/>
+              </a:spcAft>
+              <a:buNone/>
+            </a:pPr>
+            <a:r>
+              <a:rPr lang="en-US" sz="1500" b="0">
+                <a:solidFill>
+                  <a:srgbClr val="202B33"/>
+                </a:solidFill>
+                <a:latin typeface="Arial"/>
+                <a:ea typeface="Arial"/>
+                <a:cs typeface="Arial"/>
+              </a:rPr>
+              <a:t xml:space="preserve">recovery included, because that is how you</a:t>
+            </a:r>
+            <a:endParaRPr lang="en-US" sz="1500"/>
+          </a:p>
+          <a:p>
+            <a:pPr marL="0" indent="0">
+              <a:lnSpc>
+                <a:spcPts val="1950"/>
+              </a:lnSpc>
+              <a:spcAft>
+                <a:spcPts val="0"/>
+              </a:spcAft>
+              <a:buNone/>
+            </a:pPr>
+            <a:r>
+              <a:rPr lang="en-US" sz="1500" b="0">
+                <a:solidFill>
+                  <a:srgbClr val="202B33"/>
+                </a:solidFill>
+                <a:latin typeface="Arial"/>
+                <a:ea typeface="Arial"/>
+                <a:cs typeface="Arial"/>
+              </a:rPr>
+              <a:t xml:space="preserve">reduce asset specificity from a slide into</a:t>
+            </a:r>
+            <a:endParaRPr lang="en-US" sz="1500"/>
+          </a:p>
+          <a:p>
+            <a:pPr marL="0" indent="0">
+              <a:lnSpc>
+                <a:spcPts val="1950"/>
+              </a:lnSpc>
+              <a:spcAft>
+                <a:spcPts val="0"/>
+              </a:spcAft>
+              <a:buNone/>
+            </a:pPr>
+            <a:r>
+              <a:rPr lang="en-US" sz="1500" b="0">
+                <a:solidFill>
+                  <a:srgbClr val="202B33"/>
+                </a:solidFill>
+                <a:latin typeface="Arial"/>
+                <a:ea typeface="Arial"/>
+                <a:cs typeface="Arial"/>
+              </a:rPr>
+              <a:t xml:space="preserve">a fact. And put the estimated cost per</a:t>
+            </a:r>
+            <a:endParaRPr lang="en-US" sz="1500"/>
+          </a:p>
+          <a:p>
+            <a:pPr marL="0" indent="0">
+              <a:lnSpc>
+                <a:spcPts val="1950"/>
+              </a:lnSpc>
+              <a:spcAft>
+                <a:spcPts val="0"/>
+              </a:spcAft>
+              <a:buNone/>
+            </a:pPr>
+            <a:r>
+              <a:rPr lang="en-US" sz="1500" b="0">
+                <a:solidFill>
+                  <a:srgbClr val="202B33"/>
+                </a:solidFill>
+                <a:latin typeface="Arial"/>
+                <a:ea typeface="Arial"/>
+                <a:cs typeface="Arial"/>
+              </a:rPr>
+              <a:t xml:space="preserve">accepted outcome in the design doc next to</a:t>
+            </a:r>
+            <a:endParaRPr lang="en-US" sz="1500"/>
+          </a:p>
+          <a:p>
+            <a:pPr marL="0" indent="0">
+              <a:lnSpc>
+                <a:spcPts val="1950"/>
+              </a:lnSpc>
+              <a:spcAft>
+                <a:spcPts val="0"/>
+              </a:spcAft>
+              <a:buNone/>
+            </a:pPr>
+            <a:r>
+              <a:rPr lang="en-US" sz="1500" b="0">
+                <a:solidFill>
+                  <a:srgbClr val="202B33"/>
+                </a:solidFill>
+                <a:latin typeface="Arial"/>
+                <a:ea typeface="Arial"/>
+                <a:cs typeface="Arial"/>
+              </a:rPr>
+              <a:t xml:space="preserve">the latency budget, because that is the</a:t>
+            </a:r>
+            <a:endParaRPr lang="en-US" sz="1500"/>
+          </a:p>
+          <a:p>
+            <a:pPr marL="0" indent="0">
+              <a:lnSpc>
+                <a:spcPts val="1950"/>
+              </a:lnSpc>
+              <a:spcAft>
+                <a:spcPts val="0"/>
+              </a:spcAft>
+              <a:buNone/>
+            </a:pPr>
+            <a:r>
+              <a:rPr lang="en-US" sz="1500" b="0">
+                <a:solidFill>
+                  <a:srgbClr val="202B33"/>
+                </a:solidFill>
+                <a:latin typeface="Arial"/>
+                <a:ea typeface="Arial"/>
+                <a:cs typeface="Arial"/>
+              </a:rPr>
+              <a:t xml:space="preserve">meter, and the meter is the fix for moral</a:t>
+            </a:r>
+            <a:endParaRPr lang="en-US" sz="1500"/>
+          </a:p>
+          <a:p>
+            <a:pPr marL="0" indent="0">
+              <a:lnSpc>
+                <a:spcPts val="1950"/>
+              </a:lnSpc>
+              <a:spcAft>
+                <a:spcPts val="0"/>
+              </a:spcAft>
+              <a:buNone/>
+            </a:pPr>
+            <a:r>
+              <a:rPr lang="en-US" sz="1500" b="0">
+                <a:solidFill>
+                  <a:srgbClr val="202B33"/>
+                </a:solidFill>
+                <a:latin typeface="Arial"/>
+                <a:ea typeface="Arial"/>
+                <a:cs typeface="Arial"/>
+              </a:rPr>
+              <a:t xml:space="preserve">hazard.</a:t>
             </a:r>
             <a:endParaRPr lang="en-US" sz="1500"/>
           </a:p>
@@ -19587,7 +19749,7 @@
                 <a:ea typeface="Arial"/>
                 <a:cs typeface="Arial"/>
               </a:rPr>
-              <a:t xml:space="preserve">14 / 15    SOURCE SLIDE 14</a:t>
+              <a:t xml:space="preserve">15 / 15    SOURCE SLIDE 15</a:t>
             </a:r>
             <a:endParaRPr lang="en-US" sz="1050"/>
           </a:p>
@@ -19636,7 +19798,7 @@
                 <a:ea typeface="Arial"/>
                 <a:cs typeface="Arial"/>
               </a:rPr>
-              <a:t xml:space="preserve">Three prices for the next design review</a:t>
+              <a:t xml:space="preserve">Cheap intelligence changes incentives first</a:t>
             </a:r>
             <a:endParaRPr lang="en-US" sz="2550"/>
           </a:p>
@@ -19685,30 +19847,30 @@
                 <a:ea typeface="Arial"/>
                 <a:cs typeface="Arial"/>
               </a:rPr>
-              <a:t xml:space="preserve">What we pay today · What we pay without the</a:t>
-            </a:r>
-            <a:endParaRPr lang="en-US" sz="1500"/>
-          </a:p>
-          <a:p>
-            <a:pPr marL="0" indent="0">
-              <a:lnSpc>
-                <a:spcPts val="1950"/>
-              </a:lnSpc>
-              <a:spcAft>
-                <a:spcPts val="0"/>
-              </a:spcAft>
-              <a:buNone/>
-            </a:pPr>
-            <a:r>
-              <a:rPr lang="en-US" sz="1500" b="0">
-                <a:solidFill>
-                  <a:srgbClr val="202B33"/>
-                </a:solidFill>
-                <a:latin typeface="Arial"/>
-                <a:ea typeface="Arial"/>
-                <a:cs typeface="Arial"/>
-              </a:rPr>
-              <a:t xml:space="preserve">offer · What we can survive paying</a:t>
+              <a:t xml:space="preserve">Externality · Induced demand · Jevons</a:t>
+            </a:r>
+            <a:endParaRPr lang="en-US" sz="1500"/>
+          </a:p>
+          <a:p>
+            <a:pPr marL="0" indent="0">
+              <a:lnSpc>
+                <a:spcPts val="1950"/>
+              </a:lnSpc>
+              <a:spcAft>
+                <a:spcPts val="0"/>
+              </a:spcAft>
+              <a:buNone/>
+            </a:pPr>
+            <a:r>
+              <a:rPr lang="en-US" sz="1500" b="0">
+                <a:solidFill>
+                  <a:srgbClr val="202B33"/>
+                </a:solidFill>
+                <a:latin typeface="Arial"/>
+                <a:ea typeface="Arial"/>
+                <a:cs typeface="Arial"/>
+              </a:rPr>
+              <a:t xml:space="preserve">paradox · Path dependence</a:t>
             </a:r>
             <a:endParaRPr lang="en-US" sz="1500"/>
           </a:p>
@@ -19754,7 +19916,30 @@
                 <a:ea typeface="Arial"/>
                 <a:cs typeface="Arial"/>
               </a:rPr>
-              <a:t xml:space="preserve">Record gross usage separately from credits</a:t>
+              <a:t xml:space="preserve">Moral hazard · Credible commitment · Asset</a:t>
+            </a:r>
+            <a:endParaRPr lang="en-US" sz="1500"/>
+          </a:p>
+          <a:p>
+            <a:pPr marL="0" indent="0">
+              <a:lnSpc>
+                <a:spcPts val="1950"/>
+              </a:lnSpc>
+              <a:spcAft>
+                <a:spcPts val="0"/>
+              </a:spcAft>
+              <a:buNone/>
+            </a:pPr>
+            <a:r>
+              <a:rPr lang="en-US" sz="1500" b="0">
+                <a:solidFill>
+                  <a:srgbClr val="202B33"/>
+                </a:solidFill>
+                <a:latin typeface="Arial"/>
+                <a:ea typeface="Arial"/>
+                <a:cs typeface="Arial"/>
+              </a:rPr>
+              <a:t xml:space="preserve">specificity · Real option</a:t>
             </a:r>
             <a:endParaRPr lang="en-US" sz="1500"/>
           </a:p>
@@ -19800,30 +19985,7 @@
                 <a:ea typeface="Arial"/>
                 <a:cs typeface="Arial"/>
               </a:rPr>
-              <a:t xml:space="preserve">Keep an acceptance suite · Rehearse one</a:t>
-            </a:r>
-            <a:endParaRPr lang="en-US" sz="1500"/>
-          </a:p>
-          <a:p>
-            <a:pPr marL="0" indent="0">
-              <a:lnSpc>
-                <a:spcPts val="1950"/>
-              </a:lnSpc>
-              <a:spcAft>
-                <a:spcPts val="0"/>
-              </a:spcAft>
-              <a:buNone/>
-            </a:pPr>
-            <a:r>
-              <a:rPr lang="en-US" sz="1500" b="0">
-                <a:solidFill>
-                  <a:srgbClr val="202B33"/>
-                </a:solidFill>
-                <a:latin typeface="Arial"/>
-                <a:ea typeface="Arial"/>
-                <a:cs typeface="Arial"/>
-              </a:rPr>
-              <a:t xml:space="preserve">replacement · Price the portability</a:t>
+              <a:t xml:space="preserve">Build for more than one price.</a:t>
             </a:r>
             <a:endParaRPr lang="en-US" sz="1500"/>
           </a:p>
@@ -19869,214 +20031,237 @@
                 <a:ea typeface="Arial"/>
                 <a:cs typeface="Arial"/>
               </a:rPr>
-              <a:t xml:space="preserve">Three numbers, and if you take nothing</a:t>
-            </a:r>
-            <a:endParaRPr lang="en-US" sz="1500"/>
-          </a:p>
-          <a:p>
-            <a:pPr marL="0" indent="0">
-              <a:lnSpc>
-                <a:spcPts val="1950"/>
-              </a:lnSpc>
-              <a:spcAft>
-                <a:spcPts val="0"/>
-              </a:spcAft>
-              <a:buNone/>
-            </a:pPr>
-            <a:r>
-              <a:rPr lang="en-US" sz="1500" b="0">
-                <a:solidFill>
-                  <a:srgbClr val="202B33"/>
-                </a:solidFill>
-                <a:latin typeface="Arial"/>
-                <a:ea typeface="Arial"/>
-                <a:cs typeface="Arial"/>
-              </a:rPr>
-              <a:t xml:space="preserve">else, take these. The effective rate you</a:t>
-            </a:r>
-            <a:endParaRPr lang="en-US" sz="1500"/>
-          </a:p>
-          <a:p>
-            <a:pPr marL="0" indent="0">
-              <a:lnSpc>
-                <a:spcPts val="1950"/>
-              </a:lnSpc>
-              <a:spcAft>
-                <a:spcPts val="0"/>
-              </a:spcAft>
-              <a:buNone/>
-            </a:pPr>
-            <a:r>
-              <a:rPr lang="en-US" sz="1500" b="0">
-                <a:solidFill>
-                  <a:srgbClr val="202B33"/>
-                </a:solidFill>
-                <a:latin typeface="Arial"/>
-                <a:ea typeface="Arial"/>
-                <a:cs typeface="Arial"/>
-              </a:rPr>
-              <a:t xml:space="preserve">pay today. The gross rate with no</a:t>
-            </a:r>
-            <a:endParaRPr lang="en-US" sz="1500"/>
-          </a:p>
-          <a:p>
-            <a:pPr marL="0" indent="0">
-              <a:lnSpc>
-                <a:spcPts val="1950"/>
-              </a:lnSpc>
-              <a:spcAft>
-                <a:spcPts val="0"/>
-              </a:spcAft>
-              <a:buNone/>
-            </a:pPr>
-            <a:r>
-              <a:rPr lang="en-US" sz="1500" b="0">
-                <a:solidFill>
-                  <a:srgbClr val="202B33"/>
-                </a:solidFill>
-                <a:latin typeface="Arial"/>
-                <a:ea typeface="Arial"/>
-                <a:cs typeface="Arial"/>
-              </a:rPr>
-              <a:t xml:space="preserve">promotional treatment, which is your</a:t>
-            </a:r>
-            <a:endParaRPr lang="en-US" sz="1500"/>
-          </a:p>
-          <a:p>
-            <a:pPr marL="0" indent="0">
-              <a:lnSpc>
-                <a:spcPts val="1950"/>
-              </a:lnSpc>
-              <a:spcAft>
-                <a:spcPts val="0"/>
-              </a:spcAft>
-              <a:buNone/>
-            </a:pPr>
-            <a:r>
-              <a:rPr lang="en-US" sz="1500" b="0">
-                <a:solidFill>
-                  <a:srgbClr val="202B33"/>
-                </a:solidFill>
-                <a:latin typeface="Arial"/>
-                <a:ea typeface="Arial"/>
-                <a:cs typeface="Arial"/>
-              </a:rPr>
-              <a:t xml:space="preserve">exposure if the offer ends. And the highest</a:t>
-            </a:r>
-            <a:endParaRPr lang="en-US" sz="1500"/>
-          </a:p>
-          <a:p>
-            <a:pPr marL="0" indent="0">
-              <a:lnSpc>
-                <a:spcPts val="1950"/>
-              </a:lnSpc>
-              <a:spcAft>
-                <a:spcPts val="0"/>
-              </a:spcAft>
-              <a:buNone/>
-            </a:pPr>
-            <a:r>
-              <a:rPr lang="en-US" sz="1500" b="0">
-                <a:solidFill>
-                  <a:srgbClr val="202B33"/>
-                </a:solidFill>
-                <a:latin typeface="Arial"/>
-                <a:ea typeface="Arial"/>
-                <a:cs typeface="Arial"/>
-              </a:rPr>
-              <a:t xml:space="preserve">rate at which this product still makes</a:t>
-            </a:r>
-            <a:endParaRPr lang="en-US" sz="1500"/>
-          </a:p>
-          <a:p>
-            <a:pPr marL="0" indent="0">
-              <a:lnSpc>
-                <a:spcPts val="1950"/>
-              </a:lnSpc>
-              <a:spcAft>
-                <a:spcPts val="0"/>
-              </a:spcAft>
-              <a:buNone/>
-            </a:pPr>
-            <a:r>
-              <a:rPr lang="en-US" sz="1500" b="0">
-                <a:solidFill>
-                  <a:srgbClr val="202B33"/>
-                </a:solidFill>
-                <a:latin typeface="Arial"/>
-                <a:ea typeface="Arial"/>
-                <a:cs typeface="Arial"/>
-              </a:rPr>
-              <a:t xml:space="preserve">sense, which is the number nobody has ever</a:t>
-            </a:r>
-            <a:endParaRPr lang="en-US" sz="1500"/>
-          </a:p>
-          <a:p>
-            <a:pPr marL="0" indent="0">
-              <a:lnSpc>
-                <a:spcPts val="1950"/>
-              </a:lnSpc>
-              <a:spcAft>
-                <a:spcPts val="0"/>
-              </a:spcAft>
-              <a:buNone/>
-            </a:pPr>
-            <a:r>
-              <a:rPr lang="en-US" sz="1500" b="0">
-                <a:solidFill>
-                  <a:srgbClr val="202B33"/>
-                </a:solidFill>
-                <a:latin typeface="Arial"/>
-                <a:ea typeface="Arial"/>
-                <a:cs typeface="Arial"/>
-              </a:rPr>
-              <a:t xml:space="preserve">calculated and everybody should. Sweep</a:t>
-            </a:r>
-            <a:endParaRPr lang="en-US" sz="1500"/>
-          </a:p>
-          <a:p>
-            <a:pPr marL="0" indent="0">
-              <a:lnSpc>
-                <a:spcPts val="1950"/>
-              </a:lnSpc>
-              <a:spcAft>
-                <a:spcPts val="0"/>
-              </a:spcAft>
-              <a:buNone/>
-            </a:pPr>
-            <a:r>
-              <a:rPr lang="en-US" sz="1500" b="0">
-                <a:solidFill>
-                  <a:srgbClr val="202B33"/>
-                </a:solidFill>
-                <a:latin typeface="Arial"/>
-                <a:ea typeface="Arial"/>
-                <a:cs typeface="Arial"/>
-              </a:rPr>
-              <a:t xml:space="preserve">downward too, so you can cancel the</a:t>
-            </a:r>
-            <a:endParaRPr lang="en-US" sz="1500"/>
-          </a:p>
-          <a:p>
-            <a:pPr marL="0" indent="0">
-              <a:lnSpc>
-                <a:spcPts val="1950"/>
-              </a:lnSpc>
-              <a:spcAft>
-                <a:spcPts val="0"/>
-              </a:spcAft>
-              <a:buNone/>
-            </a:pPr>
-            <a:r>
-              <a:rPr lang="en-US" sz="1500" b="0">
-                <a:solidFill>
-                  <a:srgbClr val="202B33"/>
-                </a:solidFill>
-                <a:latin typeface="Arial"/>
-                <a:ea typeface="Arial"/>
-                <a:cs typeface="Arial"/>
-              </a:rPr>
-              <a:t xml:space="preserve">optimization project when efficiency makes</a:t>
+              <a:t xml:space="preserve">Back to the electricity. Use the cheap</a:t>
+            </a:r>
+            <a:endParaRPr lang="en-US" sz="1500"/>
+          </a:p>
+          <a:p>
+            <a:pPr marL="0" indent="0">
+              <a:lnSpc>
+                <a:spcPts val="1950"/>
+              </a:lnSpc>
+              <a:spcAft>
+                <a:spcPts val="0"/>
+              </a:spcAft>
+              <a:buNone/>
+            </a:pPr>
+            <a:r>
+              <a:rPr lang="en-US" sz="1500" b="0">
+                <a:solidFill>
+                  <a:srgbClr val="202B33"/>
+                </a:solidFill>
+                <a:latin typeface="Arial"/>
+                <a:ea typeface="Arial"/>
+                <a:cs typeface="Arial"/>
+              </a:rPr>
+              <a:t xml:space="preserve">input. It is genuinely great and I am not</a:t>
+            </a:r>
+            <a:endParaRPr lang="en-US" sz="1500"/>
+          </a:p>
+          <a:p>
+            <a:pPr marL="0" indent="0">
+              <a:lnSpc>
+                <a:spcPts val="1950"/>
+              </a:lnSpc>
+              <a:spcAft>
+                <a:spcPts val="0"/>
+              </a:spcAft>
+              <a:buNone/>
+            </a:pPr>
+            <a:r>
+              <a:rPr lang="en-US" sz="1500" b="0">
+                <a:solidFill>
+                  <a:srgbClr val="202B33"/>
+                </a:solidFill>
+                <a:latin typeface="Arial"/>
+                <a:ea typeface="Arial"/>
+                <a:cs typeface="Arial"/>
+              </a:rPr>
+              <a:t xml:space="preserve">asking anyone to be miserable about it.</a:t>
+            </a:r>
+            <a:endParaRPr lang="en-US" sz="1500"/>
+          </a:p>
+          <a:p>
+            <a:pPr marL="0" indent="0">
+              <a:lnSpc>
+                <a:spcPts val="1950"/>
+              </a:lnSpc>
+              <a:spcAft>
+                <a:spcPts val="0"/>
+              </a:spcAft>
+              <a:buNone/>
+            </a:pPr>
+            <a:r>
+              <a:rPr lang="en-US" sz="1500" b="0">
+                <a:solidFill>
+                  <a:srgbClr val="202B33"/>
+                </a:solidFill>
+                <a:latin typeface="Arial"/>
+                <a:ea typeface="Arial"/>
+                <a:cs typeface="Arial"/>
+              </a:rPr>
+              <a:t xml:space="preserve">Just understand what it encouraged you to</a:t>
+            </a:r>
+            <a:endParaRPr lang="en-US" sz="1500"/>
+          </a:p>
+          <a:p>
+            <a:pPr marL="0" indent="0">
+              <a:lnSpc>
+                <a:spcPts val="1950"/>
+              </a:lnSpc>
+              <a:spcAft>
+                <a:spcPts val="0"/>
+              </a:spcAft>
+              <a:buNone/>
+            </a:pPr>
+            <a:r>
+              <a:rPr lang="en-US" sz="1500" b="0">
+                <a:solidFill>
+                  <a:srgbClr val="202B33"/>
+                </a:solidFill>
+                <a:latin typeface="Arial"/>
+                <a:ea typeface="Arial"/>
+                <a:cs typeface="Arial"/>
+              </a:rPr>
+              <a:t xml:space="preserve">build, and keep the expensive decisions</a:t>
+            </a:r>
+            <a:endParaRPr lang="en-US" sz="1500"/>
+          </a:p>
+          <a:p>
+            <a:pPr marL="0" indent="0">
+              <a:lnSpc>
+                <a:spcPts val="1950"/>
+              </a:lnSpc>
+              <a:spcAft>
+                <a:spcPts val="0"/>
+              </a:spcAft>
+              <a:buNone/>
+            </a:pPr>
+            <a:r>
+              <a:rPr lang="en-US" sz="1500" b="0">
+                <a:solidFill>
+                  <a:srgbClr val="202B33"/>
+                </a:solidFill>
+                <a:latin typeface="Arial"/>
+                <a:ea typeface="Arial"/>
+                <a:cs typeface="Arial"/>
+              </a:rPr>
+              <a:t xml:space="preserve">reversible while you find out.</a:t>
+            </a:r>
+            <a:endParaRPr lang="en-US" sz="1500"/>
+          </a:p>
+          <a:p>
+            <a:pPr marL="0" indent="0">
+              <a:lnSpc>
+                <a:spcPts val="1950"/>
+              </a:lnSpc>
+              <a:spcAft>
+                <a:spcPts val="0"/>
+              </a:spcAft>
+              <a:buNone/>
+            </a:pPr>
+            <a:r>
+              <a:rPr lang="en-US" sz="1500" b="0">
+                <a:solidFill>
+                  <a:srgbClr val="202B33"/>
+                </a:solidFill>
+                <a:latin typeface="Arial"/>
+                <a:ea typeface="Arial"/>
+                <a:cs typeface="Arial"/>
+              </a:rPr>
+              <a:t xml:space="preserve"/>
+            </a:r>
+            <a:endParaRPr lang="en-US" sz="1500"/>
+          </a:p>
+          <a:p>
+            <a:pPr marL="0" indent="0">
+              <a:lnSpc>
+                <a:spcPts val="1950"/>
+              </a:lnSpc>
+              <a:spcAft>
+                <a:spcPts val="0"/>
+              </a:spcAft>
+              <a:buNone/>
+            </a:pPr>
+            <a:r>
+              <a:rPr lang="en-US" sz="1500" b="0">
+                <a:solidFill>
+                  <a:srgbClr val="202B33"/>
+                </a:solidFill>
+                <a:latin typeface="Arial"/>
+                <a:ea typeface="Arial"/>
+                <a:cs typeface="Arial"/>
+              </a:rPr>
+              <a:t xml:space="preserve">There are your eight words. Externality,</a:t>
+            </a:r>
+            <a:endParaRPr lang="en-US" sz="1500"/>
+          </a:p>
+          <a:p>
+            <a:pPr marL="0" indent="0">
+              <a:lnSpc>
+                <a:spcPts val="1950"/>
+              </a:lnSpc>
+              <a:spcAft>
+                <a:spcPts val="0"/>
+              </a:spcAft>
+              <a:buNone/>
+            </a:pPr>
+            <a:r>
+              <a:rPr lang="en-US" sz="1500" b="0">
+                <a:solidFill>
+                  <a:srgbClr val="202B33"/>
+                </a:solidFill>
+                <a:latin typeface="Arial"/>
+                <a:ea typeface="Arial"/>
+                <a:cs typeface="Arial"/>
+              </a:rPr>
+              <a:t xml:space="preserve">because the cost moved rather than</a:t>
+            </a:r>
+            <a:endParaRPr lang="en-US" sz="1500"/>
+          </a:p>
+          <a:p>
+            <a:pPr marL="0" indent="0">
+              <a:lnSpc>
+                <a:spcPts val="1950"/>
+              </a:lnSpc>
+              <a:spcAft>
+                <a:spcPts val="0"/>
+              </a:spcAft>
+              <a:buNone/>
+            </a:pPr>
+            <a:r>
+              <a:rPr lang="en-US" sz="1500" b="0">
+                <a:solidFill>
+                  <a:srgbClr val="202B33"/>
+                </a:solidFill>
+                <a:latin typeface="Arial"/>
+                <a:ea typeface="Arial"/>
+                <a:cs typeface="Arial"/>
+              </a:rPr>
+              <a:t xml:space="preserve">vanished. Induced demand and Jevons,</a:t>
+            </a:r>
+            <a:endParaRPr lang="en-US" sz="1500"/>
+          </a:p>
+          <a:p>
+            <a:pPr marL="0" indent="0">
+              <a:lnSpc>
+                <a:spcPts val="1950"/>
+              </a:lnSpc>
+              <a:spcAft>
+                <a:spcPts val="0"/>
+              </a:spcAft>
+              <a:buNone/>
+            </a:pPr>
+            <a:r>
+              <a:rPr lang="en-US" sz="1500" b="0">
+                <a:solidFill>
+                  <a:srgbClr val="202B33"/>
+                </a:solidFill>
+                <a:latin typeface="Arial"/>
+                <a:ea typeface="Arial"/>
+                <a:cs typeface="Arial"/>
+              </a:rPr>
+              <a:t xml:space="preserve">because cheaper made you use more, not</a:t>
             </a:r>
             <a:endParaRPr lang="en-US" sz="1500"/>
           </a:p>
@@ -20125,7 +20310,214 @@
                 <a:ea typeface="Arial"/>
                 <a:cs typeface="Arial"/>
               </a:rPr>
-              <a:t xml:space="preserve">it pointless.</a:t>
+              <a:t xml:space="preserve">less. Path dependence, because the lots</a:t>
+            </a:r>
+            <a:endParaRPr lang="en-US" sz="1500"/>
+          </a:p>
+          <a:p>
+            <a:pPr marL="0" indent="0">
+              <a:lnSpc>
+                <a:spcPts val="1950"/>
+              </a:lnSpc>
+              <a:spcAft>
+                <a:spcPts val="0"/>
+              </a:spcAft>
+              <a:buNone/>
+            </a:pPr>
+            <a:r>
+              <a:rPr lang="en-US" sz="1500" b="0">
+                <a:solidFill>
+                  <a:srgbClr val="202B33"/>
+                </a:solidFill>
+                <a:latin typeface="Arial"/>
+                <a:ea typeface="Arial"/>
+                <a:cs typeface="Arial"/>
+              </a:rPr>
+              <a:t xml:space="preserve">stay built. Moral hazard, because whoever</a:t>
+            </a:r>
+            <a:endParaRPr lang="en-US" sz="1500"/>
+          </a:p>
+          <a:p>
+            <a:pPr marL="0" indent="0">
+              <a:lnSpc>
+                <a:spcPts val="1950"/>
+              </a:lnSpc>
+              <a:spcAft>
+                <a:spcPts val="0"/>
+              </a:spcAft>
+              <a:buNone/>
+            </a:pPr>
+            <a:r>
+              <a:rPr lang="en-US" sz="1500" b="0">
+                <a:solidFill>
+                  <a:srgbClr val="202B33"/>
+                </a:solidFill>
+                <a:latin typeface="Arial"/>
+                <a:ea typeface="Arial"/>
+                <a:cs typeface="Arial"/>
+              </a:rPr>
+              <a:t xml:space="preserve">chooses is not whoever pays. Credible</a:t>
+            </a:r>
+            <a:endParaRPr lang="en-US" sz="1500"/>
+          </a:p>
+          <a:p>
+            <a:pPr marL="0" indent="0">
+              <a:lnSpc>
+                <a:spcPts val="1950"/>
+              </a:lnSpc>
+              <a:spcAft>
+                <a:spcPts val="0"/>
+              </a:spcAft>
+              <a:buNone/>
+            </a:pPr>
+            <a:r>
+              <a:rPr lang="en-US" sz="1500" b="0">
+                <a:solidFill>
+                  <a:srgbClr val="202B33"/>
+                </a:solidFill>
+                <a:latin typeface="Arial"/>
+                <a:ea typeface="Arial"/>
+                <a:cs typeface="Arial"/>
+              </a:rPr>
+              <a:t xml:space="preserve">commitment, because those contracts are</a:t>
+            </a:r>
+            <a:endParaRPr lang="en-US" sz="1500"/>
+          </a:p>
+          <a:p>
+            <a:pPr marL="0" indent="0">
+              <a:lnSpc>
+                <a:spcPts val="1950"/>
+              </a:lnSpc>
+              <a:spcAft>
+                <a:spcPts val="0"/>
+              </a:spcAft>
+              <a:buNone/>
+            </a:pPr>
+            <a:r>
+              <a:rPr lang="en-US" sz="1500" b="0">
+                <a:solidFill>
+                  <a:srgbClr val="202B33"/>
+                </a:solidFill>
+                <a:latin typeface="Arial"/>
+                <a:ea typeface="Arial"/>
+                <a:cs typeface="Arial"/>
+              </a:rPr>
+              <a:t xml:space="preserve">moves in a game and not disclosures about</a:t>
+            </a:r>
+            <a:endParaRPr lang="en-US" sz="1500"/>
+          </a:p>
+          <a:p>
+            <a:pPr marL="0" indent="0">
+              <a:lnSpc>
+                <a:spcPts val="1950"/>
+              </a:lnSpc>
+              <a:spcAft>
+                <a:spcPts val="0"/>
+              </a:spcAft>
+              <a:buNone/>
+            </a:pPr>
+            <a:r>
+              <a:rPr lang="en-US" sz="1500" b="0">
+                <a:solidFill>
+                  <a:srgbClr val="202B33"/>
+                </a:solidFill>
+                <a:latin typeface="Arial"/>
+                <a:ea typeface="Arial"/>
+                <a:cs typeface="Arial"/>
+              </a:rPr>
+              <a:t xml:space="preserve">it. Asset specificity, because your</a:t>
+            </a:r>
+            <a:endParaRPr lang="en-US" sz="1500"/>
+          </a:p>
+          <a:p>
+            <a:pPr marL="0" indent="0">
+              <a:lnSpc>
+                <a:spcPts val="1950"/>
+              </a:lnSpc>
+              <a:spcAft>
+                <a:spcPts val="0"/>
+              </a:spcAft>
+              <a:buNone/>
+            </a:pPr>
+            <a:r>
+              <a:rPr lang="en-US" sz="1500" b="0">
+                <a:solidFill>
+                  <a:srgbClr val="202B33"/>
+                </a:solidFill>
+                <a:latin typeface="Arial"/>
+                <a:ea typeface="Arial"/>
+                <a:cs typeface="Arial"/>
+              </a:rPr>
+              <a:t xml:space="preserve">architecture is worth more here than</a:t>
+            </a:r>
+            <a:endParaRPr lang="en-US" sz="1500"/>
+          </a:p>
+          <a:p>
+            <a:pPr marL="0" indent="0">
+              <a:lnSpc>
+                <a:spcPts val="1950"/>
+              </a:lnSpc>
+              <a:spcAft>
+                <a:spcPts val="0"/>
+              </a:spcAft>
+              <a:buNone/>
+            </a:pPr>
+            <a:r>
+              <a:rPr lang="en-US" sz="1500" b="0">
+                <a:solidFill>
+                  <a:srgbClr val="202B33"/>
+                </a:solidFill>
+                <a:latin typeface="Arial"/>
+                <a:ea typeface="Arial"/>
+                <a:cs typeface="Arial"/>
+              </a:rPr>
+              <a:t xml:space="preserve">anywhere else. And real option, because</a:t>
+            </a:r>
+            <a:endParaRPr lang="en-US" sz="1500"/>
+          </a:p>
+          <a:p>
+            <a:pPr marL="0" indent="0">
+              <a:lnSpc>
+                <a:spcPts val="1950"/>
+              </a:lnSpc>
+              <a:spcAft>
+                <a:spcPts val="0"/>
+              </a:spcAft>
+              <a:buNone/>
+            </a:pPr>
+            <a:r>
+              <a:rPr lang="en-US" sz="1500" b="0">
+                <a:solidFill>
+                  <a:srgbClr val="202B33"/>
+                </a:solidFill>
+                <a:latin typeface="Arial"/>
+                <a:ea typeface="Arial"/>
+                <a:cs typeface="Arial"/>
+              </a:rPr>
+              <a:t xml:space="preserve">reversibility is something you buy, not</a:t>
+            </a:r>
+            <a:endParaRPr lang="en-US" sz="1500"/>
+          </a:p>
+          <a:p>
+            <a:pPr marL="0" indent="0">
+              <a:lnSpc>
+                <a:spcPts val="1950"/>
+              </a:lnSpc>
+              <a:spcAft>
+                <a:spcPts val="0"/>
+              </a:spcAft>
+              <a:buNone/>
+            </a:pPr>
+            <a:r>
+              <a:rPr lang="en-US" sz="1500" b="0">
+                <a:solidFill>
+                  <a:srgbClr val="202B33"/>
+                </a:solidFill>
+                <a:latin typeface="Arial"/>
+                <a:ea typeface="Arial"/>
+                <a:cs typeface="Arial"/>
+              </a:rPr>
+              <a:t xml:space="preserve">something you feel.</a:t>
             </a:r>
             <a:endParaRPr lang="en-US" sz="1500"/>
           </a:p>
@@ -20171,329 +20563,168 @@
                 <a:ea typeface="Arial"/>
                 <a:cs typeface="Arial"/>
               </a:rPr>
-              <a:t xml:space="preserve">Four actions, and each one is one of the</a:t>
-            </a:r>
-            <a:endParaRPr lang="en-US" sz="1500"/>
-          </a:p>
-          <a:p>
-            <a:pPr marL="0" indent="0">
-              <a:lnSpc>
-                <a:spcPts val="1950"/>
-              </a:lnSpc>
-              <a:spcAft>
-                <a:spcPts val="0"/>
-              </a:spcAft>
-              <a:buNone/>
-            </a:pPr>
-            <a:r>
-              <a:rPr lang="en-US" sz="1500" b="0">
-                <a:solidFill>
-                  <a:srgbClr val="202B33"/>
-                </a:solidFill>
-                <a:latin typeface="Arial"/>
-                <a:ea typeface="Arial"/>
-                <a:cs typeface="Arial"/>
-              </a:rPr>
-              <a:t xml:space="preserve">words. Record gross consumption separately</a:t>
-            </a:r>
-            <a:endParaRPr lang="en-US" sz="1500"/>
-          </a:p>
-          <a:p>
-            <a:pPr marL="0" indent="0">
-              <a:lnSpc>
-                <a:spcPts val="1950"/>
-              </a:lnSpc>
-              <a:spcAft>
-                <a:spcPts val="0"/>
-              </a:spcAft>
-              <a:buNone/>
-            </a:pPr>
-            <a:r>
-              <a:rPr lang="en-US" sz="1500" b="0">
-                <a:solidFill>
-                  <a:srgbClr val="202B33"/>
-                </a:solidFill>
-                <a:latin typeface="Arial"/>
-                <a:ea typeface="Arial"/>
-                <a:cs typeface="Arial"/>
-              </a:rPr>
-              <a:t xml:space="preserve">from credits, so price and subsidy stop</a:t>
-            </a:r>
-            <a:endParaRPr lang="en-US" sz="1500"/>
-          </a:p>
-          <a:p>
-            <a:pPr marL="0" indent="0">
-              <a:lnSpc>
-                <a:spcPts val="1950"/>
-              </a:lnSpc>
-              <a:spcAft>
-                <a:spcPts val="0"/>
-              </a:spcAft>
-              <a:buNone/>
-            </a:pPr>
-            <a:r>
-              <a:rPr lang="en-US" sz="1500" b="0">
-                <a:solidFill>
-                  <a:srgbClr val="202B33"/>
-                </a:solidFill>
-                <a:latin typeface="Arial"/>
-                <a:ea typeface="Arial"/>
-                <a:cs typeface="Arial"/>
-              </a:rPr>
-              <a:t xml:space="preserve">being the same number on your dashboard.</a:t>
-            </a:r>
-            <a:endParaRPr lang="en-US" sz="1500"/>
-          </a:p>
-          <a:p>
-            <a:pPr marL="0" indent="0">
-              <a:lnSpc>
-                <a:spcPts val="1950"/>
-              </a:lnSpc>
-              <a:spcAft>
-                <a:spcPts val="0"/>
-              </a:spcAft>
-              <a:buNone/>
-            </a:pPr>
-            <a:r>
-              <a:rPr lang="en-US" sz="1500" b="0">
-                <a:solidFill>
-                  <a:srgbClr val="202B33"/>
-                </a:solidFill>
-                <a:latin typeface="Arial"/>
-                <a:ea typeface="Arial"/>
-                <a:cs typeface="Arial"/>
-              </a:rPr>
-              <a:t xml:space="preserve">Keep a small representative acceptance</a:t>
-            </a:r>
-            <a:endParaRPr lang="en-US" sz="1500"/>
-          </a:p>
-          <a:p>
-            <a:pPr marL="0" indent="0">
-              <a:lnSpc>
-                <a:spcPts val="1950"/>
-              </a:lnSpc>
-              <a:spcAft>
-                <a:spcPts val="0"/>
-              </a:spcAft>
-              <a:buNone/>
-            </a:pPr>
-            <a:r>
-              <a:rPr lang="en-US" sz="1500" b="0">
-                <a:solidFill>
-                  <a:srgbClr val="202B33"/>
-                </a:solidFill>
-                <a:latin typeface="Arial"/>
-                <a:ea typeface="Arial"/>
-                <a:cs typeface="Arial"/>
-              </a:rPr>
-              <a:t xml:space="preserve">suite, because that is the strike test on</a:t>
-            </a:r>
-            <a:endParaRPr lang="en-US" sz="1500"/>
-          </a:p>
-          <a:p>
-            <a:pPr marL="0" indent="0">
-              <a:lnSpc>
-                <a:spcPts val="1950"/>
-              </a:lnSpc>
-              <a:spcAft>
-                <a:spcPts val="0"/>
-              </a:spcAft>
-              <a:buNone/>
-            </a:pPr>
-            <a:r>
-              <a:rPr lang="en-US" sz="1500" b="0">
-                <a:solidFill>
-                  <a:srgbClr val="202B33"/>
-                </a:solidFill>
-                <a:latin typeface="Arial"/>
-                <a:ea typeface="Arial"/>
-                <a:cs typeface="Arial"/>
-              </a:rPr>
-              <a:t xml:space="preserve">your option. Rehearse one provider</a:t>
-            </a:r>
-            <a:endParaRPr lang="en-US" sz="1500"/>
-          </a:p>
-          <a:p>
-            <a:pPr marL="0" indent="0">
-              <a:lnSpc>
-                <a:spcPts val="1950"/>
-              </a:lnSpc>
-              <a:spcAft>
-                <a:spcPts val="0"/>
-              </a:spcAft>
-              <a:buNone/>
-            </a:pPr>
-            <a:r>
-              <a:rPr lang="en-US" sz="1500" b="0">
-                <a:solidFill>
-                  <a:srgbClr val="202B33"/>
-                </a:solidFill>
-                <a:latin typeface="Arial"/>
-                <a:ea typeface="Arial"/>
-                <a:cs typeface="Arial"/>
-              </a:rPr>
-              <a:t xml:space="preserve">replacement before you need it, latency and</a:t>
-            </a:r>
-            <a:endParaRPr lang="en-US" sz="1500"/>
-          </a:p>
-          <a:p>
-            <a:pPr marL="0" indent="0">
-              <a:lnSpc>
-                <a:spcPts val="1950"/>
-              </a:lnSpc>
-              <a:spcAft>
-                <a:spcPts val="0"/>
-              </a:spcAft>
-              <a:buNone/>
-            </a:pPr>
-            <a:r>
-              <a:rPr lang="en-US" sz="1500" b="0">
-                <a:solidFill>
-                  <a:srgbClr val="202B33"/>
-                </a:solidFill>
-                <a:latin typeface="Arial"/>
-                <a:ea typeface="Arial"/>
-                <a:cs typeface="Arial"/>
-              </a:rPr>
-              <a:t xml:space="preserve">recovery included, because that is how you</a:t>
-            </a:r>
-            <a:endParaRPr lang="en-US" sz="1500"/>
-          </a:p>
-          <a:p>
-            <a:pPr marL="0" indent="0">
-              <a:lnSpc>
-                <a:spcPts val="1950"/>
-              </a:lnSpc>
-              <a:spcAft>
-                <a:spcPts val="0"/>
-              </a:spcAft>
-              <a:buNone/>
-            </a:pPr>
-            <a:r>
-              <a:rPr lang="en-US" sz="1500" b="0">
-                <a:solidFill>
-                  <a:srgbClr val="202B33"/>
-                </a:solidFill>
-                <a:latin typeface="Arial"/>
-                <a:ea typeface="Arial"/>
-                <a:cs typeface="Arial"/>
-              </a:rPr>
-              <a:t xml:space="preserve">reduce asset specificity from a slide into</a:t>
-            </a:r>
-            <a:endParaRPr lang="en-US" sz="1500"/>
-          </a:p>
-          <a:p>
-            <a:pPr marL="0" indent="0">
-              <a:lnSpc>
-                <a:spcPts val="1950"/>
-              </a:lnSpc>
-              <a:spcAft>
-                <a:spcPts val="0"/>
-              </a:spcAft>
-              <a:buNone/>
-            </a:pPr>
-            <a:r>
-              <a:rPr lang="en-US" sz="1500" b="0">
-                <a:solidFill>
-                  <a:srgbClr val="202B33"/>
-                </a:solidFill>
-                <a:latin typeface="Arial"/>
-                <a:ea typeface="Arial"/>
-                <a:cs typeface="Arial"/>
-              </a:rPr>
-              <a:t xml:space="preserve">a fact. And put the estimated cost per</a:t>
-            </a:r>
-            <a:endParaRPr lang="en-US" sz="1500"/>
-          </a:p>
-          <a:p>
-            <a:pPr marL="0" indent="0">
-              <a:lnSpc>
-                <a:spcPts val="1950"/>
-              </a:lnSpc>
-              <a:spcAft>
-                <a:spcPts val="0"/>
-              </a:spcAft>
-              <a:buNone/>
-            </a:pPr>
-            <a:r>
-              <a:rPr lang="en-US" sz="1500" b="0">
-                <a:solidFill>
-                  <a:srgbClr val="202B33"/>
-                </a:solidFill>
-                <a:latin typeface="Arial"/>
-                <a:ea typeface="Arial"/>
-                <a:cs typeface="Arial"/>
-              </a:rPr>
-              <a:t xml:space="preserve">accepted outcome in the design doc next to</a:t>
-            </a:r>
-            <a:endParaRPr lang="en-US" sz="1500"/>
-          </a:p>
-          <a:p>
-            <a:pPr marL="0" indent="0">
-              <a:lnSpc>
-                <a:spcPts val="1950"/>
-              </a:lnSpc>
-              <a:spcAft>
-                <a:spcPts val="0"/>
-              </a:spcAft>
-              <a:buNone/>
-            </a:pPr>
-            <a:r>
-              <a:rPr lang="en-US" sz="1500" b="0">
-                <a:solidFill>
-                  <a:srgbClr val="202B33"/>
-                </a:solidFill>
-                <a:latin typeface="Arial"/>
-                <a:ea typeface="Arial"/>
-                <a:cs typeface="Arial"/>
-              </a:rPr>
-              <a:t xml:space="preserve">the latency budget, because that is the</a:t>
-            </a:r>
-            <a:endParaRPr lang="en-US" sz="1500"/>
-          </a:p>
-          <a:p>
-            <a:pPr marL="0" indent="0">
-              <a:lnSpc>
-                <a:spcPts val="1950"/>
-              </a:lnSpc>
-              <a:spcAft>
-                <a:spcPts val="0"/>
-              </a:spcAft>
-              <a:buNone/>
-            </a:pPr>
-            <a:r>
-              <a:rPr lang="en-US" sz="1500" b="0">
-                <a:solidFill>
-                  <a:srgbClr val="202B33"/>
-                </a:solidFill>
-                <a:latin typeface="Arial"/>
-                <a:ea typeface="Arial"/>
-                <a:cs typeface="Arial"/>
-              </a:rPr>
-              <a:t xml:space="preserve">meter, and the meter is the fix for moral</a:t>
-            </a:r>
-            <a:endParaRPr lang="en-US" sz="1500"/>
-          </a:p>
-          <a:p>
-            <a:pPr marL="0" indent="0">
-              <a:lnSpc>
-                <a:spcPts val="1950"/>
-              </a:lnSpc>
-              <a:spcAft>
-                <a:spcPts val="0"/>
-              </a:spcAft>
-              <a:buNone/>
-            </a:pPr>
-            <a:r>
-              <a:rPr lang="en-US" sz="1500" b="0">
-                <a:solidFill>
-                  <a:srgbClr val="202B33"/>
-                </a:solidFill>
-                <a:latin typeface="Arial"/>
-                <a:ea typeface="Arial"/>
-                <a:cs typeface="Arial"/>
-              </a:rPr>
-              <a:t xml:space="preserve">hazard.</a:t>
+              <a:t xml:space="preserve">Some low prices are temporary. Some are a</a:t>
+            </a:r>
+            <a:endParaRPr lang="en-US" sz="1500"/>
+          </a:p>
+          <a:p>
+            <a:pPr marL="0" indent="0">
+              <a:lnSpc>
+                <a:spcPts val="1950"/>
+              </a:lnSpc>
+              <a:spcAft>
+                <a:spcPts val="0"/>
+              </a:spcAft>
+              <a:buNone/>
+            </a:pPr>
+            <a:r>
+              <a:rPr lang="en-US" sz="1500" b="0">
+                <a:solidFill>
+                  <a:srgbClr val="202B33"/>
+                </a:solidFill>
+                <a:latin typeface="Arial"/>
+                <a:ea typeface="Arial"/>
+                <a:cs typeface="Arial"/>
+              </a:rPr>
+              <a:t xml:space="preserve">preview of genuinely cheaper production.</a:t>
+            </a:r>
+            <a:endParaRPr lang="en-US" sz="1500"/>
+          </a:p>
+          <a:p>
+            <a:pPr marL="0" indent="0">
+              <a:lnSpc>
+                <a:spcPts val="1950"/>
+              </a:lnSpc>
+              <a:spcAft>
+                <a:spcPts val="0"/>
+              </a:spcAft>
+              <a:buNone/>
+            </a:pPr>
+            <a:r>
+              <a:rPr lang="en-US" sz="1500" b="0">
+                <a:solidFill>
+                  <a:srgbClr val="202B33"/>
+                </a:solidFill>
+                <a:latin typeface="Arial"/>
+                <a:ea typeface="Arial"/>
+                <a:cs typeface="Arial"/>
+              </a:rPr>
+              <a:t xml:space="preserve">You do not have to know which. You have to</a:t>
+            </a:r>
+            <a:endParaRPr lang="en-US" sz="1500"/>
+          </a:p>
+          <a:p>
+            <a:pPr marL="0" indent="0">
+              <a:lnSpc>
+                <a:spcPts val="1950"/>
+              </a:lnSpc>
+              <a:spcAft>
+                <a:spcPts val="0"/>
+              </a:spcAft>
+              <a:buNone/>
+            </a:pPr>
+            <a:r>
+              <a:rPr lang="en-US" sz="1500" b="0">
+                <a:solidFill>
+                  <a:srgbClr val="202B33"/>
+                </a:solidFill>
+                <a:latin typeface="Arial"/>
+                <a:ea typeface="Arial"/>
+                <a:cs typeface="Arial"/>
+              </a:rPr>
+              <a:t xml:space="preserve">measure outcomes and keep the big choices</a:t>
+            </a:r>
+            <a:endParaRPr lang="en-US" sz="1500"/>
+          </a:p>
+          <a:p>
+            <a:pPr marL="0" indent="0">
+              <a:lnSpc>
+                <a:spcPts val="1950"/>
+              </a:lnSpc>
+              <a:spcAft>
+                <a:spcPts val="0"/>
+              </a:spcAft>
+              <a:buNone/>
+            </a:pPr>
+            <a:r>
+              <a:rPr lang="en-US" sz="1500" b="0">
+                <a:solidFill>
+                  <a:srgbClr val="202B33"/>
+                </a:solidFill>
+                <a:latin typeface="Arial"/>
+                <a:ea typeface="Arial"/>
+                <a:cs typeface="Arial"/>
+              </a:rPr>
+              <a:t xml:space="preserve">reversible either way.</a:t>
+            </a:r>
+            <a:endParaRPr lang="en-US" sz="1500"/>
+          </a:p>
+          <a:p>
+            <a:pPr marL="0" indent="0">
+              <a:lnSpc>
+                <a:spcPts val="1950"/>
+              </a:lnSpc>
+              <a:spcAft>
+                <a:spcPts val="0"/>
+              </a:spcAft>
+              <a:buNone/>
+            </a:pPr>
+            <a:r>
+              <a:rPr lang="en-US" sz="1500" b="0">
+                <a:solidFill>
+                  <a:srgbClr val="202B33"/>
+                </a:solidFill>
+                <a:latin typeface="Arial"/>
+                <a:ea typeface="Arial"/>
+                <a:cs typeface="Arial"/>
+              </a:rPr>
+              <a:t xml:space="preserve"/>
+            </a:r>
+            <a:endParaRPr lang="en-US" sz="1500"/>
+          </a:p>
+          <a:p>
+            <a:pPr marL="0" indent="0">
+              <a:lnSpc>
+                <a:spcPts val="1950"/>
+              </a:lnSpc>
+              <a:spcAft>
+                <a:spcPts val="0"/>
+              </a:spcAft>
+              <a:buNone/>
+            </a:pPr>
+            <a:r>
+              <a:rPr lang="en-US" sz="1500" b="0">
+                <a:solidFill>
+                  <a:srgbClr val="202B33"/>
+                </a:solidFill>
+                <a:latin typeface="Arial"/>
+                <a:ea typeface="Arial"/>
+                <a:cs typeface="Arial"/>
+              </a:rPr>
+              <a:t xml:space="preserve">Cheap intelligence changes incentives</a:t>
+            </a:r>
+            <a:endParaRPr lang="en-US" sz="1500"/>
+          </a:p>
+          <a:p>
+            <a:pPr marL="0" indent="0">
+              <a:lnSpc>
+                <a:spcPts val="1950"/>
+              </a:lnSpc>
+              <a:spcAft>
+                <a:spcPts val="0"/>
+              </a:spcAft>
+              <a:buNone/>
+            </a:pPr>
+            <a:r>
+              <a:rPr lang="en-US" sz="1500" b="0">
+                <a:solidFill>
+                  <a:srgbClr val="202B33"/>
+                </a:solidFill>
+                <a:latin typeface="Arial"/>
+                <a:ea typeface="Arial"/>
+                <a:cs typeface="Arial"/>
+              </a:rPr>
+              <a:t xml:space="preserve">before it changes organizations.</a:t>
             </a:r>
             <a:endParaRPr lang="en-US" sz="1500"/>
           </a:p>
@@ -21621,7 +21852,7 @@
                 <a:ea typeface="Arial"/>
                 <a:cs typeface="Arial"/>
               </a:rPr>
-              <a:t xml:space="preserve">15 / 15    SOURCE SLIDE 15</a:t>
+              <a:t xml:space="preserve">SOURCE REFERENCES</a:t>
             </a:r>
             <a:endParaRPr lang="en-US" sz="1050"/>
           </a:p>
@@ -21670,7 +21901,7 @@
                 <a:ea typeface="Arial"/>
                 <a:cs typeface="Arial"/>
               </a:rPr>
-              <a:t xml:space="preserve">Cheap intelligence changes incentives first</a:t>
+              <a:t xml:space="preserve">References</a:t>
             </a:r>
             <a:endParaRPr lang="en-US" sz="2550"/>
           </a:p>
@@ -21719,30 +21950,76 @@
                 <a:ea typeface="Arial"/>
                 <a:cs typeface="Arial"/>
               </a:rPr>
-              <a:t xml:space="preserve">Externality · Induced demand · Jevons</a:t>
-            </a:r>
-            <a:endParaRPr lang="en-US" sz="1500"/>
-          </a:p>
-          <a:p>
-            <a:pPr marL="0" indent="0">
-              <a:lnSpc>
-                <a:spcPts val="1950"/>
-              </a:lnSpc>
-              <a:spcAft>
-                <a:spcPts val="0"/>
-              </a:spcAft>
-              <a:buNone/>
-            </a:pPr>
-            <a:r>
-              <a:rPr lang="en-US" sz="1500" b="0">
-                <a:solidFill>
-                  <a:srgbClr val="202B33"/>
-                </a:solidFill>
-                <a:latin typeface="Arial"/>
-                <a:ea typeface="Arial"/>
-                <a:cs typeface="Arial"/>
-              </a:rPr>
-              <a:t xml:space="preserve">paradox · Path dependence</a:t>
+              <a:t xml:space="preserve">Brooke Group Ltd. v. Brown &amp; Williamson</a:t>
+            </a:r>
+            <a:endParaRPr lang="en-US" sz="1500"/>
+          </a:p>
+          <a:p>
+            <a:pPr marL="0" indent="0">
+              <a:lnSpc>
+                <a:spcPts val="1950"/>
+              </a:lnSpc>
+              <a:spcAft>
+                <a:spcPts val="0"/>
+              </a:spcAft>
+              <a:buNone/>
+            </a:pPr>
+            <a:r>
+              <a:rPr lang="en-US" sz="1500" b="0">
+                <a:solidFill>
+                  <a:srgbClr val="202B33"/>
+                </a:solidFill>
+                <a:latin typeface="Arial"/>
+                <a:ea typeface="Arial"/>
+                <a:cs typeface="Arial"/>
+              </a:rPr>
+              <a:t xml:space="preserve">Tobacco Corp., 509 U.S. 209 (1993), on the</a:t>
+            </a:r>
+            <a:endParaRPr lang="en-US" sz="1500"/>
+          </a:p>
+          <a:p>
+            <a:pPr marL="0" indent="0">
+              <a:lnSpc>
+                <a:spcPts val="1950"/>
+              </a:lnSpc>
+              <a:spcAft>
+                <a:spcPts val="0"/>
+              </a:spcAft>
+              <a:buNone/>
+            </a:pPr>
+            <a:r>
+              <a:rPr lang="en-US" sz="1500" b="0">
+                <a:solidFill>
+                  <a:srgbClr val="202B33"/>
+                </a:solidFill>
+                <a:latin typeface="Arial"/>
+                <a:ea typeface="Arial"/>
+                <a:cs typeface="Arial"/>
+              </a:rPr>
+              <a:t xml:space="preserve">recoupment requirement in predatory-pricing</a:t>
+            </a:r>
+            <a:endParaRPr lang="en-US" sz="1500"/>
+          </a:p>
+          <a:p>
+            <a:pPr marL="0" indent="0">
+              <a:lnSpc>
+                <a:spcPts val="1950"/>
+              </a:lnSpc>
+              <a:spcAft>
+                <a:spcPts val="0"/>
+              </a:spcAft>
+              <a:buNone/>
+            </a:pPr>
+            <a:r>
+              <a:rPr lang="en-US" sz="1500" b="0">
+                <a:solidFill>
+                  <a:srgbClr val="202B33"/>
+                </a:solidFill>
+                <a:latin typeface="Arial"/>
+                <a:ea typeface="Arial"/>
+                <a:cs typeface="Arial"/>
+              </a:rPr>
+              <a:t xml:space="preserve">claims.</a:t>
             </a:r>
             <a:endParaRPr lang="en-US" sz="1500"/>
           </a:p>
@@ -21788,30 +22065,76 @@
                 <a:ea typeface="Arial"/>
                 <a:cs typeface="Arial"/>
               </a:rPr>
-              <a:t xml:space="preserve">Moral hazard · Credible commitment · Asset</a:t>
-            </a:r>
-            <a:endParaRPr lang="en-US" sz="1500"/>
-          </a:p>
-          <a:p>
-            <a:pPr marL="0" indent="0">
-              <a:lnSpc>
-                <a:spcPts val="1950"/>
-              </a:lnSpc>
-              <a:spcAft>
-                <a:spcPts val="0"/>
-              </a:spcAft>
-              <a:buNone/>
-            </a:pPr>
-            <a:r>
-              <a:rPr lang="en-US" sz="1500" b="0">
-                <a:solidFill>
-                  <a:srgbClr val="202B33"/>
-                </a:solidFill>
-                <a:latin typeface="Arial"/>
-                <a:ea typeface="Arial"/>
-                <a:cs typeface="Arial"/>
-              </a:rPr>
-              <a:t xml:space="preserve">specificity · Real option</a:t>
+              <a:t xml:space="preserve">Rochet and Tirole (2003), Platform</a:t>
+            </a:r>
+            <a:endParaRPr lang="en-US" sz="1500"/>
+          </a:p>
+          <a:p>
+            <a:pPr marL="0" indent="0">
+              <a:lnSpc>
+                <a:spcPts val="1950"/>
+              </a:lnSpc>
+              <a:spcAft>
+                <a:spcPts val="0"/>
+              </a:spcAft>
+              <a:buNone/>
+            </a:pPr>
+            <a:r>
+              <a:rPr lang="en-US" sz="1500" b="0">
+                <a:solidFill>
+                  <a:srgbClr val="202B33"/>
+                </a:solidFill>
+                <a:latin typeface="Arial"/>
+                <a:ea typeface="Arial"/>
+                <a:cs typeface="Arial"/>
+              </a:rPr>
+              <a:t xml:space="preserve">Competition in Two-Sided Markets, Journal</a:t>
+            </a:r>
+            <a:endParaRPr lang="en-US" sz="1500"/>
+          </a:p>
+          <a:p>
+            <a:pPr marL="0" indent="0">
+              <a:lnSpc>
+                <a:spcPts val="1950"/>
+              </a:lnSpc>
+              <a:spcAft>
+                <a:spcPts val="0"/>
+              </a:spcAft>
+              <a:buNone/>
+            </a:pPr>
+            <a:r>
+              <a:rPr lang="en-US" sz="1500" b="0">
+                <a:solidFill>
+                  <a:srgbClr val="202B33"/>
+                </a:solidFill>
+                <a:latin typeface="Arial"/>
+                <a:ea typeface="Arial"/>
+                <a:cs typeface="Arial"/>
+              </a:rPr>
+              <a:t xml:space="preserve">of the European Economic Association, on</a:t>
+            </a:r>
+            <a:endParaRPr lang="en-US" sz="1500"/>
+          </a:p>
+          <a:p>
+            <a:pPr marL="0" indent="0">
+              <a:lnSpc>
+                <a:spcPts val="1950"/>
+              </a:lnSpc>
+              <a:spcAft>
+                <a:spcPts val="0"/>
+              </a:spcAft>
+              <a:buNone/>
+            </a:pPr>
+            <a:r>
+              <a:rPr lang="en-US" sz="1500" b="0">
+                <a:solidFill>
+                  <a:srgbClr val="202B33"/>
+                </a:solidFill>
+                <a:latin typeface="Arial"/>
+                <a:ea typeface="Arial"/>
+                <a:cs typeface="Arial"/>
+              </a:rPr>
+              <a:t xml:space="preserve">cross-subsidy between sides of a market.</a:t>
             </a:r>
             <a:endParaRPr lang="en-US" sz="1500"/>
           </a:p>
@@ -21857,7 +22180,122 @@
                 <a:ea typeface="Arial"/>
                 <a:cs typeface="Arial"/>
               </a:rPr>
-              <a:t xml:space="preserve">Build for more than one price.</a:t>
+              <a:t xml:space="preserve">Microsoft, 28 Oct 2025 —</a:t>
+            </a:r>
+            <a:endParaRPr lang="en-US" sz="1500"/>
+          </a:p>
+          <a:p>
+            <a:pPr marL="0" indent="0">
+              <a:lnSpc>
+                <a:spcPts val="1950"/>
+              </a:lnSpc>
+              <a:spcAft>
+                <a:spcPts val="0"/>
+              </a:spcAft>
+              <a:buNone/>
+            </a:pPr>
+            <a:r>
+              <a:rPr lang="en-US" sz="1500" b="0">
+                <a:solidFill>
+                  <a:srgbClr val="202B33"/>
+                </a:solidFill>
+                <a:latin typeface="Arial"/>
+                <a:ea typeface="Arial"/>
+                <a:cs typeface="Arial"/>
+              </a:rPr>
+              <a:t xml:space="preserve">https://blogs.microsoft.com/blog/2025/10/28/the-next-chapter-of-the-microsoft-openai-partnership/)</a:t>
+            </a:r>
+            <a:endParaRPr lang="en-US" sz="1500"/>
+          </a:p>
+          <a:p>
+            <a:pPr marL="0" indent="0">
+              <a:lnSpc>
+                <a:spcPts val="1950"/>
+              </a:lnSpc>
+              <a:spcAft>
+                <a:spcPts val="0"/>
+              </a:spcAft>
+              <a:buNone/>
+            </a:pPr>
+            <a:r>
+              <a:rPr lang="en-US" sz="1500" b="0">
+                <a:solidFill>
+                  <a:srgbClr val="202B33"/>
+                </a:solidFill>
+                <a:latin typeface="Arial"/>
+                <a:ea typeface="Arial"/>
+                <a:cs typeface="Arial"/>
+              </a:rPr>
+              <a:t xml:space="preserve">· [Amazon, Apr</a:t>
+            </a:r>
+            <a:endParaRPr lang="en-US" sz="1500"/>
+          </a:p>
+          <a:p>
+            <a:pPr marL="0" indent="0">
+              <a:lnSpc>
+                <a:spcPts val="1950"/>
+              </a:lnSpc>
+              <a:spcAft>
+                <a:spcPts val="0"/>
+              </a:spcAft>
+              <a:buNone/>
+            </a:pPr>
+            <a:r>
+              <a:rPr lang="en-US" sz="1500" b="0">
+                <a:solidFill>
+                  <a:srgbClr val="202B33"/>
+                </a:solidFill>
+                <a:latin typeface="Arial"/>
+                <a:ea typeface="Arial"/>
+                <a:cs typeface="Arial"/>
+              </a:rPr>
+              <a:t xml:space="preserve">2026](https://www.aboutamazon.com/news/company-news/amazon-invests-additional-5-billion-anthropic-ai)</a:t>
+            </a:r>
+            <a:endParaRPr lang="en-US" sz="1500"/>
+          </a:p>
+          <a:p>
+            <a:pPr marL="0" indent="0">
+              <a:lnSpc>
+                <a:spcPts val="1950"/>
+              </a:lnSpc>
+              <a:spcAft>
+                <a:spcPts val="0"/>
+              </a:spcAft>
+              <a:buNone/>
+            </a:pPr>
+            <a:r>
+              <a:rPr lang="en-US" sz="1500" b="0">
+                <a:solidFill>
+                  <a:srgbClr val="202B33"/>
+                </a:solidFill>
+                <a:latin typeface="Arial"/>
+                <a:ea typeface="Arial"/>
+                <a:cs typeface="Arial"/>
+              </a:rPr>
+              <a:t xml:space="preserve">· [AWS Activate, accessed 5 Sep</a:t>
+            </a:r>
+            <a:endParaRPr lang="en-US" sz="1500"/>
+          </a:p>
+          <a:p>
+            <a:pPr marL="0" indent="0">
+              <a:lnSpc>
+                <a:spcPts val="1950"/>
+              </a:lnSpc>
+              <a:spcAft>
+                <a:spcPts val="0"/>
+              </a:spcAft>
+              <a:buNone/>
+            </a:pPr>
+            <a:r>
+              <a:rPr lang="en-US" sz="1500" b="0">
+                <a:solidFill>
+                  <a:srgbClr val="202B33"/>
+                </a:solidFill>
+                <a:latin typeface="Arial"/>
+                <a:ea typeface="Arial"/>
+                <a:cs typeface="Arial"/>
+              </a:rPr>
+              <a:t xml:space="preserve">2026](https://aws.amazon.com/startups/credits/.</a:t>
             </a:r>
             <a:endParaRPr lang="en-US" sz="1500"/>
           </a:p>
@@ -21903,237 +22341,30 @@
                 <a:ea typeface="Arial"/>
                 <a:cs typeface="Arial"/>
               </a:rPr>
-              <a:t xml:space="preserve">Back to the electricity. Use the cheap</a:t>
-            </a:r>
-            <a:endParaRPr lang="en-US" sz="1500"/>
-          </a:p>
-          <a:p>
-            <a:pPr marL="0" indent="0">
-              <a:lnSpc>
-                <a:spcPts val="1950"/>
-              </a:lnSpc>
-              <a:spcAft>
-                <a:spcPts val="0"/>
-              </a:spcAft>
-              <a:buNone/>
-            </a:pPr>
-            <a:r>
-              <a:rPr lang="en-US" sz="1500" b="0">
-                <a:solidFill>
-                  <a:srgbClr val="202B33"/>
-                </a:solidFill>
-                <a:latin typeface="Arial"/>
-                <a:ea typeface="Arial"/>
-                <a:cs typeface="Arial"/>
-              </a:rPr>
-              <a:t xml:space="preserve">input. It is genuinely great and I am not</a:t>
-            </a:r>
-            <a:endParaRPr lang="en-US" sz="1500"/>
-          </a:p>
-          <a:p>
-            <a:pPr marL="0" indent="0">
-              <a:lnSpc>
-                <a:spcPts val="1950"/>
-              </a:lnSpc>
-              <a:spcAft>
-                <a:spcPts val="0"/>
-              </a:spcAft>
-              <a:buNone/>
-            </a:pPr>
-            <a:r>
-              <a:rPr lang="en-US" sz="1500" b="0">
-                <a:solidFill>
-                  <a:srgbClr val="202B33"/>
-                </a:solidFill>
-                <a:latin typeface="Arial"/>
-                <a:ea typeface="Arial"/>
-                <a:cs typeface="Arial"/>
-              </a:rPr>
-              <a:t xml:space="preserve">asking anyone to be miserable about it.</a:t>
-            </a:r>
-            <a:endParaRPr lang="en-US" sz="1500"/>
-          </a:p>
-          <a:p>
-            <a:pPr marL="0" indent="0">
-              <a:lnSpc>
-                <a:spcPts val="1950"/>
-              </a:lnSpc>
-              <a:spcAft>
-                <a:spcPts val="0"/>
-              </a:spcAft>
-              <a:buNone/>
-            </a:pPr>
-            <a:r>
-              <a:rPr lang="en-US" sz="1500" b="0">
-                <a:solidFill>
-                  <a:srgbClr val="202B33"/>
-                </a:solidFill>
-                <a:latin typeface="Arial"/>
-                <a:ea typeface="Arial"/>
-                <a:cs typeface="Arial"/>
-              </a:rPr>
-              <a:t xml:space="preserve">Just understand what it encouraged you to</a:t>
-            </a:r>
-            <a:endParaRPr lang="en-US" sz="1500"/>
-          </a:p>
-          <a:p>
-            <a:pPr marL="0" indent="0">
-              <a:lnSpc>
-                <a:spcPts val="1950"/>
-              </a:lnSpc>
-              <a:spcAft>
-                <a:spcPts val="0"/>
-              </a:spcAft>
-              <a:buNone/>
-            </a:pPr>
-            <a:r>
-              <a:rPr lang="en-US" sz="1500" b="0">
-                <a:solidFill>
-                  <a:srgbClr val="202B33"/>
-                </a:solidFill>
-                <a:latin typeface="Arial"/>
-                <a:ea typeface="Arial"/>
-                <a:cs typeface="Arial"/>
-              </a:rPr>
-              <a:t xml:space="preserve">build, and keep the expensive decisions</a:t>
-            </a:r>
-            <a:endParaRPr lang="en-US" sz="1500"/>
-          </a:p>
-          <a:p>
-            <a:pPr marL="0" indent="0">
-              <a:lnSpc>
-                <a:spcPts val="1950"/>
-              </a:lnSpc>
-              <a:spcAft>
-                <a:spcPts val="0"/>
-              </a:spcAft>
-              <a:buNone/>
-            </a:pPr>
-            <a:r>
-              <a:rPr lang="en-US" sz="1500" b="0">
-                <a:solidFill>
-                  <a:srgbClr val="202B33"/>
-                </a:solidFill>
-                <a:latin typeface="Arial"/>
-                <a:ea typeface="Arial"/>
-                <a:cs typeface="Arial"/>
-              </a:rPr>
-              <a:t xml:space="preserve">reversible while you find out.</a:t>
-            </a:r>
-            <a:endParaRPr lang="en-US" sz="1500"/>
-          </a:p>
-          <a:p>
-            <a:pPr marL="0" indent="0">
-              <a:lnSpc>
-                <a:spcPts val="1950"/>
-              </a:lnSpc>
-              <a:spcAft>
-                <a:spcPts val="0"/>
-              </a:spcAft>
-              <a:buNone/>
-            </a:pPr>
-            <a:r>
-              <a:rPr lang="en-US" sz="1500" b="0">
-                <a:solidFill>
-                  <a:srgbClr val="202B33"/>
-                </a:solidFill>
-                <a:latin typeface="Arial"/>
-                <a:ea typeface="Arial"/>
-                <a:cs typeface="Arial"/>
-              </a:rPr>
-              <a:t xml:space="preserve"/>
-            </a:r>
-            <a:endParaRPr lang="en-US" sz="1500"/>
-          </a:p>
-          <a:p>
-            <a:pPr marL="0" indent="0">
-              <a:lnSpc>
-                <a:spcPts val="1950"/>
-              </a:lnSpc>
-              <a:spcAft>
-                <a:spcPts val="0"/>
-              </a:spcAft>
-              <a:buNone/>
-            </a:pPr>
-            <a:r>
-              <a:rPr lang="en-US" sz="1500" b="0">
-                <a:solidFill>
-                  <a:srgbClr val="202B33"/>
-                </a:solidFill>
-                <a:latin typeface="Arial"/>
-                <a:ea typeface="Arial"/>
-                <a:cs typeface="Arial"/>
-              </a:rPr>
-              <a:t xml:space="preserve">There are your eight words. Externality,</a:t>
-            </a:r>
-            <a:endParaRPr lang="en-US" sz="1500"/>
-          </a:p>
-          <a:p>
-            <a:pPr marL="0" indent="0">
-              <a:lnSpc>
-                <a:spcPts val="1950"/>
-              </a:lnSpc>
-              <a:spcAft>
-                <a:spcPts val="0"/>
-              </a:spcAft>
-              <a:buNone/>
-            </a:pPr>
-            <a:r>
-              <a:rPr lang="en-US" sz="1500" b="0">
-                <a:solidFill>
-                  <a:srgbClr val="202B33"/>
-                </a:solidFill>
-                <a:latin typeface="Arial"/>
-                <a:ea typeface="Arial"/>
-                <a:cs typeface="Arial"/>
-              </a:rPr>
-              <a:t xml:space="preserve">because the cost moved rather than</a:t>
-            </a:r>
-            <a:endParaRPr lang="en-US" sz="1500"/>
-          </a:p>
-          <a:p>
-            <a:pPr marL="0" indent="0">
-              <a:lnSpc>
-                <a:spcPts val="1950"/>
-              </a:lnSpc>
-              <a:spcAft>
-                <a:spcPts val="0"/>
-              </a:spcAft>
-              <a:buNone/>
-            </a:pPr>
-            <a:r>
-              <a:rPr lang="en-US" sz="1500" b="0">
-                <a:solidFill>
-                  <a:srgbClr val="202B33"/>
-                </a:solidFill>
-                <a:latin typeface="Arial"/>
-                <a:ea typeface="Arial"/>
-                <a:cs typeface="Arial"/>
-              </a:rPr>
-              <a:t xml:space="preserve">vanished. Induced demand and Jevons,</a:t>
-            </a:r>
-            <a:endParaRPr lang="en-US" sz="1500"/>
-          </a:p>
-          <a:p>
-            <a:pPr marL="0" indent="0">
-              <a:lnSpc>
-                <a:spcPts val="1950"/>
-              </a:lnSpc>
-              <a:spcAft>
-                <a:spcPts val="0"/>
-              </a:spcAft>
-              <a:buNone/>
-            </a:pPr>
-            <a:r>
-              <a:rPr lang="en-US" sz="1500" b="0">
-                <a:solidFill>
-                  <a:srgbClr val="202B33"/>
-                </a:solidFill>
-                <a:latin typeface="Arial"/>
-                <a:ea typeface="Arial"/>
-                <a:cs typeface="Arial"/>
-              </a:rPr>
-              <a:t xml:space="preserve">because cheaper made you use more, not</a:t>
+              <a:t xml:space="preserve">Schelling (1960), The Strategy of Conflict,</a:t>
+            </a:r>
+            <a:endParaRPr lang="en-US" sz="1500"/>
+          </a:p>
+          <a:p>
+            <a:pPr marL="0" indent="0">
+              <a:lnSpc>
+                <a:spcPts val="1950"/>
+              </a:lnSpc>
+              <a:spcAft>
+                <a:spcPts val="0"/>
+              </a:spcAft>
+              <a:buNone/>
+            </a:pPr>
+            <a:r>
+              <a:rPr lang="en-US" sz="1500" b="0">
+                <a:solidFill>
+                  <a:srgbClr val="202B33"/>
+                </a:solidFill>
+                <a:latin typeface="Arial"/>
+                <a:ea typeface="Arial"/>
+                <a:cs typeface="Arial"/>
+              </a:rPr>
+              <a:t xml:space="preserve">Harvard University Press. Nobel 2005.</a:t>
             </a:r>
             <a:endParaRPr lang="en-US" sz="1500"/>
           </a:p>
@@ -22182,236 +22413,6 @@
                 <a:ea typeface="Arial"/>
                 <a:cs typeface="Arial"/>
               </a:rPr>
-              <a:t xml:space="preserve">less. Path dependence, because the lots</a:t>
-            </a:r>
-            <a:endParaRPr lang="en-US" sz="1500"/>
-          </a:p>
-          <a:p>
-            <a:pPr marL="0" indent="0">
-              <a:lnSpc>
-                <a:spcPts val="1950"/>
-              </a:lnSpc>
-              <a:spcAft>
-                <a:spcPts val="0"/>
-              </a:spcAft>
-              <a:buNone/>
-            </a:pPr>
-            <a:r>
-              <a:rPr lang="en-US" sz="1500" b="0">
-                <a:solidFill>
-                  <a:srgbClr val="202B33"/>
-                </a:solidFill>
-                <a:latin typeface="Arial"/>
-                <a:ea typeface="Arial"/>
-                <a:cs typeface="Arial"/>
-              </a:rPr>
-              <a:t xml:space="preserve">stay built. Moral hazard, because whoever</a:t>
-            </a:r>
-            <a:endParaRPr lang="en-US" sz="1500"/>
-          </a:p>
-          <a:p>
-            <a:pPr marL="0" indent="0">
-              <a:lnSpc>
-                <a:spcPts val="1950"/>
-              </a:lnSpc>
-              <a:spcAft>
-                <a:spcPts val="0"/>
-              </a:spcAft>
-              <a:buNone/>
-            </a:pPr>
-            <a:r>
-              <a:rPr lang="en-US" sz="1500" b="0">
-                <a:solidFill>
-                  <a:srgbClr val="202B33"/>
-                </a:solidFill>
-                <a:latin typeface="Arial"/>
-                <a:ea typeface="Arial"/>
-                <a:cs typeface="Arial"/>
-              </a:rPr>
-              <a:t xml:space="preserve">chooses is not whoever pays. Credible</a:t>
-            </a:r>
-            <a:endParaRPr lang="en-US" sz="1500"/>
-          </a:p>
-          <a:p>
-            <a:pPr marL="0" indent="0">
-              <a:lnSpc>
-                <a:spcPts val="1950"/>
-              </a:lnSpc>
-              <a:spcAft>
-                <a:spcPts val="0"/>
-              </a:spcAft>
-              <a:buNone/>
-            </a:pPr>
-            <a:r>
-              <a:rPr lang="en-US" sz="1500" b="0">
-                <a:solidFill>
-                  <a:srgbClr val="202B33"/>
-                </a:solidFill>
-                <a:latin typeface="Arial"/>
-                <a:ea typeface="Arial"/>
-                <a:cs typeface="Arial"/>
-              </a:rPr>
-              <a:t xml:space="preserve">commitment, because those contracts are</a:t>
-            </a:r>
-            <a:endParaRPr lang="en-US" sz="1500"/>
-          </a:p>
-          <a:p>
-            <a:pPr marL="0" indent="0">
-              <a:lnSpc>
-                <a:spcPts val="1950"/>
-              </a:lnSpc>
-              <a:spcAft>
-                <a:spcPts val="0"/>
-              </a:spcAft>
-              <a:buNone/>
-            </a:pPr>
-            <a:r>
-              <a:rPr lang="en-US" sz="1500" b="0">
-                <a:solidFill>
-                  <a:srgbClr val="202B33"/>
-                </a:solidFill>
-                <a:latin typeface="Arial"/>
-                <a:ea typeface="Arial"/>
-                <a:cs typeface="Arial"/>
-              </a:rPr>
-              <a:t xml:space="preserve">moves in a game and not disclosures about</a:t>
-            </a:r>
-            <a:endParaRPr lang="en-US" sz="1500"/>
-          </a:p>
-          <a:p>
-            <a:pPr marL="0" indent="0">
-              <a:lnSpc>
-                <a:spcPts val="1950"/>
-              </a:lnSpc>
-              <a:spcAft>
-                <a:spcPts val="0"/>
-              </a:spcAft>
-              <a:buNone/>
-            </a:pPr>
-            <a:r>
-              <a:rPr lang="en-US" sz="1500" b="0">
-                <a:solidFill>
-                  <a:srgbClr val="202B33"/>
-                </a:solidFill>
-                <a:latin typeface="Arial"/>
-                <a:ea typeface="Arial"/>
-                <a:cs typeface="Arial"/>
-              </a:rPr>
-              <a:t xml:space="preserve">it. Asset specificity, because your</a:t>
-            </a:r>
-            <a:endParaRPr lang="en-US" sz="1500"/>
-          </a:p>
-          <a:p>
-            <a:pPr marL="0" indent="0">
-              <a:lnSpc>
-                <a:spcPts val="1950"/>
-              </a:lnSpc>
-              <a:spcAft>
-                <a:spcPts val="0"/>
-              </a:spcAft>
-              <a:buNone/>
-            </a:pPr>
-            <a:r>
-              <a:rPr lang="en-US" sz="1500" b="0">
-                <a:solidFill>
-                  <a:srgbClr val="202B33"/>
-                </a:solidFill>
-                <a:latin typeface="Arial"/>
-                <a:ea typeface="Arial"/>
-                <a:cs typeface="Arial"/>
-              </a:rPr>
-              <a:t xml:space="preserve">architecture is worth more here than</a:t>
-            </a:r>
-            <a:endParaRPr lang="en-US" sz="1500"/>
-          </a:p>
-          <a:p>
-            <a:pPr marL="0" indent="0">
-              <a:lnSpc>
-                <a:spcPts val="1950"/>
-              </a:lnSpc>
-              <a:spcAft>
-                <a:spcPts val="0"/>
-              </a:spcAft>
-              <a:buNone/>
-            </a:pPr>
-            <a:r>
-              <a:rPr lang="en-US" sz="1500" b="0">
-                <a:solidFill>
-                  <a:srgbClr val="202B33"/>
-                </a:solidFill>
-                <a:latin typeface="Arial"/>
-                <a:ea typeface="Arial"/>
-                <a:cs typeface="Arial"/>
-              </a:rPr>
-              <a:t xml:space="preserve">anywhere else. And real option, because</a:t>
-            </a:r>
-            <a:endParaRPr lang="en-US" sz="1500"/>
-          </a:p>
-          <a:p>
-            <a:pPr marL="0" indent="0">
-              <a:lnSpc>
-                <a:spcPts val="1950"/>
-              </a:lnSpc>
-              <a:spcAft>
-                <a:spcPts val="0"/>
-              </a:spcAft>
-              <a:buNone/>
-            </a:pPr>
-            <a:r>
-              <a:rPr lang="en-US" sz="1500" b="0">
-                <a:solidFill>
-                  <a:srgbClr val="202B33"/>
-                </a:solidFill>
-                <a:latin typeface="Arial"/>
-                <a:ea typeface="Arial"/>
-                <a:cs typeface="Arial"/>
-              </a:rPr>
-              <a:t xml:space="preserve">reversibility is something you buy, not</a:t>
-            </a:r>
-            <a:endParaRPr lang="en-US" sz="1500"/>
-          </a:p>
-          <a:p>
-            <a:pPr marL="0" indent="0">
-              <a:lnSpc>
-                <a:spcPts val="1950"/>
-              </a:lnSpc>
-              <a:spcAft>
-                <a:spcPts val="0"/>
-              </a:spcAft>
-              <a:buNone/>
-            </a:pPr>
-            <a:r>
-              <a:rPr lang="en-US" sz="1500" b="0">
-                <a:solidFill>
-                  <a:srgbClr val="202B33"/>
-                </a:solidFill>
-                <a:latin typeface="Arial"/>
-                <a:ea typeface="Arial"/>
-                <a:cs typeface="Arial"/>
-              </a:rPr>
-              <a:t xml:space="preserve">something you feel.</a:t>
-            </a:r>
-            <a:endParaRPr lang="en-US" sz="1500"/>
-          </a:p>
-          <a:p>
-            <a:pPr marL="0" indent="0">
-              <a:lnSpc>
-                <a:spcPts val="1950"/>
-              </a:lnSpc>
-              <a:spcAft>
-                <a:spcPts val="0"/>
-              </a:spcAft>
-              <a:buNone/>
-            </a:pPr>
-            <a:r>
-              <a:rPr lang="en-US" sz="1500" b="0">
-                <a:solidFill>
-                  <a:srgbClr val="202B33"/>
-                </a:solidFill>
-                <a:latin typeface="Arial"/>
-                <a:ea typeface="Arial"/>
-                <a:cs typeface="Arial"/>
-              </a:rPr>
               <a:t xml:space="preserve"/>
             </a:r>
             <a:endParaRPr lang="en-US" sz="1500"/>
@@ -22435,99 +22436,122 @@
                 <a:ea typeface="Arial"/>
                 <a:cs typeface="Arial"/>
               </a:rPr>
-              <a:t xml:space="preserve">Some low prices are temporary. Some are a</a:t>
-            </a:r>
-            <a:endParaRPr lang="en-US" sz="1500"/>
-          </a:p>
-          <a:p>
-            <a:pPr marL="0" indent="0">
-              <a:lnSpc>
-                <a:spcPts val="1950"/>
-              </a:lnSpc>
-              <a:spcAft>
-                <a:spcPts val="0"/>
-              </a:spcAft>
-              <a:buNone/>
-            </a:pPr>
-            <a:r>
-              <a:rPr lang="en-US" sz="1500" b="0">
-                <a:solidFill>
-                  <a:srgbClr val="202B33"/>
-                </a:solidFill>
-                <a:latin typeface="Arial"/>
-                <a:ea typeface="Arial"/>
-                <a:cs typeface="Arial"/>
-              </a:rPr>
-              <a:t xml:space="preserve">preview of genuinely cheaper production.</a:t>
-            </a:r>
-            <a:endParaRPr lang="en-US" sz="1500"/>
-          </a:p>
-          <a:p>
-            <a:pPr marL="0" indent="0">
-              <a:lnSpc>
-                <a:spcPts val="1950"/>
-              </a:lnSpc>
-              <a:spcAft>
-                <a:spcPts val="0"/>
-              </a:spcAft>
-              <a:buNone/>
-            </a:pPr>
-            <a:r>
-              <a:rPr lang="en-US" sz="1500" b="0">
-                <a:solidFill>
-                  <a:srgbClr val="202B33"/>
-                </a:solidFill>
-                <a:latin typeface="Arial"/>
-                <a:ea typeface="Arial"/>
-                <a:cs typeface="Arial"/>
-              </a:rPr>
-              <a:t xml:space="preserve">You do not have to know which. You have to</a:t>
-            </a:r>
-            <a:endParaRPr lang="en-US" sz="1500"/>
-          </a:p>
-          <a:p>
-            <a:pPr marL="0" indent="0">
-              <a:lnSpc>
-                <a:spcPts val="1950"/>
-              </a:lnSpc>
-              <a:spcAft>
-                <a:spcPts val="0"/>
-              </a:spcAft>
-              <a:buNone/>
-            </a:pPr>
-            <a:r>
-              <a:rPr lang="en-US" sz="1500" b="0">
-                <a:solidFill>
-                  <a:srgbClr val="202B33"/>
-                </a:solidFill>
-                <a:latin typeface="Arial"/>
-                <a:ea typeface="Arial"/>
-                <a:cs typeface="Arial"/>
-              </a:rPr>
-              <a:t xml:space="preserve">measure outcomes and keep the big choices</a:t>
-            </a:r>
-            <a:endParaRPr lang="en-US" sz="1500"/>
-          </a:p>
-          <a:p>
-            <a:pPr marL="0" indent="0">
-              <a:lnSpc>
-                <a:spcPts val="1950"/>
-              </a:lnSpc>
-              <a:spcAft>
-                <a:spcPts val="0"/>
-              </a:spcAft>
-              <a:buNone/>
-            </a:pPr>
-            <a:r>
-              <a:rPr lang="en-US" sz="1500" b="0">
-                <a:solidFill>
-                  <a:srgbClr val="202B33"/>
-                </a:solidFill>
-                <a:latin typeface="Arial"/>
-                <a:ea typeface="Arial"/>
-                <a:cs typeface="Arial"/>
-              </a:rPr>
-              <a:t xml:space="preserve">reversible either way.</a:t>
+              <a:t xml:space="preserve">Shoup (2005, updated 2011), The High Cost</a:t>
+            </a:r>
+            <a:endParaRPr lang="en-US" sz="1500"/>
+          </a:p>
+          <a:p>
+            <a:pPr marL="0" indent="0">
+              <a:lnSpc>
+                <a:spcPts val="1950"/>
+              </a:lnSpc>
+              <a:spcAft>
+                <a:spcPts val="0"/>
+              </a:spcAft>
+              <a:buNone/>
+            </a:pPr>
+            <a:r>
+              <a:rPr lang="en-US" sz="1500" b="0">
+                <a:solidFill>
+                  <a:srgbClr val="202B33"/>
+                </a:solidFill>
+                <a:latin typeface="Arial"/>
+                <a:ea typeface="Arial"/>
+                <a:cs typeface="Arial"/>
+              </a:rPr>
+              <a:t xml:space="preserve">of Free Parking, American Planning</a:t>
+            </a:r>
+            <a:endParaRPr lang="en-US" sz="1500"/>
+          </a:p>
+          <a:p>
+            <a:pPr marL="0" indent="0">
+              <a:lnSpc>
+                <a:spcPts val="1950"/>
+              </a:lnSpc>
+              <a:spcAft>
+                <a:spcPts val="0"/>
+              </a:spcAft>
+              <a:buNone/>
+            </a:pPr>
+            <a:r>
+              <a:rPr lang="en-US" sz="1500" b="0">
+                <a:solidFill>
+                  <a:srgbClr val="202B33"/>
+                </a:solidFill>
+                <a:latin typeface="Arial"/>
+                <a:ea typeface="Arial"/>
+                <a:cs typeface="Arial"/>
+              </a:rPr>
+              <a:t xml:space="preserve">Association. Also Shoup (2011), Free</a:t>
+            </a:r>
+            <a:endParaRPr lang="en-US" sz="1500"/>
+          </a:p>
+          <a:p>
+            <a:pPr marL="0" indent="0">
+              <a:lnSpc>
+                <a:spcPts val="1950"/>
+              </a:lnSpc>
+              <a:spcAft>
+                <a:spcPts val="0"/>
+              </a:spcAft>
+              <a:buNone/>
+            </a:pPr>
+            <a:r>
+              <a:rPr lang="en-US" sz="1500" b="0">
+                <a:solidFill>
+                  <a:srgbClr val="202B33"/>
+                </a:solidFill>
+                <a:latin typeface="Arial"/>
+                <a:ea typeface="Arial"/>
+                <a:cs typeface="Arial"/>
+              </a:rPr>
+              <a:t xml:space="preserve">parking or free markets —</a:t>
+            </a:r>
+            <a:endParaRPr lang="en-US" sz="1500"/>
+          </a:p>
+          <a:p>
+            <a:pPr marL="0" indent="0">
+              <a:lnSpc>
+                <a:spcPts val="1950"/>
+              </a:lnSpc>
+              <a:spcAft>
+                <a:spcPts val="0"/>
+              </a:spcAft>
+              <a:buNone/>
+            </a:pPr>
+            <a:r>
+              <a:rPr lang="en-US" sz="1500" b="0">
+                <a:solidFill>
+                  <a:srgbClr val="202B33"/>
+                </a:solidFill>
+                <a:latin typeface="Arial"/>
+                <a:ea typeface="Arial"/>
+                <a:cs typeface="Arial"/>
+              </a:rPr>
+              <a:t xml:space="preserve">https://www.accessmagazine.org/spring-2011/free-parking-free-markets/,</a:t>
+            </a:r>
+            <a:endParaRPr lang="en-US" sz="1500"/>
+          </a:p>
+          <a:p>
+            <a:pPr marL="0" indent="0">
+              <a:lnSpc>
+                <a:spcPts val="1950"/>
+              </a:lnSpc>
+              <a:spcAft>
+                <a:spcPts val="0"/>
+              </a:spcAft>
+              <a:buNone/>
+            </a:pPr>
+            <a:r>
+              <a:rPr lang="en-US" sz="1500" b="0">
+                <a:solidFill>
+                  <a:srgbClr val="202B33"/>
+                </a:solidFill>
+                <a:latin typeface="Arial"/>
+                <a:ea typeface="Arial"/>
+                <a:cs typeface="Arial"/>
+              </a:rPr>
+              <a:t xml:space="preserve">ACCESS Magazine.</a:t>
             </a:r>
             <a:endParaRPr lang="en-US" sz="1500"/>
           </a:p>
@@ -22573,30 +22597,237 @@
                 <a:ea typeface="Arial"/>
                 <a:cs typeface="Arial"/>
               </a:rPr>
-              <a:t xml:space="preserve">Cheap intelligence changes incentives</a:t>
-            </a:r>
-            <a:endParaRPr lang="en-US" sz="1500"/>
-          </a:p>
-          <a:p>
-            <a:pPr marL="0" indent="0">
-              <a:lnSpc>
-                <a:spcPts val="1950"/>
-              </a:lnSpc>
-              <a:spcAft>
-                <a:spcPts val="0"/>
-              </a:spcAft>
-              <a:buNone/>
-            </a:pPr>
-            <a:r>
-              <a:rPr lang="en-US" sz="1500" b="0">
-                <a:solidFill>
-                  <a:srgbClr val="202B33"/>
-                </a:solidFill>
-                <a:latin typeface="Arial"/>
-                <a:ea typeface="Arial"/>
-                <a:cs typeface="Arial"/>
-              </a:rPr>
-              <a:t xml:space="preserve">before it changes organizations.</a:t>
+              <a:t xml:space="preserve">Jevons (1865), The Coal Question, chapter</a:t>
+            </a:r>
+            <a:endParaRPr lang="en-US" sz="1500"/>
+          </a:p>
+          <a:p>
+            <a:pPr marL="0" indent="0">
+              <a:lnSpc>
+                <a:spcPts val="1950"/>
+              </a:lnSpc>
+              <a:spcAft>
+                <a:spcPts val="0"/>
+              </a:spcAft>
+              <a:buNone/>
+            </a:pPr>
+            <a:r>
+              <a:rPr lang="en-US" sz="1500" b="0">
+                <a:solidFill>
+                  <a:srgbClr val="202B33"/>
+                </a:solidFill>
+                <a:latin typeface="Arial"/>
+                <a:ea typeface="Arial"/>
+                <a:cs typeface="Arial"/>
+              </a:rPr>
+              <a:t xml:space="preserve">VII. Duranton and Turner (2011), The</a:t>
+            </a:r>
+            <a:endParaRPr lang="en-US" sz="1500"/>
+          </a:p>
+          <a:p>
+            <a:pPr marL="0" indent="0">
+              <a:lnSpc>
+                <a:spcPts val="1950"/>
+              </a:lnSpc>
+              <a:spcAft>
+                <a:spcPts val="0"/>
+              </a:spcAft>
+              <a:buNone/>
+            </a:pPr>
+            <a:r>
+              <a:rPr lang="en-US" sz="1500" b="0">
+                <a:solidFill>
+                  <a:srgbClr val="202B33"/>
+                </a:solidFill>
+                <a:latin typeface="Arial"/>
+                <a:ea typeface="Arial"/>
+                <a:cs typeface="Arial"/>
+              </a:rPr>
+              <a:t xml:space="preserve">Fundamental Law of Road Congestion,</a:t>
+            </a:r>
+            <a:endParaRPr lang="en-US" sz="1500"/>
+          </a:p>
+          <a:p>
+            <a:pPr marL="0" indent="0">
+              <a:lnSpc>
+                <a:spcPts val="1950"/>
+              </a:lnSpc>
+              <a:spcAft>
+                <a:spcPts val="0"/>
+              </a:spcAft>
+              <a:buNone/>
+            </a:pPr>
+            <a:r>
+              <a:rPr lang="en-US" sz="1500" b="0">
+                <a:solidFill>
+                  <a:srgbClr val="202B33"/>
+                </a:solidFill>
+                <a:latin typeface="Arial"/>
+                <a:ea typeface="Arial"/>
+                <a:cs typeface="Arial"/>
+              </a:rPr>
+              <a:t xml:space="preserve">American Economic Review 101(6).</a:t>
+            </a:r>
+            <a:endParaRPr lang="en-US" sz="1500"/>
+          </a:p>
+          <a:p>
+            <a:pPr marL="0" indent="0">
+              <a:lnSpc>
+                <a:spcPts val="1950"/>
+              </a:lnSpc>
+              <a:spcAft>
+                <a:spcPts val="0"/>
+              </a:spcAft>
+              <a:buNone/>
+            </a:pPr>
+            <a:r>
+              <a:rPr lang="en-US" sz="1500" b="0">
+                <a:solidFill>
+                  <a:srgbClr val="202B33"/>
+                </a:solidFill>
+                <a:latin typeface="Arial"/>
+                <a:ea typeface="Arial"/>
+                <a:cs typeface="Arial"/>
+              </a:rPr>
+              <a:t xml:space="preserve"/>
+            </a:r>
+            <a:endParaRPr lang="en-US" sz="1500"/>
+          </a:p>
+          <a:p>
+            <a:pPr marL="0" indent="0">
+              <a:lnSpc>
+                <a:spcPts val="1950"/>
+              </a:lnSpc>
+              <a:spcAft>
+                <a:spcPts val="0"/>
+              </a:spcAft>
+              <a:buNone/>
+            </a:pPr>
+            <a:r>
+              <a:rPr lang="en-US" sz="1500" b="0">
+                <a:solidFill>
+                  <a:srgbClr val="202B33"/>
+                </a:solidFill>
+                <a:latin typeface="Arial"/>
+                <a:ea typeface="Arial"/>
+                <a:cs typeface="Arial"/>
+              </a:rPr>
+              <a:t xml:space="preserve">Cottier, Snodin, Owen, Adamczewski (Epoch</a:t>
+            </a:r>
+            <a:endParaRPr lang="en-US" sz="1500"/>
+          </a:p>
+          <a:p>
+            <a:pPr marL="0" indent="0">
+              <a:lnSpc>
+                <a:spcPts val="1950"/>
+              </a:lnSpc>
+              <a:spcAft>
+                <a:spcPts val="0"/>
+              </a:spcAft>
+              <a:buNone/>
+            </a:pPr>
+            <a:r>
+              <a:rPr lang="en-US" sz="1500" b="0">
+                <a:solidFill>
+                  <a:srgbClr val="202B33"/>
+                </a:solidFill>
+                <a:latin typeface="Arial"/>
+                <a:ea typeface="Arial"/>
+                <a:cs typeface="Arial"/>
+              </a:rPr>
+              <a:t xml:space="preserve">AI, March 2025), LLM inference prices have</a:t>
+            </a:r>
+            <a:endParaRPr lang="en-US" sz="1500"/>
+          </a:p>
+          <a:p>
+            <a:pPr marL="0" indent="0">
+              <a:lnSpc>
+                <a:spcPts val="1950"/>
+              </a:lnSpc>
+              <a:spcAft>
+                <a:spcPts val="0"/>
+              </a:spcAft>
+              <a:buNone/>
+            </a:pPr>
+            <a:r>
+              <a:rPr lang="en-US" sz="1500" b="0">
+                <a:solidFill>
+                  <a:srgbClr val="202B33"/>
+                </a:solidFill>
+                <a:latin typeface="Arial"/>
+                <a:ea typeface="Arial"/>
+                <a:cs typeface="Arial"/>
+              </a:rPr>
+              <a:t xml:space="preserve">fallen rapidly but unequally across tasks —</a:t>
+            </a:r>
+            <a:endParaRPr lang="en-US" sz="1500"/>
+          </a:p>
+          <a:p>
+            <a:pPr marL="0" indent="0">
+              <a:lnSpc>
+                <a:spcPts val="1950"/>
+              </a:lnSpc>
+              <a:spcAft>
+                <a:spcPts val="0"/>
+              </a:spcAft>
+              <a:buNone/>
+            </a:pPr>
+            <a:r>
+              <a:rPr lang="en-US" sz="1500" b="0">
+                <a:solidFill>
+                  <a:srgbClr val="202B33"/>
+                </a:solidFill>
+                <a:latin typeface="Arial"/>
+                <a:ea typeface="Arial"/>
+                <a:cs typeface="Arial"/>
+              </a:rPr>
+              <a:t xml:space="preserve">https://epoch.ai/data-insights/llm-inference-price-trends.</a:t>
+            </a:r>
+            <a:endParaRPr lang="en-US" sz="1500"/>
+          </a:p>
+          <a:p>
+            <a:pPr marL="0" indent="0">
+              <a:lnSpc>
+                <a:spcPts val="1950"/>
+              </a:lnSpc>
+              <a:spcAft>
+                <a:spcPts val="0"/>
+              </a:spcAft>
+              <a:buNone/>
+            </a:pPr>
+            <a:r>
+              <a:rPr lang="en-US" sz="1500" b="0">
+                <a:solidFill>
+                  <a:srgbClr val="202B33"/>
+                </a:solidFill>
+                <a:latin typeface="Arial"/>
+                <a:ea typeface="Arial"/>
+                <a:cs typeface="Arial"/>
+              </a:rPr>
+              <a:t xml:space="preserve">Check for a newer edition before each</a:t>
+            </a:r>
+            <a:endParaRPr lang="en-US" sz="1500"/>
+          </a:p>
+          <a:p>
+            <a:pPr marL="0" indent="0">
+              <a:lnSpc>
+                <a:spcPts val="1950"/>
+              </a:lnSpc>
+              <a:spcAft>
+                <a:spcPts val="0"/>
+              </a:spcAft>
+              <a:buNone/>
+            </a:pPr>
+            <a:r>
+              <a:rPr lang="en-US" sz="1500" b="0">
+                <a:solidFill>
+                  <a:srgbClr val="202B33"/>
+                </a:solidFill>
+                <a:latin typeface="Arial"/>
+                <a:ea typeface="Arial"/>
+                <a:cs typeface="Arial"/>
+              </a:rPr>
+              <a:t xml:space="preserve">delivery.</a:t>
             </a:r>
             <a:endParaRPr lang="en-US" sz="1500"/>
           </a:p>
@@ -22825,7 +23056,7 @@
                 <a:ea typeface="Arial"/>
                 <a:cs typeface="Arial"/>
               </a:rPr>
-              <a:t xml:space="preserve">References</a:t>
+              <a:t xml:space="preserve">References (continued)</a:t>
             </a:r>
             <a:endParaRPr lang="en-US" sz="2550"/>
           </a:p>
@@ -22874,421 +23105,168 @@
                 <a:ea typeface="Arial"/>
                 <a:cs typeface="Arial"/>
               </a:rPr>
-              <a:t xml:space="preserve">Brooke Group Ltd. v. Brown &amp; Williamson</a:t>
-            </a:r>
-            <a:endParaRPr lang="en-US" sz="1500"/>
-          </a:p>
-          <a:p>
-            <a:pPr marL="0" indent="0">
-              <a:lnSpc>
-                <a:spcPts val="1950"/>
-              </a:lnSpc>
-              <a:spcAft>
-                <a:spcPts val="0"/>
-              </a:spcAft>
-              <a:buNone/>
-            </a:pPr>
-            <a:r>
-              <a:rPr lang="en-US" sz="1500" b="0">
-                <a:solidFill>
-                  <a:srgbClr val="202B33"/>
-                </a:solidFill>
-                <a:latin typeface="Arial"/>
-                <a:ea typeface="Arial"/>
-                <a:cs typeface="Arial"/>
-              </a:rPr>
-              <a:t xml:space="preserve">Tobacco Corp., 509 U.S. 209 (1993), on the</a:t>
-            </a:r>
-            <a:endParaRPr lang="en-US" sz="1500"/>
-          </a:p>
-          <a:p>
-            <a:pPr marL="0" indent="0">
-              <a:lnSpc>
-                <a:spcPts val="1950"/>
-              </a:lnSpc>
-              <a:spcAft>
-                <a:spcPts val="0"/>
-              </a:spcAft>
-              <a:buNone/>
-            </a:pPr>
-            <a:r>
-              <a:rPr lang="en-US" sz="1500" b="0">
-                <a:solidFill>
-                  <a:srgbClr val="202B33"/>
-                </a:solidFill>
-                <a:latin typeface="Arial"/>
-                <a:ea typeface="Arial"/>
-                <a:cs typeface="Arial"/>
-              </a:rPr>
-              <a:t xml:space="preserve">recoupment requirement in predatory-pricing</a:t>
-            </a:r>
-            <a:endParaRPr lang="en-US" sz="1500"/>
-          </a:p>
-          <a:p>
-            <a:pPr marL="0" indent="0">
-              <a:lnSpc>
-                <a:spcPts val="1950"/>
-              </a:lnSpc>
-              <a:spcAft>
-                <a:spcPts val="0"/>
-              </a:spcAft>
-              <a:buNone/>
-            </a:pPr>
-            <a:r>
-              <a:rPr lang="en-US" sz="1500" b="0">
-                <a:solidFill>
-                  <a:srgbClr val="202B33"/>
-                </a:solidFill>
-                <a:latin typeface="Arial"/>
-                <a:ea typeface="Arial"/>
-                <a:cs typeface="Arial"/>
-              </a:rPr>
-              <a:t xml:space="preserve">claims.</a:t>
-            </a:r>
-            <a:endParaRPr lang="en-US" sz="1500"/>
-          </a:p>
-          <a:p>
-            <a:pPr marL="0" indent="0">
-              <a:lnSpc>
-                <a:spcPts val="1950"/>
-              </a:lnSpc>
-              <a:spcAft>
-                <a:spcPts val="0"/>
-              </a:spcAft>
-              <a:buNone/>
-            </a:pPr>
-            <a:r>
-              <a:rPr lang="en-US" sz="1500" b="0">
-                <a:solidFill>
-                  <a:srgbClr val="202B33"/>
-                </a:solidFill>
-                <a:latin typeface="Arial"/>
-                <a:ea typeface="Arial"/>
-                <a:cs typeface="Arial"/>
-              </a:rPr>
-              <a:t xml:space="preserve"/>
-            </a:r>
-            <a:endParaRPr lang="en-US" sz="1500"/>
-          </a:p>
-          <a:p>
-            <a:pPr marL="0" indent="0">
-              <a:lnSpc>
-                <a:spcPts val="1950"/>
-              </a:lnSpc>
-              <a:spcAft>
-                <a:spcPts val="0"/>
-              </a:spcAft>
-              <a:buNone/>
-            </a:pPr>
-            <a:r>
-              <a:rPr lang="en-US" sz="1500" b="0">
-                <a:solidFill>
-                  <a:srgbClr val="202B33"/>
-                </a:solidFill>
-                <a:latin typeface="Arial"/>
-                <a:ea typeface="Arial"/>
-                <a:cs typeface="Arial"/>
-              </a:rPr>
-              <a:t xml:space="preserve">Rochet and Tirole (2003), Platform</a:t>
-            </a:r>
-            <a:endParaRPr lang="en-US" sz="1500"/>
-          </a:p>
-          <a:p>
-            <a:pPr marL="0" indent="0">
-              <a:lnSpc>
-                <a:spcPts val="1950"/>
-              </a:lnSpc>
-              <a:spcAft>
-                <a:spcPts val="0"/>
-              </a:spcAft>
-              <a:buNone/>
-            </a:pPr>
-            <a:r>
-              <a:rPr lang="en-US" sz="1500" b="0">
-                <a:solidFill>
-                  <a:srgbClr val="202B33"/>
-                </a:solidFill>
-                <a:latin typeface="Arial"/>
-                <a:ea typeface="Arial"/>
-                <a:cs typeface="Arial"/>
-              </a:rPr>
-              <a:t xml:space="preserve">Competition in Two-Sided Markets, Journal</a:t>
-            </a:r>
-            <a:endParaRPr lang="en-US" sz="1500"/>
-          </a:p>
-          <a:p>
-            <a:pPr marL="0" indent="0">
-              <a:lnSpc>
-                <a:spcPts val="1950"/>
-              </a:lnSpc>
-              <a:spcAft>
-                <a:spcPts val="0"/>
-              </a:spcAft>
-              <a:buNone/>
-            </a:pPr>
-            <a:r>
-              <a:rPr lang="en-US" sz="1500" b="0">
-                <a:solidFill>
-                  <a:srgbClr val="202B33"/>
-                </a:solidFill>
-                <a:latin typeface="Arial"/>
-                <a:ea typeface="Arial"/>
-                <a:cs typeface="Arial"/>
-              </a:rPr>
-              <a:t xml:space="preserve">of the European Economic Association, on</a:t>
-            </a:r>
-            <a:endParaRPr lang="en-US" sz="1500"/>
-          </a:p>
-          <a:p>
-            <a:pPr marL="0" indent="0">
-              <a:lnSpc>
-                <a:spcPts val="1950"/>
-              </a:lnSpc>
-              <a:spcAft>
-                <a:spcPts val="0"/>
-              </a:spcAft>
-              <a:buNone/>
-            </a:pPr>
-            <a:r>
-              <a:rPr lang="en-US" sz="1500" b="0">
-                <a:solidFill>
-                  <a:srgbClr val="202B33"/>
-                </a:solidFill>
-                <a:latin typeface="Arial"/>
-                <a:ea typeface="Arial"/>
-                <a:cs typeface="Arial"/>
-              </a:rPr>
-              <a:t xml:space="preserve">cross-subsidy between sides of a market.</a:t>
-            </a:r>
-            <a:endParaRPr lang="en-US" sz="1500"/>
-          </a:p>
-          <a:p>
-            <a:pPr marL="0" indent="0">
-              <a:lnSpc>
-                <a:spcPts val="1950"/>
-              </a:lnSpc>
-              <a:spcAft>
-                <a:spcPts val="0"/>
-              </a:spcAft>
-              <a:buNone/>
-            </a:pPr>
-            <a:r>
-              <a:rPr lang="en-US" sz="1500" b="0">
-                <a:solidFill>
-                  <a:srgbClr val="202B33"/>
-                </a:solidFill>
-                <a:latin typeface="Arial"/>
-                <a:ea typeface="Arial"/>
-                <a:cs typeface="Arial"/>
-              </a:rPr>
-              <a:t xml:space="preserve"/>
-            </a:r>
-            <a:endParaRPr lang="en-US" sz="1500"/>
-          </a:p>
-          <a:p>
-            <a:pPr marL="0" indent="0">
-              <a:lnSpc>
-                <a:spcPts val="1950"/>
-              </a:lnSpc>
-              <a:spcAft>
-                <a:spcPts val="0"/>
-              </a:spcAft>
-              <a:buNone/>
-            </a:pPr>
-            <a:r>
-              <a:rPr lang="en-US" sz="1500" b="0">
-                <a:solidFill>
-                  <a:srgbClr val="202B33"/>
-                </a:solidFill>
-                <a:latin typeface="Arial"/>
-                <a:ea typeface="Arial"/>
-                <a:cs typeface="Arial"/>
-              </a:rPr>
-              <a:t xml:space="preserve">Microsoft, 28 Oct 2025 —</a:t>
-            </a:r>
-            <a:endParaRPr lang="en-US" sz="1500"/>
-          </a:p>
-          <a:p>
-            <a:pPr marL="0" indent="0">
-              <a:lnSpc>
-                <a:spcPts val="1950"/>
-              </a:lnSpc>
-              <a:spcAft>
-                <a:spcPts val="0"/>
-              </a:spcAft>
-              <a:buNone/>
-            </a:pPr>
-            <a:r>
-              <a:rPr lang="en-US" sz="1500" b="0">
-                <a:solidFill>
-                  <a:srgbClr val="202B33"/>
-                </a:solidFill>
-                <a:latin typeface="Arial"/>
-                <a:ea typeface="Arial"/>
-                <a:cs typeface="Arial"/>
-              </a:rPr>
-              <a:t xml:space="preserve">https://blogs.microsoft.com/blog/2025/10/28/the-next-chapter-of-the-microsoft-openai-partnership/)</a:t>
-            </a:r>
-            <a:endParaRPr lang="en-US" sz="1500"/>
-          </a:p>
-          <a:p>
-            <a:pPr marL="0" indent="0">
-              <a:lnSpc>
-                <a:spcPts val="1950"/>
-              </a:lnSpc>
-              <a:spcAft>
-                <a:spcPts val="0"/>
-              </a:spcAft>
-              <a:buNone/>
-            </a:pPr>
-            <a:r>
-              <a:rPr lang="en-US" sz="1500" b="0">
-                <a:solidFill>
-                  <a:srgbClr val="202B33"/>
-                </a:solidFill>
-                <a:latin typeface="Arial"/>
-                <a:ea typeface="Arial"/>
-                <a:cs typeface="Arial"/>
-              </a:rPr>
-              <a:t xml:space="preserve">· [Amazon, Apr</a:t>
-            </a:r>
-            <a:endParaRPr lang="en-US" sz="1500"/>
-          </a:p>
-          <a:p>
-            <a:pPr marL="0" indent="0">
-              <a:lnSpc>
-                <a:spcPts val="1950"/>
-              </a:lnSpc>
-              <a:spcAft>
-                <a:spcPts val="0"/>
-              </a:spcAft>
-              <a:buNone/>
-            </a:pPr>
-            <a:r>
-              <a:rPr lang="en-US" sz="1500" b="0">
-                <a:solidFill>
-                  <a:srgbClr val="202B33"/>
-                </a:solidFill>
-                <a:latin typeface="Arial"/>
-                <a:ea typeface="Arial"/>
-                <a:cs typeface="Arial"/>
-              </a:rPr>
-              <a:t xml:space="preserve">2026](https://www.aboutamazon.com/news/company-news/amazon-invests-additional-5-billion-anthropic-ai)</a:t>
-            </a:r>
-            <a:endParaRPr lang="en-US" sz="1500"/>
-          </a:p>
-          <a:p>
-            <a:pPr marL="0" indent="0">
-              <a:lnSpc>
-                <a:spcPts val="1950"/>
-              </a:lnSpc>
-              <a:spcAft>
-                <a:spcPts val="0"/>
-              </a:spcAft>
-              <a:buNone/>
-            </a:pPr>
-            <a:r>
-              <a:rPr lang="en-US" sz="1500" b="0">
-                <a:solidFill>
-                  <a:srgbClr val="202B33"/>
-                </a:solidFill>
-                <a:latin typeface="Arial"/>
-                <a:ea typeface="Arial"/>
-                <a:cs typeface="Arial"/>
-              </a:rPr>
-              <a:t xml:space="preserve">· [AWS Activate, accessed 5 Sep</a:t>
-            </a:r>
-            <a:endParaRPr lang="en-US" sz="1500"/>
-          </a:p>
-          <a:p>
-            <a:pPr marL="0" indent="0">
-              <a:lnSpc>
-                <a:spcPts val="1950"/>
-              </a:lnSpc>
-              <a:spcAft>
-                <a:spcPts val="0"/>
-              </a:spcAft>
-              <a:buNone/>
-            </a:pPr>
-            <a:r>
-              <a:rPr lang="en-US" sz="1500" b="0">
-                <a:solidFill>
-                  <a:srgbClr val="202B33"/>
-                </a:solidFill>
-                <a:latin typeface="Arial"/>
-                <a:ea typeface="Arial"/>
-                <a:cs typeface="Arial"/>
-              </a:rPr>
-              <a:t xml:space="preserve">2026](https://aws.amazon.com/startups/credits/.</a:t>
-            </a:r>
-            <a:endParaRPr lang="en-US" sz="1500"/>
-          </a:p>
-          <a:p>
-            <a:pPr marL="0" indent="0">
-              <a:lnSpc>
-                <a:spcPts val="1950"/>
-              </a:lnSpc>
-              <a:spcAft>
-                <a:spcPts val="0"/>
-              </a:spcAft>
-              <a:buNone/>
-            </a:pPr>
-            <a:r>
-              <a:rPr lang="en-US" sz="1500" b="0">
-                <a:solidFill>
-                  <a:srgbClr val="202B33"/>
-                </a:solidFill>
-                <a:latin typeface="Arial"/>
-                <a:ea typeface="Arial"/>
-                <a:cs typeface="Arial"/>
-              </a:rPr>
-              <a:t xml:space="preserve"/>
-            </a:r>
-            <a:endParaRPr lang="en-US" sz="1500"/>
-          </a:p>
-          <a:p>
-            <a:pPr marL="0" indent="0">
-              <a:lnSpc>
-                <a:spcPts val="1950"/>
-              </a:lnSpc>
-              <a:spcAft>
-                <a:spcPts val="0"/>
-              </a:spcAft>
-              <a:buNone/>
-            </a:pPr>
-            <a:r>
-              <a:rPr lang="en-US" sz="1500" b="0">
-                <a:solidFill>
-                  <a:srgbClr val="202B33"/>
-                </a:solidFill>
-                <a:latin typeface="Arial"/>
-                <a:ea typeface="Arial"/>
-                <a:cs typeface="Arial"/>
-              </a:rPr>
-              <a:t xml:space="preserve">Schelling (1960), The Strategy of Conflict,</a:t>
-            </a:r>
-            <a:endParaRPr lang="en-US" sz="1500"/>
-          </a:p>
-          <a:p>
-            <a:pPr marL="0" indent="0">
-              <a:lnSpc>
-                <a:spcPts val="1950"/>
-              </a:lnSpc>
-              <a:spcAft>
-                <a:spcPts val="0"/>
-              </a:spcAft>
-              <a:buNone/>
-            </a:pPr>
-            <a:r>
-              <a:rPr lang="en-US" sz="1500" b="0">
-                <a:solidFill>
-                  <a:srgbClr val="202B33"/>
-                </a:solidFill>
-                <a:latin typeface="Arial"/>
-                <a:ea typeface="Arial"/>
-                <a:cs typeface="Arial"/>
-              </a:rPr>
-              <a:t xml:space="preserve">Harvard University Press. Nobel 2005.</a:t>
+              <a:t xml:space="preserve">David (1985), Clio and the Economics of</a:t>
+            </a:r>
+            <a:endParaRPr lang="en-US" sz="1500"/>
+          </a:p>
+          <a:p>
+            <a:pPr marL="0" indent="0">
+              <a:lnSpc>
+                <a:spcPts val="1950"/>
+              </a:lnSpc>
+              <a:spcAft>
+                <a:spcPts val="0"/>
+              </a:spcAft>
+              <a:buNone/>
+            </a:pPr>
+            <a:r>
+              <a:rPr lang="en-US" sz="1500" b="0">
+                <a:solidFill>
+                  <a:srgbClr val="202B33"/>
+                </a:solidFill>
+                <a:latin typeface="Arial"/>
+                <a:ea typeface="Arial"/>
+                <a:cs typeface="Arial"/>
+              </a:rPr>
+              <a:t xml:space="preserve">QWERTY, American Economic Review 75(2).</a:t>
+            </a:r>
+            <a:endParaRPr lang="en-US" sz="1500"/>
+          </a:p>
+          <a:p>
+            <a:pPr marL="0" indent="0">
+              <a:lnSpc>
+                <a:spcPts val="1950"/>
+              </a:lnSpc>
+              <a:spcAft>
+                <a:spcPts val="0"/>
+              </a:spcAft>
+              <a:buNone/>
+            </a:pPr>
+            <a:r>
+              <a:rPr lang="en-US" sz="1500" b="0">
+                <a:solidFill>
+                  <a:srgbClr val="202B33"/>
+                </a:solidFill>
+                <a:latin typeface="Arial"/>
+                <a:ea typeface="Arial"/>
+                <a:cs typeface="Arial"/>
+              </a:rPr>
+              <a:t xml:space="preserve">Contested by Liebowitz and Margolis (1990),</a:t>
+            </a:r>
+            <a:endParaRPr lang="en-US" sz="1500"/>
+          </a:p>
+          <a:p>
+            <a:pPr marL="0" indent="0">
+              <a:lnSpc>
+                <a:spcPts val="1950"/>
+              </a:lnSpc>
+              <a:spcAft>
+                <a:spcPts val="0"/>
+              </a:spcAft>
+              <a:buNone/>
+            </a:pPr>
+            <a:r>
+              <a:rPr lang="en-US" sz="1500" b="0">
+                <a:solidFill>
+                  <a:srgbClr val="202B33"/>
+                </a:solidFill>
+                <a:latin typeface="Arial"/>
+                <a:ea typeface="Arial"/>
+                <a:cs typeface="Arial"/>
+              </a:rPr>
+              <a:t xml:space="preserve">The Fable of the Keys, Journal of Law and</a:t>
+            </a:r>
+            <a:endParaRPr lang="en-US" sz="1500"/>
+          </a:p>
+          <a:p>
+            <a:pPr marL="0" indent="0">
+              <a:lnSpc>
+                <a:spcPts val="1950"/>
+              </a:lnSpc>
+              <a:spcAft>
+                <a:spcPts val="0"/>
+              </a:spcAft>
+              <a:buNone/>
+            </a:pPr>
+            <a:r>
+              <a:rPr lang="en-US" sz="1500" b="0">
+                <a:solidFill>
+                  <a:srgbClr val="202B33"/>
+                </a:solidFill>
+                <a:latin typeface="Arial"/>
+                <a:ea typeface="Arial"/>
+                <a:cs typeface="Arial"/>
+              </a:rPr>
+              <a:t xml:space="preserve">Economics 33(1). Arthur (1989), Competing</a:t>
+            </a:r>
+            <a:endParaRPr lang="en-US" sz="1500"/>
+          </a:p>
+          <a:p>
+            <a:pPr marL="0" indent="0">
+              <a:lnSpc>
+                <a:spcPts val="1950"/>
+              </a:lnSpc>
+              <a:spcAft>
+                <a:spcPts val="0"/>
+              </a:spcAft>
+              <a:buNone/>
+            </a:pPr>
+            <a:r>
+              <a:rPr lang="en-US" sz="1500" b="0">
+                <a:solidFill>
+                  <a:srgbClr val="202B33"/>
+                </a:solidFill>
+                <a:latin typeface="Arial"/>
+                <a:ea typeface="Arial"/>
+                <a:cs typeface="Arial"/>
+              </a:rPr>
+              <a:t xml:space="preserve">Technologies, Increasing Returns, and</a:t>
+            </a:r>
+            <a:endParaRPr lang="en-US" sz="1500"/>
+          </a:p>
+          <a:p>
+            <a:pPr marL="0" indent="0">
+              <a:lnSpc>
+                <a:spcPts val="1950"/>
+              </a:lnSpc>
+              <a:spcAft>
+                <a:spcPts val="0"/>
+              </a:spcAft>
+              <a:buNone/>
+            </a:pPr>
+            <a:r>
+              <a:rPr lang="en-US" sz="1500" b="0">
+                <a:solidFill>
+                  <a:srgbClr val="202B33"/>
+                </a:solidFill>
+                <a:latin typeface="Arial"/>
+                <a:ea typeface="Arial"/>
+                <a:cs typeface="Arial"/>
+              </a:rPr>
+              <a:t xml:space="preserve">Lock-In by Historical Events, The Economic</a:t>
+            </a:r>
+            <a:endParaRPr lang="en-US" sz="1500"/>
+          </a:p>
+          <a:p>
+            <a:pPr marL="0" indent="0">
+              <a:lnSpc>
+                <a:spcPts val="1950"/>
+              </a:lnSpc>
+              <a:spcAft>
+                <a:spcPts val="0"/>
+              </a:spcAft>
+              <a:buNone/>
+            </a:pPr>
+            <a:r>
+              <a:rPr lang="en-US" sz="1500" b="0">
+                <a:solidFill>
+                  <a:srgbClr val="202B33"/>
+                </a:solidFill>
+                <a:latin typeface="Arial"/>
+                <a:ea typeface="Arial"/>
+                <a:cs typeface="Arial"/>
+              </a:rPr>
+              <a:t xml:space="preserve">Journal 99(394).</a:t>
             </a:r>
             <a:endParaRPr lang="en-US" sz="1500"/>
           </a:p>
@@ -23360,122 +23338,53 @@
                 <a:ea typeface="Arial"/>
                 <a:cs typeface="Arial"/>
               </a:rPr>
-              <a:t xml:space="preserve">Shoup (2005, updated 2011), The High Cost</a:t>
-            </a:r>
-            <a:endParaRPr lang="en-US" sz="1500"/>
-          </a:p>
-          <a:p>
-            <a:pPr marL="0" indent="0">
-              <a:lnSpc>
-                <a:spcPts val="1950"/>
-              </a:lnSpc>
-              <a:spcAft>
-                <a:spcPts val="0"/>
-              </a:spcAft>
-              <a:buNone/>
-            </a:pPr>
-            <a:r>
-              <a:rPr lang="en-US" sz="1500" b="0">
-                <a:solidFill>
-                  <a:srgbClr val="202B33"/>
-                </a:solidFill>
-                <a:latin typeface="Arial"/>
-                <a:ea typeface="Arial"/>
-                <a:cs typeface="Arial"/>
-              </a:rPr>
-              <a:t xml:space="preserve">of Free Parking, American Planning</a:t>
-            </a:r>
-            <a:endParaRPr lang="en-US" sz="1500"/>
-          </a:p>
-          <a:p>
-            <a:pPr marL="0" indent="0">
-              <a:lnSpc>
-                <a:spcPts val="1950"/>
-              </a:lnSpc>
-              <a:spcAft>
-                <a:spcPts val="0"/>
-              </a:spcAft>
-              <a:buNone/>
-            </a:pPr>
-            <a:r>
-              <a:rPr lang="en-US" sz="1500" b="0">
-                <a:solidFill>
-                  <a:srgbClr val="202B33"/>
-                </a:solidFill>
-                <a:latin typeface="Arial"/>
-                <a:ea typeface="Arial"/>
-                <a:cs typeface="Arial"/>
-              </a:rPr>
-              <a:t xml:space="preserve">Association. Also Shoup (2011), Free</a:t>
-            </a:r>
-            <a:endParaRPr lang="en-US" sz="1500"/>
-          </a:p>
-          <a:p>
-            <a:pPr marL="0" indent="0">
-              <a:lnSpc>
-                <a:spcPts val="1950"/>
-              </a:lnSpc>
-              <a:spcAft>
-                <a:spcPts val="0"/>
-              </a:spcAft>
-              <a:buNone/>
-            </a:pPr>
-            <a:r>
-              <a:rPr lang="en-US" sz="1500" b="0">
-                <a:solidFill>
-                  <a:srgbClr val="202B33"/>
-                </a:solidFill>
-                <a:latin typeface="Arial"/>
-                <a:ea typeface="Arial"/>
-                <a:cs typeface="Arial"/>
-              </a:rPr>
-              <a:t xml:space="preserve">parking or free markets —</a:t>
-            </a:r>
-            <a:endParaRPr lang="en-US" sz="1500"/>
-          </a:p>
-          <a:p>
-            <a:pPr marL="0" indent="0">
-              <a:lnSpc>
-                <a:spcPts val="1950"/>
-              </a:lnSpc>
-              <a:spcAft>
-                <a:spcPts val="0"/>
-              </a:spcAft>
-              <a:buNone/>
-            </a:pPr>
-            <a:r>
-              <a:rPr lang="en-US" sz="1500" b="0">
-                <a:solidFill>
-                  <a:srgbClr val="202B33"/>
-                </a:solidFill>
-                <a:latin typeface="Arial"/>
-                <a:ea typeface="Arial"/>
-                <a:cs typeface="Arial"/>
-              </a:rPr>
-              <a:t xml:space="preserve">https://www.accessmagazine.org/spring-2011/free-parking-free-markets/,</a:t>
-            </a:r>
-            <a:endParaRPr lang="en-US" sz="1500"/>
-          </a:p>
-          <a:p>
-            <a:pPr marL="0" indent="0">
-              <a:lnSpc>
-                <a:spcPts val="1950"/>
-              </a:lnSpc>
-              <a:spcAft>
-                <a:spcPts val="0"/>
-              </a:spcAft>
-              <a:buNone/>
-            </a:pPr>
-            <a:r>
-              <a:rPr lang="en-US" sz="1500" b="0">
-                <a:solidFill>
-                  <a:srgbClr val="202B33"/>
-                </a:solidFill>
-                <a:latin typeface="Arial"/>
-                <a:ea typeface="Arial"/>
-                <a:cs typeface="Arial"/>
-              </a:rPr>
-              <a:t xml:space="preserve">ACCESS Magazine.</a:t>
+              <a:t xml:space="preserve">Holmstrom (1979), Moral Hazard and</a:t>
+            </a:r>
+            <a:endParaRPr lang="en-US" sz="1500"/>
+          </a:p>
+          <a:p>
+            <a:pPr marL="0" indent="0">
+              <a:lnSpc>
+                <a:spcPts val="1950"/>
+              </a:lnSpc>
+              <a:spcAft>
+                <a:spcPts val="0"/>
+              </a:spcAft>
+              <a:buNone/>
+            </a:pPr>
+            <a:r>
+              <a:rPr lang="en-US" sz="1500" b="0">
+                <a:solidFill>
+                  <a:srgbClr val="202B33"/>
+                </a:solidFill>
+                <a:latin typeface="Arial"/>
+                <a:ea typeface="Arial"/>
+                <a:cs typeface="Arial"/>
+              </a:rPr>
+              <a:t xml:space="preserve">Observability, Bell Journal of Economics</a:t>
+            </a:r>
+            <a:endParaRPr lang="en-US" sz="1500"/>
+          </a:p>
+          <a:p>
+            <a:pPr marL="0" indent="0">
+              <a:lnSpc>
+                <a:spcPts val="1950"/>
+              </a:lnSpc>
+              <a:spcAft>
+                <a:spcPts val="0"/>
+              </a:spcAft>
+              <a:buNone/>
+            </a:pPr>
+            <a:r>
+              <a:rPr lang="en-US" sz="1500" b="0">
+                <a:solidFill>
+                  <a:srgbClr val="202B33"/>
+                </a:solidFill>
+                <a:latin typeface="Arial"/>
+                <a:ea typeface="Arial"/>
+                <a:cs typeface="Arial"/>
+              </a:rPr>
+              <a:t xml:space="preserve">10(1), 74 to 91. Nobel 2016.</a:t>
             </a:r>
             <a:endParaRPr lang="en-US" sz="1500"/>
           </a:p>
@@ -23521,237 +23430,30 @@
                 <a:ea typeface="Arial"/>
                 <a:cs typeface="Arial"/>
               </a:rPr>
-              <a:t xml:space="preserve">Jevons (1865), The Coal Question, chapter</a:t>
-            </a:r>
-            <a:endParaRPr lang="en-US" sz="1500"/>
-          </a:p>
-          <a:p>
-            <a:pPr marL="0" indent="0">
-              <a:lnSpc>
-                <a:spcPts val="1950"/>
-              </a:lnSpc>
-              <a:spcAft>
-                <a:spcPts val="0"/>
-              </a:spcAft>
-              <a:buNone/>
-            </a:pPr>
-            <a:r>
-              <a:rPr lang="en-US" sz="1500" b="0">
-                <a:solidFill>
-                  <a:srgbClr val="202B33"/>
-                </a:solidFill>
-                <a:latin typeface="Arial"/>
-                <a:ea typeface="Arial"/>
-                <a:cs typeface="Arial"/>
-              </a:rPr>
-              <a:t xml:space="preserve">VII. Duranton and Turner (2011), The</a:t>
-            </a:r>
-            <a:endParaRPr lang="en-US" sz="1500"/>
-          </a:p>
-          <a:p>
-            <a:pPr marL="0" indent="0">
-              <a:lnSpc>
-                <a:spcPts val="1950"/>
-              </a:lnSpc>
-              <a:spcAft>
-                <a:spcPts val="0"/>
-              </a:spcAft>
-              <a:buNone/>
-            </a:pPr>
-            <a:r>
-              <a:rPr lang="en-US" sz="1500" b="0">
-                <a:solidFill>
-                  <a:srgbClr val="202B33"/>
-                </a:solidFill>
-                <a:latin typeface="Arial"/>
-                <a:ea typeface="Arial"/>
-                <a:cs typeface="Arial"/>
-              </a:rPr>
-              <a:t xml:space="preserve">Fundamental Law of Road Congestion,</a:t>
-            </a:r>
-            <a:endParaRPr lang="en-US" sz="1500"/>
-          </a:p>
-          <a:p>
-            <a:pPr marL="0" indent="0">
-              <a:lnSpc>
-                <a:spcPts val="1950"/>
-              </a:lnSpc>
-              <a:spcAft>
-                <a:spcPts val="0"/>
-              </a:spcAft>
-              <a:buNone/>
-            </a:pPr>
-            <a:r>
-              <a:rPr lang="en-US" sz="1500" b="0">
-                <a:solidFill>
-                  <a:srgbClr val="202B33"/>
-                </a:solidFill>
-                <a:latin typeface="Arial"/>
-                <a:ea typeface="Arial"/>
-                <a:cs typeface="Arial"/>
-              </a:rPr>
-              <a:t xml:space="preserve">American Economic Review 101(6).</a:t>
-            </a:r>
-            <a:endParaRPr lang="en-US" sz="1500"/>
-          </a:p>
-          <a:p>
-            <a:pPr marL="0" indent="0">
-              <a:lnSpc>
-                <a:spcPts val="1950"/>
-              </a:lnSpc>
-              <a:spcAft>
-                <a:spcPts val="0"/>
-              </a:spcAft>
-              <a:buNone/>
-            </a:pPr>
-            <a:r>
-              <a:rPr lang="en-US" sz="1500" b="0">
-                <a:solidFill>
-                  <a:srgbClr val="202B33"/>
-                </a:solidFill>
-                <a:latin typeface="Arial"/>
-                <a:ea typeface="Arial"/>
-                <a:cs typeface="Arial"/>
-              </a:rPr>
-              <a:t xml:space="preserve"/>
-            </a:r>
-            <a:endParaRPr lang="en-US" sz="1500"/>
-          </a:p>
-          <a:p>
-            <a:pPr marL="0" indent="0">
-              <a:lnSpc>
-                <a:spcPts val="1950"/>
-              </a:lnSpc>
-              <a:spcAft>
-                <a:spcPts val="0"/>
-              </a:spcAft>
-              <a:buNone/>
-            </a:pPr>
-            <a:r>
-              <a:rPr lang="en-US" sz="1500" b="0">
-                <a:solidFill>
-                  <a:srgbClr val="202B33"/>
-                </a:solidFill>
-                <a:latin typeface="Arial"/>
-                <a:ea typeface="Arial"/>
-                <a:cs typeface="Arial"/>
-              </a:rPr>
-              <a:t xml:space="preserve">Cottier, Snodin, Owen, Adamczewski (Epoch</a:t>
-            </a:r>
-            <a:endParaRPr lang="en-US" sz="1500"/>
-          </a:p>
-          <a:p>
-            <a:pPr marL="0" indent="0">
-              <a:lnSpc>
-                <a:spcPts val="1950"/>
-              </a:lnSpc>
-              <a:spcAft>
-                <a:spcPts val="0"/>
-              </a:spcAft>
-              <a:buNone/>
-            </a:pPr>
-            <a:r>
-              <a:rPr lang="en-US" sz="1500" b="0">
-                <a:solidFill>
-                  <a:srgbClr val="202B33"/>
-                </a:solidFill>
-                <a:latin typeface="Arial"/>
-                <a:ea typeface="Arial"/>
-                <a:cs typeface="Arial"/>
-              </a:rPr>
-              <a:t xml:space="preserve">AI, March 2025), LLM inference prices have</a:t>
-            </a:r>
-            <a:endParaRPr lang="en-US" sz="1500"/>
-          </a:p>
-          <a:p>
-            <a:pPr marL="0" indent="0">
-              <a:lnSpc>
-                <a:spcPts val="1950"/>
-              </a:lnSpc>
-              <a:spcAft>
-                <a:spcPts val="0"/>
-              </a:spcAft>
-              <a:buNone/>
-            </a:pPr>
-            <a:r>
-              <a:rPr lang="en-US" sz="1500" b="0">
-                <a:solidFill>
-                  <a:srgbClr val="202B33"/>
-                </a:solidFill>
-                <a:latin typeface="Arial"/>
-                <a:ea typeface="Arial"/>
-                <a:cs typeface="Arial"/>
-              </a:rPr>
-              <a:t xml:space="preserve">fallen rapidly but unequally across tasks —</a:t>
-            </a:r>
-            <a:endParaRPr lang="en-US" sz="1500"/>
-          </a:p>
-          <a:p>
-            <a:pPr marL="0" indent="0">
-              <a:lnSpc>
-                <a:spcPts val="1950"/>
-              </a:lnSpc>
-              <a:spcAft>
-                <a:spcPts val="0"/>
-              </a:spcAft>
-              <a:buNone/>
-            </a:pPr>
-            <a:r>
-              <a:rPr lang="en-US" sz="1500" b="0">
-                <a:solidFill>
-                  <a:srgbClr val="202B33"/>
-                </a:solidFill>
-                <a:latin typeface="Arial"/>
-                <a:ea typeface="Arial"/>
-                <a:cs typeface="Arial"/>
-              </a:rPr>
-              <a:t xml:space="preserve">https://epoch.ai/data-insights/llm-inference-price-trends.</a:t>
-            </a:r>
-            <a:endParaRPr lang="en-US" sz="1500"/>
-          </a:p>
-          <a:p>
-            <a:pPr marL="0" indent="0">
-              <a:lnSpc>
-                <a:spcPts val="1950"/>
-              </a:lnSpc>
-              <a:spcAft>
-                <a:spcPts val="0"/>
-              </a:spcAft>
-              <a:buNone/>
-            </a:pPr>
-            <a:r>
-              <a:rPr lang="en-US" sz="1500" b="0">
-                <a:solidFill>
-                  <a:srgbClr val="202B33"/>
-                </a:solidFill>
-                <a:latin typeface="Arial"/>
-                <a:ea typeface="Arial"/>
-                <a:cs typeface="Arial"/>
-              </a:rPr>
-              <a:t xml:space="preserve">Check for a newer edition before each</a:t>
-            </a:r>
-            <a:endParaRPr lang="en-US" sz="1500"/>
-          </a:p>
-          <a:p>
-            <a:pPr marL="0" indent="0">
-              <a:lnSpc>
-                <a:spcPts val="1950"/>
-              </a:lnSpc>
-              <a:spcAft>
-                <a:spcPts val="0"/>
-              </a:spcAft>
-              <a:buNone/>
-            </a:pPr>
-            <a:r>
-              <a:rPr lang="en-US" sz="1500" b="0">
-                <a:solidFill>
-                  <a:srgbClr val="202B33"/>
-                </a:solidFill>
-                <a:latin typeface="Arial"/>
-                <a:ea typeface="Arial"/>
-                <a:cs typeface="Arial"/>
-              </a:rPr>
-              <a:t xml:space="preserve">delivery.</a:t>
+              <a:t xml:space="preserve">Dixit and Pindyck (1994), Investment Under</a:t>
+            </a:r>
+            <a:endParaRPr lang="en-US" sz="1500"/>
+          </a:p>
+          <a:p>
+            <a:pPr marL="0" indent="0">
+              <a:lnSpc>
+                <a:spcPts val="1950"/>
+              </a:lnSpc>
+              <a:spcAft>
+                <a:spcPts val="0"/>
+              </a:spcAft>
+              <a:buNone/>
+            </a:pPr>
+            <a:r>
+              <a:rPr lang="en-US" sz="1500" b="0">
+                <a:solidFill>
+                  <a:srgbClr val="202B33"/>
+                </a:solidFill>
+                <a:latin typeface="Arial"/>
+                <a:ea typeface="Arial"/>
+                <a:cs typeface="Arial"/>
+              </a:rPr>
+              <a:t xml:space="preserve">Uncertainty, Princeton University Press.</a:t>
             </a:r>
             <a:endParaRPr lang="en-US" sz="1500"/>
           </a:p>
@@ -23850,632 +23552,6 @@
                 <a:cs typeface="Arial"/>
               </a:rPr>
               <a:t xml:space="preserve">21</a:t>
-            </a:r>
-            <a:endParaRPr lang="en-US" sz="975"/>
-          </a:p>
-        </p:txBody>
-      </p:sp>
-    </p:spTree>
-  </p:cSld>
-  <p:clrMapOvr>
-    <a:masterClrMapping/>
-  </p:clrMapOvr>
-</p:sld>
-</file>
-
-<file path=ppt/slides/slide22.xml><?xml version="1.0" encoding="utf-8"?>
-<p:sld xmlns:a="http://schemas.openxmlformats.org/drawingml/2006/main" xmlns:r="http://schemas.openxmlformats.org/officeDocument/2006/relationships" xmlns:p="http://schemas.openxmlformats.org/presentationml/2006/main">
-  <p:cSld name="Slide 22">
-    <p:bg>
-      <p:bgPr>
-        <a:solidFill>
-          <a:srgbClr val="FAFAF7"/>
-        </a:solidFill>
-        <a:effectLst/>
-      </p:bgPr>
-    </p:bg>
-    <p:spTree>
-      <p:nvGrpSpPr>
-        <p:cNvPr id="1" name=""/>
-        <p:cNvGrpSpPr/>
-        <p:nvPr/>
-      </p:nvGrpSpPr>
-      <p:grpSpPr>
-        <a:xfrm>
-          <a:off x="0" y="0"/>
-          <a:ext cx="0" cy="0"/>
-          <a:chOff x="0" y="0"/>
-          <a:chExt cx="0" cy="0"/>
-        </a:xfrm>
-      </p:grpSpPr>
-      <p:sp>
-        <p:nvSpPr>
-          <p:cNvPr id="2" name="Text 2"/>
-          <p:cNvSpPr txBox="1"/>
-          <p:nvPr/>
-        </p:nvSpPr>
-        <p:spPr>
-          <a:xfrm>
-            <a:off x="457200" y="266700"/>
-            <a:ext cx="9144000" cy="228600"/>
-          </a:xfrm>
-          <a:prstGeom prst="rect">
-            <a:avLst/>
-          </a:prstGeom>
-          <a:noFill/>
-          <a:ln>
-            <a:noFill/>
-          </a:ln>
-        </p:spPr>
-        <p:txBody>
-          <a:bodyPr wrap="none" lIns="0" tIns="0" rIns="0" bIns="0" anchor="t">
-            <a:noAutofit/>
-          </a:bodyPr>
-          <a:lstStyle/>
-          <a:p>
-            <a:pPr marL="0" indent="0">
-              <a:lnSpc>
-                <a:spcPts val="1365"/>
-              </a:lnSpc>
-              <a:spcAft>
-                <a:spcPts val="0"/>
-              </a:spcAft>
-              <a:buNone/>
-            </a:pPr>
-            <a:r>
-              <a:rPr lang="en-US" sz="1050" b="1">
-                <a:solidFill>
-                  <a:srgbClr val="246957"/>
-                </a:solidFill>
-                <a:latin typeface="Arial"/>
-                <a:ea typeface="Arial"/>
-                <a:cs typeface="Arial"/>
-              </a:rPr>
-              <a:t xml:space="preserve">SOURCE REFERENCES</a:t>
-            </a:r>
-            <a:endParaRPr lang="en-US" sz="1050"/>
-          </a:p>
-        </p:txBody>
-      </p:sp>
-      <p:sp>
-        <p:nvSpPr>
-          <p:cNvPr id="3" name="Text 3"/>
-          <p:cNvSpPr txBox="1"/>
-          <p:nvPr/>
-        </p:nvSpPr>
-        <p:spPr>
-          <a:xfrm>
-            <a:off x="457200" y="657225"/>
-            <a:ext cx="9144000" cy="1104900"/>
-          </a:xfrm>
-          <a:prstGeom prst="rect">
-            <a:avLst/>
-          </a:prstGeom>
-          <a:noFill/>
-          <a:ln>
-            <a:noFill/>
-          </a:ln>
-        </p:spPr>
-        <p:txBody>
-          <a:bodyPr wrap="none" lIns="0" tIns="0" rIns="0" bIns="0" anchor="t">
-            <a:noAutofit/>
-          </a:bodyPr>
-          <a:lstStyle/>
-          <a:p>
-            <a:pPr marL="0" indent="0">
-              <a:lnSpc>
-                <a:spcPts val="3060"/>
-              </a:lnSpc>
-              <a:spcAft>
-                <a:spcPts val="0"/>
-              </a:spcAft>
-              <a:buNone/>
-            </a:pPr>
-            <a:r>
-              <a:rPr lang="en-US" sz="2550" b="1">
-                <a:solidFill>
-                  <a:srgbClr val="202B33"/>
-                </a:solidFill>
-                <a:latin typeface="Arial"/>
-                <a:ea typeface="Arial"/>
-                <a:cs typeface="Arial"/>
-              </a:rPr>
-              <a:t xml:space="preserve">References (continued)</a:t>
-            </a:r>
-            <a:endParaRPr lang="en-US" sz="2550"/>
-          </a:p>
-        </p:txBody>
-      </p:sp>
-      <p:sp>
-        <p:nvSpPr>
-          <p:cNvPr id="4" name="Text 4"/>
-          <p:cNvSpPr txBox="1"/>
-          <p:nvPr/>
-        </p:nvSpPr>
-        <p:spPr>
-          <a:xfrm>
-            <a:off x="457200" y="1971675"/>
-            <a:ext cx="4352925" cy="5314950"/>
-          </a:xfrm>
-          <a:prstGeom prst="rect">
-            <a:avLst/>
-          </a:prstGeom>
-          <a:noFill/>
-          <a:ln>
-            <a:noFill/>
-          </a:ln>
-        </p:spPr>
-        <p:txBody>
-          <a:bodyPr wrap="none" lIns="0" tIns="0" rIns="0" bIns="0" anchor="t">
-            <a:noAutofit/>
-          </a:bodyPr>
-          <a:lstStyle/>
-          <a:p>
-            <a:pPr marL="0" indent="0">
-              <a:lnSpc>
-                <a:spcPts val="1950"/>
-              </a:lnSpc>
-              <a:spcAft>
-                <a:spcPts val="0"/>
-              </a:spcAft>
-              <a:buNone/>
-            </a:pPr>
-            <a:r>
-              <a:rPr lang="en-US" sz="1500" b="0">
-                <a:solidFill>
-                  <a:srgbClr val="202B33"/>
-                </a:solidFill>
-                <a:latin typeface="Arial"/>
-                <a:ea typeface="Arial"/>
-                <a:cs typeface="Arial"/>
-              </a:rPr>
-              <a:t xml:space="preserve">David (1985), Clio and the Economics of</a:t>
-            </a:r>
-            <a:endParaRPr lang="en-US" sz="1500"/>
-          </a:p>
-          <a:p>
-            <a:pPr marL="0" indent="0">
-              <a:lnSpc>
-                <a:spcPts val="1950"/>
-              </a:lnSpc>
-              <a:spcAft>
-                <a:spcPts val="0"/>
-              </a:spcAft>
-              <a:buNone/>
-            </a:pPr>
-            <a:r>
-              <a:rPr lang="en-US" sz="1500" b="0">
-                <a:solidFill>
-                  <a:srgbClr val="202B33"/>
-                </a:solidFill>
-                <a:latin typeface="Arial"/>
-                <a:ea typeface="Arial"/>
-                <a:cs typeface="Arial"/>
-              </a:rPr>
-              <a:t xml:space="preserve">QWERTY, American Economic Review 75(2).</a:t>
-            </a:r>
-            <a:endParaRPr lang="en-US" sz="1500"/>
-          </a:p>
-          <a:p>
-            <a:pPr marL="0" indent="0">
-              <a:lnSpc>
-                <a:spcPts val="1950"/>
-              </a:lnSpc>
-              <a:spcAft>
-                <a:spcPts val="0"/>
-              </a:spcAft>
-              <a:buNone/>
-            </a:pPr>
-            <a:r>
-              <a:rPr lang="en-US" sz="1500" b="0">
-                <a:solidFill>
-                  <a:srgbClr val="202B33"/>
-                </a:solidFill>
-                <a:latin typeface="Arial"/>
-                <a:ea typeface="Arial"/>
-                <a:cs typeface="Arial"/>
-              </a:rPr>
-              <a:t xml:space="preserve">Contested by Liebowitz and Margolis (1990),</a:t>
-            </a:r>
-            <a:endParaRPr lang="en-US" sz="1500"/>
-          </a:p>
-          <a:p>
-            <a:pPr marL="0" indent="0">
-              <a:lnSpc>
-                <a:spcPts val="1950"/>
-              </a:lnSpc>
-              <a:spcAft>
-                <a:spcPts val="0"/>
-              </a:spcAft>
-              <a:buNone/>
-            </a:pPr>
-            <a:r>
-              <a:rPr lang="en-US" sz="1500" b="0">
-                <a:solidFill>
-                  <a:srgbClr val="202B33"/>
-                </a:solidFill>
-                <a:latin typeface="Arial"/>
-                <a:ea typeface="Arial"/>
-                <a:cs typeface="Arial"/>
-              </a:rPr>
-              <a:t xml:space="preserve">The Fable of the Keys, Journal of Law and</a:t>
-            </a:r>
-            <a:endParaRPr lang="en-US" sz="1500"/>
-          </a:p>
-          <a:p>
-            <a:pPr marL="0" indent="0">
-              <a:lnSpc>
-                <a:spcPts val="1950"/>
-              </a:lnSpc>
-              <a:spcAft>
-                <a:spcPts val="0"/>
-              </a:spcAft>
-              <a:buNone/>
-            </a:pPr>
-            <a:r>
-              <a:rPr lang="en-US" sz="1500" b="0">
-                <a:solidFill>
-                  <a:srgbClr val="202B33"/>
-                </a:solidFill>
-                <a:latin typeface="Arial"/>
-                <a:ea typeface="Arial"/>
-                <a:cs typeface="Arial"/>
-              </a:rPr>
-              <a:t xml:space="preserve">Economics 33(1). Arthur (1989), Competing</a:t>
-            </a:r>
-            <a:endParaRPr lang="en-US" sz="1500"/>
-          </a:p>
-          <a:p>
-            <a:pPr marL="0" indent="0">
-              <a:lnSpc>
-                <a:spcPts val="1950"/>
-              </a:lnSpc>
-              <a:spcAft>
-                <a:spcPts val="0"/>
-              </a:spcAft>
-              <a:buNone/>
-            </a:pPr>
-            <a:r>
-              <a:rPr lang="en-US" sz="1500" b="0">
-                <a:solidFill>
-                  <a:srgbClr val="202B33"/>
-                </a:solidFill>
-                <a:latin typeface="Arial"/>
-                <a:ea typeface="Arial"/>
-                <a:cs typeface="Arial"/>
-              </a:rPr>
-              <a:t xml:space="preserve">Technologies, Increasing Returns, and</a:t>
-            </a:r>
-            <a:endParaRPr lang="en-US" sz="1500"/>
-          </a:p>
-          <a:p>
-            <a:pPr marL="0" indent="0">
-              <a:lnSpc>
-                <a:spcPts val="1950"/>
-              </a:lnSpc>
-              <a:spcAft>
-                <a:spcPts val="0"/>
-              </a:spcAft>
-              <a:buNone/>
-            </a:pPr>
-            <a:r>
-              <a:rPr lang="en-US" sz="1500" b="0">
-                <a:solidFill>
-                  <a:srgbClr val="202B33"/>
-                </a:solidFill>
-                <a:latin typeface="Arial"/>
-                <a:ea typeface="Arial"/>
-                <a:cs typeface="Arial"/>
-              </a:rPr>
-              <a:t xml:space="preserve">Lock-In by Historical Events, The Economic</a:t>
-            </a:r>
-            <a:endParaRPr lang="en-US" sz="1500"/>
-          </a:p>
-          <a:p>
-            <a:pPr marL="0" indent="0">
-              <a:lnSpc>
-                <a:spcPts val="1950"/>
-              </a:lnSpc>
-              <a:spcAft>
-                <a:spcPts val="0"/>
-              </a:spcAft>
-              <a:buNone/>
-            </a:pPr>
-            <a:r>
-              <a:rPr lang="en-US" sz="1500" b="0">
-                <a:solidFill>
-                  <a:srgbClr val="202B33"/>
-                </a:solidFill>
-                <a:latin typeface="Arial"/>
-                <a:ea typeface="Arial"/>
-                <a:cs typeface="Arial"/>
-              </a:rPr>
-              <a:t xml:space="preserve">Journal 99(394).</a:t>
-            </a:r>
-            <a:endParaRPr lang="en-US" sz="1500"/>
-          </a:p>
-        </p:txBody>
-      </p:sp>
-      <p:sp>
-        <p:nvSpPr>
-          <p:cNvPr id="5" name="Text 5"/>
-          <p:cNvSpPr txBox="1"/>
-          <p:nvPr/>
-        </p:nvSpPr>
-        <p:spPr>
-          <a:xfrm>
-            <a:off x="5238750" y="1971675"/>
-            <a:ext cx="4362450" cy="5314950"/>
-          </a:xfrm>
-          <a:prstGeom prst="rect">
-            <a:avLst/>
-          </a:prstGeom>
-          <a:noFill/>
-          <a:ln>
-            <a:noFill/>
-          </a:ln>
-        </p:spPr>
-        <p:txBody>
-          <a:bodyPr wrap="none" lIns="0" tIns="0" rIns="0" bIns="0" anchor="t">
-            <a:noAutofit/>
-          </a:bodyPr>
-          <a:lstStyle/>
-          <a:p>
-            <a:pPr marL="0" indent="0">
-              <a:lnSpc>
-                <a:spcPts val="1950"/>
-              </a:lnSpc>
-              <a:spcAft>
-                <a:spcPts val="0"/>
-              </a:spcAft>
-              <a:buNone/>
-            </a:pPr>
-            <a:r>
-              <a:rPr lang="en-US" sz="1500" b="0">
-                <a:solidFill>
-                  <a:srgbClr val="202B33"/>
-                </a:solidFill>
-                <a:latin typeface="Arial"/>
-                <a:ea typeface="Arial"/>
-                <a:cs typeface="Arial"/>
-              </a:rPr>
-              <a:t xml:space="preserve"/>
-            </a:r>
-            <a:endParaRPr lang="en-US" sz="1500"/>
-          </a:p>
-          <a:p>
-            <a:pPr marL="0" indent="0">
-              <a:lnSpc>
-                <a:spcPts val="1950"/>
-              </a:lnSpc>
-              <a:spcAft>
-                <a:spcPts val="0"/>
-              </a:spcAft>
-              <a:buNone/>
-            </a:pPr>
-            <a:r>
-              <a:rPr lang="en-US" sz="1500" b="0">
-                <a:solidFill>
-                  <a:srgbClr val="202B33"/>
-                </a:solidFill>
-                <a:latin typeface="Arial"/>
-                <a:ea typeface="Arial"/>
-                <a:cs typeface="Arial"/>
-              </a:rPr>
-              <a:t xml:space="preserve">Holmstrom (1979), Moral Hazard and</a:t>
-            </a:r>
-            <a:endParaRPr lang="en-US" sz="1500"/>
-          </a:p>
-          <a:p>
-            <a:pPr marL="0" indent="0">
-              <a:lnSpc>
-                <a:spcPts val="1950"/>
-              </a:lnSpc>
-              <a:spcAft>
-                <a:spcPts val="0"/>
-              </a:spcAft>
-              <a:buNone/>
-            </a:pPr>
-            <a:r>
-              <a:rPr lang="en-US" sz="1500" b="0">
-                <a:solidFill>
-                  <a:srgbClr val="202B33"/>
-                </a:solidFill>
-                <a:latin typeface="Arial"/>
-                <a:ea typeface="Arial"/>
-                <a:cs typeface="Arial"/>
-              </a:rPr>
-              <a:t xml:space="preserve">Observability, Bell Journal of Economics</a:t>
-            </a:r>
-            <a:endParaRPr lang="en-US" sz="1500"/>
-          </a:p>
-          <a:p>
-            <a:pPr marL="0" indent="0">
-              <a:lnSpc>
-                <a:spcPts val="1950"/>
-              </a:lnSpc>
-              <a:spcAft>
-                <a:spcPts val="0"/>
-              </a:spcAft>
-              <a:buNone/>
-            </a:pPr>
-            <a:r>
-              <a:rPr lang="en-US" sz="1500" b="0">
-                <a:solidFill>
-                  <a:srgbClr val="202B33"/>
-                </a:solidFill>
-                <a:latin typeface="Arial"/>
-                <a:ea typeface="Arial"/>
-                <a:cs typeface="Arial"/>
-              </a:rPr>
-              <a:t xml:space="preserve">10(1), 74 to 91. Nobel 2016.</a:t>
-            </a:r>
-            <a:endParaRPr lang="en-US" sz="1500"/>
-          </a:p>
-          <a:p>
-            <a:pPr marL="0" indent="0">
-              <a:lnSpc>
-                <a:spcPts val="1950"/>
-              </a:lnSpc>
-              <a:spcAft>
-                <a:spcPts val="0"/>
-              </a:spcAft>
-              <a:buNone/>
-            </a:pPr>
-            <a:r>
-              <a:rPr lang="en-US" sz="1500" b="0">
-                <a:solidFill>
-                  <a:srgbClr val="202B33"/>
-                </a:solidFill>
-                <a:latin typeface="Arial"/>
-                <a:ea typeface="Arial"/>
-                <a:cs typeface="Arial"/>
-              </a:rPr>
-              <a:t xml:space="preserve"/>
-            </a:r>
-            <a:endParaRPr lang="en-US" sz="1500"/>
-          </a:p>
-          <a:p>
-            <a:pPr marL="0" indent="0">
-              <a:lnSpc>
-                <a:spcPts val="1950"/>
-              </a:lnSpc>
-              <a:spcAft>
-                <a:spcPts val="0"/>
-              </a:spcAft>
-              <a:buNone/>
-            </a:pPr>
-            <a:r>
-              <a:rPr lang="en-US" sz="1500" b="0">
-                <a:solidFill>
-                  <a:srgbClr val="202B33"/>
-                </a:solidFill>
-                <a:latin typeface="Arial"/>
-                <a:ea typeface="Arial"/>
-                <a:cs typeface="Arial"/>
-              </a:rPr>
-              <a:t xml:space="preserve">Dixit and Pindyck (1994), Investment Under</a:t>
-            </a:r>
-            <a:endParaRPr lang="en-US" sz="1500"/>
-          </a:p>
-          <a:p>
-            <a:pPr marL="0" indent="0">
-              <a:lnSpc>
-                <a:spcPts val="1950"/>
-              </a:lnSpc>
-              <a:spcAft>
-                <a:spcPts val="0"/>
-              </a:spcAft>
-              <a:buNone/>
-            </a:pPr>
-            <a:r>
-              <a:rPr lang="en-US" sz="1500" b="0">
-                <a:solidFill>
-                  <a:srgbClr val="202B33"/>
-                </a:solidFill>
-                <a:latin typeface="Arial"/>
-                <a:ea typeface="Arial"/>
-                <a:cs typeface="Arial"/>
-              </a:rPr>
-              <a:t xml:space="preserve">Uncertainty, Princeton University Press.</a:t>
-            </a:r>
-            <a:endParaRPr lang="en-US" sz="1500"/>
-          </a:p>
-        </p:txBody>
-      </p:sp>
-      <p:sp>
-        <p:nvSpPr>
-          <p:cNvPr id="6" name="Text 6"/>
-          <p:cNvSpPr txBox="1"/>
-          <p:nvPr/>
-        </p:nvSpPr>
-        <p:spPr>
-          <a:xfrm>
-            <a:off x="457200" y="7486650"/>
-            <a:ext cx="8820150" cy="190500"/>
-          </a:xfrm>
-          <a:prstGeom prst="rect">
-            <a:avLst/>
-          </a:prstGeom>
-          <a:noFill/>
-          <a:ln>
-            <a:noFill/>
-          </a:ln>
-        </p:spPr>
-        <p:txBody>
-          <a:bodyPr wrap="none" lIns="0" tIns="0" rIns="0" bIns="0" anchor="t">
-            <a:noAutofit/>
-          </a:bodyPr>
-          <a:lstStyle/>
-          <a:p>
-            <a:pPr marL="0" indent="0">
-              <a:lnSpc>
-                <a:spcPts val="1268"/>
-              </a:lnSpc>
-              <a:spcAft>
-                <a:spcPts val="0"/>
-              </a:spcAft>
-              <a:buNone/>
-            </a:pPr>
-            <a:r>
-              <a:rPr lang="en-US" sz="975" b="0">
-                <a:solidFill>
-                  <a:srgbClr val="48555B"/>
-                </a:solidFill>
-                <a:latin typeface="Arial"/>
-                <a:ea typeface="Arial"/>
-                <a:cs typeface="Arial"/>
-              </a:rPr>
-              <a:t xml:space="preserve">Buy Me a Free Tier</a:t>
-            </a:r>
-            <a:endParaRPr lang="en-US" sz="975"/>
-          </a:p>
-        </p:txBody>
-      </p:sp>
-      <p:sp>
-        <p:nvSpPr>
-          <p:cNvPr id="7" name="Text 7"/>
-          <p:cNvSpPr txBox="1"/>
-          <p:nvPr/>
-        </p:nvSpPr>
-        <p:spPr>
-          <a:xfrm>
-            <a:off x="9391650" y="7486650"/>
-            <a:ext cx="238125" cy="190500"/>
-          </a:xfrm>
-          <a:prstGeom prst="rect">
-            <a:avLst/>
-          </a:prstGeom>
-          <a:noFill/>
-          <a:ln>
-            <a:noFill/>
-          </a:ln>
-        </p:spPr>
-        <p:txBody>
-          <a:bodyPr wrap="none" lIns="0" tIns="0" rIns="0" bIns="0" anchor="t">
-            <a:noAutofit/>
-          </a:bodyPr>
-          <a:lstStyle/>
-          <a:p>
-            <a:pPr marL="0" indent="0">
-              <a:lnSpc>
-                <a:spcPts val="1268"/>
-              </a:lnSpc>
-              <a:spcAft>
-                <a:spcPts val="0"/>
-              </a:spcAft>
-              <a:buNone/>
-            </a:pPr>
-            <a:r>
-              <a:rPr lang="en-US" sz="975" b="0">
-                <a:solidFill>
-                  <a:srgbClr val="48555B"/>
-                </a:solidFill>
-                <a:latin typeface="Arial"/>
-                <a:ea typeface="Arial"/>
-                <a:cs typeface="Arial"/>
-              </a:rPr>
-              <a:t xml:space="preserve">22</a:t>
             </a:r>
             <a:endParaRPr lang="en-US" sz="975"/>
           </a:p>
@@ -27172,7 +26248,7 @@
                 <a:ea typeface="Arial"/>
                 <a:cs typeface="Arial"/>
               </a:rPr>
-              <a:t xml:space="preserve">cost. They are not. They are evidence about</a:t>
+              <a:t xml:space="preserve">cost. They are evidence about strategy, and</a:t>
             </a:r>
             <a:endParaRPr lang="en-US" sz="1500"/>
           </a:p>
@@ -27221,214 +26297,191 @@
                 <a:ea typeface="Arial"/>
                 <a:cs typeface="Arial"/>
               </a:rPr>
-              <a:t xml:space="preserve">strategy, and Thomas Schelling gave us the</a:t>
-            </a:r>
-            <a:endParaRPr lang="en-US" sz="1500"/>
-          </a:p>
-          <a:p>
-            <a:pPr marL="0" indent="0">
-              <a:lnSpc>
-                <a:spcPts val="1950"/>
-              </a:lnSpc>
-              <a:spcAft>
-                <a:spcPts val="0"/>
-              </a:spcAft>
-              <a:buNone/>
-            </a:pPr>
-            <a:r>
-              <a:rPr lang="en-US" sz="1500" b="0">
-                <a:solidFill>
-                  <a:srgbClr val="202B33"/>
-                </a:solidFill>
-                <a:latin typeface="Arial"/>
-                <a:ea typeface="Arial"/>
-                <a:cs typeface="Arial"/>
-              </a:rPr>
-              <a:t xml:space="preserve">word in 1960: a credible commitment. You</a:t>
-            </a:r>
-            <a:endParaRPr lang="en-US" sz="1500"/>
-          </a:p>
-          <a:p>
-            <a:pPr marL="0" indent="0">
-              <a:lnSpc>
-                <a:spcPts val="1950"/>
-              </a:lnSpc>
-              <a:spcAft>
-                <a:spcPts val="0"/>
-              </a:spcAft>
-              <a:buNone/>
-            </a:pPr>
-            <a:r>
-              <a:rPr lang="en-US" sz="1500" b="0">
-                <a:solidFill>
-                  <a:srgbClr val="202B33"/>
-                </a:solidFill>
-                <a:latin typeface="Arial"/>
-                <a:ea typeface="Arial"/>
-                <a:cs typeface="Arial"/>
-              </a:rPr>
-              <a:t xml:space="preserve">deliberately destroy your own ability to</a:t>
-            </a:r>
-            <a:endParaRPr lang="en-US" sz="1500"/>
-          </a:p>
-          <a:p>
-            <a:pPr marL="0" indent="0">
-              <a:lnSpc>
-                <a:spcPts val="1950"/>
-              </a:lnSpc>
-              <a:spcAft>
-                <a:spcPts val="0"/>
-              </a:spcAft>
-              <a:buNone/>
-            </a:pPr>
-            <a:r>
-              <a:rPr lang="en-US" sz="1500" b="0">
-                <a:solidFill>
-                  <a:srgbClr val="202B33"/>
-                </a:solidFill>
-                <a:latin typeface="Arial"/>
-                <a:ea typeface="Arial"/>
-                <a:cs typeface="Arial"/>
-              </a:rPr>
-              <a:t xml:space="preserve">back out, precisely so everyone else</a:t>
-            </a:r>
-            <a:endParaRPr lang="en-US" sz="1500"/>
-          </a:p>
-          <a:p>
-            <a:pPr marL="0" indent="0">
-              <a:lnSpc>
-                <a:spcPts val="1950"/>
-              </a:lnSpc>
-              <a:spcAft>
-                <a:spcPts val="0"/>
-              </a:spcAft>
-              <a:buNone/>
-            </a:pPr>
-            <a:r>
-              <a:rPr lang="en-US" sz="1500" b="0">
-                <a:solidFill>
-                  <a:srgbClr val="202B33"/>
-                </a:solidFill>
-                <a:latin typeface="Arial"/>
-                <a:ea typeface="Arial"/>
-                <a:cs typeface="Arial"/>
-              </a:rPr>
-              <a:t xml:space="preserve">updates. Burn the boats. A ten-year</a:t>
-            </a:r>
-            <a:endParaRPr lang="en-US" sz="1500"/>
-          </a:p>
-          <a:p>
-            <a:pPr marL="0" indent="0">
-              <a:lnSpc>
-                <a:spcPts val="1950"/>
-              </a:lnSpc>
-              <a:spcAft>
-                <a:spcPts val="0"/>
-              </a:spcAft>
-              <a:buNone/>
-            </a:pPr>
-            <a:r>
-              <a:rPr lang="en-US" sz="1500" b="0">
-                <a:solidFill>
-                  <a:srgbClr val="202B33"/>
-                </a:solidFill>
-                <a:latin typeface="Arial"/>
-                <a:ea typeface="Arial"/>
-                <a:cs typeface="Arial"/>
-              </a:rPr>
-              <a:t xml:space="preserve">contract you cannot walk away from is not a</a:t>
-            </a:r>
-            <a:endParaRPr lang="en-US" sz="1500"/>
-          </a:p>
-          <a:p>
-            <a:pPr marL="0" indent="0">
-              <a:lnSpc>
-                <a:spcPts val="1950"/>
-              </a:lnSpc>
-              <a:spcAft>
-                <a:spcPts val="0"/>
-              </a:spcAft>
-              <a:buNone/>
-            </a:pPr>
-            <a:r>
-              <a:rPr lang="en-US" sz="1500" b="0">
-                <a:solidFill>
-                  <a:srgbClr val="202B33"/>
-                </a:solidFill>
-                <a:latin typeface="Arial"/>
-                <a:ea typeface="Arial"/>
-                <a:cs typeface="Arial"/>
-              </a:rPr>
-              <a:t xml:space="preserve">disclosure of your margins. It is a signal</a:t>
-            </a:r>
-            <a:endParaRPr lang="en-US" sz="1500"/>
-          </a:p>
-          <a:p>
-            <a:pPr marL="0" indent="0">
-              <a:lnSpc>
-                <a:spcPts val="1950"/>
-              </a:lnSpc>
-              <a:spcAft>
-                <a:spcPts val="0"/>
-              </a:spcAft>
-              <a:buNone/>
-            </a:pPr>
-            <a:r>
-              <a:rPr lang="en-US" sz="1500" b="0">
-                <a:solidFill>
-                  <a:srgbClr val="202B33"/>
-                </a:solidFill>
-                <a:latin typeface="Arial"/>
-                <a:ea typeface="Arial"/>
-                <a:cs typeface="Arial"/>
-              </a:rPr>
-              <a:t xml:space="preserve">that you intend to still be here, aimed at</a:t>
-            </a:r>
-            <a:endParaRPr lang="en-US" sz="1500"/>
-          </a:p>
-          <a:p>
-            <a:pPr marL="0" indent="0">
-              <a:lnSpc>
-                <a:spcPts val="1950"/>
-              </a:lnSpc>
-              <a:spcAft>
-                <a:spcPts val="0"/>
-              </a:spcAft>
-              <a:buNone/>
-            </a:pPr>
-            <a:r>
-              <a:rPr lang="en-US" sz="1500" b="0">
-                <a:solidFill>
-                  <a:srgbClr val="202B33"/>
-                </a:solidFill>
-                <a:latin typeface="Arial"/>
-                <a:ea typeface="Arial"/>
-                <a:cs typeface="Arial"/>
-              </a:rPr>
-              <a:t xml:space="preserve">competitors and at customers who are</a:t>
-            </a:r>
-            <a:endParaRPr lang="en-US" sz="1500"/>
-          </a:p>
-          <a:p>
-            <a:pPr marL="0" indent="0">
-              <a:lnSpc>
-                <a:spcPts val="1950"/>
-              </a:lnSpc>
-              <a:spcAft>
-                <a:spcPts val="0"/>
-              </a:spcAft>
-              <a:buNone/>
-            </a:pPr>
-            <a:r>
-              <a:rPr lang="en-US" sz="1500" b="0">
-                <a:solidFill>
-                  <a:srgbClr val="202B33"/>
-                </a:solidFill>
-                <a:latin typeface="Arial"/>
-                <a:ea typeface="Arial"/>
-                <a:cs typeface="Arial"/>
-              </a:rPr>
-              <a:t xml:space="preserve">nervous about picking you.</a:t>
+              <a:t xml:space="preserve">Thomas Schelling gave us the word in 1960:</a:t>
+            </a:r>
+            <a:endParaRPr lang="en-US" sz="1500"/>
+          </a:p>
+          <a:p>
+            <a:pPr marL="0" indent="0">
+              <a:lnSpc>
+                <a:spcPts val="1950"/>
+              </a:lnSpc>
+              <a:spcAft>
+                <a:spcPts val="0"/>
+              </a:spcAft>
+              <a:buNone/>
+            </a:pPr>
+            <a:r>
+              <a:rPr lang="en-US" sz="1500" b="0">
+                <a:solidFill>
+                  <a:srgbClr val="202B33"/>
+                </a:solidFill>
+                <a:latin typeface="Arial"/>
+                <a:ea typeface="Arial"/>
+                <a:cs typeface="Arial"/>
+              </a:rPr>
+              <a:t xml:space="preserve">a credible commitment. You deliberately</a:t>
+            </a:r>
+            <a:endParaRPr lang="en-US" sz="1500"/>
+          </a:p>
+          <a:p>
+            <a:pPr marL="0" indent="0">
+              <a:lnSpc>
+                <a:spcPts val="1950"/>
+              </a:lnSpc>
+              <a:spcAft>
+                <a:spcPts val="0"/>
+              </a:spcAft>
+              <a:buNone/>
+            </a:pPr>
+            <a:r>
+              <a:rPr lang="en-US" sz="1500" b="0">
+                <a:solidFill>
+                  <a:srgbClr val="202B33"/>
+                </a:solidFill>
+                <a:latin typeface="Arial"/>
+                <a:ea typeface="Arial"/>
+                <a:cs typeface="Arial"/>
+              </a:rPr>
+              <a:t xml:space="preserve">destroy your own ability to back out,</a:t>
+            </a:r>
+            <a:endParaRPr lang="en-US" sz="1500"/>
+          </a:p>
+          <a:p>
+            <a:pPr marL="0" indent="0">
+              <a:lnSpc>
+                <a:spcPts val="1950"/>
+              </a:lnSpc>
+              <a:spcAft>
+                <a:spcPts val="0"/>
+              </a:spcAft>
+              <a:buNone/>
+            </a:pPr>
+            <a:r>
+              <a:rPr lang="en-US" sz="1500" b="0">
+                <a:solidFill>
+                  <a:srgbClr val="202B33"/>
+                </a:solidFill>
+                <a:latin typeface="Arial"/>
+                <a:ea typeface="Arial"/>
+                <a:cs typeface="Arial"/>
+              </a:rPr>
+              <a:t xml:space="preserve">precisely so everyone else updates. Burn</a:t>
+            </a:r>
+            <a:endParaRPr lang="en-US" sz="1500"/>
+          </a:p>
+          <a:p>
+            <a:pPr marL="0" indent="0">
+              <a:lnSpc>
+                <a:spcPts val="1950"/>
+              </a:lnSpc>
+              <a:spcAft>
+                <a:spcPts val="0"/>
+              </a:spcAft>
+              <a:buNone/>
+            </a:pPr>
+            <a:r>
+              <a:rPr lang="en-US" sz="1500" b="0">
+                <a:solidFill>
+                  <a:srgbClr val="202B33"/>
+                </a:solidFill>
+                <a:latin typeface="Arial"/>
+                <a:ea typeface="Arial"/>
+                <a:cs typeface="Arial"/>
+              </a:rPr>
+              <a:t xml:space="preserve">the boats. A ten-year contract you cannot</a:t>
+            </a:r>
+            <a:endParaRPr lang="en-US" sz="1500"/>
+          </a:p>
+          <a:p>
+            <a:pPr marL="0" indent="0">
+              <a:lnSpc>
+                <a:spcPts val="1950"/>
+              </a:lnSpc>
+              <a:spcAft>
+                <a:spcPts val="0"/>
+              </a:spcAft>
+              <a:buNone/>
+            </a:pPr>
+            <a:r>
+              <a:rPr lang="en-US" sz="1500" b="0">
+                <a:solidFill>
+                  <a:srgbClr val="202B33"/>
+                </a:solidFill>
+                <a:latin typeface="Arial"/>
+                <a:ea typeface="Arial"/>
+                <a:cs typeface="Arial"/>
+              </a:rPr>
+              <a:t xml:space="preserve">walk away from discloses nothing about your</a:t>
+            </a:r>
+            <a:endParaRPr lang="en-US" sz="1500"/>
+          </a:p>
+          <a:p>
+            <a:pPr marL="0" indent="0">
+              <a:lnSpc>
+                <a:spcPts val="1950"/>
+              </a:lnSpc>
+              <a:spcAft>
+                <a:spcPts val="0"/>
+              </a:spcAft>
+              <a:buNone/>
+            </a:pPr>
+            <a:r>
+              <a:rPr lang="en-US" sz="1500" b="0">
+                <a:solidFill>
+                  <a:srgbClr val="202B33"/>
+                </a:solidFill>
+                <a:latin typeface="Arial"/>
+                <a:ea typeface="Arial"/>
+                <a:cs typeface="Arial"/>
+              </a:rPr>
+              <a:t xml:space="preserve">margins. It signals that you intend to</a:t>
+            </a:r>
+            <a:endParaRPr lang="en-US" sz="1500"/>
+          </a:p>
+          <a:p>
+            <a:pPr marL="0" indent="0">
+              <a:lnSpc>
+                <a:spcPts val="1950"/>
+              </a:lnSpc>
+              <a:spcAft>
+                <a:spcPts val="0"/>
+              </a:spcAft>
+              <a:buNone/>
+            </a:pPr>
+            <a:r>
+              <a:rPr lang="en-US" sz="1500" b="0">
+                <a:solidFill>
+                  <a:srgbClr val="202B33"/>
+                </a:solidFill>
+                <a:latin typeface="Arial"/>
+                <a:ea typeface="Arial"/>
+                <a:cs typeface="Arial"/>
+              </a:rPr>
+              <a:t xml:space="preserve">still be here, aimed at competitors and at</a:t>
+            </a:r>
+            <a:endParaRPr lang="en-US" sz="1500"/>
+          </a:p>
+          <a:p>
+            <a:pPr marL="0" indent="0">
+              <a:lnSpc>
+                <a:spcPts val="1950"/>
+              </a:lnSpc>
+              <a:spcAft>
+                <a:spcPts val="0"/>
+              </a:spcAft>
+              <a:buNone/>
+            </a:pPr>
+            <a:r>
+              <a:rPr lang="en-US" sz="1500" b="0">
+                <a:solidFill>
+                  <a:srgbClr val="202B33"/>
+                </a:solidFill>
+                <a:latin typeface="Arial"/>
+                <a:ea typeface="Arial"/>
+                <a:cs typeface="Arial"/>
+              </a:rPr>
+              <a:t xml:space="preserve">nervous customers.</a:t>
             </a:r>
             <a:endParaRPr lang="en-US" sz="1500"/>
           </a:p>
@@ -29440,29 +28493,6 @@
             </a:r>
             <a:endParaRPr lang="en-US" sz="1500"/>
           </a:p>
-          <a:p>
-            <a:pPr marL="0" indent="0">
-              <a:lnSpc>
-                <a:spcPts val="1950"/>
-              </a:lnSpc>
-              <a:spcAft>
-                <a:spcPts val="0"/>
-              </a:spcAft>
-              <a:buNone/>
-            </a:pPr>
-            <a:r>
-              <a:rPr lang="en-US" sz="1500" b="0">
-                <a:solidFill>
-                  <a:srgbClr val="202B33"/>
-                </a:solidFill>
-                <a:latin typeface="Arial"/>
-                <a:ea typeface="Arial"/>
-                <a:cs typeface="Arial"/>
-              </a:rPr>
-              <a:t xml:space="preserve">highway and you get more traffic. Duranton</a:t>
-            </a:r>
-            <a:endParaRPr lang="en-US" sz="1500"/>
-          </a:p>
         </p:txBody>
       </p:sp>
       <p:sp>
@@ -29508,6 +28538,29 @@
                 <a:ea typeface="Arial"/>
                 <a:cs typeface="Arial"/>
               </a:rPr>
+              <a:t xml:space="preserve">highway and you get more traffic. Duranton</a:t>
+            </a:r>
+            <a:endParaRPr lang="en-US" sz="1500"/>
+          </a:p>
+          <a:p>
+            <a:pPr marL="0" indent="0">
+              <a:lnSpc>
+                <a:spcPts val="1950"/>
+              </a:lnSpc>
+              <a:spcAft>
+                <a:spcPts val="0"/>
+              </a:spcAft>
+              <a:buNone/>
+            </a:pPr>
+            <a:r>
+              <a:rPr lang="en-US" sz="1500" b="0">
+                <a:solidFill>
+                  <a:srgbClr val="202B33"/>
+                </a:solidFill>
+                <a:latin typeface="Arial"/>
+                <a:ea typeface="Arial"/>
+                <a:cs typeface="Arial"/>
+              </a:rPr>
               <a:t xml:space="preserve">and Turner measured it across US cities in</a:t>
             </a:r>
             <a:endParaRPr lang="en-US" sz="1500"/>
@@ -29669,306 +28722,260 @@
                 <a:ea typeface="Arial"/>
                 <a:cs typeface="Arial"/>
               </a:rPr>
-              <a:t xml:space="preserve">So: your per-token price has fallen off a</a:t>
-            </a:r>
-            <a:endParaRPr lang="en-US" sz="1500"/>
-          </a:p>
-          <a:p>
-            <a:pPr marL="0" indent="0">
-              <a:lnSpc>
-                <a:spcPts val="1950"/>
-              </a:lnSpc>
-              <a:spcAft>
-                <a:spcPts val="0"/>
-              </a:spcAft>
-              <a:buNone/>
-            </a:pPr>
-            <a:r>
-              <a:rPr lang="en-US" sz="1500" b="0">
-                <a:solidFill>
-                  <a:srgbClr val="202B33"/>
-                </a:solidFill>
-                <a:latin typeface="Arial"/>
-                <a:ea typeface="Arial"/>
-                <a:cs typeface="Arial"/>
-              </a:rPr>
-              <a:t xml:space="preserve">cliff over the last few years, and your</a:t>
-            </a:r>
-            <a:endParaRPr lang="en-US" sz="1500"/>
-          </a:p>
-          <a:p>
-            <a:pPr marL="0" indent="0">
-              <a:lnSpc>
-                <a:spcPts val="1950"/>
-              </a:lnSpc>
-              <a:spcAft>
-                <a:spcPts val="0"/>
-              </a:spcAft>
-              <a:buNone/>
-            </a:pPr>
-            <a:r>
-              <a:rPr lang="en-US" sz="1500" b="0">
-                <a:solidFill>
-                  <a:srgbClr val="202B33"/>
-                </a:solidFill>
-                <a:latin typeface="Arial"/>
-                <a:ea typeface="Arial"/>
-                <a:cs typeface="Arial"/>
-              </a:rPr>
-              <a:t xml:space="preserve">bill went up. Everyone in this room has had</a:t>
-            </a:r>
-            <a:endParaRPr lang="en-US" sz="1500"/>
-          </a:p>
-          <a:p>
-            <a:pPr marL="0" indent="0">
-              <a:lnSpc>
-                <a:spcPts val="1950"/>
-              </a:lnSpc>
-              <a:spcAft>
-                <a:spcPts val="0"/>
-              </a:spcAft>
-              <a:buNone/>
-            </a:pPr>
-            <a:r>
-              <a:rPr lang="en-US" sz="1500" b="0">
-                <a:solidFill>
-                  <a:srgbClr val="202B33"/>
-                </a:solidFill>
-                <a:latin typeface="Arial"/>
-                <a:ea typeface="Arial"/>
-                <a:cs typeface="Arial"/>
-              </a:rPr>
-              <a:t xml:space="preserve">that conversation with a CFO and lost it.</a:t>
-            </a:r>
-            <a:endParaRPr lang="en-US" sz="1500"/>
-          </a:p>
-          <a:p>
-            <a:pPr marL="0" indent="0">
-              <a:lnSpc>
-                <a:spcPts val="1950"/>
-              </a:lnSpc>
-              <a:spcAft>
-                <a:spcPts val="0"/>
-              </a:spcAft>
-              <a:buNone/>
-            </a:pPr>
-            <a:r>
-              <a:rPr lang="en-US" sz="1500" b="0">
-                <a:solidFill>
-                  <a:srgbClr val="202B33"/>
-                </a:solidFill>
-                <a:latin typeface="Arial"/>
-                <a:ea typeface="Arial"/>
-                <a:cs typeface="Arial"/>
-              </a:rPr>
-              <a:t xml:space="preserve">You are not being gouged and you did not do</a:t>
-            </a:r>
-            <a:endParaRPr lang="en-US" sz="1500"/>
-          </a:p>
-          <a:p>
-            <a:pPr marL="0" indent="0">
-              <a:lnSpc>
-                <a:spcPts val="1950"/>
-              </a:lnSpc>
-              <a:spcAft>
-                <a:spcPts val="0"/>
-              </a:spcAft>
-              <a:buNone/>
-            </a:pPr>
-            <a:r>
-              <a:rPr lang="en-US" sz="1500" b="0">
-                <a:solidFill>
-                  <a:srgbClr val="202B33"/>
-                </a:solidFill>
-                <a:latin typeface="Arial"/>
-                <a:ea typeface="Arial"/>
-                <a:cs typeface="Arial"/>
-              </a:rPr>
-              <a:t xml:space="preserve">anything wrong. Spend is price times</a:t>
-            </a:r>
-            <a:endParaRPr lang="en-US" sz="1500"/>
-          </a:p>
-          <a:p>
-            <a:pPr marL="0" indent="0">
-              <a:lnSpc>
-                <a:spcPts val="1950"/>
-              </a:lnSpc>
-              <a:spcAft>
-                <a:spcPts val="0"/>
-              </a:spcAft>
-              <a:buNone/>
-            </a:pPr>
-            <a:r>
-              <a:rPr lang="en-US" sz="1500" b="0">
-                <a:solidFill>
-                  <a:srgbClr val="202B33"/>
-                </a:solidFill>
-                <a:latin typeface="Arial"/>
-                <a:ea typeface="Arial"/>
-                <a:cs typeface="Arial"/>
-              </a:rPr>
-              <a:t xml:space="preserve">consumption, and consumption is jobs times</a:t>
-            </a:r>
-            <a:endParaRPr lang="en-US" sz="1500"/>
-          </a:p>
-          <a:p>
-            <a:pPr marL="0" indent="0">
-              <a:lnSpc>
-                <a:spcPts val="1950"/>
-              </a:lnSpc>
-              <a:spcAft>
-                <a:spcPts val="0"/>
-              </a:spcAft>
-              <a:buNone/>
-            </a:pPr>
-            <a:r>
-              <a:rPr lang="en-US" sz="1500" b="0">
-                <a:solidFill>
-                  <a:srgbClr val="202B33"/>
-                </a:solidFill>
-                <a:latin typeface="Arial"/>
-                <a:ea typeface="Arial"/>
-                <a:cs typeface="Arial"/>
-              </a:rPr>
-              <a:t xml:space="preserve">calls per job times tokens per call.</a:t>
-            </a:r>
-            <a:endParaRPr lang="en-US" sz="1500"/>
-          </a:p>
-          <a:p>
-            <a:pPr marL="0" indent="0">
-              <a:lnSpc>
-                <a:spcPts val="1950"/>
-              </a:lnSpc>
-              <a:spcAft>
-                <a:spcPts val="0"/>
-              </a:spcAft>
-              <a:buNone/>
-            </a:pPr>
-            <a:r>
-              <a:rPr lang="en-US" sz="1500" b="0">
-                <a:solidFill>
-                  <a:srgbClr val="202B33"/>
-                </a:solidFill>
-                <a:latin typeface="Arial"/>
-                <a:ea typeface="Arial"/>
-                <a:cs typeface="Arial"/>
-              </a:rPr>
-              <a:t xml:space="preserve">Cheapness moved every term on the right.</a:t>
-            </a:r>
-            <a:endParaRPr lang="en-US" sz="1500"/>
-          </a:p>
-          <a:p>
-            <a:pPr marL="0" indent="0">
-              <a:lnSpc>
-                <a:spcPts val="1950"/>
-              </a:lnSpc>
-              <a:spcAft>
-                <a:spcPts val="0"/>
-              </a:spcAft>
-              <a:buNone/>
-            </a:pPr>
-            <a:r>
-              <a:rPr lang="en-US" sz="1500" b="0">
-                <a:solidFill>
-                  <a:srgbClr val="202B33"/>
-                </a:solidFill>
-                <a:latin typeface="Arial"/>
-                <a:ea typeface="Arial"/>
-                <a:cs typeface="Arial"/>
-              </a:rPr>
-              <a:t xml:space="preserve">Epoch's data through 2025 shows the price</a:t>
-            </a:r>
-            <a:endParaRPr lang="en-US" sz="1500"/>
-          </a:p>
-          <a:p>
-            <a:pPr marL="0" indent="0">
-              <a:lnSpc>
-                <a:spcPts val="1950"/>
-              </a:lnSpc>
-              <a:spcAft>
-                <a:spcPts val="0"/>
-              </a:spcAft>
-              <a:buNone/>
-            </a:pPr>
-            <a:r>
-              <a:rPr lang="en-US" sz="1500" b="0">
-                <a:solidFill>
-                  <a:srgbClr val="202B33"/>
-                </a:solidFill>
-                <a:latin typeface="Arial"/>
-                <a:ea typeface="Arial"/>
-                <a:cs typeface="Arial"/>
-              </a:rPr>
-              <a:t xml:space="preserve">of a fixed capability falling fast and very</a:t>
-            </a:r>
-            <a:endParaRPr lang="en-US" sz="1500"/>
-          </a:p>
-          <a:p>
-            <a:pPr marL="0" indent="0">
-              <a:lnSpc>
-                <a:spcPts val="1950"/>
-              </a:lnSpc>
-              <a:spcAft>
-                <a:spcPts val="0"/>
-              </a:spcAft>
-              <a:buNone/>
-            </a:pPr>
-            <a:r>
-              <a:rPr lang="en-US" sz="1500" b="0">
-                <a:solidFill>
-                  <a:srgbClr val="202B33"/>
-                </a:solidFill>
-                <a:latin typeface="Arial"/>
-                <a:ea typeface="Arial"/>
-                <a:cs typeface="Arial"/>
-              </a:rPr>
-              <a:t xml:space="preserve">unevenly by task, which is real and worth</a:t>
-            </a:r>
-            <a:endParaRPr lang="en-US" sz="1500"/>
-          </a:p>
-          <a:p>
-            <a:pPr marL="0" indent="0">
-              <a:lnSpc>
-                <a:spcPts val="1950"/>
-              </a:lnSpc>
-              <a:spcAft>
-                <a:spcPts val="0"/>
-              </a:spcAft>
-              <a:buNone/>
-            </a:pPr>
-            <a:r>
-              <a:rPr lang="en-US" sz="1500" b="0">
-                <a:solidFill>
-                  <a:srgbClr val="202B33"/>
-                </a:solidFill>
-                <a:latin typeface="Arial"/>
-                <a:ea typeface="Arial"/>
-                <a:cs typeface="Arial"/>
-              </a:rPr>
-              <a:t xml:space="preserve">knowing, and is also exactly the condition</a:t>
-            </a:r>
-            <a:endParaRPr lang="en-US" sz="1500"/>
-          </a:p>
-          <a:p>
-            <a:pPr marL="0" indent="0">
-              <a:lnSpc>
-                <a:spcPts val="1950"/>
-              </a:lnSpc>
-              <a:spcAft>
-                <a:spcPts val="0"/>
-              </a:spcAft>
-              <a:buNone/>
-            </a:pPr>
-            <a:r>
-              <a:rPr lang="en-US" sz="1500" b="0">
-                <a:solidFill>
-                  <a:srgbClr val="202B33"/>
-                </a:solidFill>
-                <a:latin typeface="Arial"/>
-                <a:ea typeface="Arial"/>
-                <a:cs typeface="Arial"/>
-              </a:rPr>
-              <a:t xml:space="preserve">under which total spend rises.</a:t>
+              <a:t xml:space="preserve">So: your per-token price fell off a cliff</a:t>
+            </a:r>
+            <a:endParaRPr lang="en-US" sz="1500"/>
+          </a:p>
+          <a:p>
+            <a:pPr marL="0" indent="0">
+              <a:lnSpc>
+                <a:spcPts val="1950"/>
+              </a:lnSpc>
+              <a:spcAft>
+                <a:spcPts val="0"/>
+              </a:spcAft>
+              <a:buNone/>
+            </a:pPr>
+            <a:r>
+              <a:rPr lang="en-US" sz="1500" b="0">
+                <a:solidFill>
+                  <a:srgbClr val="202B33"/>
+                </a:solidFill>
+                <a:latin typeface="Arial"/>
+                <a:ea typeface="Arial"/>
+                <a:cs typeface="Arial"/>
+              </a:rPr>
+              <a:t xml:space="preserve">and your bill went up. Everyone here has</a:t>
+            </a:r>
+            <a:endParaRPr lang="en-US" sz="1500"/>
+          </a:p>
+          <a:p>
+            <a:pPr marL="0" indent="0">
+              <a:lnSpc>
+                <a:spcPts val="1950"/>
+              </a:lnSpc>
+              <a:spcAft>
+                <a:spcPts val="0"/>
+              </a:spcAft>
+              <a:buNone/>
+            </a:pPr>
+            <a:r>
+              <a:rPr lang="en-US" sz="1500" b="0">
+                <a:solidFill>
+                  <a:srgbClr val="202B33"/>
+                </a:solidFill>
+                <a:latin typeface="Arial"/>
+                <a:ea typeface="Arial"/>
+                <a:cs typeface="Arial"/>
+              </a:rPr>
+              <a:t xml:space="preserve">had that conversation with a CFO and lost</a:t>
+            </a:r>
+            <a:endParaRPr lang="en-US" sz="1500"/>
+          </a:p>
+          <a:p>
+            <a:pPr marL="0" indent="0">
+              <a:lnSpc>
+                <a:spcPts val="1950"/>
+              </a:lnSpc>
+              <a:spcAft>
+                <a:spcPts val="0"/>
+              </a:spcAft>
+              <a:buNone/>
+            </a:pPr>
+            <a:r>
+              <a:rPr lang="en-US" sz="1500" b="0">
+                <a:solidFill>
+                  <a:srgbClr val="202B33"/>
+                </a:solidFill>
+                <a:latin typeface="Arial"/>
+                <a:ea typeface="Arial"/>
+                <a:cs typeface="Arial"/>
+              </a:rPr>
+              <a:t xml:space="preserve">it. You are not being gouged and you did</a:t>
+            </a:r>
+            <a:endParaRPr lang="en-US" sz="1500"/>
+          </a:p>
+          <a:p>
+            <a:pPr marL="0" indent="0">
+              <a:lnSpc>
+                <a:spcPts val="1950"/>
+              </a:lnSpc>
+              <a:spcAft>
+                <a:spcPts val="0"/>
+              </a:spcAft>
+              <a:buNone/>
+            </a:pPr>
+            <a:r>
+              <a:rPr lang="en-US" sz="1500" b="0">
+                <a:solidFill>
+                  <a:srgbClr val="202B33"/>
+                </a:solidFill>
+                <a:latin typeface="Arial"/>
+                <a:ea typeface="Arial"/>
+                <a:cs typeface="Arial"/>
+              </a:rPr>
+              <a:t xml:space="preserve">nothing wrong. Spend is price times jobs</a:t>
+            </a:r>
+            <a:endParaRPr lang="en-US" sz="1500"/>
+          </a:p>
+          <a:p>
+            <a:pPr marL="0" indent="0">
+              <a:lnSpc>
+                <a:spcPts val="1950"/>
+              </a:lnSpc>
+              <a:spcAft>
+                <a:spcPts val="0"/>
+              </a:spcAft>
+              <a:buNone/>
+            </a:pPr>
+            <a:r>
+              <a:rPr lang="en-US" sz="1500" b="0">
+                <a:solidFill>
+                  <a:srgbClr val="202B33"/>
+                </a:solidFill>
+                <a:latin typeface="Arial"/>
+                <a:ea typeface="Arial"/>
+                <a:cs typeface="Arial"/>
+              </a:rPr>
+              <a:t xml:space="preserve">times calls per job times tokens per call,</a:t>
+            </a:r>
+            <a:endParaRPr lang="en-US" sz="1500"/>
+          </a:p>
+          <a:p>
+            <a:pPr marL="0" indent="0">
+              <a:lnSpc>
+                <a:spcPts val="1950"/>
+              </a:lnSpc>
+              <a:spcAft>
+                <a:spcPts val="0"/>
+              </a:spcAft>
+              <a:buNone/>
+            </a:pPr>
+            <a:r>
+              <a:rPr lang="en-US" sz="1500" b="0">
+                <a:solidFill>
+                  <a:srgbClr val="202B33"/>
+                </a:solidFill>
+                <a:latin typeface="Arial"/>
+                <a:ea typeface="Arial"/>
+                <a:cs typeface="Arial"/>
+              </a:rPr>
+              <a:t xml:space="preserve">and cheapness moved every term on the</a:t>
+            </a:r>
+            <a:endParaRPr lang="en-US" sz="1500"/>
+          </a:p>
+          <a:p>
+            <a:pPr marL="0" indent="0">
+              <a:lnSpc>
+                <a:spcPts val="1950"/>
+              </a:lnSpc>
+              <a:spcAft>
+                <a:spcPts val="0"/>
+              </a:spcAft>
+              <a:buNone/>
+            </a:pPr>
+            <a:r>
+              <a:rPr lang="en-US" sz="1500" b="0">
+                <a:solidFill>
+                  <a:srgbClr val="202B33"/>
+                </a:solidFill>
+                <a:latin typeface="Arial"/>
+                <a:ea typeface="Arial"/>
+                <a:cs typeface="Arial"/>
+              </a:rPr>
+              <a:t xml:space="preserve">right. Epoch's data through 2025 shows the</a:t>
+            </a:r>
+            <a:endParaRPr lang="en-US" sz="1500"/>
+          </a:p>
+          <a:p>
+            <a:pPr marL="0" indent="0">
+              <a:lnSpc>
+                <a:spcPts val="1950"/>
+              </a:lnSpc>
+              <a:spcAft>
+                <a:spcPts val="0"/>
+              </a:spcAft>
+              <a:buNone/>
+            </a:pPr>
+            <a:r>
+              <a:rPr lang="en-US" sz="1500" b="0">
+                <a:solidFill>
+                  <a:srgbClr val="202B33"/>
+                </a:solidFill>
+                <a:latin typeface="Arial"/>
+                <a:ea typeface="Arial"/>
+                <a:cs typeface="Arial"/>
+              </a:rPr>
+              <a:t xml:space="preserve">price of a fixed capability falling fast</a:t>
+            </a:r>
+            <a:endParaRPr lang="en-US" sz="1500"/>
+          </a:p>
+          <a:p>
+            <a:pPr marL="0" indent="0">
+              <a:lnSpc>
+                <a:spcPts val="1950"/>
+              </a:lnSpc>
+              <a:spcAft>
+                <a:spcPts val="0"/>
+              </a:spcAft>
+              <a:buNone/>
+            </a:pPr>
+            <a:r>
+              <a:rPr lang="en-US" sz="1500" b="0">
+                <a:solidFill>
+                  <a:srgbClr val="202B33"/>
+                </a:solidFill>
+                <a:latin typeface="Arial"/>
+                <a:ea typeface="Arial"/>
+                <a:cs typeface="Arial"/>
+              </a:rPr>
+              <a:t xml:space="preserve">and very unevenly by task — which is real,</a:t>
+            </a:r>
+            <a:endParaRPr lang="en-US" sz="1500"/>
+          </a:p>
+          <a:p>
+            <a:pPr marL="0" indent="0">
+              <a:lnSpc>
+                <a:spcPts val="1950"/>
+              </a:lnSpc>
+              <a:spcAft>
+                <a:spcPts val="0"/>
+              </a:spcAft>
+              <a:buNone/>
+            </a:pPr>
+            <a:r>
+              <a:rPr lang="en-US" sz="1500" b="0">
+                <a:solidFill>
+                  <a:srgbClr val="202B33"/>
+                </a:solidFill>
+                <a:latin typeface="Arial"/>
+                <a:ea typeface="Arial"/>
+                <a:cs typeface="Arial"/>
+              </a:rPr>
+              <a:t xml:space="preserve">and is also exactly the condition under</a:t>
+            </a:r>
+            <a:endParaRPr lang="en-US" sz="1500"/>
+          </a:p>
+          <a:p>
+            <a:pPr marL="0" indent="0">
+              <a:lnSpc>
+                <a:spcPts val="1950"/>
+              </a:lnSpc>
+              <a:spcAft>
+                <a:spcPts val="0"/>
+              </a:spcAft>
+              <a:buNone/>
+            </a:pPr>
+            <a:r>
+              <a:rPr lang="en-US" sz="1500" b="0">
+                <a:solidFill>
+                  <a:srgbClr val="202B33"/>
+                </a:solidFill>
+                <a:latin typeface="Arial"/>
+                <a:ea typeface="Arial"/>
+                <a:cs typeface="Arial"/>
+              </a:rPr>
+              <a:t xml:space="preserve">which total spend rises.</a:t>
             </a:r>
             <a:endParaRPr lang="en-US" sz="1500"/>
           </a:p>
